--- a/docs/pptx/carbo/jx-carbo-linsubhr-ratio-grade2.pptx
+++ b/docs/pptx/carbo/jx-carbo-linsubhr-ratio-grade2.pptx
@@ -2271,7 +2271,7 @@
           </p:nvSpPr>
           <p:spPr>
             <a:xfrm>
-              <a:off x="817517" y="5114368"/>
+              <a:off x="817517" y="5142518"/>
               <a:ext cx="7799693" cy="0"/>
             </a:xfrm>
             <a:custGeom>
@@ -2314,7 +2314,7 @@
           </p:nvSpPr>
           <p:spPr>
             <a:xfrm>
-              <a:off x="817517" y="4244691"/>
+              <a:off x="817517" y="4313054"/>
               <a:ext cx="7799693" cy="0"/>
             </a:xfrm>
             <a:custGeom>
@@ -2357,7 +2357,7 @@
           </p:nvSpPr>
           <p:spPr>
             <a:xfrm>
-              <a:off x="817517" y="3375014"/>
+              <a:off x="817517" y="3483591"/>
               <a:ext cx="7799693" cy="0"/>
             </a:xfrm>
             <a:custGeom>
@@ -2400,7 +2400,7 @@
           </p:nvSpPr>
           <p:spPr>
             <a:xfrm>
-              <a:off x="817517" y="2505337"/>
+              <a:off x="817517" y="2654127"/>
               <a:ext cx="7799693" cy="0"/>
             </a:xfrm>
             <a:custGeom>
@@ -2443,15 +2443,15 @@
           </p:nvSpPr>
           <p:spPr>
             <a:xfrm>
-              <a:off x="1615213" y="1896563"/>
-              <a:ext cx="0" cy="3826579"/>
+              <a:off x="1615213" y="2073503"/>
+              <a:ext cx="0" cy="3649639"/>
             </a:xfrm>
             <a:custGeom>
               <a:avLst/>
               <a:pathLst>
-                <a:path w="0" h="3826579">
+                <a:path w="0" h="3649639">
                   <a:moveTo>
-                    <a:pt x="0" y="3826579"/>
+                    <a:pt x="0" y="3649639"/>
                   </a:moveTo>
                   <a:lnTo>
                     <a:pt x="0" y="0"/>
@@ -2486,15 +2486,15 @@
           </p:nvSpPr>
           <p:spPr>
             <a:xfrm>
-              <a:off x="3387871" y="1896563"/>
-              <a:ext cx="0" cy="3826579"/>
+              <a:off x="3387871" y="2073503"/>
+              <a:ext cx="0" cy="3649639"/>
             </a:xfrm>
             <a:custGeom>
               <a:avLst/>
               <a:pathLst>
-                <a:path w="0" h="3826579">
+                <a:path w="0" h="3649639">
                   <a:moveTo>
-                    <a:pt x="0" y="3826579"/>
+                    <a:pt x="0" y="3649639"/>
                   </a:moveTo>
                   <a:lnTo>
                     <a:pt x="0" y="0"/>
@@ -2529,15 +2529,15 @@
           </p:nvSpPr>
           <p:spPr>
             <a:xfrm>
-              <a:off x="5160528" y="1896563"/>
-              <a:ext cx="0" cy="3826579"/>
+              <a:off x="5160528" y="2073503"/>
+              <a:ext cx="0" cy="3649639"/>
             </a:xfrm>
             <a:custGeom>
               <a:avLst/>
               <a:pathLst>
-                <a:path w="0" h="3826579">
+                <a:path w="0" h="3649639">
                   <a:moveTo>
-                    <a:pt x="0" y="3826579"/>
+                    <a:pt x="0" y="3649639"/>
                   </a:moveTo>
                   <a:lnTo>
                     <a:pt x="0" y="0"/>
@@ -2572,15 +2572,15 @@
           </p:nvSpPr>
           <p:spPr>
             <a:xfrm>
-              <a:off x="6933186" y="1896563"/>
-              <a:ext cx="0" cy="3826579"/>
+              <a:off x="6933186" y="2073503"/>
+              <a:ext cx="0" cy="3649639"/>
             </a:xfrm>
             <a:custGeom>
               <a:avLst/>
               <a:pathLst>
-                <a:path w="0" h="3826579">
+                <a:path w="0" h="3649639">
                   <a:moveTo>
-                    <a:pt x="0" y="3826579"/>
+                    <a:pt x="0" y="3649639"/>
                   </a:moveTo>
                   <a:lnTo>
                     <a:pt x="0" y="0"/>
@@ -2615,7 +2615,7 @@
           </p:nvSpPr>
           <p:spPr>
             <a:xfrm>
-              <a:off x="817517" y="5549207"/>
+              <a:off x="817517" y="5557249"/>
               <a:ext cx="7799693" cy="0"/>
             </a:xfrm>
             <a:custGeom>
@@ -2658,7 +2658,7 @@
           </p:nvSpPr>
           <p:spPr>
             <a:xfrm>
-              <a:off x="817517" y="4679530"/>
+              <a:off x="817517" y="4727786"/>
               <a:ext cx="7799693" cy="0"/>
             </a:xfrm>
             <a:custGeom>
@@ -2701,7 +2701,7 @@
           </p:nvSpPr>
           <p:spPr>
             <a:xfrm>
-              <a:off x="817517" y="3809853"/>
+              <a:off x="817517" y="3898322"/>
               <a:ext cx="7799693" cy="0"/>
             </a:xfrm>
             <a:custGeom>
@@ -2744,7 +2744,7 @@
           </p:nvSpPr>
           <p:spPr>
             <a:xfrm>
-              <a:off x="817517" y="2940175"/>
+              <a:off x="817517" y="3068859"/>
               <a:ext cx="7799693" cy="0"/>
             </a:xfrm>
             <a:custGeom>
@@ -2787,7 +2787,7 @@
           </p:nvSpPr>
           <p:spPr>
             <a:xfrm>
-              <a:off x="817517" y="2070498"/>
+              <a:off x="817517" y="2239395"/>
               <a:ext cx="7799693" cy="0"/>
             </a:xfrm>
             <a:custGeom>
@@ -2830,15 +2830,15 @@
           </p:nvSpPr>
           <p:spPr>
             <a:xfrm>
-              <a:off x="2501542" y="1896563"/>
-              <a:ext cx="0" cy="3826579"/>
+              <a:off x="2501542" y="2073503"/>
+              <a:ext cx="0" cy="3649639"/>
             </a:xfrm>
             <a:custGeom>
               <a:avLst/>
               <a:pathLst>
-                <a:path w="0" h="3826579">
+                <a:path w="0" h="3649639">
                   <a:moveTo>
-                    <a:pt x="0" y="3826579"/>
+                    <a:pt x="0" y="3649639"/>
                   </a:moveTo>
                   <a:lnTo>
                     <a:pt x="0" y="0"/>
@@ -2873,15 +2873,15 @@
           </p:nvSpPr>
           <p:spPr>
             <a:xfrm>
-              <a:off x="4274200" y="1896563"/>
-              <a:ext cx="0" cy="3826579"/>
+              <a:off x="4274200" y="2073503"/>
+              <a:ext cx="0" cy="3649639"/>
             </a:xfrm>
             <a:custGeom>
               <a:avLst/>
               <a:pathLst>
-                <a:path w="0" h="3826579">
+                <a:path w="0" h="3649639">
                   <a:moveTo>
-                    <a:pt x="0" y="3826579"/>
+                    <a:pt x="0" y="3649639"/>
                   </a:moveTo>
                   <a:lnTo>
                     <a:pt x="0" y="0"/>
@@ -2916,15 +2916,15 @@
           </p:nvSpPr>
           <p:spPr>
             <a:xfrm>
-              <a:off x="6046857" y="1896563"/>
-              <a:ext cx="0" cy="3826579"/>
+              <a:off x="6046857" y="2073503"/>
+              <a:ext cx="0" cy="3649639"/>
             </a:xfrm>
             <a:custGeom>
               <a:avLst/>
               <a:pathLst>
-                <a:path w="0" h="3826579">
+                <a:path w="0" h="3649639">
                   <a:moveTo>
-                    <a:pt x="0" y="3826579"/>
+                    <a:pt x="0" y="3649639"/>
                   </a:moveTo>
                   <a:lnTo>
                     <a:pt x="0" y="0"/>
@@ -2959,15 +2959,15 @@
           </p:nvSpPr>
           <p:spPr>
             <a:xfrm>
-              <a:off x="7819515" y="1896563"/>
-              <a:ext cx="0" cy="3826579"/>
+              <a:off x="7819515" y="2073503"/>
+              <a:ext cx="0" cy="3649639"/>
             </a:xfrm>
             <a:custGeom>
               <a:avLst/>
               <a:pathLst>
-                <a:path w="0" h="3826579">
+                <a:path w="0" h="3649639">
                   <a:moveTo>
-                    <a:pt x="0" y="3826579"/>
+                    <a:pt x="0" y="3649639"/>
                   </a:moveTo>
                   <a:lnTo>
                     <a:pt x="0" y="0"/>
@@ -3002,600 +3002,600 @@
           </p:nvSpPr>
           <p:spPr>
             <a:xfrm>
-              <a:off x="817517" y="1965262"/>
-              <a:ext cx="7403783" cy="3418804"/>
+              <a:off x="817517" y="2139025"/>
+              <a:ext cx="7403783" cy="3260720"/>
             </a:xfrm>
             <a:custGeom>
               <a:avLst/>
               <a:pathLst>
-                <a:path w="7403783" h="3418804">
+                <a:path w="7403783" h="3260720">
                   <a:moveTo>
                     <a:pt x="0" y="0"/>
                   </a:moveTo>
                   <a:lnTo>
-                    <a:pt x="47058" y="69840"/>
-                  </a:lnTo>
-                  <a:lnTo>
-                    <a:pt x="123691" y="180005"/>
-                  </a:lnTo>
-                  <a:lnTo>
-                    <a:pt x="200323" y="286717"/>
-                  </a:lnTo>
-                  <a:lnTo>
-                    <a:pt x="276956" y="390084"/>
-                  </a:lnTo>
-                  <a:lnTo>
-                    <a:pt x="353588" y="490210"/>
-                  </a:lnTo>
-                  <a:lnTo>
-                    <a:pt x="430221" y="587198"/>
-                  </a:lnTo>
-                  <a:lnTo>
-                    <a:pt x="506853" y="681144"/>
-                  </a:lnTo>
-                  <a:lnTo>
-                    <a:pt x="583486" y="772146"/>
-                  </a:lnTo>
-                  <a:lnTo>
-                    <a:pt x="660118" y="860295"/>
-                  </a:lnTo>
-                  <a:lnTo>
-                    <a:pt x="736751" y="945680"/>
-                  </a:lnTo>
-                  <a:lnTo>
-                    <a:pt x="813384" y="1028389"/>
-                  </a:lnTo>
-                  <a:lnTo>
-                    <a:pt x="890016" y="1108504"/>
-                  </a:lnTo>
-                  <a:lnTo>
-                    <a:pt x="966649" y="1186108"/>
-                  </a:lnTo>
-                  <a:lnTo>
-                    <a:pt x="1043281" y="1261279"/>
-                  </a:lnTo>
-                  <a:lnTo>
-                    <a:pt x="1119914" y="1334094"/>
-                  </a:lnTo>
-                  <a:lnTo>
-                    <a:pt x="1196546" y="1404626"/>
-                  </a:lnTo>
-                  <a:lnTo>
-                    <a:pt x="1273179" y="1472947"/>
-                  </a:lnTo>
-                  <a:lnTo>
-                    <a:pt x="1349811" y="1539126"/>
-                  </a:lnTo>
-                  <a:lnTo>
-                    <a:pt x="1426444" y="1603230"/>
-                  </a:lnTo>
-                  <a:lnTo>
-                    <a:pt x="1503076" y="1665324"/>
-                  </a:lnTo>
-                  <a:lnTo>
-                    <a:pt x="1579709" y="1725472"/>
-                  </a:lnTo>
-                  <a:lnTo>
-                    <a:pt x="1656342" y="1783735"/>
-                  </a:lnTo>
-                  <a:lnTo>
-                    <a:pt x="1732974" y="1840171"/>
-                  </a:lnTo>
-                  <a:lnTo>
-                    <a:pt x="1809607" y="1894837"/>
-                  </a:lnTo>
-                  <a:lnTo>
-                    <a:pt x="1886239" y="1947790"/>
-                  </a:lnTo>
-                  <a:lnTo>
-                    <a:pt x="1962872" y="1999083"/>
-                  </a:lnTo>
-                  <a:lnTo>
-                    <a:pt x="2039504" y="2048768"/>
-                  </a:lnTo>
-                  <a:lnTo>
-                    <a:pt x="2116137" y="2096895"/>
-                  </a:lnTo>
-                  <a:lnTo>
-                    <a:pt x="2192769" y="2143513"/>
-                  </a:lnTo>
-                  <a:lnTo>
-                    <a:pt x="2269402" y="2188670"/>
-                  </a:lnTo>
-                  <a:lnTo>
-                    <a:pt x="2346034" y="2232411"/>
-                  </a:lnTo>
-                  <a:lnTo>
-                    <a:pt x="2422667" y="2274781"/>
-                  </a:lnTo>
-                  <a:lnTo>
-                    <a:pt x="2499300" y="2315823"/>
-                  </a:lnTo>
-                  <a:lnTo>
-                    <a:pt x="2575932" y="2355578"/>
-                  </a:lnTo>
-                  <a:lnTo>
-                    <a:pt x="2652565" y="2394087"/>
-                  </a:lnTo>
-                  <a:lnTo>
-                    <a:pt x="2729197" y="2431388"/>
-                  </a:lnTo>
-                  <a:lnTo>
-                    <a:pt x="2805830" y="2467521"/>
-                  </a:lnTo>
-                  <a:lnTo>
-                    <a:pt x="2882462" y="2502520"/>
-                  </a:lnTo>
-                  <a:lnTo>
-                    <a:pt x="2959095" y="2536422"/>
-                  </a:lnTo>
-                  <a:lnTo>
-                    <a:pt x="3035727" y="2569262"/>
-                  </a:lnTo>
-                  <a:lnTo>
-                    <a:pt x="3112360" y="2601072"/>
-                  </a:lnTo>
-                  <a:lnTo>
-                    <a:pt x="3188993" y="2631884"/>
-                  </a:lnTo>
-                  <a:lnTo>
-                    <a:pt x="3265625" y="2661731"/>
-                  </a:lnTo>
-                  <a:lnTo>
-                    <a:pt x="3342258" y="2690642"/>
-                  </a:lnTo>
-                  <a:lnTo>
-                    <a:pt x="3418890" y="2716754"/>
-                  </a:lnTo>
-                  <a:lnTo>
-                    <a:pt x="3495523" y="2732284"/>
-                  </a:lnTo>
-                  <a:lnTo>
-                    <a:pt x="3572155" y="2747536"/>
-                  </a:lnTo>
-                  <a:lnTo>
-                    <a:pt x="3648788" y="2762515"/>
-                  </a:lnTo>
-                  <a:lnTo>
-                    <a:pt x="3725420" y="2777225"/>
-                  </a:lnTo>
-                  <a:lnTo>
-                    <a:pt x="3802053" y="2791672"/>
-                  </a:lnTo>
-                  <a:lnTo>
-                    <a:pt x="3878685" y="2805860"/>
-                  </a:lnTo>
-                  <a:lnTo>
-                    <a:pt x="3955318" y="2819794"/>
-                  </a:lnTo>
-                  <a:lnTo>
-                    <a:pt x="4031951" y="2833479"/>
-                  </a:lnTo>
-                  <a:lnTo>
-                    <a:pt x="4108583" y="2846918"/>
-                  </a:lnTo>
-                  <a:lnTo>
-                    <a:pt x="4185216" y="2860117"/>
-                  </a:lnTo>
-                  <a:lnTo>
-                    <a:pt x="4261848" y="2873080"/>
-                  </a:lnTo>
-                  <a:lnTo>
-                    <a:pt x="4338481" y="2885810"/>
-                  </a:lnTo>
-                  <a:lnTo>
-                    <a:pt x="4415113" y="2898312"/>
-                  </a:lnTo>
-                  <a:lnTo>
-                    <a:pt x="4491746" y="2910591"/>
-                  </a:lnTo>
-                  <a:lnTo>
-                    <a:pt x="4568378" y="2922649"/>
-                  </a:lnTo>
-                  <a:lnTo>
-                    <a:pt x="4645011" y="2934492"/>
-                  </a:lnTo>
-                  <a:lnTo>
-                    <a:pt x="4721644" y="2946122"/>
-                  </a:lnTo>
-                  <a:lnTo>
-                    <a:pt x="4798276" y="2957545"/>
-                  </a:lnTo>
-                  <a:lnTo>
-                    <a:pt x="4874909" y="2968762"/>
-                  </a:lnTo>
-                  <a:lnTo>
-                    <a:pt x="4951541" y="2979779"/>
-                  </a:lnTo>
-                  <a:lnTo>
-                    <a:pt x="5028174" y="2990599"/>
-                  </a:lnTo>
-                  <a:lnTo>
-                    <a:pt x="5104806" y="3001224"/>
-                  </a:lnTo>
-                  <a:lnTo>
-                    <a:pt x="5181439" y="3011660"/>
-                  </a:lnTo>
-                  <a:lnTo>
-                    <a:pt x="5258071" y="3021909"/>
-                  </a:lnTo>
-                  <a:lnTo>
-                    <a:pt x="5334704" y="3031974"/>
-                  </a:lnTo>
-                  <a:lnTo>
-                    <a:pt x="5411336" y="3041858"/>
-                  </a:lnTo>
-                  <a:lnTo>
-                    <a:pt x="5487969" y="3051566"/>
-                  </a:lnTo>
-                  <a:lnTo>
-                    <a:pt x="5564602" y="3061100"/>
-                  </a:lnTo>
-                  <a:lnTo>
-                    <a:pt x="5641234" y="3070463"/>
-                  </a:lnTo>
-                  <a:lnTo>
-                    <a:pt x="5717867" y="3079659"/>
-                  </a:lnTo>
-                  <a:lnTo>
-                    <a:pt x="5794499" y="3088690"/>
-                  </a:lnTo>
-                  <a:lnTo>
-                    <a:pt x="5871132" y="3097559"/>
-                  </a:lnTo>
-                  <a:lnTo>
-                    <a:pt x="5947764" y="3106269"/>
-                  </a:lnTo>
-                  <a:lnTo>
-                    <a:pt x="6024397" y="3114824"/>
-                  </a:lnTo>
-                  <a:lnTo>
-                    <a:pt x="6101029" y="3123225"/>
-                  </a:lnTo>
-                  <a:lnTo>
-                    <a:pt x="6177662" y="3131475"/>
-                  </a:lnTo>
-                  <a:lnTo>
-                    <a:pt x="6254294" y="3139578"/>
-                  </a:lnTo>
-                  <a:lnTo>
-                    <a:pt x="6330927" y="3147536"/>
-                  </a:lnTo>
-                  <a:lnTo>
-                    <a:pt x="6407560" y="3155351"/>
-                  </a:lnTo>
-                  <a:lnTo>
-                    <a:pt x="6484192" y="3163027"/>
-                  </a:lnTo>
-                  <a:lnTo>
-                    <a:pt x="6560825" y="3170565"/>
-                  </a:lnTo>
-                  <a:lnTo>
-                    <a:pt x="6637457" y="3177968"/>
-                  </a:lnTo>
-                  <a:lnTo>
-                    <a:pt x="6714090" y="3185238"/>
-                  </a:lnTo>
-                  <a:lnTo>
-                    <a:pt x="6790722" y="3192378"/>
-                  </a:lnTo>
-                  <a:lnTo>
-                    <a:pt x="6867355" y="3199390"/>
-                  </a:lnTo>
-                  <a:lnTo>
-                    <a:pt x="6943987" y="3206277"/>
-                  </a:lnTo>
-                  <a:lnTo>
-                    <a:pt x="7020620" y="3213040"/>
-                  </a:lnTo>
-                  <a:lnTo>
-                    <a:pt x="7097253" y="3219682"/>
-                  </a:lnTo>
-                  <a:lnTo>
-                    <a:pt x="7173885" y="3226206"/>
-                  </a:lnTo>
-                  <a:lnTo>
-                    <a:pt x="7250518" y="3232612"/>
-                  </a:lnTo>
-                  <a:lnTo>
-                    <a:pt x="7327150" y="3238904"/>
-                  </a:lnTo>
-                  <a:lnTo>
-                    <a:pt x="7403783" y="3245083"/>
-                  </a:lnTo>
-                  <a:lnTo>
-                    <a:pt x="7403783" y="3418804"/>
-                  </a:lnTo>
-                  <a:lnTo>
-                    <a:pt x="7327150" y="3413459"/>
-                  </a:lnTo>
-                  <a:lnTo>
-                    <a:pt x="7250518" y="3407942"/>
-                  </a:lnTo>
-                  <a:lnTo>
-                    <a:pt x="7173885" y="3402245"/>
-                  </a:lnTo>
-                  <a:lnTo>
-                    <a:pt x="7097253" y="3396365"/>
-                  </a:lnTo>
-                  <a:lnTo>
-                    <a:pt x="7020620" y="3390294"/>
-                  </a:lnTo>
-                  <a:lnTo>
-                    <a:pt x="6943987" y="3384027"/>
-                  </a:lnTo>
-                  <a:lnTo>
-                    <a:pt x="6867355" y="3377557"/>
-                  </a:lnTo>
-                  <a:lnTo>
-                    <a:pt x="6790722" y="3370877"/>
-                  </a:lnTo>
-                  <a:lnTo>
-                    <a:pt x="6714090" y="3363981"/>
-                  </a:lnTo>
-                  <a:lnTo>
-                    <a:pt x="6637457" y="3356862"/>
-                  </a:lnTo>
-                  <a:lnTo>
-                    <a:pt x="6560825" y="3349513"/>
-                  </a:lnTo>
-                  <a:lnTo>
-                    <a:pt x="6484192" y="3341926"/>
-                  </a:lnTo>
-                  <a:lnTo>
-                    <a:pt x="6407560" y="3334093"/>
-                  </a:lnTo>
-                  <a:lnTo>
-                    <a:pt x="6330927" y="3326007"/>
-                  </a:lnTo>
-                  <a:lnTo>
-                    <a:pt x="6254294" y="3317659"/>
-                  </a:lnTo>
-                  <a:lnTo>
-                    <a:pt x="6177662" y="3309041"/>
-                  </a:lnTo>
-                  <a:lnTo>
-                    <a:pt x="6101029" y="3300144"/>
-                  </a:lnTo>
-                  <a:lnTo>
-                    <a:pt x="6024397" y="3290959"/>
-                  </a:lnTo>
-                  <a:lnTo>
-                    <a:pt x="5947764" y="3281477"/>
-                  </a:lnTo>
-                  <a:lnTo>
-                    <a:pt x="5871132" y="3271688"/>
-                  </a:lnTo>
-                  <a:lnTo>
-                    <a:pt x="5794499" y="3261582"/>
-                  </a:lnTo>
-                  <a:lnTo>
-                    <a:pt x="5717867" y="3251149"/>
-                  </a:lnTo>
-                  <a:lnTo>
-                    <a:pt x="5641234" y="3240378"/>
-                  </a:lnTo>
-                  <a:lnTo>
-                    <a:pt x="5564602" y="3229259"/>
-                  </a:lnTo>
-                  <a:lnTo>
-                    <a:pt x="5487969" y="3217780"/>
-                  </a:lnTo>
-                  <a:lnTo>
-                    <a:pt x="5411336" y="3205929"/>
-                  </a:lnTo>
-                  <a:lnTo>
-                    <a:pt x="5334704" y="3193695"/>
-                  </a:lnTo>
-                  <a:lnTo>
-                    <a:pt x="5258071" y="3181065"/>
-                  </a:lnTo>
-                  <a:lnTo>
-                    <a:pt x="5181439" y="3168026"/>
-                  </a:lnTo>
-                  <a:lnTo>
-                    <a:pt x="5104806" y="3154565"/>
-                  </a:lnTo>
-                  <a:lnTo>
-                    <a:pt x="5028174" y="3140668"/>
-                  </a:lnTo>
-                  <a:lnTo>
-                    <a:pt x="4951541" y="3126322"/>
-                  </a:lnTo>
-                  <a:lnTo>
-                    <a:pt x="4874909" y="3111512"/>
-                  </a:lnTo>
-                  <a:lnTo>
-                    <a:pt x="4798276" y="3096222"/>
-                  </a:lnTo>
-                  <a:lnTo>
-                    <a:pt x="4721644" y="3080437"/>
-                  </a:lnTo>
-                  <a:lnTo>
-                    <a:pt x="4645011" y="3064141"/>
-                  </a:lnTo>
-                  <a:lnTo>
-                    <a:pt x="4568378" y="3047318"/>
-                  </a:lnTo>
-                  <a:lnTo>
-                    <a:pt x="4491746" y="3029951"/>
-                  </a:lnTo>
-                  <a:lnTo>
-                    <a:pt x="4415113" y="3012021"/>
-                  </a:lnTo>
-                  <a:lnTo>
-                    <a:pt x="4338481" y="2993512"/>
-                  </a:lnTo>
-                  <a:lnTo>
-                    <a:pt x="4261848" y="2974403"/>
-                  </a:lnTo>
-                  <a:lnTo>
-                    <a:pt x="4185216" y="2954675"/>
-                  </a:lnTo>
-                  <a:lnTo>
-                    <a:pt x="4108583" y="2934310"/>
-                  </a:lnTo>
-                  <a:lnTo>
-                    <a:pt x="4031951" y="2913285"/>
-                  </a:lnTo>
-                  <a:lnTo>
-                    <a:pt x="3955318" y="2891579"/>
-                  </a:lnTo>
-                  <a:lnTo>
-                    <a:pt x="3878685" y="2869172"/>
-                  </a:lnTo>
-                  <a:lnTo>
-                    <a:pt x="3802053" y="2846038"/>
-                  </a:lnTo>
-                  <a:lnTo>
-                    <a:pt x="3725420" y="2822157"/>
-                  </a:lnTo>
-                  <a:lnTo>
-                    <a:pt x="3648788" y="2797502"/>
-                  </a:lnTo>
-                  <a:lnTo>
-                    <a:pt x="3572155" y="2772050"/>
-                  </a:lnTo>
-                  <a:lnTo>
-                    <a:pt x="3495523" y="2745773"/>
-                  </a:lnTo>
-                  <a:lnTo>
-                    <a:pt x="3418890" y="2718647"/>
-                  </a:lnTo>
-                  <a:lnTo>
-                    <a:pt x="3342258" y="2700941"/>
-                  </a:lnTo>
-                  <a:lnTo>
-                    <a:pt x="3265625" y="2684840"/>
-                  </a:lnTo>
-                  <a:lnTo>
-                    <a:pt x="3188993" y="2668445"/>
-                  </a:lnTo>
-                  <a:lnTo>
-                    <a:pt x="3112360" y="2651751"/>
-                  </a:lnTo>
-                  <a:lnTo>
-                    <a:pt x="3035727" y="2634753"/>
-                  </a:lnTo>
-                  <a:lnTo>
-                    <a:pt x="2959095" y="2617444"/>
-                  </a:lnTo>
-                  <a:lnTo>
-                    <a:pt x="2882462" y="2599820"/>
-                  </a:lnTo>
-                  <a:lnTo>
-                    <a:pt x="2805830" y="2581875"/>
-                  </a:lnTo>
-                  <a:lnTo>
-                    <a:pt x="2729197" y="2563603"/>
-                  </a:lnTo>
-                  <a:lnTo>
-                    <a:pt x="2652565" y="2544997"/>
-                  </a:lnTo>
-                  <a:lnTo>
-                    <a:pt x="2575932" y="2526052"/>
-                  </a:lnTo>
-                  <a:lnTo>
-                    <a:pt x="2499300" y="2506761"/>
-                  </a:lnTo>
-                  <a:lnTo>
-                    <a:pt x="2422667" y="2487119"/>
-                  </a:lnTo>
-                  <a:lnTo>
-                    <a:pt x="2346034" y="2467119"/>
-                  </a:lnTo>
-                  <a:lnTo>
-                    <a:pt x="2269402" y="2446754"/>
-                  </a:lnTo>
-                  <a:lnTo>
-                    <a:pt x="2192769" y="2426017"/>
-                  </a:lnTo>
-                  <a:lnTo>
-                    <a:pt x="2116137" y="2404903"/>
-                  </a:lnTo>
-                  <a:lnTo>
-                    <a:pt x="2039504" y="2383403"/>
-                  </a:lnTo>
-                  <a:lnTo>
-                    <a:pt x="1962872" y="2361512"/>
-                  </a:lnTo>
-                  <a:lnTo>
-                    <a:pt x="1886239" y="2339221"/>
-                  </a:lnTo>
-                  <a:lnTo>
-                    <a:pt x="1809607" y="2316524"/>
-                  </a:lnTo>
-                  <a:lnTo>
-                    <a:pt x="1732974" y="2293412"/>
-                  </a:lnTo>
-                  <a:lnTo>
-                    <a:pt x="1656342" y="2269880"/>
-                  </a:lnTo>
-                  <a:lnTo>
-                    <a:pt x="1579709" y="2245918"/>
-                  </a:lnTo>
-                  <a:lnTo>
-                    <a:pt x="1503076" y="2221520"/>
-                  </a:lnTo>
-                  <a:lnTo>
-                    <a:pt x="1426444" y="2196676"/>
-                  </a:lnTo>
-                  <a:lnTo>
-                    <a:pt x="1349811" y="2171379"/>
-                  </a:lnTo>
-                  <a:lnTo>
-                    <a:pt x="1273179" y="2145622"/>
-                  </a:lnTo>
-                  <a:lnTo>
-                    <a:pt x="1196546" y="2119394"/>
-                  </a:lnTo>
-                  <a:lnTo>
-                    <a:pt x="1119914" y="2092688"/>
-                  </a:lnTo>
-                  <a:lnTo>
-                    <a:pt x="1043281" y="2065496"/>
-                  </a:lnTo>
-                  <a:lnTo>
-                    <a:pt x="966649" y="2037807"/>
-                  </a:lnTo>
-                  <a:lnTo>
-                    <a:pt x="890016" y="2009614"/>
-                  </a:lnTo>
-                  <a:lnTo>
-                    <a:pt x="813384" y="1980906"/>
-                  </a:lnTo>
-                  <a:lnTo>
-                    <a:pt x="736751" y="1951675"/>
-                  </a:lnTo>
-                  <a:lnTo>
-                    <a:pt x="660118" y="1921911"/>
-                  </a:lnTo>
-                  <a:lnTo>
-                    <a:pt x="583486" y="1891604"/>
-                  </a:lnTo>
-                  <a:lnTo>
-                    <a:pt x="506853" y="1860745"/>
-                  </a:lnTo>
-                  <a:lnTo>
-                    <a:pt x="430221" y="1829322"/>
-                  </a:lnTo>
-                  <a:lnTo>
-                    <a:pt x="353588" y="1797327"/>
-                  </a:lnTo>
-                  <a:lnTo>
-                    <a:pt x="276956" y="1764749"/>
-                  </a:lnTo>
-                  <a:lnTo>
-                    <a:pt x="200323" y="1731576"/>
-                  </a:lnTo>
-                  <a:lnTo>
-                    <a:pt x="123691" y="1697798"/>
-                  </a:lnTo>
-                  <a:lnTo>
-                    <a:pt x="47058" y="1663405"/>
-                  </a:lnTo>
-                  <a:lnTo>
-                    <a:pt x="0" y="1641899"/>
+                    <a:pt x="47058" y="66610"/>
+                  </a:lnTo>
+                  <a:lnTo>
+                    <a:pt x="123691" y="171682"/>
+                  </a:lnTo>
+                  <a:lnTo>
+                    <a:pt x="200323" y="273460"/>
+                  </a:lnTo>
+                  <a:lnTo>
+                    <a:pt x="276956" y="372047"/>
+                  </a:lnTo>
+                  <a:lnTo>
+                    <a:pt x="353588" y="467543"/>
+                  </a:lnTo>
+                  <a:lnTo>
+                    <a:pt x="430221" y="560046"/>
+                  </a:lnTo>
+                  <a:lnTo>
+                    <a:pt x="506853" y="649649"/>
+                  </a:lnTo>
+                  <a:lnTo>
+                    <a:pt x="583486" y="736442"/>
+                  </a:lnTo>
+                  <a:lnTo>
+                    <a:pt x="660118" y="820515"/>
+                  </a:lnTo>
+                  <a:lnTo>
+                    <a:pt x="736751" y="901952"/>
+                  </a:lnTo>
+                  <a:lnTo>
+                    <a:pt x="813384" y="980836"/>
+                  </a:lnTo>
+                  <a:lnTo>
+                    <a:pt x="890016" y="1057247"/>
+                  </a:lnTo>
+                  <a:lnTo>
+                    <a:pt x="966649" y="1131263"/>
+                  </a:lnTo>
+                  <a:lnTo>
+                    <a:pt x="1043281" y="1202958"/>
+                  </a:lnTo>
+                  <a:lnTo>
+                    <a:pt x="1119914" y="1272406"/>
+                  </a:lnTo>
+                  <a:lnTo>
+                    <a:pt x="1196546" y="1339677"/>
+                  </a:lnTo>
+                  <a:lnTo>
+                    <a:pt x="1273179" y="1404838"/>
+                  </a:lnTo>
+                  <a:lnTo>
+                    <a:pt x="1349811" y="1467957"/>
+                  </a:lnTo>
+                  <a:lnTo>
+                    <a:pt x="1426444" y="1529097"/>
+                  </a:lnTo>
+                  <a:lnTo>
+                    <a:pt x="1503076" y="1588320"/>
+                  </a:lnTo>
+                  <a:lnTo>
+                    <a:pt x="1579709" y="1645687"/>
+                  </a:lnTo>
+                  <a:lnTo>
+                    <a:pt x="1656342" y="1701256"/>
+                  </a:lnTo>
+                  <a:lnTo>
+                    <a:pt x="1732974" y="1755082"/>
+                  </a:lnTo>
+                  <a:lnTo>
+                    <a:pt x="1809607" y="1807221"/>
+                  </a:lnTo>
+                  <a:lnTo>
+                    <a:pt x="1886239" y="1857725"/>
+                  </a:lnTo>
+                  <a:lnTo>
+                    <a:pt x="1962872" y="1906646"/>
+                  </a:lnTo>
+                  <a:lnTo>
+                    <a:pt x="2039504" y="1954033"/>
+                  </a:lnTo>
+                  <a:lnTo>
+                    <a:pt x="2116137" y="1999935"/>
+                  </a:lnTo>
+                  <a:lnTo>
+                    <a:pt x="2192769" y="2044398"/>
+                  </a:lnTo>
+                  <a:lnTo>
+                    <a:pt x="2269402" y="2087467"/>
+                  </a:lnTo>
+                  <a:lnTo>
+                    <a:pt x="2346034" y="2129185"/>
+                  </a:lnTo>
+                  <a:lnTo>
+                    <a:pt x="2422667" y="2169596"/>
+                  </a:lnTo>
+                  <a:lnTo>
+                    <a:pt x="2499300" y="2208740"/>
+                  </a:lnTo>
+                  <a:lnTo>
+                    <a:pt x="2575932" y="2246657"/>
+                  </a:lnTo>
+                  <a:lnTo>
+                    <a:pt x="2652565" y="2283385"/>
+                  </a:lnTo>
+                  <a:lnTo>
+                    <a:pt x="2729197" y="2318962"/>
+                  </a:lnTo>
+                  <a:lnTo>
+                    <a:pt x="2805830" y="2353423"/>
+                  </a:lnTo>
+                  <a:lnTo>
+                    <a:pt x="2882462" y="2386804"/>
+                  </a:lnTo>
+                  <a:lnTo>
+                    <a:pt x="2959095" y="2419139"/>
+                  </a:lnTo>
+                  <a:lnTo>
+                    <a:pt x="3035727" y="2450460"/>
+                  </a:lnTo>
+                  <a:lnTo>
+                    <a:pt x="3112360" y="2480799"/>
+                  </a:lnTo>
+                  <a:lnTo>
+                    <a:pt x="3188993" y="2510187"/>
+                  </a:lnTo>
+                  <a:lnTo>
+                    <a:pt x="3265625" y="2538653"/>
+                  </a:lnTo>
+                  <a:lnTo>
+                    <a:pt x="3342258" y="2566228"/>
+                  </a:lnTo>
+                  <a:lnTo>
+                    <a:pt x="3418890" y="2591133"/>
+                  </a:lnTo>
+                  <a:lnTo>
+                    <a:pt x="3495523" y="2605944"/>
+                  </a:lnTo>
+                  <a:lnTo>
+                    <a:pt x="3572155" y="2620491"/>
+                  </a:lnTo>
+                  <a:lnTo>
+                    <a:pt x="3648788" y="2634777"/>
+                  </a:lnTo>
+                  <a:lnTo>
+                    <a:pt x="3725420" y="2648807"/>
+                  </a:lnTo>
+                  <a:lnTo>
+                    <a:pt x="3802053" y="2662586"/>
+                  </a:lnTo>
+                  <a:lnTo>
+                    <a:pt x="3878685" y="2676118"/>
+                  </a:lnTo>
+                  <a:lnTo>
+                    <a:pt x="3955318" y="2689408"/>
+                  </a:lnTo>
+                  <a:lnTo>
+                    <a:pt x="4031951" y="2702460"/>
+                  </a:lnTo>
+                  <a:lnTo>
+                    <a:pt x="4108583" y="2715278"/>
+                  </a:lnTo>
+                  <a:lnTo>
+                    <a:pt x="4185216" y="2727866"/>
+                  </a:lnTo>
+                  <a:lnTo>
+                    <a:pt x="4261848" y="2740229"/>
+                  </a:lnTo>
+                  <a:lnTo>
+                    <a:pt x="4338481" y="2752371"/>
+                  </a:lnTo>
+                  <a:lnTo>
+                    <a:pt x="4415113" y="2764295"/>
+                  </a:lnTo>
+                  <a:lnTo>
+                    <a:pt x="4491746" y="2776006"/>
+                  </a:lnTo>
+                  <a:lnTo>
+                    <a:pt x="4568378" y="2787507"/>
+                  </a:lnTo>
+                  <a:lnTo>
+                    <a:pt x="4645011" y="2798802"/>
+                  </a:lnTo>
+                  <a:lnTo>
+                    <a:pt x="4721644" y="2809895"/>
+                  </a:lnTo>
+                  <a:lnTo>
+                    <a:pt x="4798276" y="2820789"/>
+                  </a:lnTo>
+                  <a:lnTo>
+                    <a:pt x="4874909" y="2831488"/>
+                  </a:lnTo>
+                  <a:lnTo>
+                    <a:pt x="4951541" y="2841995"/>
+                  </a:lnTo>
+                  <a:lnTo>
+                    <a:pt x="5028174" y="2852315"/>
+                  </a:lnTo>
+                  <a:lnTo>
+                    <a:pt x="5104806" y="2862449"/>
+                  </a:lnTo>
+                  <a:lnTo>
+                    <a:pt x="5181439" y="2872402"/>
+                  </a:lnTo>
+                  <a:lnTo>
+                    <a:pt x="5258071" y="2882177"/>
+                  </a:lnTo>
+                  <a:lnTo>
+                    <a:pt x="5334704" y="2891776"/>
+                  </a:lnTo>
+                  <a:lnTo>
+                    <a:pt x="5411336" y="2901204"/>
+                  </a:lnTo>
+                  <a:lnTo>
+                    <a:pt x="5487969" y="2910463"/>
+                  </a:lnTo>
+                  <a:lnTo>
+                    <a:pt x="5564602" y="2919556"/>
+                  </a:lnTo>
+                  <a:lnTo>
+                    <a:pt x="5641234" y="2928486"/>
+                  </a:lnTo>
+                  <a:lnTo>
+                    <a:pt x="5717867" y="2937257"/>
+                  </a:lnTo>
+                  <a:lnTo>
+                    <a:pt x="5794499" y="2945870"/>
+                  </a:lnTo>
+                  <a:lnTo>
+                    <a:pt x="5871132" y="2954329"/>
+                  </a:lnTo>
+                  <a:lnTo>
+                    <a:pt x="5947764" y="2962636"/>
+                  </a:lnTo>
+                  <a:lnTo>
+                    <a:pt x="6024397" y="2970795"/>
+                  </a:lnTo>
+                  <a:lnTo>
+                    <a:pt x="6101029" y="2978808"/>
+                  </a:lnTo>
+                  <a:lnTo>
+                    <a:pt x="6177662" y="2986677"/>
+                  </a:lnTo>
+                  <a:lnTo>
+                    <a:pt x="6254294" y="2994405"/>
+                  </a:lnTo>
+                  <a:lnTo>
+                    <a:pt x="6330927" y="3001995"/>
+                  </a:lnTo>
+                  <a:lnTo>
+                    <a:pt x="6407560" y="3009449"/>
+                  </a:lnTo>
+                  <a:lnTo>
+                    <a:pt x="6484192" y="3016770"/>
+                  </a:lnTo>
+                  <a:lnTo>
+                    <a:pt x="6560825" y="3023959"/>
+                  </a:lnTo>
+                  <a:lnTo>
+                    <a:pt x="6637457" y="3031019"/>
+                  </a:lnTo>
+                  <a:lnTo>
+                    <a:pt x="6714090" y="3037954"/>
+                  </a:lnTo>
+                  <a:lnTo>
+                    <a:pt x="6790722" y="3044764"/>
+                  </a:lnTo>
+                  <a:lnTo>
+                    <a:pt x="6867355" y="3051452"/>
+                  </a:lnTo>
+                  <a:lnTo>
+                    <a:pt x="6943987" y="3058020"/>
+                  </a:lnTo>
+                  <a:lnTo>
+                    <a:pt x="7020620" y="3064470"/>
+                  </a:lnTo>
+                  <a:lnTo>
+                    <a:pt x="7097253" y="3070806"/>
+                  </a:lnTo>
+                  <a:lnTo>
+                    <a:pt x="7173885" y="3077027"/>
+                  </a:lnTo>
+                  <a:lnTo>
+                    <a:pt x="7250518" y="3083137"/>
+                  </a:lnTo>
+                  <a:lnTo>
+                    <a:pt x="7327150" y="3089138"/>
+                  </a:lnTo>
+                  <a:lnTo>
+                    <a:pt x="7403783" y="3095032"/>
+                  </a:lnTo>
+                  <a:lnTo>
+                    <a:pt x="7403783" y="3260720"/>
+                  </a:lnTo>
+                  <a:lnTo>
+                    <a:pt x="7327150" y="3255622"/>
+                  </a:lnTo>
+                  <a:lnTo>
+                    <a:pt x="7250518" y="3250360"/>
+                  </a:lnTo>
+                  <a:lnTo>
+                    <a:pt x="7173885" y="3244927"/>
+                  </a:lnTo>
+                  <a:lnTo>
+                    <a:pt x="7097253" y="3239318"/>
+                  </a:lnTo>
+                  <a:lnTo>
+                    <a:pt x="7020620" y="3233528"/>
+                  </a:lnTo>
+                  <a:lnTo>
+                    <a:pt x="6943987" y="3227551"/>
+                  </a:lnTo>
+                  <a:lnTo>
+                    <a:pt x="6867355" y="3221380"/>
+                  </a:lnTo>
+                  <a:lnTo>
+                    <a:pt x="6790722" y="3215009"/>
+                  </a:lnTo>
+                  <a:lnTo>
+                    <a:pt x="6714090" y="3208432"/>
+                  </a:lnTo>
+                  <a:lnTo>
+                    <a:pt x="6637457" y="3201642"/>
+                  </a:lnTo>
+                  <a:lnTo>
+                    <a:pt x="6560825" y="3194633"/>
+                  </a:lnTo>
+                  <a:lnTo>
+                    <a:pt x="6484192" y="3187396"/>
+                  </a:lnTo>
+                  <a:lnTo>
+                    <a:pt x="6407560" y="3179926"/>
+                  </a:lnTo>
+                  <a:lnTo>
+                    <a:pt x="6330927" y="3172214"/>
+                  </a:lnTo>
+                  <a:lnTo>
+                    <a:pt x="6254294" y="3164252"/>
+                  </a:lnTo>
+                  <a:lnTo>
+                    <a:pt x="6177662" y="3156032"/>
+                  </a:lnTo>
+                  <a:lnTo>
+                    <a:pt x="6101029" y="3147546"/>
+                  </a:lnTo>
+                  <a:lnTo>
+                    <a:pt x="6024397" y="3138786"/>
+                  </a:lnTo>
+                  <a:lnTo>
+                    <a:pt x="5947764" y="3129742"/>
+                  </a:lnTo>
+                  <a:lnTo>
+                    <a:pt x="5871132" y="3120406"/>
+                  </a:lnTo>
+                  <a:lnTo>
+                    <a:pt x="5794499" y="3110767"/>
+                  </a:lnTo>
+                  <a:lnTo>
+                    <a:pt x="5717867" y="3100817"/>
+                  </a:lnTo>
+                  <a:lnTo>
+                    <a:pt x="5641234" y="3090544"/>
+                  </a:lnTo>
+                  <a:lnTo>
+                    <a:pt x="5564602" y="3079939"/>
+                  </a:lnTo>
+                  <a:lnTo>
+                    <a:pt x="5487969" y="3068991"/>
+                  </a:lnTo>
+                  <a:lnTo>
+                    <a:pt x="5411336" y="3057688"/>
+                  </a:lnTo>
+                  <a:lnTo>
+                    <a:pt x="5334704" y="3046020"/>
+                  </a:lnTo>
+                  <a:lnTo>
+                    <a:pt x="5258071" y="3033973"/>
+                  </a:lnTo>
+                  <a:lnTo>
+                    <a:pt x="5181439" y="3021537"/>
+                  </a:lnTo>
+                  <a:lnTo>
+                    <a:pt x="5104806" y="3008699"/>
+                  </a:lnTo>
+                  <a:lnTo>
+                    <a:pt x="5028174" y="2995445"/>
+                  </a:lnTo>
+                  <a:lnTo>
+                    <a:pt x="4951541" y="2981762"/>
+                  </a:lnTo>
+                  <a:lnTo>
+                    <a:pt x="4874909" y="2967636"/>
+                  </a:lnTo>
+                  <a:lnTo>
+                    <a:pt x="4798276" y="2953054"/>
+                  </a:lnTo>
+                  <a:lnTo>
+                    <a:pt x="4721644" y="2937999"/>
+                  </a:lnTo>
+                  <a:lnTo>
+                    <a:pt x="4645011" y="2922457"/>
+                  </a:lnTo>
+                  <a:lnTo>
+                    <a:pt x="4568378" y="2906412"/>
+                  </a:lnTo>
+                  <a:lnTo>
+                    <a:pt x="4491746" y="2889847"/>
+                  </a:lnTo>
+                  <a:lnTo>
+                    <a:pt x="4415113" y="2872747"/>
+                  </a:lnTo>
+                  <a:lnTo>
+                    <a:pt x="4338481" y="2855093"/>
+                  </a:lnTo>
+                  <a:lnTo>
+                    <a:pt x="4261848" y="2836867"/>
+                  </a:lnTo>
+                  <a:lnTo>
+                    <a:pt x="4185216" y="2818052"/>
+                  </a:lnTo>
+                  <a:lnTo>
+                    <a:pt x="4108583" y="2798628"/>
+                  </a:lnTo>
+                  <a:lnTo>
+                    <a:pt x="4031951" y="2778575"/>
+                  </a:lnTo>
+                  <a:lnTo>
+                    <a:pt x="3955318" y="2757874"/>
+                  </a:lnTo>
+                  <a:lnTo>
+                    <a:pt x="3878685" y="2736502"/>
+                  </a:lnTo>
+                  <a:lnTo>
+                    <a:pt x="3802053" y="2714439"/>
+                  </a:lnTo>
+                  <a:lnTo>
+                    <a:pt x="3725420" y="2691661"/>
+                  </a:lnTo>
+                  <a:lnTo>
+                    <a:pt x="3648788" y="2668147"/>
+                  </a:lnTo>
+                  <a:lnTo>
+                    <a:pt x="3572155" y="2643871"/>
+                  </a:lnTo>
+                  <a:lnTo>
+                    <a:pt x="3495523" y="2618810"/>
+                  </a:lnTo>
+                  <a:lnTo>
+                    <a:pt x="3418890" y="2592937"/>
+                  </a:lnTo>
+                  <a:lnTo>
+                    <a:pt x="3342258" y="2576051"/>
+                  </a:lnTo>
+                  <a:lnTo>
+                    <a:pt x="3265625" y="2560694"/>
+                  </a:lnTo>
+                  <a:lnTo>
+                    <a:pt x="3188993" y="2545057"/>
+                  </a:lnTo>
+                  <a:lnTo>
+                    <a:pt x="3112360" y="2529135"/>
+                  </a:lnTo>
+                  <a:lnTo>
+                    <a:pt x="3035727" y="2512923"/>
+                  </a:lnTo>
+                  <a:lnTo>
+                    <a:pt x="2959095" y="2496415"/>
+                  </a:lnTo>
+                  <a:lnTo>
+                    <a:pt x="2882462" y="2479606"/>
+                  </a:lnTo>
+                  <a:lnTo>
+                    <a:pt x="2805830" y="2462490"/>
+                  </a:lnTo>
+                  <a:lnTo>
+                    <a:pt x="2729197" y="2445063"/>
+                  </a:lnTo>
+                  <a:lnTo>
+                    <a:pt x="2652565" y="2427317"/>
+                  </a:lnTo>
+                  <a:lnTo>
+                    <a:pt x="2575932" y="2409248"/>
+                  </a:lnTo>
+                  <a:lnTo>
+                    <a:pt x="2499300" y="2390850"/>
+                  </a:lnTo>
+                  <a:lnTo>
+                    <a:pt x="2422667" y="2372116"/>
+                  </a:lnTo>
+                  <a:lnTo>
+                    <a:pt x="2346034" y="2353040"/>
+                  </a:lnTo>
+                  <a:lnTo>
+                    <a:pt x="2269402" y="2333617"/>
+                  </a:lnTo>
+                  <a:lnTo>
+                    <a:pt x="2192769" y="2313839"/>
+                  </a:lnTo>
+                  <a:lnTo>
+                    <a:pt x="2116137" y="2293701"/>
+                  </a:lnTo>
+                  <a:lnTo>
+                    <a:pt x="2039504" y="2273196"/>
+                  </a:lnTo>
+                  <a:lnTo>
+                    <a:pt x="1962872" y="2252316"/>
+                  </a:lnTo>
+                  <a:lnTo>
+                    <a:pt x="1886239" y="2231056"/>
+                  </a:lnTo>
+                  <a:lnTo>
+                    <a:pt x="1809607" y="2209408"/>
+                  </a:lnTo>
+                  <a:lnTo>
+                    <a:pt x="1732974" y="2187366"/>
+                  </a:lnTo>
+                  <a:lnTo>
+                    <a:pt x="1656342" y="2164921"/>
+                  </a:lnTo>
+                  <a:lnTo>
+                    <a:pt x="1579709" y="2142068"/>
+                  </a:lnTo>
+                  <a:lnTo>
+                    <a:pt x="1503076" y="2118797"/>
+                  </a:lnTo>
+                  <a:lnTo>
+                    <a:pt x="1426444" y="2095103"/>
+                  </a:lnTo>
+                  <a:lnTo>
+                    <a:pt x="1349811" y="2070976"/>
+                  </a:lnTo>
+                  <a:lnTo>
+                    <a:pt x="1273179" y="2046409"/>
+                  </a:lnTo>
+                  <a:lnTo>
+                    <a:pt x="1196546" y="2021394"/>
+                  </a:lnTo>
+                  <a:lnTo>
+                    <a:pt x="1119914" y="1995923"/>
+                  </a:lnTo>
+                  <a:lnTo>
+                    <a:pt x="1043281" y="1969988"/>
+                  </a:lnTo>
+                  <a:lnTo>
+                    <a:pt x="966649" y="1943580"/>
+                  </a:lnTo>
+                  <a:lnTo>
+                    <a:pt x="890016" y="1916690"/>
+                  </a:lnTo>
+                  <a:lnTo>
+                    <a:pt x="813384" y="1889310"/>
+                  </a:lnTo>
+                  <a:lnTo>
+                    <a:pt x="736751" y="1861430"/>
+                  </a:lnTo>
+                  <a:lnTo>
+                    <a:pt x="660118" y="1833042"/>
+                  </a:lnTo>
+                  <a:lnTo>
+                    <a:pt x="583486" y="1804137"/>
+                  </a:lnTo>
+                  <a:lnTo>
+                    <a:pt x="506853" y="1774704"/>
+                  </a:lnTo>
+                  <a:lnTo>
+                    <a:pt x="430221" y="1744735"/>
+                  </a:lnTo>
+                  <a:lnTo>
+                    <a:pt x="353588" y="1714219"/>
+                  </a:lnTo>
+                  <a:lnTo>
+                    <a:pt x="276956" y="1683147"/>
+                  </a:lnTo>
+                  <a:lnTo>
+                    <a:pt x="200323" y="1651508"/>
+                  </a:lnTo>
+                  <a:lnTo>
+                    <a:pt x="123691" y="1619293"/>
+                  </a:lnTo>
+                  <a:lnTo>
+                    <a:pt x="47058" y="1586490"/>
+                  </a:lnTo>
+                  <a:lnTo>
+                    <a:pt x="0" y="1565979"/>
                   </a:lnTo>
                   <a:close/>
                 </a:path>
@@ -3621,306 +3621,306 @@
           </p:nvSpPr>
           <p:spPr>
             <a:xfrm>
-              <a:off x="817517" y="1965262"/>
-              <a:ext cx="7403783" cy="3245083"/>
+              <a:off x="817517" y="2139025"/>
+              <a:ext cx="7403783" cy="3095032"/>
             </a:xfrm>
             <a:custGeom>
               <a:avLst/>
               <a:pathLst>
-                <a:path w="7403783" h="3245083">
+                <a:path w="7403783" h="3095032">
                   <a:moveTo>
                     <a:pt x="0" y="0"/>
                   </a:moveTo>
                   <a:lnTo>
-                    <a:pt x="47058" y="69840"/>
-                  </a:lnTo>
-                  <a:lnTo>
-                    <a:pt x="123691" y="180005"/>
-                  </a:lnTo>
-                  <a:lnTo>
-                    <a:pt x="200323" y="286717"/>
-                  </a:lnTo>
-                  <a:lnTo>
-                    <a:pt x="276956" y="390084"/>
-                  </a:lnTo>
-                  <a:lnTo>
-                    <a:pt x="353588" y="490210"/>
-                  </a:lnTo>
-                  <a:lnTo>
-                    <a:pt x="430221" y="587198"/>
-                  </a:lnTo>
-                  <a:lnTo>
-                    <a:pt x="506853" y="681144"/>
-                  </a:lnTo>
-                  <a:lnTo>
-                    <a:pt x="583486" y="772146"/>
-                  </a:lnTo>
-                  <a:lnTo>
-                    <a:pt x="660118" y="860295"/>
-                  </a:lnTo>
-                  <a:lnTo>
-                    <a:pt x="736751" y="945680"/>
-                  </a:lnTo>
-                  <a:lnTo>
-                    <a:pt x="813384" y="1028389"/>
-                  </a:lnTo>
-                  <a:lnTo>
-                    <a:pt x="890016" y="1108504"/>
-                  </a:lnTo>
-                  <a:lnTo>
-                    <a:pt x="966649" y="1186108"/>
-                  </a:lnTo>
-                  <a:lnTo>
-                    <a:pt x="1043281" y="1261279"/>
-                  </a:lnTo>
-                  <a:lnTo>
-                    <a:pt x="1119914" y="1334094"/>
-                  </a:lnTo>
-                  <a:lnTo>
-                    <a:pt x="1196546" y="1404626"/>
-                  </a:lnTo>
-                  <a:lnTo>
-                    <a:pt x="1273179" y="1472947"/>
-                  </a:lnTo>
-                  <a:lnTo>
-                    <a:pt x="1349811" y="1539126"/>
-                  </a:lnTo>
-                  <a:lnTo>
-                    <a:pt x="1426444" y="1603230"/>
-                  </a:lnTo>
-                  <a:lnTo>
-                    <a:pt x="1503076" y="1665324"/>
-                  </a:lnTo>
-                  <a:lnTo>
-                    <a:pt x="1579709" y="1725472"/>
-                  </a:lnTo>
-                  <a:lnTo>
-                    <a:pt x="1656342" y="1783735"/>
-                  </a:lnTo>
-                  <a:lnTo>
-                    <a:pt x="1732974" y="1840171"/>
-                  </a:lnTo>
-                  <a:lnTo>
-                    <a:pt x="1809607" y="1894837"/>
-                  </a:lnTo>
-                  <a:lnTo>
-                    <a:pt x="1886239" y="1947790"/>
-                  </a:lnTo>
-                  <a:lnTo>
-                    <a:pt x="1962872" y="1999083"/>
-                  </a:lnTo>
-                  <a:lnTo>
-                    <a:pt x="2039504" y="2048768"/>
-                  </a:lnTo>
-                  <a:lnTo>
-                    <a:pt x="2116137" y="2096895"/>
-                  </a:lnTo>
-                  <a:lnTo>
-                    <a:pt x="2192769" y="2143513"/>
-                  </a:lnTo>
-                  <a:lnTo>
-                    <a:pt x="2269402" y="2188670"/>
-                  </a:lnTo>
-                  <a:lnTo>
-                    <a:pt x="2346034" y="2232411"/>
-                  </a:lnTo>
-                  <a:lnTo>
-                    <a:pt x="2422667" y="2274781"/>
-                  </a:lnTo>
-                  <a:lnTo>
-                    <a:pt x="2499300" y="2315823"/>
-                  </a:lnTo>
-                  <a:lnTo>
-                    <a:pt x="2575932" y="2355578"/>
-                  </a:lnTo>
-                  <a:lnTo>
-                    <a:pt x="2652565" y="2394087"/>
-                  </a:lnTo>
-                  <a:lnTo>
-                    <a:pt x="2729197" y="2431388"/>
-                  </a:lnTo>
-                  <a:lnTo>
-                    <a:pt x="2805830" y="2467521"/>
-                  </a:lnTo>
-                  <a:lnTo>
-                    <a:pt x="2882462" y="2502520"/>
-                  </a:lnTo>
-                  <a:lnTo>
-                    <a:pt x="2959095" y="2536422"/>
-                  </a:lnTo>
-                  <a:lnTo>
-                    <a:pt x="3035727" y="2569262"/>
-                  </a:lnTo>
-                  <a:lnTo>
-                    <a:pt x="3112360" y="2601072"/>
-                  </a:lnTo>
-                  <a:lnTo>
-                    <a:pt x="3188993" y="2631884"/>
-                  </a:lnTo>
-                  <a:lnTo>
-                    <a:pt x="3265625" y="2661731"/>
-                  </a:lnTo>
-                  <a:lnTo>
-                    <a:pt x="3342258" y="2690642"/>
-                  </a:lnTo>
-                  <a:lnTo>
-                    <a:pt x="3418890" y="2716754"/>
-                  </a:lnTo>
-                  <a:lnTo>
-                    <a:pt x="3495523" y="2732284"/>
-                  </a:lnTo>
-                  <a:lnTo>
-                    <a:pt x="3572155" y="2747536"/>
-                  </a:lnTo>
-                  <a:lnTo>
-                    <a:pt x="3648788" y="2762515"/>
-                  </a:lnTo>
-                  <a:lnTo>
-                    <a:pt x="3725420" y="2777225"/>
-                  </a:lnTo>
-                  <a:lnTo>
-                    <a:pt x="3802053" y="2791672"/>
-                  </a:lnTo>
-                  <a:lnTo>
-                    <a:pt x="3878685" y="2805860"/>
-                  </a:lnTo>
-                  <a:lnTo>
-                    <a:pt x="3955318" y="2819794"/>
-                  </a:lnTo>
-                  <a:lnTo>
-                    <a:pt x="4031951" y="2833479"/>
-                  </a:lnTo>
-                  <a:lnTo>
-                    <a:pt x="4108583" y="2846918"/>
-                  </a:lnTo>
-                  <a:lnTo>
-                    <a:pt x="4185216" y="2860117"/>
-                  </a:lnTo>
-                  <a:lnTo>
-                    <a:pt x="4261848" y="2873080"/>
-                  </a:lnTo>
-                  <a:lnTo>
-                    <a:pt x="4338481" y="2885810"/>
-                  </a:lnTo>
-                  <a:lnTo>
-                    <a:pt x="4415113" y="2898312"/>
-                  </a:lnTo>
-                  <a:lnTo>
-                    <a:pt x="4491746" y="2910591"/>
-                  </a:lnTo>
-                  <a:lnTo>
-                    <a:pt x="4568378" y="2922649"/>
-                  </a:lnTo>
-                  <a:lnTo>
-                    <a:pt x="4645011" y="2934492"/>
-                  </a:lnTo>
-                  <a:lnTo>
-                    <a:pt x="4721644" y="2946122"/>
-                  </a:lnTo>
-                  <a:lnTo>
-                    <a:pt x="4798276" y="2957545"/>
-                  </a:lnTo>
-                  <a:lnTo>
-                    <a:pt x="4874909" y="2968762"/>
-                  </a:lnTo>
-                  <a:lnTo>
-                    <a:pt x="4951541" y="2979779"/>
-                  </a:lnTo>
-                  <a:lnTo>
-                    <a:pt x="5028174" y="2990599"/>
-                  </a:lnTo>
-                  <a:lnTo>
-                    <a:pt x="5104806" y="3001224"/>
-                  </a:lnTo>
-                  <a:lnTo>
-                    <a:pt x="5181439" y="3011660"/>
-                  </a:lnTo>
-                  <a:lnTo>
-                    <a:pt x="5258071" y="3021909"/>
-                  </a:lnTo>
-                  <a:lnTo>
-                    <a:pt x="5334704" y="3031974"/>
-                  </a:lnTo>
-                  <a:lnTo>
-                    <a:pt x="5411336" y="3041858"/>
-                  </a:lnTo>
-                  <a:lnTo>
-                    <a:pt x="5487969" y="3051566"/>
-                  </a:lnTo>
-                  <a:lnTo>
-                    <a:pt x="5564602" y="3061100"/>
-                  </a:lnTo>
-                  <a:lnTo>
-                    <a:pt x="5641234" y="3070463"/>
-                  </a:lnTo>
-                  <a:lnTo>
-                    <a:pt x="5717867" y="3079659"/>
-                  </a:lnTo>
-                  <a:lnTo>
-                    <a:pt x="5794499" y="3088690"/>
-                  </a:lnTo>
-                  <a:lnTo>
-                    <a:pt x="5871132" y="3097559"/>
-                  </a:lnTo>
-                  <a:lnTo>
-                    <a:pt x="5947764" y="3106269"/>
-                  </a:lnTo>
-                  <a:lnTo>
-                    <a:pt x="6024397" y="3114824"/>
-                  </a:lnTo>
-                  <a:lnTo>
-                    <a:pt x="6101029" y="3123225"/>
-                  </a:lnTo>
-                  <a:lnTo>
-                    <a:pt x="6177662" y="3131475"/>
-                  </a:lnTo>
-                  <a:lnTo>
-                    <a:pt x="6254294" y="3139578"/>
-                  </a:lnTo>
-                  <a:lnTo>
-                    <a:pt x="6330927" y="3147536"/>
-                  </a:lnTo>
-                  <a:lnTo>
-                    <a:pt x="6407560" y="3155351"/>
-                  </a:lnTo>
-                  <a:lnTo>
-                    <a:pt x="6484192" y="3163027"/>
-                  </a:lnTo>
-                  <a:lnTo>
-                    <a:pt x="6560825" y="3170565"/>
-                  </a:lnTo>
-                  <a:lnTo>
-                    <a:pt x="6637457" y="3177968"/>
-                  </a:lnTo>
-                  <a:lnTo>
-                    <a:pt x="6714090" y="3185238"/>
-                  </a:lnTo>
-                  <a:lnTo>
-                    <a:pt x="6790722" y="3192378"/>
-                  </a:lnTo>
-                  <a:lnTo>
-                    <a:pt x="6867355" y="3199390"/>
-                  </a:lnTo>
-                  <a:lnTo>
-                    <a:pt x="6943987" y="3206277"/>
-                  </a:lnTo>
-                  <a:lnTo>
-                    <a:pt x="7020620" y="3213040"/>
-                  </a:lnTo>
-                  <a:lnTo>
-                    <a:pt x="7097253" y="3219682"/>
-                  </a:lnTo>
-                  <a:lnTo>
-                    <a:pt x="7173885" y="3226206"/>
-                  </a:lnTo>
-                  <a:lnTo>
-                    <a:pt x="7250518" y="3232612"/>
-                  </a:lnTo>
-                  <a:lnTo>
-                    <a:pt x="7327150" y="3238904"/>
-                  </a:lnTo>
-                  <a:lnTo>
-                    <a:pt x="7403783" y="3245083"/>
+                    <a:pt x="47058" y="66610"/>
+                  </a:lnTo>
+                  <a:lnTo>
+                    <a:pt x="123691" y="171682"/>
+                  </a:lnTo>
+                  <a:lnTo>
+                    <a:pt x="200323" y="273460"/>
+                  </a:lnTo>
+                  <a:lnTo>
+                    <a:pt x="276956" y="372047"/>
+                  </a:lnTo>
+                  <a:lnTo>
+                    <a:pt x="353588" y="467543"/>
+                  </a:lnTo>
+                  <a:lnTo>
+                    <a:pt x="430221" y="560046"/>
+                  </a:lnTo>
+                  <a:lnTo>
+                    <a:pt x="506853" y="649649"/>
+                  </a:lnTo>
+                  <a:lnTo>
+                    <a:pt x="583486" y="736442"/>
+                  </a:lnTo>
+                  <a:lnTo>
+                    <a:pt x="660118" y="820515"/>
+                  </a:lnTo>
+                  <a:lnTo>
+                    <a:pt x="736751" y="901952"/>
+                  </a:lnTo>
+                  <a:lnTo>
+                    <a:pt x="813384" y="980836"/>
+                  </a:lnTo>
+                  <a:lnTo>
+                    <a:pt x="890016" y="1057247"/>
+                  </a:lnTo>
+                  <a:lnTo>
+                    <a:pt x="966649" y="1131263"/>
+                  </a:lnTo>
+                  <a:lnTo>
+                    <a:pt x="1043281" y="1202958"/>
+                  </a:lnTo>
+                  <a:lnTo>
+                    <a:pt x="1119914" y="1272406"/>
+                  </a:lnTo>
+                  <a:lnTo>
+                    <a:pt x="1196546" y="1339677"/>
+                  </a:lnTo>
+                  <a:lnTo>
+                    <a:pt x="1273179" y="1404838"/>
+                  </a:lnTo>
+                  <a:lnTo>
+                    <a:pt x="1349811" y="1467957"/>
+                  </a:lnTo>
+                  <a:lnTo>
+                    <a:pt x="1426444" y="1529097"/>
+                  </a:lnTo>
+                  <a:lnTo>
+                    <a:pt x="1503076" y="1588320"/>
+                  </a:lnTo>
+                  <a:lnTo>
+                    <a:pt x="1579709" y="1645687"/>
+                  </a:lnTo>
+                  <a:lnTo>
+                    <a:pt x="1656342" y="1701256"/>
+                  </a:lnTo>
+                  <a:lnTo>
+                    <a:pt x="1732974" y="1755082"/>
+                  </a:lnTo>
+                  <a:lnTo>
+                    <a:pt x="1809607" y="1807221"/>
+                  </a:lnTo>
+                  <a:lnTo>
+                    <a:pt x="1886239" y="1857725"/>
+                  </a:lnTo>
+                  <a:lnTo>
+                    <a:pt x="1962872" y="1906646"/>
+                  </a:lnTo>
+                  <a:lnTo>
+                    <a:pt x="2039504" y="1954033"/>
+                  </a:lnTo>
+                  <a:lnTo>
+                    <a:pt x="2116137" y="1999935"/>
+                  </a:lnTo>
+                  <a:lnTo>
+                    <a:pt x="2192769" y="2044398"/>
+                  </a:lnTo>
+                  <a:lnTo>
+                    <a:pt x="2269402" y="2087467"/>
+                  </a:lnTo>
+                  <a:lnTo>
+                    <a:pt x="2346034" y="2129185"/>
+                  </a:lnTo>
+                  <a:lnTo>
+                    <a:pt x="2422667" y="2169596"/>
+                  </a:lnTo>
+                  <a:lnTo>
+                    <a:pt x="2499300" y="2208740"/>
+                  </a:lnTo>
+                  <a:lnTo>
+                    <a:pt x="2575932" y="2246657"/>
+                  </a:lnTo>
+                  <a:lnTo>
+                    <a:pt x="2652565" y="2283385"/>
+                  </a:lnTo>
+                  <a:lnTo>
+                    <a:pt x="2729197" y="2318962"/>
+                  </a:lnTo>
+                  <a:lnTo>
+                    <a:pt x="2805830" y="2353423"/>
+                  </a:lnTo>
+                  <a:lnTo>
+                    <a:pt x="2882462" y="2386804"/>
+                  </a:lnTo>
+                  <a:lnTo>
+                    <a:pt x="2959095" y="2419139"/>
+                  </a:lnTo>
+                  <a:lnTo>
+                    <a:pt x="3035727" y="2450460"/>
+                  </a:lnTo>
+                  <a:lnTo>
+                    <a:pt x="3112360" y="2480799"/>
+                  </a:lnTo>
+                  <a:lnTo>
+                    <a:pt x="3188993" y="2510187"/>
+                  </a:lnTo>
+                  <a:lnTo>
+                    <a:pt x="3265625" y="2538653"/>
+                  </a:lnTo>
+                  <a:lnTo>
+                    <a:pt x="3342258" y="2566228"/>
+                  </a:lnTo>
+                  <a:lnTo>
+                    <a:pt x="3418890" y="2591133"/>
+                  </a:lnTo>
+                  <a:lnTo>
+                    <a:pt x="3495523" y="2605944"/>
+                  </a:lnTo>
+                  <a:lnTo>
+                    <a:pt x="3572155" y="2620491"/>
+                  </a:lnTo>
+                  <a:lnTo>
+                    <a:pt x="3648788" y="2634777"/>
+                  </a:lnTo>
+                  <a:lnTo>
+                    <a:pt x="3725420" y="2648807"/>
+                  </a:lnTo>
+                  <a:lnTo>
+                    <a:pt x="3802053" y="2662586"/>
+                  </a:lnTo>
+                  <a:lnTo>
+                    <a:pt x="3878685" y="2676118"/>
+                  </a:lnTo>
+                  <a:lnTo>
+                    <a:pt x="3955318" y="2689408"/>
+                  </a:lnTo>
+                  <a:lnTo>
+                    <a:pt x="4031951" y="2702460"/>
+                  </a:lnTo>
+                  <a:lnTo>
+                    <a:pt x="4108583" y="2715278"/>
+                  </a:lnTo>
+                  <a:lnTo>
+                    <a:pt x="4185216" y="2727866"/>
+                  </a:lnTo>
+                  <a:lnTo>
+                    <a:pt x="4261848" y="2740229"/>
+                  </a:lnTo>
+                  <a:lnTo>
+                    <a:pt x="4338481" y="2752371"/>
+                  </a:lnTo>
+                  <a:lnTo>
+                    <a:pt x="4415113" y="2764295"/>
+                  </a:lnTo>
+                  <a:lnTo>
+                    <a:pt x="4491746" y="2776006"/>
+                  </a:lnTo>
+                  <a:lnTo>
+                    <a:pt x="4568378" y="2787507"/>
+                  </a:lnTo>
+                  <a:lnTo>
+                    <a:pt x="4645011" y="2798802"/>
+                  </a:lnTo>
+                  <a:lnTo>
+                    <a:pt x="4721644" y="2809895"/>
+                  </a:lnTo>
+                  <a:lnTo>
+                    <a:pt x="4798276" y="2820789"/>
+                  </a:lnTo>
+                  <a:lnTo>
+                    <a:pt x="4874909" y="2831488"/>
+                  </a:lnTo>
+                  <a:lnTo>
+                    <a:pt x="4951541" y="2841995"/>
+                  </a:lnTo>
+                  <a:lnTo>
+                    <a:pt x="5028174" y="2852315"/>
+                  </a:lnTo>
+                  <a:lnTo>
+                    <a:pt x="5104806" y="2862449"/>
+                  </a:lnTo>
+                  <a:lnTo>
+                    <a:pt x="5181439" y="2872402"/>
+                  </a:lnTo>
+                  <a:lnTo>
+                    <a:pt x="5258071" y="2882177"/>
+                  </a:lnTo>
+                  <a:lnTo>
+                    <a:pt x="5334704" y="2891776"/>
+                  </a:lnTo>
+                  <a:lnTo>
+                    <a:pt x="5411336" y="2901204"/>
+                  </a:lnTo>
+                  <a:lnTo>
+                    <a:pt x="5487969" y="2910463"/>
+                  </a:lnTo>
+                  <a:lnTo>
+                    <a:pt x="5564602" y="2919556"/>
+                  </a:lnTo>
+                  <a:lnTo>
+                    <a:pt x="5641234" y="2928486"/>
+                  </a:lnTo>
+                  <a:lnTo>
+                    <a:pt x="5717867" y="2937257"/>
+                  </a:lnTo>
+                  <a:lnTo>
+                    <a:pt x="5794499" y="2945870"/>
+                  </a:lnTo>
+                  <a:lnTo>
+                    <a:pt x="5871132" y="2954329"/>
+                  </a:lnTo>
+                  <a:lnTo>
+                    <a:pt x="5947764" y="2962636"/>
+                  </a:lnTo>
+                  <a:lnTo>
+                    <a:pt x="6024397" y="2970795"/>
+                  </a:lnTo>
+                  <a:lnTo>
+                    <a:pt x="6101029" y="2978808"/>
+                  </a:lnTo>
+                  <a:lnTo>
+                    <a:pt x="6177662" y="2986677"/>
+                  </a:lnTo>
+                  <a:lnTo>
+                    <a:pt x="6254294" y="2994405"/>
+                  </a:lnTo>
+                  <a:lnTo>
+                    <a:pt x="6330927" y="3001995"/>
+                  </a:lnTo>
+                  <a:lnTo>
+                    <a:pt x="6407560" y="3009449"/>
+                  </a:lnTo>
+                  <a:lnTo>
+                    <a:pt x="6484192" y="3016770"/>
+                  </a:lnTo>
+                  <a:lnTo>
+                    <a:pt x="6560825" y="3023959"/>
+                  </a:lnTo>
+                  <a:lnTo>
+                    <a:pt x="6637457" y="3031019"/>
+                  </a:lnTo>
+                  <a:lnTo>
+                    <a:pt x="6714090" y="3037954"/>
+                  </a:lnTo>
+                  <a:lnTo>
+                    <a:pt x="6790722" y="3044764"/>
+                  </a:lnTo>
+                  <a:lnTo>
+                    <a:pt x="6867355" y="3051452"/>
+                  </a:lnTo>
+                  <a:lnTo>
+                    <a:pt x="6943987" y="3058020"/>
+                  </a:lnTo>
+                  <a:lnTo>
+                    <a:pt x="7020620" y="3064470"/>
+                  </a:lnTo>
+                  <a:lnTo>
+                    <a:pt x="7097253" y="3070806"/>
+                  </a:lnTo>
+                  <a:lnTo>
+                    <a:pt x="7173885" y="3077027"/>
+                  </a:lnTo>
+                  <a:lnTo>
+                    <a:pt x="7250518" y="3083137"/>
+                  </a:lnTo>
+                  <a:lnTo>
+                    <a:pt x="7327150" y="3089138"/>
+                  </a:lnTo>
+                  <a:lnTo>
+                    <a:pt x="7403783" y="3095032"/>
                   </a:lnTo>
                 </a:path>
               </a:pathLst>
@@ -3940,303 +3940,303 @@
           </p:nvSpPr>
           <p:spPr>
             <a:xfrm>
-              <a:off x="817517" y="3607162"/>
-              <a:ext cx="7403783" cy="1776904"/>
+              <a:off x="817517" y="3705004"/>
+              <a:ext cx="7403783" cy="1694741"/>
             </a:xfrm>
             <a:custGeom>
               <a:avLst/>
               <a:pathLst>
-                <a:path w="7403783" h="1776904">
+                <a:path w="7403783" h="1694741">
                   <a:moveTo>
-                    <a:pt x="7403783" y="1776904"/>
+                    <a:pt x="7403783" y="1694741"/>
                   </a:moveTo>
                   <a:lnTo>
-                    <a:pt x="7327150" y="1771559"/>
-                  </a:lnTo>
-                  <a:lnTo>
-                    <a:pt x="7250518" y="1766042"/>
-                  </a:lnTo>
-                  <a:lnTo>
-                    <a:pt x="7173885" y="1760346"/>
-                  </a:lnTo>
-                  <a:lnTo>
-                    <a:pt x="7097253" y="1754465"/>
-                  </a:lnTo>
-                  <a:lnTo>
-                    <a:pt x="7020620" y="1748394"/>
-                  </a:lnTo>
-                  <a:lnTo>
-                    <a:pt x="6943987" y="1742127"/>
-                  </a:lnTo>
-                  <a:lnTo>
-                    <a:pt x="6867355" y="1735657"/>
-                  </a:lnTo>
-                  <a:lnTo>
-                    <a:pt x="6790722" y="1728977"/>
-                  </a:lnTo>
-                  <a:lnTo>
-                    <a:pt x="6714090" y="1722081"/>
-                  </a:lnTo>
-                  <a:lnTo>
-                    <a:pt x="6637457" y="1714962"/>
-                  </a:lnTo>
-                  <a:lnTo>
-                    <a:pt x="6560825" y="1707613"/>
-                  </a:lnTo>
-                  <a:lnTo>
-                    <a:pt x="6484192" y="1700026"/>
-                  </a:lnTo>
-                  <a:lnTo>
-                    <a:pt x="6407560" y="1692193"/>
-                  </a:lnTo>
-                  <a:lnTo>
-                    <a:pt x="6330927" y="1684107"/>
-                  </a:lnTo>
-                  <a:lnTo>
-                    <a:pt x="6254294" y="1675759"/>
-                  </a:lnTo>
-                  <a:lnTo>
-                    <a:pt x="6177662" y="1667141"/>
-                  </a:lnTo>
-                  <a:lnTo>
-                    <a:pt x="6101029" y="1658244"/>
-                  </a:lnTo>
-                  <a:lnTo>
-                    <a:pt x="6024397" y="1649059"/>
-                  </a:lnTo>
-                  <a:lnTo>
-                    <a:pt x="5947764" y="1639577"/>
-                  </a:lnTo>
-                  <a:lnTo>
-                    <a:pt x="5871132" y="1629788"/>
-                  </a:lnTo>
-                  <a:lnTo>
-                    <a:pt x="5794499" y="1619682"/>
-                  </a:lnTo>
-                  <a:lnTo>
-                    <a:pt x="5717867" y="1609249"/>
-                  </a:lnTo>
-                  <a:lnTo>
-                    <a:pt x="5641234" y="1598478"/>
-                  </a:lnTo>
-                  <a:lnTo>
-                    <a:pt x="5564602" y="1587359"/>
-                  </a:lnTo>
-                  <a:lnTo>
-                    <a:pt x="5487969" y="1575880"/>
-                  </a:lnTo>
-                  <a:lnTo>
-                    <a:pt x="5411336" y="1564029"/>
-                  </a:lnTo>
-                  <a:lnTo>
-                    <a:pt x="5334704" y="1551795"/>
-                  </a:lnTo>
-                  <a:lnTo>
-                    <a:pt x="5258071" y="1539165"/>
-                  </a:lnTo>
-                  <a:lnTo>
-                    <a:pt x="5181439" y="1526126"/>
-                  </a:lnTo>
-                  <a:lnTo>
-                    <a:pt x="5104806" y="1512665"/>
-                  </a:lnTo>
-                  <a:lnTo>
-                    <a:pt x="5028174" y="1498769"/>
-                  </a:lnTo>
-                  <a:lnTo>
-                    <a:pt x="4951541" y="1484422"/>
-                  </a:lnTo>
-                  <a:lnTo>
-                    <a:pt x="4874909" y="1469612"/>
-                  </a:lnTo>
-                  <a:lnTo>
-                    <a:pt x="4798276" y="1454322"/>
-                  </a:lnTo>
-                  <a:lnTo>
-                    <a:pt x="4721644" y="1438537"/>
-                  </a:lnTo>
-                  <a:lnTo>
-                    <a:pt x="4645011" y="1422242"/>
-                  </a:lnTo>
-                  <a:lnTo>
-                    <a:pt x="4568378" y="1405419"/>
-                  </a:lnTo>
-                  <a:lnTo>
-                    <a:pt x="4491746" y="1388051"/>
-                  </a:lnTo>
-                  <a:lnTo>
-                    <a:pt x="4415113" y="1370122"/>
-                  </a:lnTo>
-                  <a:lnTo>
-                    <a:pt x="4338481" y="1351612"/>
-                  </a:lnTo>
-                  <a:lnTo>
-                    <a:pt x="4261848" y="1332503"/>
-                  </a:lnTo>
-                  <a:lnTo>
-                    <a:pt x="4185216" y="1312775"/>
-                  </a:lnTo>
-                  <a:lnTo>
-                    <a:pt x="4108583" y="1292410"/>
-                  </a:lnTo>
-                  <a:lnTo>
-                    <a:pt x="4031951" y="1271385"/>
-                  </a:lnTo>
-                  <a:lnTo>
-                    <a:pt x="3955318" y="1249679"/>
-                  </a:lnTo>
-                  <a:lnTo>
-                    <a:pt x="3878685" y="1227272"/>
-                  </a:lnTo>
-                  <a:lnTo>
-                    <a:pt x="3802053" y="1204139"/>
-                  </a:lnTo>
-                  <a:lnTo>
-                    <a:pt x="3725420" y="1180257"/>
-                  </a:lnTo>
-                  <a:lnTo>
-                    <a:pt x="3648788" y="1155602"/>
-                  </a:lnTo>
-                  <a:lnTo>
-                    <a:pt x="3572155" y="1130150"/>
-                  </a:lnTo>
-                  <a:lnTo>
-                    <a:pt x="3495523" y="1103873"/>
-                  </a:lnTo>
-                  <a:lnTo>
-                    <a:pt x="3418890" y="1076747"/>
-                  </a:lnTo>
-                  <a:lnTo>
-                    <a:pt x="3342258" y="1059041"/>
-                  </a:lnTo>
-                  <a:lnTo>
-                    <a:pt x="3265625" y="1042940"/>
-                  </a:lnTo>
-                  <a:lnTo>
-                    <a:pt x="3188993" y="1026545"/>
-                  </a:lnTo>
-                  <a:lnTo>
-                    <a:pt x="3112360" y="1009851"/>
-                  </a:lnTo>
-                  <a:lnTo>
-                    <a:pt x="3035727" y="992853"/>
-                  </a:lnTo>
-                  <a:lnTo>
-                    <a:pt x="2959095" y="975544"/>
-                  </a:lnTo>
-                  <a:lnTo>
-                    <a:pt x="2882462" y="957921"/>
-                  </a:lnTo>
-                  <a:lnTo>
-                    <a:pt x="2805830" y="939975"/>
-                  </a:lnTo>
-                  <a:lnTo>
-                    <a:pt x="2729197" y="921703"/>
-                  </a:lnTo>
-                  <a:lnTo>
-                    <a:pt x="2652565" y="903097"/>
-                  </a:lnTo>
-                  <a:lnTo>
-                    <a:pt x="2575932" y="884152"/>
-                  </a:lnTo>
-                  <a:lnTo>
-                    <a:pt x="2499300" y="864862"/>
-                  </a:lnTo>
-                  <a:lnTo>
-                    <a:pt x="2422667" y="845219"/>
-                  </a:lnTo>
-                  <a:lnTo>
-                    <a:pt x="2346034" y="825219"/>
-                  </a:lnTo>
-                  <a:lnTo>
-                    <a:pt x="2269402" y="804854"/>
-                  </a:lnTo>
-                  <a:lnTo>
-                    <a:pt x="2192769" y="784118"/>
-                  </a:lnTo>
-                  <a:lnTo>
-                    <a:pt x="2116137" y="763003"/>
-                  </a:lnTo>
-                  <a:lnTo>
-                    <a:pt x="2039504" y="741503"/>
-                  </a:lnTo>
-                  <a:lnTo>
-                    <a:pt x="1962872" y="719612"/>
-                  </a:lnTo>
-                  <a:lnTo>
-                    <a:pt x="1886239" y="697321"/>
-                  </a:lnTo>
-                  <a:lnTo>
-                    <a:pt x="1809607" y="674624"/>
-                  </a:lnTo>
-                  <a:lnTo>
-                    <a:pt x="1732974" y="651513"/>
-                  </a:lnTo>
-                  <a:lnTo>
-                    <a:pt x="1656342" y="627980"/>
-                  </a:lnTo>
-                  <a:lnTo>
-                    <a:pt x="1579709" y="604018"/>
-                  </a:lnTo>
-                  <a:lnTo>
-                    <a:pt x="1503076" y="579620"/>
-                  </a:lnTo>
-                  <a:lnTo>
-                    <a:pt x="1426444" y="554776"/>
-                  </a:lnTo>
-                  <a:lnTo>
-                    <a:pt x="1349811" y="529480"/>
-                  </a:lnTo>
-                  <a:lnTo>
-                    <a:pt x="1273179" y="503722"/>
-                  </a:lnTo>
-                  <a:lnTo>
-                    <a:pt x="1196546" y="477494"/>
-                  </a:lnTo>
-                  <a:lnTo>
-                    <a:pt x="1119914" y="450788"/>
-                  </a:lnTo>
-                  <a:lnTo>
-                    <a:pt x="1043281" y="423596"/>
-                  </a:lnTo>
-                  <a:lnTo>
-                    <a:pt x="966649" y="395907"/>
-                  </a:lnTo>
-                  <a:lnTo>
-                    <a:pt x="890016" y="367714"/>
-                  </a:lnTo>
-                  <a:lnTo>
-                    <a:pt x="813384" y="339006"/>
-                  </a:lnTo>
-                  <a:lnTo>
-                    <a:pt x="736751" y="309775"/>
-                  </a:lnTo>
-                  <a:lnTo>
-                    <a:pt x="660118" y="280011"/>
-                  </a:lnTo>
-                  <a:lnTo>
-                    <a:pt x="583486" y="249704"/>
-                  </a:lnTo>
-                  <a:lnTo>
-                    <a:pt x="506853" y="218845"/>
-                  </a:lnTo>
-                  <a:lnTo>
-                    <a:pt x="430221" y="187422"/>
-                  </a:lnTo>
-                  <a:lnTo>
-                    <a:pt x="353588" y="155427"/>
-                  </a:lnTo>
-                  <a:lnTo>
-                    <a:pt x="276956" y="122849"/>
-                  </a:lnTo>
-                  <a:lnTo>
-                    <a:pt x="200323" y="89676"/>
-                  </a:lnTo>
-                  <a:lnTo>
-                    <a:pt x="123691" y="55898"/>
-                  </a:lnTo>
-                  <a:lnTo>
-                    <a:pt x="47058" y="21505"/>
+                    <a:pt x="7327150" y="1689643"/>
+                  </a:lnTo>
+                  <a:lnTo>
+                    <a:pt x="7250518" y="1684381"/>
+                  </a:lnTo>
+                  <a:lnTo>
+                    <a:pt x="7173885" y="1678948"/>
+                  </a:lnTo>
+                  <a:lnTo>
+                    <a:pt x="7097253" y="1673339"/>
+                  </a:lnTo>
+                  <a:lnTo>
+                    <a:pt x="7020620" y="1667549"/>
+                  </a:lnTo>
+                  <a:lnTo>
+                    <a:pt x="6943987" y="1661572"/>
+                  </a:lnTo>
+                  <a:lnTo>
+                    <a:pt x="6867355" y="1655401"/>
+                  </a:lnTo>
+                  <a:lnTo>
+                    <a:pt x="6790722" y="1649030"/>
+                  </a:lnTo>
+                  <a:lnTo>
+                    <a:pt x="6714090" y="1642453"/>
+                  </a:lnTo>
+                  <a:lnTo>
+                    <a:pt x="6637457" y="1635663"/>
+                  </a:lnTo>
+                  <a:lnTo>
+                    <a:pt x="6560825" y="1628654"/>
+                  </a:lnTo>
+                  <a:lnTo>
+                    <a:pt x="6484192" y="1621417"/>
+                  </a:lnTo>
+                  <a:lnTo>
+                    <a:pt x="6407560" y="1613947"/>
+                  </a:lnTo>
+                  <a:lnTo>
+                    <a:pt x="6330927" y="1606234"/>
+                  </a:lnTo>
+                  <a:lnTo>
+                    <a:pt x="6254294" y="1598273"/>
+                  </a:lnTo>
+                  <a:lnTo>
+                    <a:pt x="6177662" y="1590053"/>
+                  </a:lnTo>
+                  <a:lnTo>
+                    <a:pt x="6101029" y="1581567"/>
+                  </a:lnTo>
+                  <a:lnTo>
+                    <a:pt x="6024397" y="1572807"/>
+                  </a:lnTo>
+                  <a:lnTo>
+                    <a:pt x="5947764" y="1563763"/>
+                  </a:lnTo>
+                  <a:lnTo>
+                    <a:pt x="5871132" y="1554427"/>
+                  </a:lnTo>
+                  <a:lnTo>
+                    <a:pt x="5794499" y="1544788"/>
+                  </a:lnTo>
+                  <a:lnTo>
+                    <a:pt x="5717867" y="1534838"/>
+                  </a:lnTo>
+                  <a:lnTo>
+                    <a:pt x="5641234" y="1524565"/>
+                  </a:lnTo>
+                  <a:lnTo>
+                    <a:pt x="5564602" y="1513960"/>
+                  </a:lnTo>
+                  <a:lnTo>
+                    <a:pt x="5487969" y="1503012"/>
+                  </a:lnTo>
+                  <a:lnTo>
+                    <a:pt x="5411336" y="1491709"/>
+                  </a:lnTo>
+                  <a:lnTo>
+                    <a:pt x="5334704" y="1480040"/>
+                  </a:lnTo>
+                  <a:lnTo>
+                    <a:pt x="5258071" y="1467994"/>
+                  </a:lnTo>
+                  <a:lnTo>
+                    <a:pt x="5181439" y="1455558"/>
+                  </a:lnTo>
+                  <a:lnTo>
+                    <a:pt x="5104806" y="1442720"/>
+                  </a:lnTo>
+                  <a:lnTo>
+                    <a:pt x="5028174" y="1429466"/>
+                  </a:lnTo>
+                  <a:lnTo>
+                    <a:pt x="4951541" y="1415783"/>
+                  </a:lnTo>
+                  <a:lnTo>
+                    <a:pt x="4874909" y="1401657"/>
+                  </a:lnTo>
+                  <a:lnTo>
+                    <a:pt x="4798276" y="1387075"/>
+                  </a:lnTo>
+                  <a:lnTo>
+                    <a:pt x="4721644" y="1372020"/>
+                  </a:lnTo>
+                  <a:lnTo>
+                    <a:pt x="4645011" y="1356478"/>
+                  </a:lnTo>
+                  <a:lnTo>
+                    <a:pt x="4568378" y="1340432"/>
+                  </a:lnTo>
+                  <a:lnTo>
+                    <a:pt x="4491746" y="1323868"/>
+                  </a:lnTo>
+                  <a:lnTo>
+                    <a:pt x="4415113" y="1306768"/>
+                  </a:lnTo>
+                  <a:lnTo>
+                    <a:pt x="4338481" y="1289114"/>
+                  </a:lnTo>
+                  <a:lnTo>
+                    <a:pt x="4261848" y="1270888"/>
+                  </a:lnTo>
+                  <a:lnTo>
+                    <a:pt x="4185216" y="1252073"/>
+                  </a:lnTo>
+                  <a:lnTo>
+                    <a:pt x="4108583" y="1232649"/>
+                  </a:lnTo>
+                  <a:lnTo>
+                    <a:pt x="4031951" y="1212596"/>
+                  </a:lnTo>
+                  <a:lnTo>
+                    <a:pt x="3955318" y="1191895"/>
+                  </a:lnTo>
+                  <a:lnTo>
+                    <a:pt x="3878685" y="1170523"/>
+                  </a:lnTo>
+                  <a:lnTo>
+                    <a:pt x="3802053" y="1148460"/>
+                  </a:lnTo>
+                  <a:lnTo>
+                    <a:pt x="3725420" y="1125682"/>
+                  </a:lnTo>
+                  <a:lnTo>
+                    <a:pt x="3648788" y="1102168"/>
+                  </a:lnTo>
+                  <a:lnTo>
+                    <a:pt x="3572155" y="1077892"/>
+                  </a:lnTo>
+                  <a:lnTo>
+                    <a:pt x="3495523" y="1052831"/>
+                  </a:lnTo>
+                  <a:lnTo>
+                    <a:pt x="3418890" y="1026958"/>
+                  </a:lnTo>
+                  <a:lnTo>
+                    <a:pt x="3342258" y="1010072"/>
+                  </a:lnTo>
+                  <a:lnTo>
+                    <a:pt x="3265625" y="994715"/>
+                  </a:lnTo>
+                  <a:lnTo>
+                    <a:pt x="3188993" y="979078"/>
+                  </a:lnTo>
+                  <a:lnTo>
+                    <a:pt x="3112360" y="963156"/>
+                  </a:lnTo>
+                  <a:lnTo>
+                    <a:pt x="3035727" y="946944"/>
+                  </a:lnTo>
+                  <a:lnTo>
+                    <a:pt x="2959095" y="930436"/>
+                  </a:lnTo>
+                  <a:lnTo>
+                    <a:pt x="2882462" y="913627"/>
+                  </a:lnTo>
+                  <a:lnTo>
+                    <a:pt x="2805830" y="896511"/>
+                  </a:lnTo>
+                  <a:lnTo>
+                    <a:pt x="2729197" y="879084"/>
+                  </a:lnTo>
+                  <a:lnTo>
+                    <a:pt x="2652565" y="861338"/>
+                  </a:lnTo>
+                  <a:lnTo>
+                    <a:pt x="2575932" y="843269"/>
+                  </a:lnTo>
+                  <a:lnTo>
+                    <a:pt x="2499300" y="824871"/>
+                  </a:lnTo>
+                  <a:lnTo>
+                    <a:pt x="2422667" y="806137"/>
+                  </a:lnTo>
+                  <a:lnTo>
+                    <a:pt x="2346034" y="787061"/>
+                  </a:lnTo>
+                  <a:lnTo>
+                    <a:pt x="2269402" y="767638"/>
+                  </a:lnTo>
+                  <a:lnTo>
+                    <a:pt x="2192769" y="747860"/>
+                  </a:lnTo>
+                  <a:lnTo>
+                    <a:pt x="2116137" y="727722"/>
+                  </a:lnTo>
+                  <a:lnTo>
+                    <a:pt x="2039504" y="707217"/>
+                  </a:lnTo>
+                  <a:lnTo>
+                    <a:pt x="1962872" y="686337"/>
+                  </a:lnTo>
+                  <a:lnTo>
+                    <a:pt x="1886239" y="665077"/>
+                  </a:lnTo>
+                  <a:lnTo>
+                    <a:pt x="1809607" y="643429"/>
+                  </a:lnTo>
+                  <a:lnTo>
+                    <a:pt x="1732974" y="621387"/>
+                  </a:lnTo>
+                  <a:lnTo>
+                    <a:pt x="1656342" y="598942"/>
+                  </a:lnTo>
+                  <a:lnTo>
+                    <a:pt x="1579709" y="576089"/>
+                  </a:lnTo>
+                  <a:lnTo>
+                    <a:pt x="1503076" y="552818"/>
+                  </a:lnTo>
+                  <a:lnTo>
+                    <a:pt x="1426444" y="529123"/>
+                  </a:lnTo>
+                  <a:lnTo>
+                    <a:pt x="1349811" y="504997"/>
+                  </a:lnTo>
+                  <a:lnTo>
+                    <a:pt x="1273179" y="480430"/>
+                  </a:lnTo>
+                  <a:lnTo>
+                    <a:pt x="1196546" y="455415"/>
+                  </a:lnTo>
+                  <a:lnTo>
+                    <a:pt x="1119914" y="429944"/>
+                  </a:lnTo>
+                  <a:lnTo>
+                    <a:pt x="1043281" y="404009"/>
+                  </a:lnTo>
+                  <a:lnTo>
+                    <a:pt x="966649" y="377601"/>
+                  </a:lnTo>
+                  <a:lnTo>
+                    <a:pt x="890016" y="350711"/>
+                  </a:lnTo>
+                  <a:lnTo>
+                    <a:pt x="813384" y="323331"/>
+                  </a:lnTo>
+                  <a:lnTo>
+                    <a:pt x="736751" y="295451"/>
+                  </a:lnTo>
+                  <a:lnTo>
+                    <a:pt x="660118" y="267063"/>
+                  </a:lnTo>
+                  <a:lnTo>
+                    <a:pt x="583486" y="238158"/>
+                  </a:lnTo>
+                  <a:lnTo>
+                    <a:pt x="506853" y="208725"/>
+                  </a:lnTo>
+                  <a:lnTo>
+                    <a:pt x="430221" y="178756"/>
+                  </a:lnTo>
+                  <a:lnTo>
+                    <a:pt x="353588" y="148240"/>
+                  </a:lnTo>
+                  <a:lnTo>
+                    <a:pt x="276956" y="117168"/>
+                  </a:lnTo>
+                  <a:lnTo>
+                    <a:pt x="200323" y="85529"/>
+                  </a:lnTo>
+                  <a:lnTo>
+                    <a:pt x="123691" y="53314"/>
+                  </a:lnTo>
+                  <a:lnTo>
+                    <a:pt x="47058" y="20511"/>
                   </a:lnTo>
                   <a:lnTo>
                     <a:pt x="0" y="0"/>
@@ -4259,306 +4259,306 @@
           </p:nvSpPr>
           <p:spPr>
             <a:xfrm>
-              <a:off x="817517" y="2911006"/>
-              <a:ext cx="7403783" cy="2401642"/>
+              <a:off x="817517" y="3041038"/>
+              <a:ext cx="7403783" cy="2290591"/>
             </a:xfrm>
             <a:custGeom>
               <a:avLst/>
               <a:pathLst>
-                <a:path w="7403783" h="2401642">
+                <a:path w="7403783" h="2290591">
                   <a:moveTo>
                     <a:pt x="0" y="0"/>
                   </a:moveTo>
                   <a:lnTo>
-                    <a:pt x="47058" y="40321"/>
-                  </a:lnTo>
-                  <a:lnTo>
-                    <a:pt x="123691" y="104364"/>
-                  </a:lnTo>
-                  <a:lnTo>
-                    <a:pt x="200323" y="166829"/>
-                  </a:lnTo>
-                  <a:lnTo>
-                    <a:pt x="276956" y="227753"/>
-                  </a:lnTo>
-                  <a:lnTo>
-                    <a:pt x="353588" y="287175"/>
-                  </a:lnTo>
-                  <a:lnTo>
-                    <a:pt x="430221" y="345133"/>
-                  </a:lnTo>
-                  <a:lnTo>
-                    <a:pt x="506853" y="401662"/>
-                  </a:lnTo>
-                  <a:lnTo>
-                    <a:pt x="583486" y="456797"/>
-                  </a:lnTo>
-                  <a:lnTo>
-                    <a:pt x="660118" y="510573"/>
-                  </a:lnTo>
-                  <a:lnTo>
-                    <a:pt x="736751" y="563024"/>
-                  </a:lnTo>
-                  <a:lnTo>
-                    <a:pt x="813384" y="614181"/>
-                  </a:lnTo>
-                  <a:lnTo>
-                    <a:pt x="890016" y="664077"/>
-                  </a:lnTo>
-                  <a:lnTo>
-                    <a:pt x="966649" y="712744"/>
-                  </a:lnTo>
-                  <a:lnTo>
-                    <a:pt x="1043281" y="760210"/>
-                  </a:lnTo>
-                  <a:lnTo>
-                    <a:pt x="1119914" y="806506"/>
-                  </a:lnTo>
-                  <a:lnTo>
-                    <a:pt x="1196546" y="851662"/>
-                  </a:lnTo>
-                  <a:lnTo>
-                    <a:pt x="1273179" y="895703"/>
-                  </a:lnTo>
-                  <a:lnTo>
-                    <a:pt x="1349811" y="938660"/>
-                  </a:lnTo>
-                  <a:lnTo>
-                    <a:pt x="1426444" y="980557"/>
-                  </a:lnTo>
-                  <a:lnTo>
-                    <a:pt x="1503076" y="1021421"/>
-                  </a:lnTo>
-                  <a:lnTo>
-                    <a:pt x="1579709" y="1061278"/>
-                  </a:lnTo>
-                  <a:lnTo>
-                    <a:pt x="1656342" y="1100152"/>
-                  </a:lnTo>
-                  <a:lnTo>
-                    <a:pt x="1732974" y="1138069"/>
-                  </a:lnTo>
-                  <a:lnTo>
-                    <a:pt x="1809607" y="1175050"/>
-                  </a:lnTo>
-                  <a:lnTo>
-                    <a:pt x="1886239" y="1211120"/>
-                  </a:lnTo>
-                  <a:lnTo>
-                    <a:pt x="1962872" y="1246300"/>
-                  </a:lnTo>
-                  <a:lnTo>
-                    <a:pt x="2039504" y="1280613"/>
-                  </a:lnTo>
-                  <a:lnTo>
-                    <a:pt x="2116137" y="1314081"/>
-                  </a:lnTo>
-                  <a:lnTo>
-                    <a:pt x="2192769" y="1346723"/>
-                  </a:lnTo>
-                  <a:lnTo>
-                    <a:pt x="2269402" y="1378561"/>
-                  </a:lnTo>
-                  <a:lnTo>
-                    <a:pt x="2346034" y="1409613"/>
-                  </a:lnTo>
-                  <a:lnTo>
-                    <a:pt x="2422667" y="1439900"/>
-                  </a:lnTo>
-                  <a:lnTo>
-                    <a:pt x="2499300" y="1469441"/>
-                  </a:lnTo>
-                  <a:lnTo>
-                    <a:pt x="2575932" y="1498253"/>
-                  </a:lnTo>
-                  <a:lnTo>
-                    <a:pt x="2652565" y="1526355"/>
-                  </a:lnTo>
-                  <a:lnTo>
-                    <a:pt x="2729197" y="1553765"/>
-                  </a:lnTo>
-                  <a:lnTo>
-                    <a:pt x="2805830" y="1580498"/>
-                  </a:lnTo>
-                  <a:lnTo>
-                    <a:pt x="2882462" y="1606573"/>
-                  </a:lnTo>
-                  <a:lnTo>
-                    <a:pt x="2959095" y="1632005"/>
-                  </a:lnTo>
-                  <a:lnTo>
-                    <a:pt x="3035727" y="1656809"/>
-                  </a:lnTo>
-                  <a:lnTo>
-                    <a:pt x="3112360" y="1681003"/>
-                  </a:lnTo>
-                  <a:lnTo>
-                    <a:pt x="3188993" y="1704600"/>
-                  </a:lnTo>
-                  <a:lnTo>
-                    <a:pt x="3265625" y="1727615"/>
-                  </a:lnTo>
-                  <a:lnTo>
-                    <a:pt x="3342258" y="1750063"/>
-                  </a:lnTo>
-                  <a:lnTo>
-                    <a:pt x="3418890" y="1771957"/>
-                  </a:lnTo>
-                  <a:lnTo>
-                    <a:pt x="3495523" y="1793312"/>
-                  </a:lnTo>
-                  <a:lnTo>
-                    <a:pt x="3572155" y="1814140"/>
-                  </a:lnTo>
-                  <a:lnTo>
-                    <a:pt x="3648788" y="1834455"/>
-                  </a:lnTo>
-                  <a:lnTo>
-                    <a:pt x="3725420" y="1854269"/>
-                  </a:lnTo>
-                  <a:lnTo>
-                    <a:pt x="3802053" y="1873594"/>
-                  </a:lnTo>
-                  <a:lnTo>
-                    <a:pt x="3878685" y="1892443"/>
-                  </a:lnTo>
-                  <a:lnTo>
-                    <a:pt x="3955318" y="1910828"/>
-                  </a:lnTo>
-                  <a:lnTo>
-                    <a:pt x="4031951" y="1928759"/>
-                  </a:lnTo>
-                  <a:lnTo>
-                    <a:pt x="4108583" y="1946248"/>
-                  </a:lnTo>
-                  <a:lnTo>
-                    <a:pt x="4185216" y="1963306"/>
-                  </a:lnTo>
-                  <a:lnTo>
-                    <a:pt x="4261848" y="1979944"/>
-                  </a:lnTo>
-                  <a:lnTo>
-                    <a:pt x="4338481" y="1996171"/>
-                  </a:lnTo>
-                  <a:lnTo>
-                    <a:pt x="4415113" y="2011999"/>
-                  </a:lnTo>
-                  <a:lnTo>
-                    <a:pt x="4491746" y="2027436"/>
-                  </a:lnTo>
-                  <a:lnTo>
-                    <a:pt x="4568378" y="2042492"/>
-                  </a:lnTo>
-                  <a:lnTo>
-                    <a:pt x="4645011" y="2057178"/>
-                  </a:lnTo>
-                  <a:lnTo>
-                    <a:pt x="4721644" y="2071501"/>
-                  </a:lnTo>
-                  <a:lnTo>
-                    <a:pt x="4798276" y="2085471"/>
-                  </a:lnTo>
-                  <a:lnTo>
-                    <a:pt x="4874909" y="2099097"/>
-                  </a:lnTo>
-                  <a:lnTo>
-                    <a:pt x="4951541" y="2112387"/>
-                  </a:lnTo>
-                  <a:lnTo>
-                    <a:pt x="5028174" y="2125350"/>
-                  </a:lnTo>
-                  <a:lnTo>
-                    <a:pt x="5104806" y="2137993"/>
-                  </a:lnTo>
-                  <a:lnTo>
-                    <a:pt x="5181439" y="2150324"/>
-                  </a:lnTo>
-                  <a:lnTo>
-                    <a:pt x="5258071" y="2162351"/>
-                  </a:lnTo>
-                  <a:lnTo>
-                    <a:pt x="5334704" y="2174082"/>
-                  </a:lnTo>
-                  <a:lnTo>
-                    <a:pt x="5411336" y="2185523"/>
-                  </a:lnTo>
-                  <a:lnTo>
-                    <a:pt x="5487969" y="2196682"/>
-                  </a:lnTo>
-                  <a:lnTo>
-                    <a:pt x="5564602" y="2207567"/>
-                  </a:lnTo>
-                  <a:lnTo>
-                    <a:pt x="5641234" y="2218183"/>
-                  </a:lnTo>
-                  <a:lnTo>
-                    <a:pt x="5717867" y="2228537"/>
-                  </a:lnTo>
-                  <a:lnTo>
-                    <a:pt x="5794499" y="2238636"/>
-                  </a:lnTo>
-                  <a:lnTo>
-                    <a:pt x="5871132" y="2248486"/>
-                  </a:lnTo>
-                  <a:lnTo>
-                    <a:pt x="5947764" y="2258093"/>
-                  </a:lnTo>
-                  <a:lnTo>
-                    <a:pt x="6024397" y="2267464"/>
-                  </a:lnTo>
-                  <a:lnTo>
-                    <a:pt x="6101029" y="2276603"/>
-                  </a:lnTo>
-                  <a:lnTo>
-                    <a:pt x="6177662" y="2285517"/>
-                  </a:lnTo>
-                  <a:lnTo>
-                    <a:pt x="6254294" y="2294212"/>
-                  </a:lnTo>
-                  <a:lnTo>
-                    <a:pt x="6330927" y="2302692"/>
-                  </a:lnTo>
-                  <a:lnTo>
-                    <a:pt x="6407560" y="2310963"/>
-                  </a:lnTo>
-                  <a:lnTo>
-                    <a:pt x="6484192" y="2319030"/>
-                  </a:lnTo>
-                  <a:lnTo>
-                    <a:pt x="6560825" y="2326898"/>
-                  </a:lnTo>
-                  <a:lnTo>
-                    <a:pt x="6637457" y="2334572"/>
-                  </a:lnTo>
-                  <a:lnTo>
-                    <a:pt x="6714090" y="2342057"/>
-                  </a:lnTo>
-                  <a:lnTo>
-                    <a:pt x="6790722" y="2349358"/>
-                  </a:lnTo>
-                  <a:lnTo>
-                    <a:pt x="6867355" y="2356478"/>
-                  </a:lnTo>
-                  <a:lnTo>
-                    <a:pt x="6943987" y="2363423"/>
-                  </a:lnTo>
-                  <a:lnTo>
-                    <a:pt x="7020620" y="2370197"/>
-                  </a:lnTo>
-                  <a:lnTo>
-                    <a:pt x="7097253" y="2376804"/>
-                  </a:lnTo>
-                  <a:lnTo>
-                    <a:pt x="7173885" y="2383248"/>
-                  </a:lnTo>
-                  <a:lnTo>
-                    <a:pt x="7250518" y="2389533"/>
-                  </a:lnTo>
-                  <a:lnTo>
-                    <a:pt x="7327150" y="2395663"/>
-                  </a:lnTo>
-                  <a:lnTo>
-                    <a:pt x="7403783" y="2401642"/>
+                    <a:pt x="47058" y="38457"/>
+                  </a:lnTo>
+                  <a:lnTo>
+                    <a:pt x="123691" y="99538"/>
+                  </a:lnTo>
+                  <a:lnTo>
+                    <a:pt x="200323" y="159114"/>
+                  </a:lnTo>
+                  <a:lnTo>
+                    <a:pt x="276956" y="217222"/>
+                  </a:lnTo>
+                  <a:lnTo>
+                    <a:pt x="353588" y="273897"/>
+                  </a:lnTo>
+                  <a:lnTo>
+                    <a:pt x="430221" y="329174"/>
+                  </a:lnTo>
+                  <a:lnTo>
+                    <a:pt x="506853" y="383089"/>
+                  </a:lnTo>
+                  <a:lnTo>
+                    <a:pt x="583486" y="435675"/>
+                  </a:lnTo>
+                  <a:lnTo>
+                    <a:pt x="660118" y="486965"/>
+                  </a:lnTo>
+                  <a:lnTo>
+                    <a:pt x="736751" y="536990"/>
+                  </a:lnTo>
+                  <a:lnTo>
+                    <a:pt x="813384" y="585782"/>
+                  </a:lnTo>
+                  <a:lnTo>
+                    <a:pt x="890016" y="633371"/>
+                  </a:lnTo>
+                  <a:lnTo>
+                    <a:pt x="966649" y="679787"/>
+                  </a:lnTo>
+                  <a:lnTo>
+                    <a:pt x="1043281" y="725058"/>
+                  </a:lnTo>
+                  <a:lnTo>
+                    <a:pt x="1119914" y="769214"/>
+                  </a:lnTo>
+                  <a:lnTo>
+                    <a:pt x="1196546" y="812281"/>
+                  </a:lnTo>
+                  <a:lnTo>
+                    <a:pt x="1273179" y="854286"/>
+                  </a:lnTo>
+                  <a:lnTo>
+                    <a:pt x="1349811" y="895256"/>
+                  </a:lnTo>
+                  <a:lnTo>
+                    <a:pt x="1426444" y="935216"/>
+                  </a:lnTo>
+                  <a:lnTo>
+                    <a:pt x="1503076" y="974191"/>
+                  </a:lnTo>
+                  <a:lnTo>
+                    <a:pt x="1579709" y="1012205"/>
+                  </a:lnTo>
+                  <a:lnTo>
+                    <a:pt x="1656342" y="1049282"/>
+                  </a:lnTo>
+                  <a:lnTo>
+                    <a:pt x="1732974" y="1085445"/>
+                  </a:lnTo>
+                  <a:lnTo>
+                    <a:pt x="1809607" y="1120716"/>
+                  </a:lnTo>
+                  <a:lnTo>
+                    <a:pt x="1886239" y="1155118"/>
+                  </a:lnTo>
+                  <a:lnTo>
+                    <a:pt x="1962872" y="1188672"/>
+                  </a:lnTo>
+                  <a:lnTo>
+                    <a:pt x="2039504" y="1221398"/>
+                  </a:lnTo>
+                  <a:lnTo>
+                    <a:pt x="2116137" y="1253318"/>
+                  </a:lnTo>
+                  <a:lnTo>
+                    <a:pt x="2192769" y="1284451"/>
+                  </a:lnTo>
+                  <a:lnTo>
+                    <a:pt x="2269402" y="1314816"/>
+                  </a:lnTo>
+                  <a:lnTo>
+                    <a:pt x="2346034" y="1344433"/>
+                  </a:lnTo>
+                  <a:lnTo>
+                    <a:pt x="2422667" y="1373320"/>
+                  </a:lnTo>
+                  <a:lnTo>
+                    <a:pt x="2499300" y="1401495"/>
+                  </a:lnTo>
+                  <a:lnTo>
+                    <a:pt x="2575932" y="1428975"/>
+                  </a:lnTo>
+                  <a:lnTo>
+                    <a:pt x="2652565" y="1455777"/>
+                  </a:lnTo>
+                  <a:lnTo>
+                    <a:pt x="2729197" y="1481919"/>
+                  </a:lnTo>
+                  <a:lnTo>
+                    <a:pt x="2805830" y="1507417"/>
+                  </a:lnTo>
+                  <a:lnTo>
+                    <a:pt x="2882462" y="1532285"/>
+                  </a:lnTo>
+                  <a:lnTo>
+                    <a:pt x="2959095" y="1556541"/>
+                  </a:lnTo>
+                  <a:lnTo>
+                    <a:pt x="3035727" y="1580199"/>
+                  </a:lnTo>
+                  <a:lnTo>
+                    <a:pt x="3112360" y="1603274"/>
+                  </a:lnTo>
+                  <a:lnTo>
+                    <a:pt x="3188993" y="1625780"/>
+                  </a:lnTo>
+                  <a:lnTo>
+                    <a:pt x="3265625" y="1647730"/>
+                  </a:lnTo>
+                  <a:lnTo>
+                    <a:pt x="3342258" y="1669140"/>
+                  </a:lnTo>
+                  <a:lnTo>
+                    <a:pt x="3418890" y="1690022"/>
+                  </a:lnTo>
+                  <a:lnTo>
+                    <a:pt x="3495523" y="1710390"/>
+                  </a:lnTo>
+                  <a:lnTo>
+                    <a:pt x="3572155" y="1730255"/>
+                  </a:lnTo>
+                  <a:lnTo>
+                    <a:pt x="3648788" y="1749630"/>
+                  </a:lnTo>
+                  <a:lnTo>
+                    <a:pt x="3725420" y="1768528"/>
+                  </a:lnTo>
+                  <a:lnTo>
+                    <a:pt x="3802053" y="1786960"/>
+                  </a:lnTo>
+                  <a:lnTo>
+                    <a:pt x="3878685" y="1804937"/>
+                  </a:lnTo>
+                  <a:lnTo>
+                    <a:pt x="3955318" y="1822472"/>
+                  </a:lnTo>
+                  <a:lnTo>
+                    <a:pt x="4031951" y="1839574"/>
+                  </a:lnTo>
+                  <a:lnTo>
+                    <a:pt x="4108583" y="1856254"/>
+                  </a:lnTo>
+                  <a:lnTo>
+                    <a:pt x="4185216" y="1872524"/>
+                  </a:lnTo>
+                  <a:lnTo>
+                    <a:pt x="4261848" y="1888392"/>
+                  </a:lnTo>
+                  <a:lnTo>
+                    <a:pt x="4338481" y="1903869"/>
+                  </a:lnTo>
+                  <a:lnTo>
+                    <a:pt x="4415113" y="1918964"/>
+                  </a:lnTo>
+                  <a:lnTo>
+                    <a:pt x="4491746" y="1933688"/>
+                  </a:lnTo>
+                  <a:lnTo>
+                    <a:pt x="4568378" y="1948048"/>
+                  </a:lnTo>
+                  <a:lnTo>
+                    <a:pt x="4645011" y="1962055"/>
+                  </a:lnTo>
+                  <a:lnTo>
+                    <a:pt x="4721644" y="1975716"/>
+                  </a:lnTo>
+                  <a:lnTo>
+                    <a:pt x="4798276" y="1989040"/>
+                  </a:lnTo>
+                  <a:lnTo>
+                    <a:pt x="4874909" y="2002036"/>
+                  </a:lnTo>
+                  <a:lnTo>
+                    <a:pt x="4951541" y="2014711"/>
+                  </a:lnTo>
+                  <a:lnTo>
+                    <a:pt x="5028174" y="2027074"/>
+                  </a:lnTo>
+                  <a:lnTo>
+                    <a:pt x="5104806" y="2039133"/>
+                  </a:lnTo>
+                  <a:lnTo>
+                    <a:pt x="5181439" y="2050894"/>
+                  </a:lnTo>
+                  <a:lnTo>
+                    <a:pt x="5258071" y="2062365"/>
+                  </a:lnTo>
+                  <a:lnTo>
+                    <a:pt x="5334704" y="2073553"/>
+                  </a:lnTo>
+                  <a:lnTo>
+                    <a:pt x="5411336" y="2084465"/>
+                  </a:lnTo>
+                  <a:lnTo>
+                    <a:pt x="5487969" y="2095109"/>
+                  </a:lnTo>
+                  <a:lnTo>
+                    <a:pt x="5564602" y="2105490"/>
+                  </a:lnTo>
+                  <a:lnTo>
+                    <a:pt x="5641234" y="2115615"/>
+                  </a:lnTo>
+                  <a:lnTo>
+                    <a:pt x="5717867" y="2125490"/>
+                  </a:lnTo>
+                  <a:lnTo>
+                    <a:pt x="5794499" y="2135122"/>
+                  </a:lnTo>
+                  <a:lnTo>
+                    <a:pt x="5871132" y="2144517"/>
+                  </a:lnTo>
+                  <a:lnTo>
+                    <a:pt x="5947764" y="2153680"/>
+                  </a:lnTo>
+                  <a:lnTo>
+                    <a:pt x="6024397" y="2162617"/>
+                  </a:lnTo>
+                  <a:lnTo>
+                    <a:pt x="6101029" y="2171334"/>
+                  </a:lnTo>
+                  <a:lnTo>
+                    <a:pt x="6177662" y="2179836"/>
+                  </a:lnTo>
+                  <a:lnTo>
+                    <a:pt x="6254294" y="2188128"/>
+                  </a:lnTo>
+                  <a:lnTo>
+                    <a:pt x="6330927" y="2196216"/>
+                  </a:lnTo>
+                  <a:lnTo>
+                    <a:pt x="6407560" y="2204105"/>
+                  </a:lnTo>
+                  <a:lnTo>
+                    <a:pt x="6484192" y="2211799"/>
+                  </a:lnTo>
+                  <a:lnTo>
+                    <a:pt x="6560825" y="2219303"/>
+                  </a:lnTo>
+                  <a:lnTo>
+                    <a:pt x="6637457" y="2226623"/>
+                  </a:lnTo>
+                  <a:lnTo>
+                    <a:pt x="6714090" y="2233761"/>
+                  </a:lnTo>
+                  <a:lnTo>
+                    <a:pt x="6790722" y="2240724"/>
+                  </a:lnTo>
+                  <a:lnTo>
+                    <a:pt x="6867355" y="2247516"/>
+                  </a:lnTo>
+                  <a:lnTo>
+                    <a:pt x="6943987" y="2254140"/>
+                  </a:lnTo>
+                  <a:lnTo>
+                    <a:pt x="7020620" y="2260600"/>
+                  </a:lnTo>
+                  <a:lnTo>
+                    <a:pt x="7097253" y="2266902"/>
+                  </a:lnTo>
+                  <a:lnTo>
+                    <a:pt x="7173885" y="2273048"/>
+                  </a:lnTo>
+                  <a:lnTo>
+                    <a:pt x="7250518" y="2279042"/>
+                  </a:lnTo>
+                  <a:lnTo>
+                    <a:pt x="7327150" y="2284889"/>
+                  </a:lnTo>
+                  <a:lnTo>
+                    <a:pt x="7403783" y="2290591"/>
                   </a:lnTo>
                 </a:path>
               </a:pathLst>
@@ -4587,7 +4587,7 @@
           </p:nvSpPr>
           <p:spPr>
             <a:xfrm>
-              <a:off x="817517" y="4679530"/>
+              <a:off x="817517" y="4727786"/>
               <a:ext cx="7799693" cy="0"/>
             </a:xfrm>
             <a:custGeom>
@@ -4630,15 +4630,15 @@
           </p:nvSpPr>
           <p:spPr>
             <a:xfrm>
-              <a:off x="4224261" y="1896563"/>
-              <a:ext cx="0" cy="3826579"/>
+              <a:off x="4224261" y="2073503"/>
+              <a:ext cx="0" cy="3649639"/>
             </a:xfrm>
             <a:custGeom>
               <a:avLst/>
               <a:pathLst>
-                <a:path w="0" h="3826579">
+                <a:path w="0" h="3649639">
                   <a:moveTo>
-                    <a:pt x="0" y="3826579"/>
+                    <a:pt x="0" y="3649639"/>
                   </a:moveTo>
                   <a:lnTo>
                     <a:pt x="0" y="0"/>
@@ -4673,7 +4673,7 @@
           </p:nvSpPr>
           <p:spPr>
             <a:xfrm>
-              <a:off x="692708" y="5509156"/>
+              <a:off x="692708" y="5517199"/>
               <a:ext cx="62179" cy="80101"/>
             </a:xfrm>
             <a:prstGeom prst="rect">
@@ -4719,7 +4719,7 @@
           </p:nvSpPr>
           <p:spPr>
             <a:xfrm>
-              <a:off x="692708" y="4639479"/>
+              <a:off x="692708" y="4687735"/>
               <a:ext cx="62179" cy="80101"/>
             </a:xfrm>
             <a:prstGeom prst="rect">
@@ -4765,7 +4765,7 @@
           </p:nvSpPr>
           <p:spPr>
             <a:xfrm>
-              <a:off x="692708" y="3769802"/>
+              <a:off x="692708" y="3858272"/>
               <a:ext cx="62179" cy="80101"/>
             </a:xfrm>
             <a:prstGeom prst="rect">
@@ -4811,7 +4811,7 @@
           </p:nvSpPr>
           <p:spPr>
             <a:xfrm>
-              <a:off x="692708" y="2900125"/>
+              <a:off x="692708" y="3028808"/>
               <a:ext cx="62179" cy="80101"/>
             </a:xfrm>
             <a:prstGeom prst="rect">
@@ -4857,7 +4857,7 @@
           </p:nvSpPr>
           <p:spPr>
             <a:xfrm>
-              <a:off x="692708" y="2030448"/>
+              <a:off x="692708" y="2199345"/>
               <a:ext cx="62179" cy="80101"/>
             </a:xfrm>
             <a:prstGeom prst="rect">
@@ -5133,7 +5133,7 @@
           </p:nvSpPr>
           <p:spPr>
             <a:xfrm rot="-5400000">
-              <a:off x="68446" y="3759743"/>
+              <a:off x="68446" y="3848213"/>
               <a:ext cx="1016904" cy="100218"/>
             </a:xfrm>
             <a:prstGeom prst="rect">
@@ -5174,6 +5174,52 @@
         <p:sp>
           <p:nvSpPr>
             <p:cNvPr id="38" name="tx38"/>
+            <p:cNvSpPr/>
+            <p:nvPr/>
+          </p:nvSpPr>
+          <p:spPr>
+            <a:xfrm>
+              <a:off x="817517" y="1896563"/>
+              <a:ext cx="5626211" cy="82021"/>
+            </a:xfrm>
+            <a:prstGeom prst="rect">
+              <a:avLst/>
+            </a:prstGeom>
+            <a:noFill/>
+          </p:spPr>
+          <p:txBody>
+            <a:bodyPr lIns="0" rIns="0" tIns="0" bIns="0" anchorCtr="1" anchor="ctr" wrap="none"/>
+            <a:lstStyle/>
+            <a:p>
+              <a:pPr algn="l" marL="0" marR="0" indent="0">
+                <a:lnSpc>
+                  <a:spcPts val="900"/>
+                </a:lnSpc>
+                <a:spcBef>
+                  <a:spcPts val="0"/>
+                </a:spcBef>
+                <a:spcAft>
+                  <a:spcPts val="0"/>
+                </a:spcAft>
+              </a:pPr>
+              <a:r>
+                <a:rPr sz="900">
+                  <a:solidFill>
+                    <a:srgbClr val="404040">
+                      <a:alpha val="100000"/>
+                    </a:srgbClr>
+                  </a:solidFill>
+                  <a:latin typeface="Helvetica"/>
+                  <a:cs typeface="Helvetica"/>
+                </a:rPr>
+                <a:t>subHR per 0.1 ratio decline: 1.33 (1.23-1.45)  |  per IQR decline (Δ = 0.30): 2.37 (1.87-3.01)  |  IQR: [0.85, 1.15]</a:t>
+              </a:r>
+            </a:p>
+          </p:txBody>
+        </p:sp>
+        <p:sp>
+          <p:nvSpPr>
+            <p:cNvPr id="39" name="tx39"/>
             <p:cNvSpPr/>
             <p:nvPr/>
           </p:nvSpPr>

--- a/docs/pptx/carbo/jx-carbo-linsubhr-ratio-grade2.pptx
+++ b/docs/pptx/carbo/jx-carbo-linsubhr-ratio-grade2.pptx
@@ -5180,7 +5180,7 @@
           <p:spPr>
             <a:xfrm>
               <a:off x="817517" y="1896563"/>
-              <a:ext cx="5626211" cy="82021"/>
+              <a:ext cx="6236116" cy="82021"/>
             </a:xfrm>
             <a:prstGeom prst="rect">
               <a:avLst/>
@@ -5212,7 +5212,7 @@
                   <a:latin typeface="Helvetica"/>
                   <a:cs typeface="Helvetica"/>
                 </a:rPr>
-                <a:t>subHR per 0.1 ratio decline: 1.33 (1.23-1.45)  |  per IQR decline (Δ = 0.30): 2.37 (1.87-3.01)  |  IQR: [0.85, 1.15]</a:t>
+                <a:t>subHR per 0.1 ratio decline: 1.33 (1.23-1.45), p = &lt;0.001  |  per IQR decline (Δ = 0.30): 2.37 (1.87-3.01)  |  IQR: [0.85, 1.15]</a:t>
               </a:r>
             </a:p>
           </p:txBody>

--- a/docs/pptx/carbo/jx-carbo-linsubhr-ratio-grade2.pptx
+++ b/docs/pptx/carbo/jx-carbo-linsubhr-ratio-grade2.pptx
@@ -5180,7 +5180,7 @@
           <p:spPr>
             <a:xfrm>
               <a:off x="817517" y="1896563"/>
-              <a:ext cx="6236116" cy="82021"/>
+              <a:ext cx="6899879" cy="82021"/>
             </a:xfrm>
             <a:prstGeom prst="rect">
               <a:avLst/>
@@ -5212,7 +5212,7 @@
                   <a:latin typeface="Helvetica"/>
                   <a:cs typeface="Helvetica"/>
                 </a:rPr>
-                <a:t>subHR per 0.1 ratio decline: 1.33 (1.23-1.45), p = &lt;0.001  |  per IQR decline (Δ = 0.30): 2.37 (1.87-3.01)  |  IQR: [0.85, 1.15]</a:t>
+                <a:t>subHR per 0.1 ratio decline: 1.33 (1.23-1.45), p_Bonf = &lt;0.001 (n = 6)  |  per IQR decline (Δ = 0.30): 2.37 (1.87-3.01)  |  IQR: [0.85, 1.15]</a:t>
               </a:r>
             </a:p>
           </p:txBody>

--- a/docs/pptx/carbo/jx-carbo-linsubhr-ratio-grade2.pptx
+++ b/docs/pptx/carbo/jx-carbo-linsubhr-ratio-grade2.pptx
@@ -2443,7 +2443,7 @@
           </p:nvSpPr>
           <p:spPr>
             <a:xfrm>
-              <a:off x="1615213" y="2073503"/>
+              <a:off x="1467192" y="2073503"/>
               <a:ext cx="0" cy="3649639"/>
             </a:xfrm>
             <a:custGeom>
@@ -2486,7 +2486,7 @@
           </p:nvSpPr>
           <p:spPr>
             <a:xfrm>
-              <a:off x="3387871" y="2073503"/>
+              <a:off x="3538150" y="2073503"/>
               <a:ext cx="0" cy="3649639"/>
             </a:xfrm>
             <a:custGeom>
@@ -2529,7 +2529,7 @@
           </p:nvSpPr>
           <p:spPr>
             <a:xfrm>
-              <a:off x="5160528" y="2073503"/>
+              <a:off x="5609107" y="2073503"/>
               <a:ext cx="0" cy="3649639"/>
             </a:xfrm>
             <a:custGeom>
@@ -2572,7 +2572,7 @@
           </p:nvSpPr>
           <p:spPr>
             <a:xfrm>
-              <a:off x="6933186" y="2073503"/>
+              <a:off x="7680065" y="2073503"/>
               <a:ext cx="0" cy="3649639"/>
             </a:xfrm>
             <a:custGeom>
@@ -2830,7 +2830,7 @@
           </p:nvSpPr>
           <p:spPr>
             <a:xfrm>
-              <a:off x="2501542" y="2073503"/>
+              <a:off x="2502671" y="2073503"/>
               <a:ext cx="0" cy="3649639"/>
             </a:xfrm>
             <a:custGeom>
@@ -2873,7 +2873,7 @@
           </p:nvSpPr>
           <p:spPr>
             <a:xfrm>
-              <a:off x="4274200" y="2073503"/>
+              <a:off x="4573628" y="2073503"/>
               <a:ext cx="0" cy="3649639"/>
             </a:xfrm>
             <a:custGeom>
@@ -2916,7 +2916,7 @@
           </p:nvSpPr>
           <p:spPr>
             <a:xfrm>
-              <a:off x="6046857" y="2073503"/>
+              <a:off x="6644586" y="2073503"/>
               <a:ext cx="0" cy="3649639"/>
             </a:xfrm>
             <a:custGeom>
@@ -2953,649 +2953,615 @@
         </p:sp>
         <p:sp>
           <p:nvSpPr>
-            <p:cNvPr id="20" name="pl20"/>
+            <p:cNvPr id="20" name="pg20"/>
             <p:cNvSpPr/>
             <p:nvPr/>
           </p:nvSpPr>
           <p:spPr>
             <a:xfrm>
-              <a:off x="7819515" y="2073503"/>
-              <a:ext cx="0" cy="3649639"/>
+              <a:off x="1172049" y="2073503"/>
+              <a:ext cx="7090630" cy="3326242"/>
             </a:xfrm>
             <a:custGeom>
               <a:avLst/>
               <a:pathLst>
-                <a:path w="0" h="3649639">
+                <a:path w="7090630" h="3326242">
                   <a:moveTo>
-                    <a:pt x="0" y="3649639"/>
+                    <a:pt x="128111" y="0"/>
                   </a:moveTo>
                   <a:lnTo>
-                    <a:pt x="0" y="0"/>
-                  </a:lnTo>
-                  <a:lnTo>
-                    <a:pt x="0" y="0"/>
-                  </a:lnTo>
-                </a:path>
-              </a:pathLst>
-            </a:custGeom>
-            <a:ln w="13550" cap="flat">
-              <a:solidFill>
-                <a:srgbClr val="EBEBEB">
-                  <a:alpha val="100000"/>
-                </a:srgbClr>
-              </a:solidFill>
-              <a:prstDash val="solid"/>
-              <a:round/>
-            </a:ln>
-          </p:spPr>
-          <p:txBody>
-            <a:bodyPr/>
-            <a:lstStyle/>
-            <a:p/>
-          </p:txBody>
-        </p:sp>
-        <p:sp>
-          <p:nvSpPr>
-            <p:cNvPr id="21" name="pg21"/>
-            <p:cNvSpPr/>
-            <p:nvPr/>
-          </p:nvSpPr>
-          <p:spPr>
-            <a:xfrm>
-              <a:off x="817517" y="2139025"/>
-              <a:ext cx="7403783" cy="3260720"/>
-            </a:xfrm>
-            <a:custGeom>
-              <a:avLst/>
-              <a:pathLst>
-                <a:path w="7403783" h="3260720">
-                  <a:moveTo>
-                    <a:pt x="0" y="0"/>
-                  </a:moveTo>
-                  <a:lnTo>
-                    <a:pt x="47058" y="66610"/>
-                  </a:lnTo>
-                  <a:lnTo>
-                    <a:pt x="123691" y="171682"/>
-                  </a:lnTo>
-                  <a:lnTo>
-                    <a:pt x="200323" y="273460"/>
-                  </a:lnTo>
-                  <a:lnTo>
-                    <a:pt x="276956" y="372047"/>
-                  </a:lnTo>
-                  <a:lnTo>
-                    <a:pt x="353588" y="467543"/>
-                  </a:lnTo>
-                  <a:lnTo>
-                    <a:pt x="430221" y="560046"/>
-                  </a:lnTo>
-                  <a:lnTo>
-                    <a:pt x="506853" y="649649"/>
-                  </a:lnTo>
-                  <a:lnTo>
-                    <a:pt x="583486" y="736442"/>
-                  </a:lnTo>
-                  <a:lnTo>
-                    <a:pt x="660118" y="820515"/>
-                  </a:lnTo>
-                  <a:lnTo>
-                    <a:pt x="736751" y="901952"/>
-                  </a:lnTo>
-                  <a:lnTo>
-                    <a:pt x="813384" y="980836"/>
-                  </a:lnTo>
-                  <a:lnTo>
-                    <a:pt x="890016" y="1057247"/>
-                  </a:lnTo>
-                  <a:lnTo>
-                    <a:pt x="966649" y="1131263"/>
-                  </a:lnTo>
-                  <a:lnTo>
-                    <a:pt x="1043281" y="1202958"/>
-                  </a:lnTo>
-                  <a:lnTo>
-                    <a:pt x="1119914" y="1272406"/>
-                  </a:lnTo>
-                  <a:lnTo>
-                    <a:pt x="1196546" y="1339677"/>
-                  </a:lnTo>
-                  <a:lnTo>
-                    <a:pt x="1273179" y="1404838"/>
-                  </a:lnTo>
-                  <a:lnTo>
-                    <a:pt x="1349811" y="1467957"/>
-                  </a:lnTo>
-                  <a:lnTo>
-                    <a:pt x="1426444" y="1529097"/>
-                  </a:lnTo>
-                  <a:lnTo>
-                    <a:pt x="1503076" y="1588320"/>
-                  </a:lnTo>
-                  <a:lnTo>
-                    <a:pt x="1579709" y="1645687"/>
-                  </a:lnTo>
-                  <a:lnTo>
-                    <a:pt x="1656342" y="1701256"/>
-                  </a:lnTo>
-                  <a:lnTo>
-                    <a:pt x="1732974" y="1755082"/>
-                  </a:lnTo>
-                  <a:lnTo>
-                    <a:pt x="1809607" y="1807221"/>
-                  </a:lnTo>
-                  <a:lnTo>
-                    <a:pt x="1886239" y="1857725"/>
-                  </a:lnTo>
-                  <a:lnTo>
-                    <a:pt x="1962872" y="1906646"/>
-                  </a:lnTo>
-                  <a:lnTo>
-                    <a:pt x="2039504" y="1954033"/>
-                  </a:lnTo>
-                  <a:lnTo>
-                    <a:pt x="2116137" y="1999935"/>
-                  </a:lnTo>
-                  <a:lnTo>
-                    <a:pt x="2192769" y="2044398"/>
-                  </a:lnTo>
-                  <a:lnTo>
-                    <a:pt x="2269402" y="2087467"/>
-                  </a:lnTo>
-                  <a:lnTo>
-                    <a:pt x="2346034" y="2129185"/>
-                  </a:lnTo>
-                  <a:lnTo>
-                    <a:pt x="2422667" y="2169596"/>
-                  </a:lnTo>
-                  <a:lnTo>
-                    <a:pt x="2499300" y="2208740"/>
-                  </a:lnTo>
-                  <a:lnTo>
-                    <a:pt x="2575932" y="2246657"/>
-                  </a:lnTo>
-                  <a:lnTo>
-                    <a:pt x="2652565" y="2283385"/>
-                  </a:lnTo>
-                  <a:lnTo>
-                    <a:pt x="2729197" y="2318962"/>
-                  </a:lnTo>
-                  <a:lnTo>
-                    <a:pt x="2805830" y="2353423"/>
-                  </a:lnTo>
-                  <a:lnTo>
-                    <a:pt x="2882462" y="2386804"/>
-                  </a:lnTo>
-                  <a:lnTo>
-                    <a:pt x="2959095" y="2419139"/>
-                  </a:lnTo>
-                  <a:lnTo>
-                    <a:pt x="3035727" y="2450460"/>
-                  </a:lnTo>
-                  <a:lnTo>
-                    <a:pt x="3112360" y="2480799"/>
-                  </a:lnTo>
-                  <a:lnTo>
-                    <a:pt x="3188993" y="2510187"/>
-                  </a:lnTo>
-                  <a:lnTo>
-                    <a:pt x="3265625" y="2538653"/>
-                  </a:lnTo>
-                  <a:lnTo>
-                    <a:pt x="3342258" y="2566228"/>
-                  </a:lnTo>
-                  <a:lnTo>
-                    <a:pt x="3418890" y="2591133"/>
-                  </a:lnTo>
-                  <a:lnTo>
-                    <a:pt x="3495523" y="2605944"/>
-                  </a:lnTo>
-                  <a:lnTo>
-                    <a:pt x="3572155" y="2620491"/>
-                  </a:lnTo>
-                  <a:lnTo>
-                    <a:pt x="3648788" y="2634777"/>
-                  </a:lnTo>
-                  <a:lnTo>
-                    <a:pt x="3725420" y="2648807"/>
-                  </a:lnTo>
-                  <a:lnTo>
-                    <a:pt x="3802053" y="2662586"/>
-                  </a:lnTo>
-                  <a:lnTo>
-                    <a:pt x="3878685" y="2676118"/>
-                  </a:lnTo>
-                  <a:lnTo>
-                    <a:pt x="3955318" y="2689408"/>
-                  </a:lnTo>
-                  <a:lnTo>
-                    <a:pt x="4031951" y="2702460"/>
-                  </a:lnTo>
-                  <a:lnTo>
-                    <a:pt x="4108583" y="2715278"/>
-                  </a:lnTo>
-                  <a:lnTo>
-                    <a:pt x="4185216" y="2727866"/>
-                  </a:lnTo>
-                  <a:lnTo>
-                    <a:pt x="4261848" y="2740229"/>
-                  </a:lnTo>
-                  <a:lnTo>
-                    <a:pt x="4338481" y="2752371"/>
-                  </a:lnTo>
-                  <a:lnTo>
-                    <a:pt x="4415113" y="2764295"/>
-                  </a:lnTo>
-                  <a:lnTo>
-                    <a:pt x="4491746" y="2776006"/>
-                  </a:lnTo>
-                  <a:lnTo>
-                    <a:pt x="4568378" y="2787507"/>
-                  </a:lnTo>
-                  <a:lnTo>
-                    <a:pt x="4645011" y="2798802"/>
-                  </a:lnTo>
-                  <a:lnTo>
-                    <a:pt x="4721644" y="2809895"/>
-                  </a:lnTo>
-                  <a:lnTo>
-                    <a:pt x="4798276" y="2820789"/>
-                  </a:lnTo>
-                  <a:lnTo>
-                    <a:pt x="4874909" y="2831488"/>
-                  </a:lnTo>
-                  <a:lnTo>
-                    <a:pt x="4951541" y="2841995"/>
-                  </a:lnTo>
-                  <a:lnTo>
-                    <a:pt x="5028174" y="2852315"/>
-                  </a:lnTo>
-                  <a:lnTo>
-                    <a:pt x="5104806" y="2862449"/>
-                  </a:lnTo>
-                  <a:lnTo>
-                    <a:pt x="5181439" y="2872402"/>
-                  </a:lnTo>
-                  <a:lnTo>
-                    <a:pt x="5258071" y="2882177"/>
-                  </a:lnTo>
-                  <a:lnTo>
-                    <a:pt x="5334704" y="2891776"/>
-                  </a:lnTo>
-                  <a:lnTo>
-                    <a:pt x="5411336" y="2901204"/>
-                  </a:lnTo>
-                  <a:lnTo>
-                    <a:pt x="5487969" y="2910463"/>
-                  </a:lnTo>
-                  <a:lnTo>
-                    <a:pt x="5564602" y="2919556"/>
-                  </a:lnTo>
-                  <a:lnTo>
-                    <a:pt x="5641234" y="2928486"/>
-                  </a:lnTo>
-                  <a:lnTo>
-                    <a:pt x="5717867" y="2937257"/>
-                  </a:lnTo>
-                  <a:lnTo>
-                    <a:pt x="5794499" y="2945870"/>
-                  </a:lnTo>
-                  <a:lnTo>
-                    <a:pt x="5871132" y="2954329"/>
-                  </a:lnTo>
-                  <a:lnTo>
-                    <a:pt x="5947764" y="2962636"/>
-                  </a:lnTo>
-                  <a:lnTo>
-                    <a:pt x="6024397" y="2970795"/>
-                  </a:lnTo>
-                  <a:lnTo>
-                    <a:pt x="6101029" y="2978808"/>
-                  </a:lnTo>
-                  <a:lnTo>
-                    <a:pt x="6177662" y="2986677"/>
-                  </a:lnTo>
-                  <a:lnTo>
-                    <a:pt x="6254294" y="2994405"/>
-                  </a:lnTo>
-                  <a:lnTo>
-                    <a:pt x="6330927" y="3001995"/>
-                  </a:lnTo>
-                  <a:lnTo>
-                    <a:pt x="6407560" y="3009449"/>
-                  </a:lnTo>
-                  <a:lnTo>
-                    <a:pt x="6484192" y="3016770"/>
-                  </a:lnTo>
-                  <a:lnTo>
-                    <a:pt x="6560825" y="3023959"/>
-                  </a:lnTo>
-                  <a:lnTo>
-                    <a:pt x="6637457" y="3031019"/>
-                  </a:lnTo>
-                  <a:lnTo>
-                    <a:pt x="6714090" y="3037954"/>
-                  </a:lnTo>
-                  <a:lnTo>
-                    <a:pt x="6790722" y="3044764"/>
-                  </a:lnTo>
-                  <a:lnTo>
-                    <a:pt x="6867355" y="3051452"/>
-                  </a:lnTo>
-                  <a:lnTo>
-                    <a:pt x="6943987" y="3058020"/>
-                  </a:lnTo>
-                  <a:lnTo>
-                    <a:pt x="7020620" y="3064470"/>
-                  </a:lnTo>
-                  <a:lnTo>
-                    <a:pt x="7097253" y="3070806"/>
-                  </a:lnTo>
-                  <a:lnTo>
-                    <a:pt x="7173885" y="3077027"/>
-                  </a:lnTo>
-                  <a:lnTo>
-                    <a:pt x="7250518" y="3083137"/>
-                  </a:lnTo>
-                  <a:lnTo>
-                    <a:pt x="7327150" y="3089138"/>
-                  </a:lnTo>
-                  <a:lnTo>
-                    <a:pt x="7403783" y="3095032"/>
-                  </a:lnTo>
-                  <a:lnTo>
-                    <a:pt x="7403783" y="3260720"/>
-                  </a:lnTo>
-                  <a:lnTo>
-                    <a:pt x="7327150" y="3255622"/>
-                  </a:lnTo>
-                  <a:lnTo>
-                    <a:pt x="7250518" y="3250360"/>
-                  </a:lnTo>
-                  <a:lnTo>
-                    <a:pt x="7173885" y="3244927"/>
-                  </a:lnTo>
-                  <a:lnTo>
-                    <a:pt x="7097253" y="3239318"/>
-                  </a:lnTo>
-                  <a:lnTo>
-                    <a:pt x="7020620" y="3233528"/>
-                  </a:lnTo>
-                  <a:lnTo>
-                    <a:pt x="6943987" y="3227551"/>
-                  </a:lnTo>
-                  <a:lnTo>
-                    <a:pt x="6867355" y="3221380"/>
-                  </a:lnTo>
-                  <a:lnTo>
-                    <a:pt x="6790722" y="3215009"/>
-                  </a:lnTo>
-                  <a:lnTo>
-                    <a:pt x="6714090" y="3208432"/>
-                  </a:lnTo>
-                  <a:lnTo>
-                    <a:pt x="6637457" y="3201642"/>
-                  </a:lnTo>
-                  <a:lnTo>
-                    <a:pt x="6560825" y="3194633"/>
-                  </a:lnTo>
-                  <a:lnTo>
-                    <a:pt x="6484192" y="3187396"/>
-                  </a:lnTo>
-                  <a:lnTo>
-                    <a:pt x="6407560" y="3179926"/>
-                  </a:lnTo>
-                  <a:lnTo>
-                    <a:pt x="6330927" y="3172214"/>
-                  </a:lnTo>
-                  <a:lnTo>
-                    <a:pt x="6254294" y="3164252"/>
-                  </a:lnTo>
-                  <a:lnTo>
-                    <a:pt x="6177662" y="3156032"/>
-                  </a:lnTo>
-                  <a:lnTo>
-                    <a:pt x="6101029" y="3147546"/>
-                  </a:lnTo>
-                  <a:lnTo>
-                    <a:pt x="6024397" y="3138786"/>
-                  </a:lnTo>
-                  <a:lnTo>
-                    <a:pt x="5947764" y="3129742"/>
-                  </a:lnTo>
-                  <a:lnTo>
-                    <a:pt x="5871132" y="3120406"/>
-                  </a:lnTo>
-                  <a:lnTo>
-                    <a:pt x="5794499" y="3110767"/>
-                  </a:lnTo>
-                  <a:lnTo>
-                    <a:pt x="5717867" y="3100817"/>
-                  </a:lnTo>
-                  <a:lnTo>
-                    <a:pt x="5641234" y="3090544"/>
-                  </a:lnTo>
-                  <a:lnTo>
-                    <a:pt x="5564602" y="3079939"/>
-                  </a:lnTo>
-                  <a:lnTo>
-                    <a:pt x="5487969" y="3068991"/>
-                  </a:lnTo>
-                  <a:lnTo>
-                    <a:pt x="5411336" y="3057688"/>
-                  </a:lnTo>
-                  <a:lnTo>
-                    <a:pt x="5334704" y="3046020"/>
-                  </a:lnTo>
-                  <a:lnTo>
-                    <a:pt x="5258071" y="3033973"/>
-                  </a:lnTo>
-                  <a:lnTo>
-                    <a:pt x="5181439" y="3021537"/>
-                  </a:lnTo>
-                  <a:lnTo>
-                    <a:pt x="5104806" y="3008699"/>
-                  </a:lnTo>
-                  <a:lnTo>
-                    <a:pt x="5028174" y="2995445"/>
-                  </a:lnTo>
-                  <a:lnTo>
-                    <a:pt x="4951541" y="2981762"/>
-                  </a:lnTo>
-                  <a:lnTo>
-                    <a:pt x="4874909" y="2967636"/>
-                  </a:lnTo>
-                  <a:lnTo>
-                    <a:pt x="4798276" y="2953054"/>
-                  </a:lnTo>
-                  <a:lnTo>
-                    <a:pt x="4721644" y="2937999"/>
-                  </a:lnTo>
-                  <a:lnTo>
-                    <a:pt x="4645011" y="2922457"/>
-                  </a:lnTo>
-                  <a:lnTo>
-                    <a:pt x="4568378" y="2906412"/>
-                  </a:lnTo>
-                  <a:lnTo>
-                    <a:pt x="4491746" y="2889847"/>
-                  </a:lnTo>
-                  <a:lnTo>
-                    <a:pt x="4415113" y="2872747"/>
-                  </a:lnTo>
-                  <a:lnTo>
-                    <a:pt x="4338481" y="2855093"/>
-                  </a:lnTo>
-                  <a:lnTo>
-                    <a:pt x="4261848" y="2836867"/>
-                  </a:lnTo>
-                  <a:lnTo>
-                    <a:pt x="4185216" y="2818052"/>
-                  </a:lnTo>
-                  <a:lnTo>
-                    <a:pt x="4108583" y="2798628"/>
-                  </a:lnTo>
-                  <a:lnTo>
-                    <a:pt x="4031951" y="2778575"/>
-                  </a:lnTo>
-                  <a:lnTo>
-                    <a:pt x="3955318" y="2757874"/>
-                  </a:lnTo>
-                  <a:lnTo>
-                    <a:pt x="3878685" y="2736502"/>
-                  </a:lnTo>
-                  <a:lnTo>
-                    <a:pt x="3802053" y="2714439"/>
-                  </a:lnTo>
-                  <a:lnTo>
-                    <a:pt x="3725420" y="2691661"/>
-                  </a:lnTo>
-                  <a:lnTo>
-                    <a:pt x="3648788" y="2668147"/>
-                  </a:lnTo>
-                  <a:lnTo>
-                    <a:pt x="3572155" y="2643871"/>
-                  </a:lnTo>
-                  <a:lnTo>
-                    <a:pt x="3495523" y="2618810"/>
-                  </a:lnTo>
-                  <a:lnTo>
-                    <a:pt x="3418890" y="2592937"/>
-                  </a:lnTo>
-                  <a:lnTo>
-                    <a:pt x="3342258" y="2576051"/>
-                  </a:lnTo>
-                  <a:lnTo>
-                    <a:pt x="3265625" y="2560694"/>
-                  </a:lnTo>
-                  <a:lnTo>
-                    <a:pt x="3188993" y="2545057"/>
-                  </a:lnTo>
-                  <a:lnTo>
-                    <a:pt x="3112360" y="2529135"/>
-                  </a:lnTo>
-                  <a:lnTo>
-                    <a:pt x="3035727" y="2512923"/>
-                  </a:lnTo>
-                  <a:lnTo>
-                    <a:pt x="2959095" y="2496415"/>
-                  </a:lnTo>
-                  <a:lnTo>
-                    <a:pt x="2882462" y="2479606"/>
-                  </a:lnTo>
-                  <a:lnTo>
-                    <a:pt x="2805830" y="2462490"/>
-                  </a:lnTo>
-                  <a:lnTo>
-                    <a:pt x="2729197" y="2445063"/>
-                  </a:lnTo>
-                  <a:lnTo>
-                    <a:pt x="2652565" y="2427317"/>
-                  </a:lnTo>
-                  <a:lnTo>
-                    <a:pt x="2575932" y="2409248"/>
-                  </a:lnTo>
-                  <a:lnTo>
-                    <a:pt x="2499300" y="2390850"/>
-                  </a:lnTo>
-                  <a:lnTo>
-                    <a:pt x="2422667" y="2372116"/>
-                  </a:lnTo>
-                  <a:lnTo>
-                    <a:pt x="2346034" y="2353040"/>
-                  </a:lnTo>
-                  <a:lnTo>
-                    <a:pt x="2269402" y="2333617"/>
-                  </a:lnTo>
-                  <a:lnTo>
-                    <a:pt x="2192769" y="2313839"/>
-                  </a:lnTo>
-                  <a:lnTo>
-                    <a:pt x="2116137" y="2293701"/>
-                  </a:lnTo>
-                  <a:lnTo>
-                    <a:pt x="2039504" y="2273196"/>
-                  </a:lnTo>
-                  <a:lnTo>
-                    <a:pt x="1962872" y="2252316"/>
-                  </a:lnTo>
-                  <a:lnTo>
-                    <a:pt x="1886239" y="2231056"/>
-                  </a:lnTo>
-                  <a:lnTo>
-                    <a:pt x="1809607" y="2209408"/>
-                  </a:lnTo>
-                  <a:lnTo>
-                    <a:pt x="1732974" y="2187366"/>
-                  </a:lnTo>
-                  <a:lnTo>
-                    <a:pt x="1656342" y="2164921"/>
-                  </a:lnTo>
-                  <a:lnTo>
-                    <a:pt x="1579709" y="2142068"/>
-                  </a:lnTo>
-                  <a:lnTo>
-                    <a:pt x="1503076" y="2118797"/>
-                  </a:lnTo>
-                  <a:lnTo>
-                    <a:pt x="1426444" y="2095103"/>
-                  </a:lnTo>
-                  <a:lnTo>
-                    <a:pt x="1349811" y="2070976"/>
-                  </a:lnTo>
-                  <a:lnTo>
-                    <a:pt x="1273179" y="2046409"/>
-                  </a:lnTo>
-                  <a:lnTo>
-                    <a:pt x="1196546" y="2021394"/>
-                  </a:lnTo>
-                  <a:lnTo>
-                    <a:pt x="1119914" y="1995923"/>
-                  </a:lnTo>
-                  <a:lnTo>
-                    <a:pt x="1043281" y="1969988"/>
-                  </a:lnTo>
-                  <a:lnTo>
-                    <a:pt x="966649" y="1943580"/>
-                  </a:lnTo>
-                  <a:lnTo>
-                    <a:pt x="890016" y="1916690"/>
-                  </a:lnTo>
-                  <a:lnTo>
-                    <a:pt x="813384" y="1889310"/>
-                  </a:lnTo>
-                  <a:lnTo>
-                    <a:pt x="736751" y="1861430"/>
-                  </a:lnTo>
-                  <a:lnTo>
-                    <a:pt x="660118" y="1833042"/>
-                  </a:lnTo>
-                  <a:lnTo>
-                    <a:pt x="583486" y="1804137"/>
-                  </a:lnTo>
-                  <a:lnTo>
-                    <a:pt x="506853" y="1774704"/>
-                  </a:lnTo>
-                  <a:lnTo>
-                    <a:pt x="430221" y="1744735"/>
-                  </a:lnTo>
-                  <a:lnTo>
-                    <a:pt x="353588" y="1714219"/>
-                  </a:lnTo>
-                  <a:lnTo>
-                    <a:pt x="276956" y="1683147"/>
-                  </a:lnTo>
-                  <a:lnTo>
-                    <a:pt x="200323" y="1651508"/>
-                  </a:lnTo>
-                  <a:lnTo>
-                    <a:pt x="123691" y="1619293"/>
-                  </a:lnTo>
-                  <a:lnTo>
-                    <a:pt x="47058" y="1586490"/>
-                  </a:lnTo>
-                  <a:lnTo>
-                    <a:pt x="0" y="1565979"/>
+                    <a:pt x="143245" y="23661"/>
+                  </a:lnTo>
+                  <a:lnTo>
+                    <a:pt x="214867" y="132133"/>
+                  </a:lnTo>
+                  <a:lnTo>
+                    <a:pt x="286490" y="237205"/>
+                  </a:lnTo>
+                  <a:lnTo>
+                    <a:pt x="358112" y="338982"/>
+                  </a:lnTo>
+                  <a:lnTo>
+                    <a:pt x="429735" y="437569"/>
+                  </a:lnTo>
+                  <a:lnTo>
+                    <a:pt x="501357" y="533066"/>
+                  </a:lnTo>
+                  <a:lnTo>
+                    <a:pt x="572980" y="625569"/>
+                  </a:lnTo>
+                  <a:lnTo>
+                    <a:pt x="644602" y="715171"/>
+                  </a:lnTo>
+                  <a:lnTo>
+                    <a:pt x="716225" y="801965"/>
+                  </a:lnTo>
+                  <a:lnTo>
+                    <a:pt x="787847" y="886038"/>
+                  </a:lnTo>
+                  <a:lnTo>
+                    <a:pt x="859470" y="967475"/>
+                  </a:lnTo>
+                  <a:lnTo>
+                    <a:pt x="931092" y="1046359"/>
+                  </a:lnTo>
+                  <a:lnTo>
+                    <a:pt x="1002715" y="1122770"/>
+                  </a:lnTo>
+                  <a:lnTo>
+                    <a:pt x="1074337" y="1196786"/>
+                  </a:lnTo>
+                  <a:lnTo>
+                    <a:pt x="1145960" y="1268481"/>
+                  </a:lnTo>
+                  <a:lnTo>
+                    <a:pt x="1217582" y="1337929"/>
+                  </a:lnTo>
+                  <a:lnTo>
+                    <a:pt x="1289205" y="1405199"/>
+                  </a:lnTo>
+                  <a:lnTo>
+                    <a:pt x="1360827" y="1470361"/>
+                  </a:lnTo>
+                  <a:lnTo>
+                    <a:pt x="1432450" y="1533480"/>
+                  </a:lnTo>
+                  <a:lnTo>
+                    <a:pt x="1504073" y="1594620"/>
+                  </a:lnTo>
+                  <a:lnTo>
+                    <a:pt x="1575695" y="1653843"/>
+                  </a:lnTo>
+                  <a:lnTo>
+                    <a:pt x="1647318" y="1711210"/>
+                  </a:lnTo>
+                  <a:lnTo>
+                    <a:pt x="1718940" y="1766778"/>
+                  </a:lnTo>
+                  <a:lnTo>
+                    <a:pt x="1790563" y="1820604"/>
+                  </a:lnTo>
+                  <a:lnTo>
+                    <a:pt x="1862185" y="1872743"/>
+                  </a:lnTo>
+                  <a:lnTo>
+                    <a:pt x="1933808" y="1923248"/>
+                  </a:lnTo>
+                  <a:lnTo>
+                    <a:pt x="2005430" y="1972169"/>
+                  </a:lnTo>
+                  <a:lnTo>
+                    <a:pt x="2077053" y="2019556"/>
+                  </a:lnTo>
+                  <a:lnTo>
+                    <a:pt x="2148675" y="2065458"/>
+                  </a:lnTo>
+                  <a:lnTo>
+                    <a:pt x="2220298" y="2109921"/>
+                  </a:lnTo>
+                  <a:lnTo>
+                    <a:pt x="2291920" y="2152989"/>
+                  </a:lnTo>
+                  <a:lnTo>
+                    <a:pt x="2363543" y="2194708"/>
+                  </a:lnTo>
+                  <a:lnTo>
+                    <a:pt x="2435165" y="2235119"/>
+                  </a:lnTo>
+                  <a:lnTo>
+                    <a:pt x="2506788" y="2274263"/>
+                  </a:lnTo>
+                  <a:lnTo>
+                    <a:pt x="2578410" y="2312180"/>
+                  </a:lnTo>
+                  <a:lnTo>
+                    <a:pt x="2650033" y="2348908"/>
+                  </a:lnTo>
+                  <a:lnTo>
+                    <a:pt x="2721655" y="2384485"/>
+                  </a:lnTo>
+                  <a:lnTo>
+                    <a:pt x="2793278" y="2418946"/>
+                  </a:lnTo>
+                  <a:lnTo>
+                    <a:pt x="2864901" y="2452327"/>
+                  </a:lnTo>
+                  <a:lnTo>
+                    <a:pt x="2936523" y="2484662"/>
+                  </a:lnTo>
+                  <a:lnTo>
+                    <a:pt x="3008146" y="2515983"/>
+                  </a:lnTo>
+                  <a:lnTo>
+                    <a:pt x="3079768" y="2546322"/>
+                  </a:lnTo>
+                  <a:lnTo>
+                    <a:pt x="3151391" y="2575709"/>
+                  </a:lnTo>
+                  <a:lnTo>
+                    <a:pt x="3223013" y="2604176"/>
+                  </a:lnTo>
+                  <a:lnTo>
+                    <a:pt x="3294636" y="2631750"/>
+                  </a:lnTo>
+                  <a:lnTo>
+                    <a:pt x="3366258" y="2656655"/>
+                  </a:lnTo>
+                  <a:lnTo>
+                    <a:pt x="3437881" y="2671467"/>
+                  </a:lnTo>
+                  <a:lnTo>
+                    <a:pt x="3509503" y="2686014"/>
+                  </a:lnTo>
+                  <a:lnTo>
+                    <a:pt x="3581126" y="2700300"/>
+                  </a:lnTo>
+                  <a:lnTo>
+                    <a:pt x="3652748" y="2714330"/>
+                  </a:lnTo>
+                  <a:lnTo>
+                    <a:pt x="3724371" y="2728109"/>
+                  </a:lnTo>
+                  <a:lnTo>
+                    <a:pt x="3795993" y="2741641"/>
+                  </a:lnTo>
+                  <a:lnTo>
+                    <a:pt x="3867616" y="2754931"/>
+                  </a:lnTo>
+                  <a:lnTo>
+                    <a:pt x="3939238" y="2767982"/>
+                  </a:lnTo>
+                  <a:lnTo>
+                    <a:pt x="4010861" y="2780800"/>
+                  </a:lnTo>
+                  <a:lnTo>
+                    <a:pt x="4082483" y="2793389"/>
+                  </a:lnTo>
+                  <a:lnTo>
+                    <a:pt x="4154106" y="2805752"/>
+                  </a:lnTo>
+                  <a:lnTo>
+                    <a:pt x="4225729" y="2817894"/>
+                  </a:lnTo>
+                  <a:lnTo>
+                    <a:pt x="4297351" y="2829818"/>
+                  </a:lnTo>
+                  <a:lnTo>
+                    <a:pt x="4368974" y="2841529"/>
+                  </a:lnTo>
+                  <a:lnTo>
+                    <a:pt x="4440596" y="2853030"/>
+                  </a:lnTo>
+                  <a:lnTo>
+                    <a:pt x="4512219" y="2864325"/>
+                  </a:lnTo>
+                  <a:lnTo>
+                    <a:pt x="4583841" y="2875417"/>
+                  </a:lnTo>
+                  <a:lnTo>
+                    <a:pt x="4655464" y="2886312"/>
+                  </a:lnTo>
+                  <a:lnTo>
+                    <a:pt x="4727086" y="2897011"/>
+                  </a:lnTo>
+                  <a:lnTo>
+                    <a:pt x="4798709" y="2907518"/>
+                  </a:lnTo>
+                  <a:lnTo>
+                    <a:pt x="4870331" y="2917837"/>
+                  </a:lnTo>
+                  <a:lnTo>
+                    <a:pt x="4941954" y="2927972"/>
+                  </a:lnTo>
+                  <a:lnTo>
+                    <a:pt x="5013576" y="2937925"/>
+                  </a:lnTo>
+                  <a:lnTo>
+                    <a:pt x="5085199" y="2947699"/>
+                  </a:lnTo>
+                  <a:lnTo>
+                    <a:pt x="5156821" y="2957299"/>
+                  </a:lnTo>
+                  <a:lnTo>
+                    <a:pt x="5228444" y="2966727"/>
+                  </a:lnTo>
+                  <a:lnTo>
+                    <a:pt x="5300066" y="2975986"/>
+                  </a:lnTo>
+                  <a:lnTo>
+                    <a:pt x="5371689" y="2985079"/>
+                  </a:lnTo>
+                  <a:lnTo>
+                    <a:pt x="5443311" y="2994009"/>
+                  </a:lnTo>
+                  <a:lnTo>
+                    <a:pt x="5514934" y="3002779"/>
+                  </a:lnTo>
+                  <a:lnTo>
+                    <a:pt x="5586557" y="3011393"/>
+                  </a:lnTo>
+                  <a:lnTo>
+                    <a:pt x="5658179" y="3019852"/>
+                  </a:lnTo>
+                  <a:lnTo>
+                    <a:pt x="5729802" y="3028159"/>
+                  </a:lnTo>
+                  <a:lnTo>
+                    <a:pt x="5801424" y="3036318"/>
+                  </a:lnTo>
+                  <a:lnTo>
+                    <a:pt x="5873047" y="3044331"/>
+                  </a:lnTo>
+                  <a:lnTo>
+                    <a:pt x="5944669" y="3052200"/>
+                  </a:lnTo>
+                  <a:lnTo>
+                    <a:pt x="6016292" y="3059928"/>
+                  </a:lnTo>
+                  <a:lnTo>
+                    <a:pt x="6087914" y="3067518"/>
+                  </a:lnTo>
+                  <a:lnTo>
+                    <a:pt x="6159537" y="3074972"/>
+                  </a:lnTo>
+                  <a:lnTo>
+                    <a:pt x="6231159" y="3082292"/>
+                  </a:lnTo>
+                  <a:lnTo>
+                    <a:pt x="6302782" y="3089482"/>
+                  </a:lnTo>
+                  <a:lnTo>
+                    <a:pt x="6374404" y="3096542"/>
+                  </a:lnTo>
+                  <a:lnTo>
+                    <a:pt x="6446027" y="3103476"/>
+                  </a:lnTo>
+                  <a:lnTo>
+                    <a:pt x="6517649" y="3110286"/>
+                  </a:lnTo>
+                  <a:lnTo>
+                    <a:pt x="6589272" y="3116974"/>
+                  </a:lnTo>
+                  <a:lnTo>
+                    <a:pt x="6660894" y="3123542"/>
+                  </a:lnTo>
+                  <a:lnTo>
+                    <a:pt x="6732517" y="3129993"/>
+                  </a:lnTo>
+                  <a:lnTo>
+                    <a:pt x="6804139" y="3136328"/>
+                  </a:lnTo>
+                  <a:lnTo>
+                    <a:pt x="6875762" y="3142550"/>
+                  </a:lnTo>
+                  <a:lnTo>
+                    <a:pt x="6947385" y="3148660"/>
+                  </a:lnTo>
+                  <a:lnTo>
+                    <a:pt x="7019007" y="3154661"/>
+                  </a:lnTo>
+                  <a:lnTo>
+                    <a:pt x="7090630" y="3160554"/>
+                  </a:lnTo>
+                  <a:lnTo>
+                    <a:pt x="7090630" y="3326242"/>
+                  </a:lnTo>
+                  <a:lnTo>
+                    <a:pt x="7019007" y="3321145"/>
+                  </a:lnTo>
+                  <a:lnTo>
+                    <a:pt x="6947385" y="3315882"/>
+                  </a:lnTo>
+                  <a:lnTo>
+                    <a:pt x="6875762" y="3310450"/>
+                  </a:lnTo>
+                  <a:lnTo>
+                    <a:pt x="6804139" y="3304841"/>
+                  </a:lnTo>
+                  <a:lnTo>
+                    <a:pt x="6732517" y="3299051"/>
+                  </a:lnTo>
+                  <a:lnTo>
+                    <a:pt x="6660894" y="3293073"/>
+                  </a:lnTo>
+                  <a:lnTo>
+                    <a:pt x="6589272" y="3286902"/>
+                  </a:lnTo>
+                  <a:lnTo>
+                    <a:pt x="6517649" y="3280532"/>
+                  </a:lnTo>
+                  <a:lnTo>
+                    <a:pt x="6446027" y="3273955"/>
+                  </a:lnTo>
+                  <a:lnTo>
+                    <a:pt x="6374404" y="3267165"/>
+                  </a:lnTo>
+                  <a:lnTo>
+                    <a:pt x="6302782" y="3260155"/>
+                  </a:lnTo>
+                  <a:lnTo>
+                    <a:pt x="6231159" y="3252919"/>
+                  </a:lnTo>
+                  <a:lnTo>
+                    <a:pt x="6159537" y="3245449"/>
+                  </a:lnTo>
+                  <a:lnTo>
+                    <a:pt x="6087914" y="3237736"/>
+                  </a:lnTo>
+                  <a:lnTo>
+                    <a:pt x="6016292" y="3229774"/>
+                  </a:lnTo>
+                  <a:lnTo>
+                    <a:pt x="5944669" y="3221555"/>
+                  </a:lnTo>
+                  <a:lnTo>
+                    <a:pt x="5873047" y="3213069"/>
+                  </a:lnTo>
+                  <a:lnTo>
+                    <a:pt x="5801424" y="3204309"/>
+                  </a:lnTo>
+                  <a:lnTo>
+                    <a:pt x="5729802" y="3195265"/>
+                  </a:lnTo>
+                  <a:lnTo>
+                    <a:pt x="5658179" y="3185929"/>
+                  </a:lnTo>
+                  <a:lnTo>
+                    <a:pt x="5586557" y="3176290"/>
+                  </a:lnTo>
+                  <a:lnTo>
+                    <a:pt x="5514934" y="3166339"/>
+                  </a:lnTo>
+                  <a:lnTo>
+                    <a:pt x="5443311" y="3156067"/>
+                  </a:lnTo>
+                  <a:lnTo>
+                    <a:pt x="5371689" y="3145462"/>
+                  </a:lnTo>
+                  <a:lnTo>
+                    <a:pt x="5300066" y="3134513"/>
+                  </a:lnTo>
+                  <a:lnTo>
+                    <a:pt x="5228444" y="3123211"/>
+                  </a:lnTo>
+                  <a:lnTo>
+                    <a:pt x="5156821" y="3111542"/>
+                  </a:lnTo>
+                  <a:lnTo>
+                    <a:pt x="5085199" y="3099496"/>
+                  </a:lnTo>
+                  <a:lnTo>
+                    <a:pt x="5013576" y="3087060"/>
+                  </a:lnTo>
+                  <a:lnTo>
+                    <a:pt x="4941954" y="3074222"/>
+                  </a:lnTo>
+                  <a:lnTo>
+                    <a:pt x="4870331" y="3060968"/>
+                  </a:lnTo>
+                  <a:lnTo>
+                    <a:pt x="4798709" y="3047285"/>
+                  </a:lnTo>
+                  <a:lnTo>
+                    <a:pt x="4727086" y="3033159"/>
+                  </a:lnTo>
+                  <a:lnTo>
+                    <a:pt x="4655464" y="3018576"/>
+                  </a:lnTo>
+                  <a:lnTo>
+                    <a:pt x="4583841" y="3003521"/>
+                  </a:lnTo>
+                  <a:lnTo>
+                    <a:pt x="4512219" y="2987979"/>
+                  </a:lnTo>
+                  <a:lnTo>
+                    <a:pt x="4440596" y="2971934"/>
+                  </a:lnTo>
+                  <a:lnTo>
+                    <a:pt x="4368974" y="2955370"/>
+                  </a:lnTo>
+                  <a:lnTo>
+                    <a:pt x="4297351" y="2938269"/>
+                  </a:lnTo>
+                  <a:lnTo>
+                    <a:pt x="4225729" y="2920615"/>
+                  </a:lnTo>
+                  <a:lnTo>
+                    <a:pt x="4154106" y="2902390"/>
+                  </a:lnTo>
+                  <a:lnTo>
+                    <a:pt x="4082483" y="2883575"/>
+                  </a:lnTo>
+                  <a:lnTo>
+                    <a:pt x="4010861" y="2864151"/>
+                  </a:lnTo>
+                  <a:lnTo>
+                    <a:pt x="3939238" y="2844098"/>
+                  </a:lnTo>
+                  <a:lnTo>
+                    <a:pt x="3867616" y="2823396"/>
+                  </a:lnTo>
+                  <a:lnTo>
+                    <a:pt x="3795993" y="2802025"/>
+                  </a:lnTo>
+                  <a:lnTo>
+                    <a:pt x="3724371" y="2779961"/>
+                  </a:lnTo>
+                  <a:lnTo>
+                    <a:pt x="3652748" y="2757184"/>
+                  </a:lnTo>
+                  <a:lnTo>
+                    <a:pt x="3581126" y="2733669"/>
+                  </a:lnTo>
+                  <a:lnTo>
+                    <a:pt x="3509503" y="2709394"/>
+                  </a:lnTo>
+                  <a:lnTo>
+                    <a:pt x="3437881" y="2684332"/>
+                  </a:lnTo>
+                  <a:lnTo>
+                    <a:pt x="3366258" y="2658460"/>
+                  </a:lnTo>
+                  <a:lnTo>
+                    <a:pt x="3294636" y="2641573"/>
+                  </a:lnTo>
+                  <a:lnTo>
+                    <a:pt x="3223013" y="2626217"/>
+                  </a:lnTo>
+                  <a:lnTo>
+                    <a:pt x="3151391" y="2610580"/>
+                  </a:lnTo>
+                  <a:lnTo>
+                    <a:pt x="3079768" y="2594658"/>
+                  </a:lnTo>
+                  <a:lnTo>
+                    <a:pt x="3008146" y="2578445"/>
+                  </a:lnTo>
+                  <a:lnTo>
+                    <a:pt x="2936523" y="2561937"/>
+                  </a:lnTo>
+                  <a:lnTo>
+                    <a:pt x="2864901" y="2545128"/>
+                  </a:lnTo>
+                  <a:lnTo>
+                    <a:pt x="2793278" y="2528013"/>
+                  </a:lnTo>
+                  <a:lnTo>
+                    <a:pt x="2721655" y="2510585"/>
+                  </a:lnTo>
+                  <a:lnTo>
+                    <a:pt x="2650033" y="2492840"/>
+                  </a:lnTo>
+                  <a:lnTo>
+                    <a:pt x="2578410" y="2474771"/>
+                  </a:lnTo>
+                  <a:lnTo>
+                    <a:pt x="2506788" y="2456372"/>
+                  </a:lnTo>
+                  <a:lnTo>
+                    <a:pt x="2435165" y="2437638"/>
+                  </a:lnTo>
+                  <a:lnTo>
+                    <a:pt x="2363543" y="2418563"/>
+                  </a:lnTo>
+                  <a:lnTo>
+                    <a:pt x="2291920" y="2399140"/>
+                  </a:lnTo>
+                  <a:lnTo>
+                    <a:pt x="2220298" y="2379362"/>
+                  </a:lnTo>
+                  <a:lnTo>
+                    <a:pt x="2148675" y="2359224"/>
+                  </a:lnTo>
+                  <a:lnTo>
+                    <a:pt x="2077053" y="2338718"/>
+                  </a:lnTo>
+                  <a:lnTo>
+                    <a:pt x="2005430" y="2317839"/>
+                  </a:lnTo>
+                  <a:lnTo>
+                    <a:pt x="1933808" y="2296579"/>
+                  </a:lnTo>
+                  <a:lnTo>
+                    <a:pt x="1862185" y="2274931"/>
+                  </a:lnTo>
+                  <a:lnTo>
+                    <a:pt x="1790563" y="2252889"/>
+                  </a:lnTo>
+                  <a:lnTo>
+                    <a:pt x="1718940" y="2230444"/>
+                  </a:lnTo>
+                  <a:lnTo>
+                    <a:pt x="1647318" y="2207590"/>
+                  </a:lnTo>
+                  <a:lnTo>
+                    <a:pt x="1575695" y="2184320"/>
+                  </a:lnTo>
+                  <a:lnTo>
+                    <a:pt x="1504073" y="2160625"/>
+                  </a:lnTo>
+                  <a:lnTo>
+                    <a:pt x="1432450" y="2136498"/>
+                  </a:lnTo>
+                  <a:lnTo>
+                    <a:pt x="1360827" y="2111932"/>
+                  </a:lnTo>
+                  <a:lnTo>
+                    <a:pt x="1289205" y="2086917"/>
+                  </a:lnTo>
+                  <a:lnTo>
+                    <a:pt x="1217582" y="2061446"/>
+                  </a:lnTo>
+                  <a:lnTo>
+                    <a:pt x="1145960" y="2035511"/>
+                  </a:lnTo>
+                  <a:lnTo>
+                    <a:pt x="1074337" y="2009102"/>
+                  </a:lnTo>
+                  <a:lnTo>
+                    <a:pt x="1002715" y="1982212"/>
+                  </a:lnTo>
+                  <a:lnTo>
+                    <a:pt x="931092" y="1954832"/>
+                  </a:lnTo>
+                  <a:lnTo>
+                    <a:pt x="859470" y="1926953"/>
+                  </a:lnTo>
+                  <a:lnTo>
+                    <a:pt x="787847" y="1898565"/>
+                  </a:lnTo>
+                  <a:lnTo>
+                    <a:pt x="716225" y="1869660"/>
+                  </a:lnTo>
+                  <a:lnTo>
+                    <a:pt x="644602" y="1840227"/>
+                  </a:lnTo>
+                  <a:lnTo>
+                    <a:pt x="572980" y="1810258"/>
+                  </a:lnTo>
+                  <a:lnTo>
+                    <a:pt x="501357" y="1779742"/>
+                  </a:lnTo>
+                  <a:lnTo>
+                    <a:pt x="429735" y="1748670"/>
+                  </a:lnTo>
+                  <a:lnTo>
+                    <a:pt x="358112" y="1717031"/>
+                  </a:lnTo>
+                  <a:lnTo>
+                    <a:pt x="286490" y="1684815"/>
+                  </a:lnTo>
+                  <a:lnTo>
+                    <a:pt x="214867" y="1652012"/>
+                  </a:lnTo>
+                  <a:lnTo>
+                    <a:pt x="143245" y="1618611"/>
+                  </a:lnTo>
+                  <a:lnTo>
+                    <a:pt x="71622" y="1584601"/>
+                  </a:lnTo>
+                  <a:lnTo>
+                    <a:pt x="0" y="1549970"/>
                   </a:lnTo>
                   <a:close/>
                 </a:path>
@@ -3615,312 +3581,640 @@
         </p:sp>
         <p:sp>
           <p:nvSpPr>
+            <p:cNvPr id="21" name="pl21"/>
+            <p:cNvSpPr/>
+            <p:nvPr/>
+          </p:nvSpPr>
+          <p:spPr>
+            <a:xfrm>
+              <a:off x="1300161" y="2073503"/>
+              <a:ext cx="6962518" cy="3160554"/>
+            </a:xfrm>
+            <a:custGeom>
+              <a:avLst/>
+              <a:pathLst>
+                <a:path w="6962518" h="3160554">
+                  <a:moveTo>
+                    <a:pt x="0" y="0"/>
+                  </a:moveTo>
+                  <a:lnTo>
+                    <a:pt x="15133" y="23661"/>
+                  </a:lnTo>
+                  <a:lnTo>
+                    <a:pt x="86755" y="132133"/>
+                  </a:lnTo>
+                  <a:lnTo>
+                    <a:pt x="158378" y="237205"/>
+                  </a:lnTo>
+                  <a:lnTo>
+                    <a:pt x="230000" y="338982"/>
+                  </a:lnTo>
+                  <a:lnTo>
+                    <a:pt x="301623" y="437569"/>
+                  </a:lnTo>
+                  <a:lnTo>
+                    <a:pt x="373245" y="533066"/>
+                  </a:lnTo>
+                  <a:lnTo>
+                    <a:pt x="444868" y="625569"/>
+                  </a:lnTo>
+                  <a:lnTo>
+                    <a:pt x="516490" y="715171"/>
+                  </a:lnTo>
+                  <a:lnTo>
+                    <a:pt x="588113" y="801965"/>
+                  </a:lnTo>
+                  <a:lnTo>
+                    <a:pt x="659735" y="886038"/>
+                  </a:lnTo>
+                  <a:lnTo>
+                    <a:pt x="731358" y="967475"/>
+                  </a:lnTo>
+                  <a:lnTo>
+                    <a:pt x="802981" y="1046359"/>
+                  </a:lnTo>
+                  <a:lnTo>
+                    <a:pt x="874603" y="1122770"/>
+                  </a:lnTo>
+                  <a:lnTo>
+                    <a:pt x="946226" y="1196786"/>
+                  </a:lnTo>
+                  <a:lnTo>
+                    <a:pt x="1017848" y="1268481"/>
+                  </a:lnTo>
+                  <a:lnTo>
+                    <a:pt x="1089471" y="1337929"/>
+                  </a:lnTo>
+                  <a:lnTo>
+                    <a:pt x="1161093" y="1405199"/>
+                  </a:lnTo>
+                  <a:lnTo>
+                    <a:pt x="1232716" y="1470361"/>
+                  </a:lnTo>
+                  <a:lnTo>
+                    <a:pt x="1304338" y="1533480"/>
+                  </a:lnTo>
+                  <a:lnTo>
+                    <a:pt x="1375961" y="1594620"/>
+                  </a:lnTo>
+                  <a:lnTo>
+                    <a:pt x="1447583" y="1653843"/>
+                  </a:lnTo>
+                  <a:lnTo>
+                    <a:pt x="1519206" y="1711210"/>
+                  </a:lnTo>
+                  <a:lnTo>
+                    <a:pt x="1590828" y="1766778"/>
+                  </a:lnTo>
+                  <a:lnTo>
+                    <a:pt x="1662451" y="1820604"/>
+                  </a:lnTo>
+                  <a:lnTo>
+                    <a:pt x="1734073" y="1872743"/>
+                  </a:lnTo>
+                  <a:lnTo>
+                    <a:pt x="1805696" y="1923248"/>
+                  </a:lnTo>
+                  <a:lnTo>
+                    <a:pt x="1877318" y="1972169"/>
+                  </a:lnTo>
+                  <a:lnTo>
+                    <a:pt x="1948941" y="2019556"/>
+                  </a:lnTo>
+                  <a:lnTo>
+                    <a:pt x="2020563" y="2065458"/>
+                  </a:lnTo>
+                  <a:lnTo>
+                    <a:pt x="2092186" y="2109921"/>
+                  </a:lnTo>
+                  <a:lnTo>
+                    <a:pt x="2163809" y="2152989"/>
+                  </a:lnTo>
+                  <a:lnTo>
+                    <a:pt x="2235431" y="2194708"/>
+                  </a:lnTo>
+                  <a:lnTo>
+                    <a:pt x="2307054" y="2235119"/>
+                  </a:lnTo>
+                  <a:lnTo>
+                    <a:pt x="2378676" y="2274263"/>
+                  </a:lnTo>
+                  <a:lnTo>
+                    <a:pt x="2450299" y="2312180"/>
+                  </a:lnTo>
+                  <a:lnTo>
+                    <a:pt x="2521921" y="2348908"/>
+                  </a:lnTo>
+                  <a:lnTo>
+                    <a:pt x="2593544" y="2384485"/>
+                  </a:lnTo>
+                  <a:lnTo>
+                    <a:pt x="2665166" y="2418946"/>
+                  </a:lnTo>
+                  <a:lnTo>
+                    <a:pt x="2736789" y="2452327"/>
+                  </a:lnTo>
+                  <a:lnTo>
+                    <a:pt x="2808411" y="2484662"/>
+                  </a:lnTo>
+                  <a:lnTo>
+                    <a:pt x="2880034" y="2515983"/>
+                  </a:lnTo>
+                  <a:lnTo>
+                    <a:pt x="2951656" y="2546322"/>
+                  </a:lnTo>
+                  <a:lnTo>
+                    <a:pt x="3023279" y="2575709"/>
+                  </a:lnTo>
+                  <a:lnTo>
+                    <a:pt x="3094901" y="2604176"/>
+                  </a:lnTo>
+                  <a:lnTo>
+                    <a:pt x="3166524" y="2631750"/>
+                  </a:lnTo>
+                  <a:lnTo>
+                    <a:pt x="3238146" y="2656655"/>
+                  </a:lnTo>
+                  <a:lnTo>
+                    <a:pt x="3309769" y="2671467"/>
+                  </a:lnTo>
+                  <a:lnTo>
+                    <a:pt x="3381391" y="2686014"/>
+                  </a:lnTo>
+                  <a:lnTo>
+                    <a:pt x="3453014" y="2700300"/>
+                  </a:lnTo>
+                  <a:lnTo>
+                    <a:pt x="3524637" y="2714330"/>
+                  </a:lnTo>
+                  <a:lnTo>
+                    <a:pt x="3596259" y="2728109"/>
+                  </a:lnTo>
+                  <a:lnTo>
+                    <a:pt x="3667882" y="2741641"/>
+                  </a:lnTo>
+                  <a:lnTo>
+                    <a:pt x="3739504" y="2754931"/>
+                  </a:lnTo>
+                  <a:lnTo>
+                    <a:pt x="3811127" y="2767982"/>
+                  </a:lnTo>
+                  <a:lnTo>
+                    <a:pt x="3882749" y="2780800"/>
+                  </a:lnTo>
+                  <a:lnTo>
+                    <a:pt x="3954372" y="2793389"/>
+                  </a:lnTo>
+                  <a:lnTo>
+                    <a:pt x="4025994" y="2805752"/>
+                  </a:lnTo>
+                  <a:lnTo>
+                    <a:pt x="4097617" y="2817894"/>
+                  </a:lnTo>
+                  <a:lnTo>
+                    <a:pt x="4169239" y="2829818"/>
+                  </a:lnTo>
+                  <a:lnTo>
+                    <a:pt x="4240862" y="2841529"/>
+                  </a:lnTo>
+                  <a:lnTo>
+                    <a:pt x="4312484" y="2853030"/>
+                  </a:lnTo>
+                  <a:lnTo>
+                    <a:pt x="4384107" y="2864325"/>
+                  </a:lnTo>
+                  <a:lnTo>
+                    <a:pt x="4455729" y="2875417"/>
+                  </a:lnTo>
+                  <a:lnTo>
+                    <a:pt x="4527352" y="2886312"/>
+                  </a:lnTo>
+                  <a:lnTo>
+                    <a:pt x="4598974" y="2897011"/>
+                  </a:lnTo>
+                  <a:lnTo>
+                    <a:pt x="4670597" y="2907518"/>
+                  </a:lnTo>
+                  <a:lnTo>
+                    <a:pt x="4742219" y="2917837"/>
+                  </a:lnTo>
+                  <a:lnTo>
+                    <a:pt x="4813842" y="2927972"/>
+                  </a:lnTo>
+                  <a:lnTo>
+                    <a:pt x="4885465" y="2937925"/>
+                  </a:lnTo>
+                  <a:lnTo>
+                    <a:pt x="4957087" y="2947699"/>
+                  </a:lnTo>
+                  <a:lnTo>
+                    <a:pt x="5028710" y="2957299"/>
+                  </a:lnTo>
+                  <a:lnTo>
+                    <a:pt x="5100332" y="2966727"/>
+                  </a:lnTo>
+                  <a:lnTo>
+                    <a:pt x="5171955" y="2975986"/>
+                  </a:lnTo>
+                  <a:lnTo>
+                    <a:pt x="5243577" y="2985079"/>
+                  </a:lnTo>
+                  <a:lnTo>
+                    <a:pt x="5315200" y="2994009"/>
+                  </a:lnTo>
+                  <a:lnTo>
+                    <a:pt x="5386822" y="3002779"/>
+                  </a:lnTo>
+                  <a:lnTo>
+                    <a:pt x="5458445" y="3011393"/>
+                  </a:lnTo>
+                  <a:lnTo>
+                    <a:pt x="5530067" y="3019852"/>
+                  </a:lnTo>
+                  <a:lnTo>
+                    <a:pt x="5601690" y="3028159"/>
+                  </a:lnTo>
+                  <a:lnTo>
+                    <a:pt x="5673312" y="3036318"/>
+                  </a:lnTo>
+                  <a:lnTo>
+                    <a:pt x="5744935" y="3044331"/>
+                  </a:lnTo>
+                  <a:lnTo>
+                    <a:pt x="5816557" y="3052200"/>
+                  </a:lnTo>
+                  <a:lnTo>
+                    <a:pt x="5888180" y="3059928"/>
+                  </a:lnTo>
+                  <a:lnTo>
+                    <a:pt x="5959802" y="3067518"/>
+                  </a:lnTo>
+                  <a:lnTo>
+                    <a:pt x="6031425" y="3074972"/>
+                  </a:lnTo>
+                  <a:lnTo>
+                    <a:pt x="6103047" y="3082292"/>
+                  </a:lnTo>
+                  <a:lnTo>
+                    <a:pt x="6174670" y="3089482"/>
+                  </a:lnTo>
+                  <a:lnTo>
+                    <a:pt x="6246293" y="3096542"/>
+                  </a:lnTo>
+                  <a:lnTo>
+                    <a:pt x="6317915" y="3103476"/>
+                  </a:lnTo>
+                  <a:lnTo>
+                    <a:pt x="6389538" y="3110286"/>
+                  </a:lnTo>
+                  <a:lnTo>
+                    <a:pt x="6461160" y="3116974"/>
+                  </a:lnTo>
+                  <a:lnTo>
+                    <a:pt x="6532783" y="3123542"/>
+                  </a:lnTo>
+                  <a:lnTo>
+                    <a:pt x="6604405" y="3129993"/>
+                  </a:lnTo>
+                  <a:lnTo>
+                    <a:pt x="6676028" y="3136328"/>
+                  </a:lnTo>
+                  <a:lnTo>
+                    <a:pt x="6747650" y="3142550"/>
+                  </a:lnTo>
+                  <a:lnTo>
+                    <a:pt x="6819273" y="3148660"/>
+                  </a:lnTo>
+                  <a:lnTo>
+                    <a:pt x="6890895" y="3154661"/>
+                  </a:lnTo>
+                  <a:lnTo>
+                    <a:pt x="6962518" y="3160554"/>
+                  </a:lnTo>
+                </a:path>
+              </a:pathLst>
+            </a:custGeom>
+          </p:spPr>
+          <p:txBody>
+            <a:bodyPr/>
+            <a:lstStyle/>
+            <a:p/>
+          </p:txBody>
+        </p:sp>
+        <p:sp>
+          <p:nvSpPr>
             <p:cNvPr id="22" name="pl22"/>
             <p:cNvSpPr/>
             <p:nvPr/>
           </p:nvSpPr>
           <p:spPr>
             <a:xfrm>
-              <a:off x="817517" y="2139025"/>
-              <a:ext cx="7403783" cy="3095032"/>
+              <a:off x="1172049" y="3623473"/>
+              <a:ext cx="7090630" cy="1776272"/>
             </a:xfrm>
             <a:custGeom>
               <a:avLst/>
               <a:pathLst>
-                <a:path w="7403783" h="3095032">
+                <a:path w="7090630" h="1776272">
                   <a:moveTo>
+                    <a:pt x="7090630" y="1776272"/>
+                  </a:moveTo>
+                  <a:lnTo>
+                    <a:pt x="7019007" y="1771174"/>
+                  </a:lnTo>
+                  <a:lnTo>
+                    <a:pt x="6947385" y="1765912"/>
+                  </a:lnTo>
+                  <a:lnTo>
+                    <a:pt x="6875762" y="1760479"/>
+                  </a:lnTo>
+                  <a:lnTo>
+                    <a:pt x="6804139" y="1754870"/>
+                  </a:lnTo>
+                  <a:lnTo>
+                    <a:pt x="6732517" y="1749080"/>
+                  </a:lnTo>
+                  <a:lnTo>
+                    <a:pt x="6660894" y="1743103"/>
+                  </a:lnTo>
+                  <a:lnTo>
+                    <a:pt x="6589272" y="1736932"/>
+                  </a:lnTo>
+                  <a:lnTo>
+                    <a:pt x="6517649" y="1730561"/>
+                  </a:lnTo>
+                  <a:lnTo>
+                    <a:pt x="6446027" y="1723984"/>
+                  </a:lnTo>
+                  <a:lnTo>
+                    <a:pt x="6374404" y="1717194"/>
+                  </a:lnTo>
+                  <a:lnTo>
+                    <a:pt x="6302782" y="1710185"/>
+                  </a:lnTo>
+                  <a:lnTo>
+                    <a:pt x="6231159" y="1702948"/>
+                  </a:lnTo>
+                  <a:lnTo>
+                    <a:pt x="6159537" y="1695478"/>
+                  </a:lnTo>
+                  <a:lnTo>
+                    <a:pt x="6087914" y="1687766"/>
+                  </a:lnTo>
+                  <a:lnTo>
+                    <a:pt x="6016292" y="1679804"/>
+                  </a:lnTo>
+                  <a:lnTo>
+                    <a:pt x="5944669" y="1671584"/>
+                  </a:lnTo>
+                  <a:lnTo>
+                    <a:pt x="5873047" y="1663098"/>
+                  </a:lnTo>
+                  <a:lnTo>
+                    <a:pt x="5801424" y="1654338"/>
+                  </a:lnTo>
+                  <a:lnTo>
+                    <a:pt x="5729802" y="1645294"/>
+                  </a:lnTo>
+                  <a:lnTo>
+                    <a:pt x="5658179" y="1635958"/>
+                  </a:lnTo>
+                  <a:lnTo>
+                    <a:pt x="5586557" y="1626319"/>
+                  </a:lnTo>
+                  <a:lnTo>
+                    <a:pt x="5514934" y="1616369"/>
+                  </a:lnTo>
+                  <a:lnTo>
+                    <a:pt x="5443311" y="1606096"/>
+                  </a:lnTo>
+                  <a:lnTo>
+                    <a:pt x="5371689" y="1595491"/>
+                  </a:lnTo>
+                  <a:lnTo>
+                    <a:pt x="5300066" y="1584543"/>
+                  </a:lnTo>
+                  <a:lnTo>
+                    <a:pt x="5228444" y="1573240"/>
+                  </a:lnTo>
+                  <a:lnTo>
+                    <a:pt x="5156821" y="1561572"/>
+                  </a:lnTo>
+                  <a:lnTo>
+                    <a:pt x="5085199" y="1549525"/>
+                  </a:lnTo>
+                  <a:lnTo>
+                    <a:pt x="5013576" y="1537090"/>
+                  </a:lnTo>
+                  <a:lnTo>
+                    <a:pt x="4941954" y="1524251"/>
+                  </a:lnTo>
+                  <a:lnTo>
+                    <a:pt x="4870331" y="1510997"/>
+                  </a:lnTo>
+                  <a:lnTo>
+                    <a:pt x="4798709" y="1497314"/>
+                  </a:lnTo>
+                  <a:lnTo>
+                    <a:pt x="4727086" y="1483189"/>
+                  </a:lnTo>
+                  <a:lnTo>
+                    <a:pt x="4655464" y="1468606"/>
+                  </a:lnTo>
+                  <a:lnTo>
+                    <a:pt x="4583841" y="1453551"/>
+                  </a:lnTo>
+                  <a:lnTo>
+                    <a:pt x="4512219" y="1438009"/>
+                  </a:lnTo>
+                  <a:lnTo>
+                    <a:pt x="4440596" y="1421964"/>
+                  </a:lnTo>
+                  <a:lnTo>
+                    <a:pt x="4368974" y="1405399"/>
+                  </a:lnTo>
+                  <a:lnTo>
+                    <a:pt x="4297351" y="1388299"/>
+                  </a:lnTo>
+                  <a:lnTo>
+                    <a:pt x="4225729" y="1370645"/>
+                  </a:lnTo>
+                  <a:lnTo>
+                    <a:pt x="4154106" y="1352419"/>
+                  </a:lnTo>
+                  <a:lnTo>
+                    <a:pt x="4082483" y="1333604"/>
+                  </a:lnTo>
+                  <a:lnTo>
+                    <a:pt x="4010861" y="1314180"/>
+                  </a:lnTo>
+                  <a:lnTo>
+                    <a:pt x="3939238" y="1294128"/>
+                  </a:lnTo>
+                  <a:lnTo>
+                    <a:pt x="3867616" y="1273426"/>
+                  </a:lnTo>
+                  <a:lnTo>
+                    <a:pt x="3795993" y="1252054"/>
+                  </a:lnTo>
+                  <a:lnTo>
+                    <a:pt x="3724371" y="1229991"/>
+                  </a:lnTo>
+                  <a:lnTo>
+                    <a:pt x="3652748" y="1207213"/>
+                  </a:lnTo>
+                  <a:lnTo>
+                    <a:pt x="3581126" y="1183699"/>
+                  </a:lnTo>
+                  <a:lnTo>
+                    <a:pt x="3509503" y="1159423"/>
+                  </a:lnTo>
+                  <a:lnTo>
+                    <a:pt x="3437881" y="1134362"/>
+                  </a:lnTo>
+                  <a:lnTo>
+                    <a:pt x="3366258" y="1108489"/>
+                  </a:lnTo>
+                  <a:lnTo>
+                    <a:pt x="3294636" y="1091603"/>
+                  </a:lnTo>
+                  <a:lnTo>
+                    <a:pt x="3223013" y="1076246"/>
+                  </a:lnTo>
+                  <a:lnTo>
+                    <a:pt x="3151391" y="1060609"/>
+                  </a:lnTo>
+                  <a:lnTo>
+                    <a:pt x="3079768" y="1044687"/>
+                  </a:lnTo>
+                  <a:lnTo>
+                    <a:pt x="3008146" y="1028475"/>
+                  </a:lnTo>
+                  <a:lnTo>
+                    <a:pt x="2936523" y="1011967"/>
+                  </a:lnTo>
+                  <a:lnTo>
+                    <a:pt x="2864901" y="995158"/>
+                  </a:lnTo>
+                  <a:lnTo>
+                    <a:pt x="2793278" y="978042"/>
+                  </a:lnTo>
+                  <a:lnTo>
+                    <a:pt x="2721655" y="960615"/>
+                  </a:lnTo>
+                  <a:lnTo>
+                    <a:pt x="2650033" y="942869"/>
+                  </a:lnTo>
+                  <a:lnTo>
+                    <a:pt x="2578410" y="924800"/>
+                  </a:lnTo>
+                  <a:lnTo>
+                    <a:pt x="2506788" y="906402"/>
+                  </a:lnTo>
+                  <a:lnTo>
+                    <a:pt x="2435165" y="887668"/>
+                  </a:lnTo>
+                  <a:lnTo>
+                    <a:pt x="2363543" y="868592"/>
+                  </a:lnTo>
+                  <a:lnTo>
+                    <a:pt x="2291920" y="849169"/>
+                  </a:lnTo>
+                  <a:lnTo>
+                    <a:pt x="2220298" y="829391"/>
+                  </a:lnTo>
+                  <a:lnTo>
+                    <a:pt x="2148675" y="809253"/>
+                  </a:lnTo>
+                  <a:lnTo>
+                    <a:pt x="2077053" y="788748"/>
+                  </a:lnTo>
+                  <a:lnTo>
+                    <a:pt x="2005430" y="767868"/>
+                  </a:lnTo>
+                  <a:lnTo>
+                    <a:pt x="1933808" y="746608"/>
+                  </a:lnTo>
+                  <a:lnTo>
+                    <a:pt x="1862185" y="724960"/>
+                  </a:lnTo>
+                  <a:lnTo>
+                    <a:pt x="1790563" y="702918"/>
+                  </a:lnTo>
+                  <a:lnTo>
+                    <a:pt x="1718940" y="680474"/>
+                  </a:lnTo>
+                  <a:lnTo>
+                    <a:pt x="1647318" y="657620"/>
+                  </a:lnTo>
+                  <a:lnTo>
+                    <a:pt x="1575695" y="634349"/>
+                  </a:lnTo>
+                  <a:lnTo>
+                    <a:pt x="1504073" y="610655"/>
+                  </a:lnTo>
+                  <a:lnTo>
+                    <a:pt x="1432450" y="586528"/>
+                  </a:lnTo>
+                  <a:lnTo>
+                    <a:pt x="1360827" y="561961"/>
+                  </a:lnTo>
+                  <a:lnTo>
+                    <a:pt x="1289205" y="536946"/>
+                  </a:lnTo>
+                  <a:lnTo>
+                    <a:pt x="1217582" y="511475"/>
+                  </a:lnTo>
+                  <a:lnTo>
+                    <a:pt x="1145960" y="485540"/>
+                  </a:lnTo>
+                  <a:lnTo>
+                    <a:pt x="1074337" y="459132"/>
+                  </a:lnTo>
+                  <a:lnTo>
+                    <a:pt x="1002715" y="432242"/>
+                  </a:lnTo>
+                  <a:lnTo>
+                    <a:pt x="931092" y="404862"/>
+                  </a:lnTo>
+                  <a:lnTo>
+                    <a:pt x="859470" y="376982"/>
+                  </a:lnTo>
+                  <a:lnTo>
+                    <a:pt x="787847" y="348594"/>
+                  </a:lnTo>
+                  <a:lnTo>
+                    <a:pt x="716225" y="319689"/>
+                  </a:lnTo>
+                  <a:lnTo>
+                    <a:pt x="644602" y="290256"/>
+                  </a:lnTo>
+                  <a:lnTo>
+                    <a:pt x="572980" y="260287"/>
+                  </a:lnTo>
+                  <a:lnTo>
+                    <a:pt x="501357" y="229771"/>
+                  </a:lnTo>
+                  <a:lnTo>
+                    <a:pt x="429735" y="198699"/>
+                  </a:lnTo>
+                  <a:lnTo>
+                    <a:pt x="358112" y="167061"/>
+                  </a:lnTo>
+                  <a:lnTo>
+                    <a:pt x="286490" y="134845"/>
+                  </a:lnTo>
+                  <a:lnTo>
+                    <a:pt x="214867" y="102042"/>
+                  </a:lnTo>
+                  <a:lnTo>
+                    <a:pt x="143245" y="68640"/>
+                  </a:lnTo>
+                  <a:lnTo>
+                    <a:pt x="71622" y="34630"/>
+                  </a:lnTo>
+                  <a:lnTo>
                     <a:pt x="0" y="0"/>
-                  </a:moveTo>
-                  <a:lnTo>
-                    <a:pt x="47058" y="66610"/>
-                  </a:lnTo>
-                  <a:lnTo>
-                    <a:pt x="123691" y="171682"/>
-                  </a:lnTo>
-                  <a:lnTo>
-                    <a:pt x="200323" y="273460"/>
-                  </a:lnTo>
-                  <a:lnTo>
-                    <a:pt x="276956" y="372047"/>
-                  </a:lnTo>
-                  <a:lnTo>
-                    <a:pt x="353588" y="467543"/>
-                  </a:lnTo>
-                  <a:lnTo>
-                    <a:pt x="430221" y="560046"/>
-                  </a:lnTo>
-                  <a:lnTo>
-                    <a:pt x="506853" y="649649"/>
-                  </a:lnTo>
-                  <a:lnTo>
-                    <a:pt x="583486" y="736442"/>
-                  </a:lnTo>
-                  <a:lnTo>
-                    <a:pt x="660118" y="820515"/>
-                  </a:lnTo>
-                  <a:lnTo>
-                    <a:pt x="736751" y="901952"/>
-                  </a:lnTo>
-                  <a:lnTo>
-                    <a:pt x="813384" y="980836"/>
-                  </a:lnTo>
-                  <a:lnTo>
-                    <a:pt x="890016" y="1057247"/>
-                  </a:lnTo>
-                  <a:lnTo>
-                    <a:pt x="966649" y="1131263"/>
-                  </a:lnTo>
-                  <a:lnTo>
-                    <a:pt x="1043281" y="1202958"/>
-                  </a:lnTo>
-                  <a:lnTo>
-                    <a:pt x="1119914" y="1272406"/>
-                  </a:lnTo>
-                  <a:lnTo>
-                    <a:pt x="1196546" y="1339677"/>
-                  </a:lnTo>
-                  <a:lnTo>
-                    <a:pt x="1273179" y="1404838"/>
-                  </a:lnTo>
-                  <a:lnTo>
-                    <a:pt x="1349811" y="1467957"/>
-                  </a:lnTo>
-                  <a:lnTo>
-                    <a:pt x="1426444" y="1529097"/>
-                  </a:lnTo>
-                  <a:lnTo>
-                    <a:pt x="1503076" y="1588320"/>
-                  </a:lnTo>
-                  <a:lnTo>
-                    <a:pt x="1579709" y="1645687"/>
-                  </a:lnTo>
-                  <a:lnTo>
-                    <a:pt x="1656342" y="1701256"/>
-                  </a:lnTo>
-                  <a:lnTo>
-                    <a:pt x="1732974" y="1755082"/>
-                  </a:lnTo>
-                  <a:lnTo>
-                    <a:pt x="1809607" y="1807221"/>
-                  </a:lnTo>
-                  <a:lnTo>
-                    <a:pt x="1886239" y="1857725"/>
-                  </a:lnTo>
-                  <a:lnTo>
-                    <a:pt x="1962872" y="1906646"/>
-                  </a:lnTo>
-                  <a:lnTo>
-                    <a:pt x="2039504" y="1954033"/>
-                  </a:lnTo>
-                  <a:lnTo>
-                    <a:pt x="2116137" y="1999935"/>
-                  </a:lnTo>
-                  <a:lnTo>
-                    <a:pt x="2192769" y="2044398"/>
-                  </a:lnTo>
-                  <a:lnTo>
-                    <a:pt x="2269402" y="2087467"/>
-                  </a:lnTo>
-                  <a:lnTo>
-                    <a:pt x="2346034" y="2129185"/>
-                  </a:lnTo>
-                  <a:lnTo>
-                    <a:pt x="2422667" y="2169596"/>
-                  </a:lnTo>
-                  <a:lnTo>
-                    <a:pt x="2499300" y="2208740"/>
-                  </a:lnTo>
-                  <a:lnTo>
-                    <a:pt x="2575932" y="2246657"/>
-                  </a:lnTo>
-                  <a:lnTo>
-                    <a:pt x="2652565" y="2283385"/>
-                  </a:lnTo>
-                  <a:lnTo>
-                    <a:pt x="2729197" y="2318962"/>
-                  </a:lnTo>
-                  <a:lnTo>
-                    <a:pt x="2805830" y="2353423"/>
-                  </a:lnTo>
-                  <a:lnTo>
-                    <a:pt x="2882462" y="2386804"/>
-                  </a:lnTo>
-                  <a:lnTo>
-                    <a:pt x="2959095" y="2419139"/>
-                  </a:lnTo>
-                  <a:lnTo>
-                    <a:pt x="3035727" y="2450460"/>
-                  </a:lnTo>
-                  <a:lnTo>
-                    <a:pt x="3112360" y="2480799"/>
-                  </a:lnTo>
-                  <a:lnTo>
-                    <a:pt x="3188993" y="2510187"/>
-                  </a:lnTo>
-                  <a:lnTo>
-                    <a:pt x="3265625" y="2538653"/>
-                  </a:lnTo>
-                  <a:lnTo>
-                    <a:pt x="3342258" y="2566228"/>
-                  </a:lnTo>
-                  <a:lnTo>
-                    <a:pt x="3418890" y="2591133"/>
-                  </a:lnTo>
-                  <a:lnTo>
-                    <a:pt x="3495523" y="2605944"/>
-                  </a:lnTo>
-                  <a:lnTo>
-                    <a:pt x="3572155" y="2620491"/>
-                  </a:lnTo>
-                  <a:lnTo>
-                    <a:pt x="3648788" y="2634777"/>
-                  </a:lnTo>
-                  <a:lnTo>
-                    <a:pt x="3725420" y="2648807"/>
-                  </a:lnTo>
-                  <a:lnTo>
-                    <a:pt x="3802053" y="2662586"/>
-                  </a:lnTo>
-                  <a:lnTo>
-                    <a:pt x="3878685" y="2676118"/>
-                  </a:lnTo>
-                  <a:lnTo>
-                    <a:pt x="3955318" y="2689408"/>
-                  </a:lnTo>
-                  <a:lnTo>
-                    <a:pt x="4031951" y="2702460"/>
-                  </a:lnTo>
-                  <a:lnTo>
-                    <a:pt x="4108583" y="2715278"/>
-                  </a:lnTo>
-                  <a:lnTo>
-                    <a:pt x="4185216" y="2727866"/>
-                  </a:lnTo>
-                  <a:lnTo>
-                    <a:pt x="4261848" y="2740229"/>
-                  </a:lnTo>
-                  <a:lnTo>
-                    <a:pt x="4338481" y="2752371"/>
-                  </a:lnTo>
-                  <a:lnTo>
-                    <a:pt x="4415113" y="2764295"/>
-                  </a:lnTo>
-                  <a:lnTo>
-                    <a:pt x="4491746" y="2776006"/>
-                  </a:lnTo>
-                  <a:lnTo>
-                    <a:pt x="4568378" y="2787507"/>
-                  </a:lnTo>
-                  <a:lnTo>
-                    <a:pt x="4645011" y="2798802"/>
-                  </a:lnTo>
-                  <a:lnTo>
-                    <a:pt x="4721644" y="2809895"/>
-                  </a:lnTo>
-                  <a:lnTo>
-                    <a:pt x="4798276" y="2820789"/>
-                  </a:lnTo>
-                  <a:lnTo>
-                    <a:pt x="4874909" y="2831488"/>
-                  </a:lnTo>
-                  <a:lnTo>
-                    <a:pt x="4951541" y="2841995"/>
-                  </a:lnTo>
-                  <a:lnTo>
-                    <a:pt x="5028174" y="2852315"/>
-                  </a:lnTo>
-                  <a:lnTo>
-                    <a:pt x="5104806" y="2862449"/>
-                  </a:lnTo>
-                  <a:lnTo>
-                    <a:pt x="5181439" y="2872402"/>
-                  </a:lnTo>
-                  <a:lnTo>
-                    <a:pt x="5258071" y="2882177"/>
-                  </a:lnTo>
-                  <a:lnTo>
-                    <a:pt x="5334704" y="2891776"/>
-                  </a:lnTo>
-                  <a:lnTo>
-                    <a:pt x="5411336" y="2901204"/>
-                  </a:lnTo>
-                  <a:lnTo>
-                    <a:pt x="5487969" y="2910463"/>
-                  </a:lnTo>
-                  <a:lnTo>
-                    <a:pt x="5564602" y="2919556"/>
-                  </a:lnTo>
-                  <a:lnTo>
-                    <a:pt x="5641234" y="2928486"/>
-                  </a:lnTo>
-                  <a:lnTo>
-                    <a:pt x="5717867" y="2937257"/>
-                  </a:lnTo>
-                  <a:lnTo>
-                    <a:pt x="5794499" y="2945870"/>
-                  </a:lnTo>
-                  <a:lnTo>
-                    <a:pt x="5871132" y="2954329"/>
-                  </a:lnTo>
-                  <a:lnTo>
-                    <a:pt x="5947764" y="2962636"/>
-                  </a:lnTo>
-                  <a:lnTo>
-                    <a:pt x="6024397" y="2970795"/>
-                  </a:lnTo>
-                  <a:lnTo>
-                    <a:pt x="6101029" y="2978808"/>
-                  </a:lnTo>
-                  <a:lnTo>
-                    <a:pt x="6177662" y="2986677"/>
-                  </a:lnTo>
-                  <a:lnTo>
-                    <a:pt x="6254294" y="2994405"/>
-                  </a:lnTo>
-                  <a:lnTo>
-                    <a:pt x="6330927" y="3001995"/>
-                  </a:lnTo>
-                  <a:lnTo>
-                    <a:pt x="6407560" y="3009449"/>
-                  </a:lnTo>
-                  <a:lnTo>
-                    <a:pt x="6484192" y="3016770"/>
-                  </a:lnTo>
-                  <a:lnTo>
-                    <a:pt x="6560825" y="3023959"/>
-                  </a:lnTo>
-                  <a:lnTo>
-                    <a:pt x="6637457" y="3031019"/>
-                  </a:lnTo>
-                  <a:lnTo>
-                    <a:pt x="6714090" y="3037954"/>
-                  </a:lnTo>
-                  <a:lnTo>
-                    <a:pt x="6790722" y="3044764"/>
-                  </a:lnTo>
-                  <a:lnTo>
-                    <a:pt x="6867355" y="3051452"/>
-                  </a:lnTo>
-                  <a:lnTo>
-                    <a:pt x="6943987" y="3058020"/>
-                  </a:lnTo>
-                  <a:lnTo>
-                    <a:pt x="7020620" y="3064470"/>
-                  </a:lnTo>
-                  <a:lnTo>
-                    <a:pt x="7097253" y="3070806"/>
-                  </a:lnTo>
-                  <a:lnTo>
-                    <a:pt x="7173885" y="3077027"/>
-                  </a:lnTo>
-                  <a:lnTo>
-                    <a:pt x="7250518" y="3083137"/>
-                  </a:lnTo>
-                  <a:lnTo>
-                    <a:pt x="7327150" y="3089138"/>
-                  </a:lnTo>
-                  <a:lnTo>
-                    <a:pt x="7403783" y="3095032"/>
                   </a:lnTo>
                 </a:path>
               </a:pathLst>
@@ -3940,625 +4234,312 @@
           </p:nvSpPr>
           <p:spPr>
             <a:xfrm>
-              <a:off x="817517" y="3705004"/>
-              <a:ext cx="7403783" cy="1694741"/>
+              <a:off x="1172049" y="2886830"/>
+              <a:ext cx="7090630" cy="2444800"/>
             </a:xfrm>
             <a:custGeom>
               <a:avLst/>
               <a:pathLst>
-                <a:path w="7403783" h="1694741">
-                  <a:moveTo>
-                    <a:pt x="7403783" y="1694741"/>
-                  </a:moveTo>
-                  <a:lnTo>
-                    <a:pt x="7327150" y="1689643"/>
-                  </a:lnTo>
-                  <a:lnTo>
-                    <a:pt x="7250518" y="1684381"/>
-                  </a:lnTo>
-                  <a:lnTo>
-                    <a:pt x="7173885" y="1678948"/>
-                  </a:lnTo>
-                  <a:lnTo>
-                    <a:pt x="7097253" y="1673339"/>
-                  </a:lnTo>
-                  <a:lnTo>
-                    <a:pt x="7020620" y="1667549"/>
-                  </a:lnTo>
-                  <a:lnTo>
-                    <a:pt x="6943987" y="1661572"/>
-                  </a:lnTo>
-                  <a:lnTo>
-                    <a:pt x="6867355" y="1655401"/>
-                  </a:lnTo>
-                  <a:lnTo>
-                    <a:pt x="6790722" y="1649030"/>
-                  </a:lnTo>
-                  <a:lnTo>
-                    <a:pt x="6714090" y="1642453"/>
-                  </a:lnTo>
-                  <a:lnTo>
-                    <a:pt x="6637457" y="1635663"/>
-                  </a:lnTo>
-                  <a:lnTo>
-                    <a:pt x="6560825" y="1628654"/>
-                  </a:lnTo>
-                  <a:lnTo>
-                    <a:pt x="6484192" y="1621417"/>
-                  </a:lnTo>
-                  <a:lnTo>
-                    <a:pt x="6407560" y="1613947"/>
-                  </a:lnTo>
-                  <a:lnTo>
-                    <a:pt x="6330927" y="1606234"/>
-                  </a:lnTo>
-                  <a:lnTo>
-                    <a:pt x="6254294" y="1598273"/>
-                  </a:lnTo>
-                  <a:lnTo>
-                    <a:pt x="6177662" y="1590053"/>
-                  </a:lnTo>
-                  <a:lnTo>
-                    <a:pt x="6101029" y="1581567"/>
-                  </a:lnTo>
-                  <a:lnTo>
-                    <a:pt x="6024397" y="1572807"/>
-                  </a:lnTo>
-                  <a:lnTo>
-                    <a:pt x="5947764" y="1563763"/>
-                  </a:lnTo>
-                  <a:lnTo>
-                    <a:pt x="5871132" y="1554427"/>
-                  </a:lnTo>
-                  <a:lnTo>
-                    <a:pt x="5794499" y="1544788"/>
-                  </a:lnTo>
-                  <a:lnTo>
-                    <a:pt x="5717867" y="1534838"/>
-                  </a:lnTo>
-                  <a:lnTo>
-                    <a:pt x="5641234" y="1524565"/>
-                  </a:lnTo>
-                  <a:lnTo>
-                    <a:pt x="5564602" y="1513960"/>
-                  </a:lnTo>
-                  <a:lnTo>
-                    <a:pt x="5487969" y="1503012"/>
-                  </a:lnTo>
-                  <a:lnTo>
-                    <a:pt x="5411336" y="1491709"/>
-                  </a:lnTo>
-                  <a:lnTo>
-                    <a:pt x="5334704" y="1480040"/>
-                  </a:lnTo>
-                  <a:lnTo>
-                    <a:pt x="5258071" y="1467994"/>
-                  </a:lnTo>
-                  <a:lnTo>
-                    <a:pt x="5181439" y="1455558"/>
-                  </a:lnTo>
-                  <a:lnTo>
-                    <a:pt x="5104806" y="1442720"/>
-                  </a:lnTo>
-                  <a:lnTo>
-                    <a:pt x="5028174" y="1429466"/>
-                  </a:lnTo>
-                  <a:lnTo>
-                    <a:pt x="4951541" y="1415783"/>
-                  </a:lnTo>
-                  <a:lnTo>
-                    <a:pt x="4874909" y="1401657"/>
-                  </a:lnTo>
-                  <a:lnTo>
-                    <a:pt x="4798276" y="1387075"/>
-                  </a:lnTo>
-                  <a:lnTo>
-                    <a:pt x="4721644" y="1372020"/>
-                  </a:lnTo>
-                  <a:lnTo>
-                    <a:pt x="4645011" y="1356478"/>
-                  </a:lnTo>
-                  <a:lnTo>
-                    <a:pt x="4568378" y="1340432"/>
-                  </a:lnTo>
-                  <a:lnTo>
-                    <a:pt x="4491746" y="1323868"/>
-                  </a:lnTo>
-                  <a:lnTo>
-                    <a:pt x="4415113" y="1306768"/>
-                  </a:lnTo>
-                  <a:lnTo>
-                    <a:pt x="4338481" y="1289114"/>
-                  </a:lnTo>
-                  <a:lnTo>
-                    <a:pt x="4261848" y="1270888"/>
-                  </a:lnTo>
-                  <a:lnTo>
-                    <a:pt x="4185216" y="1252073"/>
-                  </a:lnTo>
-                  <a:lnTo>
-                    <a:pt x="4108583" y="1232649"/>
-                  </a:lnTo>
-                  <a:lnTo>
-                    <a:pt x="4031951" y="1212596"/>
-                  </a:lnTo>
-                  <a:lnTo>
-                    <a:pt x="3955318" y="1191895"/>
-                  </a:lnTo>
-                  <a:lnTo>
-                    <a:pt x="3878685" y="1170523"/>
-                  </a:lnTo>
-                  <a:lnTo>
-                    <a:pt x="3802053" y="1148460"/>
-                  </a:lnTo>
-                  <a:lnTo>
-                    <a:pt x="3725420" y="1125682"/>
-                  </a:lnTo>
-                  <a:lnTo>
-                    <a:pt x="3648788" y="1102168"/>
-                  </a:lnTo>
-                  <a:lnTo>
-                    <a:pt x="3572155" y="1077892"/>
-                  </a:lnTo>
-                  <a:lnTo>
-                    <a:pt x="3495523" y="1052831"/>
-                  </a:lnTo>
-                  <a:lnTo>
-                    <a:pt x="3418890" y="1026958"/>
-                  </a:lnTo>
-                  <a:lnTo>
-                    <a:pt x="3342258" y="1010072"/>
-                  </a:lnTo>
-                  <a:lnTo>
-                    <a:pt x="3265625" y="994715"/>
-                  </a:lnTo>
-                  <a:lnTo>
-                    <a:pt x="3188993" y="979078"/>
-                  </a:lnTo>
-                  <a:lnTo>
-                    <a:pt x="3112360" y="963156"/>
-                  </a:lnTo>
-                  <a:lnTo>
-                    <a:pt x="3035727" y="946944"/>
-                  </a:lnTo>
-                  <a:lnTo>
-                    <a:pt x="2959095" y="930436"/>
-                  </a:lnTo>
-                  <a:lnTo>
-                    <a:pt x="2882462" y="913627"/>
-                  </a:lnTo>
-                  <a:lnTo>
-                    <a:pt x="2805830" y="896511"/>
-                  </a:lnTo>
-                  <a:lnTo>
-                    <a:pt x="2729197" y="879084"/>
-                  </a:lnTo>
-                  <a:lnTo>
-                    <a:pt x="2652565" y="861338"/>
-                  </a:lnTo>
-                  <a:lnTo>
-                    <a:pt x="2575932" y="843269"/>
-                  </a:lnTo>
-                  <a:lnTo>
-                    <a:pt x="2499300" y="824871"/>
-                  </a:lnTo>
-                  <a:lnTo>
-                    <a:pt x="2422667" y="806137"/>
-                  </a:lnTo>
-                  <a:lnTo>
-                    <a:pt x="2346034" y="787061"/>
-                  </a:lnTo>
-                  <a:lnTo>
-                    <a:pt x="2269402" y="767638"/>
-                  </a:lnTo>
-                  <a:lnTo>
-                    <a:pt x="2192769" y="747860"/>
-                  </a:lnTo>
-                  <a:lnTo>
-                    <a:pt x="2116137" y="727722"/>
-                  </a:lnTo>
-                  <a:lnTo>
-                    <a:pt x="2039504" y="707217"/>
-                  </a:lnTo>
-                  <a:lnTo>
-                    <a:pt x="1962872" y="686337"/>
-                  </a:lnTo>
-                  <a:lnTo>
-                    <a:pt x="1886239" y="665077"/>
-                  </a:lnTo>
-                  <a:lnTo>
-                    <a:pt x="1809607" y="643429"/>
-                  </a:lnTo>
-                  <a:lnTo>
-                    <a:pt x="1732974" y="621387"/>
-                  </a:lnTo>
-                  <a:lnTo>
-                    <a:pt x="1656342" y="598942"/>
-                  </a:lnTo>
-                  <a:lnTo>
-                    <a:pt x="1579709" y="576089"/>
-                  </a:lnTo>
-                  <a:lnTo>
-                    <a:pt x="1503076" y="552818"/>
-                  </a:lnTo>
-                  <a:lnTo>
-                    <a:pt x="1426444" y="529123"/>
-                  </a:lnTo>
-                  <a:lnTo>
-                    <a:pt x="1349811" y="504997"/>
-                  </a:lnTo>
-                  <a:lnTo>
-                    <a:pt x="1273179" y="480430"/>
-                  </a:lnTo>
-                  <a:lnTo>
-                    <a:pt x="1196546" y="455415"/>
-                  </a:lnTo>
-                  <a:lnTo>
-                    <a:pt x="1119914" y="429944"/>
-                  </a:lnTo>
-                  <a:lnTo>
-                    <a:pt x="1043281" y="404009"/>
-                  </a:lnTo>
-                  <a:lnTo>
-                    <a:pt x="966649" y="377601"/>
-                  </a:lnTo>
-                  <a:lnTo>
-                    <a:pt x="890016" y="350711"/>
-                  </a:lnTo>
-                  <a:lnTo>
-                    <a:pt x="813384" y="323331"/>
-                  </a:lnTo>
-                  <a:lnTo>
-                    <a:pt x="736751" y="295451"/>
-                  </a:lnTo>
-                  <a:lnTo>
-                    <a:pt x="660118" y="267063"/>
-                  </a:lnTo>
-                  <a:lnTo>
-                    <a:pt x="583486" y="238158"/>
-                  </a:lnTo>
-                  <a:lnTo>
-                    <a:pt x="506853" y="208725"/>
-                  </a:lnTo>
-                  <a:lnTo>
-                    <a:pt x="430221" y="178756"/>
-                  </a:lnTo>
-                  <a:lnTo>
-                    <a:pt x="353588" y="148240"/>
-                  </a:lnTo>
-                  <a:lnTo>
-                    <a:pt x="276956" y="117168"/>
-                  </a:lnTo>
-                  <a:lnTo>
-                    <a:pt x="200323" y="85529"/>
-                  </a:lnTo>
-                  <a:lnTo>
-                    <a:pt x="123691" y="53314"/>
-                  </a:lnTo>
-                  <a:lnTo>
-                    <a:pt x="47058" y="20511"/>
-                  </a:lnTo>
-                  <a:lnTo>
-                    <a:pt x="0" y="0"/>
-                  </a:lnTo>
-                </a:path>
-              </a:pathLst>
-            </a:custGeom>
-          </p:spPr>
-          <p:txBody>
-            <a:bodyPr/>
-            <a:lstStyle/>
-            <a:p/>
-          </p:txBody>
-        </p:sp>
-        <p:sp>
-          <p:nvSpPr>
-            <p:cNvPr id="24" name="pl24"/>
-            <p:cNvSpPr/>
-            <p:nvPr/>
-          </p:nvSpPr>
-          <p:spPr>
-            <a:xfrm>
-              <a:off x="817517" y="3041038"/>
-              <a:ext cx="7403783" cy="2290591"/>
-            </a:xfrm>
-            <a:custGeom>
-              <a:avLst/>
-              <a:pathLst>
-                <a:path w="7403783" h="2290591">
+                <a:path w="7090630" h="2444800">
                   <a:moveTo>
                     <a:pt x="0" y="0"/>
                   </a:moveTo>
                   <a:lnTo>
-                    <a:pt x="47058" y="38457"/>
-                  </a:lnTo>
-                  <a:lnTo>
-                    <a:pt x="123691" y="99538"/>
-                  </a:lnTo>
-                  <a:lnTo>
-                    <a:pt x="200323" y="159114"/>
-                  </a:lnTo>
-                  <a:lnTo>
-                    <a:pt x="276956" y="217222"/>
-                  </a:lnTo>
-                  <a:lnTo>
-                    <a:pt x="353588" y="273897"/>
-                  </a:lnTo>
-                  <a:lnTo>
-                    <a:pt x="430221" y="329174"/>
-                  </a:lnTo>
-                  <a:lnTo>
-                    <a:pt x="506853" y="383089"/>
-                  </a:lnTo>
-                  <a:lnTo>
-                    <a:pt x="583486" y="435675"/>
-                  </a:lnTo>
-                  <a:lnTo>
-                    <a:pt x="660118" y="486965"/>
-                  </a:lnTo>
-                  <a:lnTo>
-                    <a:pt x="736751" y="536990"/>
-                  </a:lnTo>
-                  <a:lnTo>
-                    <a:pt x="813384" y="585782"/>
-                  </a:lnTo>
-                  <a:lnTo>
-                    <a:pt x="890016" y="633371"/>
-                  </a:lnTo>
-                  <a:lnTo>
-                    <a:pt x="966649" y="679787"/>
-                  </a:lnTo>
-                  <a:lnTo>
-                    <a:pt x="1043281" y="725058"/>
-                  </a:lnTo>
-                  <a:lnTo>
-                    <a:pt x="1119914" y="769214"/>
-                  </a:lnTo>
-                  <a:lnTo>
-                    <a:pt x="1196546" y="812281"/>
-                  </a:lnTo>
-                  <a:lnTo>
-                    <a:pt x="1273179" y="854286"/>
-                  </a:lnTo>
-                  <a:lnTo>
-                    <a:pt x="1349811" y="895256"/>
-                  </a:lnTo>
-                  <a:lnTo>
-                    <a:pt x="1426444" y="935216"/>
-                  </a:lnTo>
-                  <a:lnTo>
-                    <a:pt x="1503076" y="974191"/>
-                  </a:lnTo>
-                  <a:lnTo>
-                    <a:pt x="1579709" y="1012205"/>
-                  </a:lnTo>
-                  <a:lnTo>
-                    <a:pt x="1656342" y="1049282"/>
-                  </a:lnTo>
-                  <a:lnTo>
-                    <a:pt x="1732974" y="1085445"/>
-                  </a:lnTo>
-                  <a:lnTo>
-                    <a:pt x="1809607" y="1120716"/>
-                  </a:lnTo>
-                  <a:lnTo>
-                    <a:pt x="1886239" y="1155118"/>
-                  </a:lnTo>
-                  <a:lnTo>
-                    <a:pt x="1962872" y="1188672"/>
-                  </a:lnTo>
-                  <a:lnTo>
-                    <a:pt x="2039504" y="1221398"/>
-                  </a:lnTo>
-                  <a:lnTo>
-                    <a:pt x="2116137" y="1253318"/>
-                  </a:lnTo>
-                  <a:lnTo>
-                    <a:pt x="2192769" y="1284451"/>
-                  </a:lnTo>
-                  <a:lnTo>
-                    <a:pt x="2269402" y="1314816"/>
-                  </a:lnTo>
-                  <a:lnTo>
-                    <a:pt x="2346034" y="1344433"/>
-                  </a:lnTo>
-                  <a:lnTo>
-                    <a:pt x="2422667" y="1373320"/>
-                  </a:lnTo>
-                  <a:lnTo>
-                    <a:pt x="2499300" y="1401495"/>
-                  </a:lnTo>
-                  <a:lnTo>
-                    <a:pt x="2575932" y="1428975"/>
-                  </a:lnTo>
-                  <a:lnTo>
-                    <a:pt x="2652565" y="1455777"/>
-                  </a:lnTo>
-                  <a:lnTo>
-                    <a:pt x="2729197" y="1481919"/>
-                  </a:lnTo>
-                  <a:lnTo>
-                    <a:pt x="2805830" y="1507417"/>
-                  </a:lnTo>
-                  <a:lnTo>
-                    <a:pt x="2882462" y="1532285"/>
-                  </a:lnTo>
-                  <a:lnTo>
-                    <a:pt x="2959095" y="1556541"/>
-                  </a:lnTo>
-                  <a:lnTo>
-                    <a:pt x="3035727" y="1580199"/>
-                  </a:lnTo>
-                  <a:lnTo>
-                    <a:pt x="3112360" y="1603274"/>
-                  </a:lnTo>
-                  <a:lnTo>
-                    <a:pt x="3188993" y="1625780"/>
-                  </a:lnTo>
-                  <a:lnTo>
-                    <a:pt x="3265625" y="1647730"/>
-                  </a:lnTo>
-                  <a:lnTo>
-                    <a:pt x="3342258" y="1669140"/>
-                  </a:lnTo>
-                  <a:lnTo>
-                    <a:pt x="3418890" y="1690022"/>
-                  </a:lnTo>
-                  <a:lnTo>
-                    <a:pt x="3495523" y="1710390"/>
-                  </a:lnTo>
-                  <a:lnTo>
-                    <a:pt x="3572155" y="1730255"/>
-                  </a:lnTo>
-                  <a:lnTo>
-                    <a:pt x="3648788" y="1749630"/>
-                  </a:lnTo>
-                  <a:lnTo>
-                    <a:pt x="3725420" y="1768528"/>
-                  </a:lnTo>
-                  <a:lnTo>
-                    <a:pt x="3802053" y="1786960"/>
-                  </a:lnTo>
-                  <a:lnTo>
-                    <a:pt x="3878685" y="1804937"/>
-                  </a:lnTo>
-                  <a:lnTo>
-                    <a:pt x="3955318" y="1822472"/>
-                  </a:lnTo>
-                  <a:lnTo>
-                    <a:pt x="4031951" y="1839574"/>
-                  </a:lnTo>
-                  <a:lnTo>
-                    <a:pt x="4108583" y="1856254"/>
-                  </a:lnTo>
-                  <a:lnTo>
-                    <a:pt x="4185216" y="1872524"/>
-                  </a:lnTo>
-                  <a:lnTo>
-                    <a:pt x="4261848" y="1888392"/>
-                  </a:lnTo>
-                  <a:lnTo>
-                    <a:pt x="4338481" y="1903869"/>
-                  </a:lnTo>
-                  <a:lnTo>
-                    <a:pt x="4415113" y="1918964"/>
-                  </a:lnTo>
-                  <a:lnTo>
-                    <a:pt x="4491746" y="1933688"/>
-                  </a:lnTo>
-                  <a:lnTo>
-                    <a:pt x="4568378" y="1948048"/>
-                  </a:lnTo>
-                  <a:lnTo>
-                    <a:pt x="4645011" y="1962055"/>
-                  </a:lnTo>
-                  <a:lnTo>
-                    <a:pt x="4721644" y="1975716"/>
-                  </a:lnTo>
-                  <a:lnTo>
-                    <a:pt x="4798276" y="1989040"/>
-                  </a:lnTo>
-                  <a:lnTo>
-                    <a:pt x="4874909" y="2002036"/>
-                  </a:lnTo>
-                  <a:lnTo>
-                    <a:pt x="4951541" y="2014711"/>
-                  </a:lnTo>
-                  <a:lnTo>
-                    <a:pt x="5028174" y="2027074"/>
-                  </a:lnTo>
-                  <a:lnTo>
-                    <a:pt x="5104806" y="2039133"/>
-                  </a:lnTo>
-                  <a:lnTo>
-                    <a:pt x="5181439" y="2050894"/>
-                  </a:lnTo>
-                  <a:lnTo>
-                    <a:pt x="5258071" y="2062365"/>
-                  </a:lnTo>
-                  <a:lnTo>
-                    <a:pt x="5334704" y="2073553"/>
-                  </a:lnTo>
-                  <a:lnTo>
-                    <a:pt x="5411336" y="2084465"/>
-                  </a:lnTo>
-                  <a:lnTo>
-                    <a:pt x="5487969" y="2095109"/>
-                  </a:lnTo>
-                  <a:lnTo>
-                    <a:pt x="5564602" y="2105490"/>
-                  </a:lnTo>
-                  <a:lnTo>
-                    <a:pt x="5641234" y="2115615"/>
-                  </a:lnTo>
-                  <a:lnTo>
-                    <a:pt x="5717867" y="2125490"/>
-                  </a:lnTo>
-                  <a:lnTo>
-                    <a:pt x="5794499" y="2135122"/>
-                  </a:lnTo>
-                  <a:lnTo>
-                    <a:pt x="5871132" y="2144517"/>
-                  </a:lnTo>
-                  <a:lnTo>
-                    <a:pt x="5947764" y="2153680"/>
-                  </a:lnTo>
-                  <a:lnTo>
-                    <a:pt x="6024397" y="2162617"/>
-                  </a:lnTo>
-                  <a:lnTo>
-                    <a:pt x="6101029" y="2171334"/>
-                  </a:lnTo>
-                  <a:lnTo>
-                    <a:pt x="6177662" y="2179836"/>
-                  </a:lnTo>
-                  <a:lnTo>
-                    <a:pt x="6254294" y="2188128"/>
-                  </a:lnTo>
-                  <a:lnTo>
-                    <a:pt x="6330927" y="2196216"/>
-                  </a:lnTo>
-                  <a:lnTo>
-                    <a:pt x="6407560" y="2204105"/>
-                  </a:lnTo>
-                  <a:lnTo>
-                    <a:pt x="6484192" y="2211799"/>
-                  </a:lnTo>
-                  <a:lnTo>
-                    <a:pt x="6560825" y="2219303"/>
-                  </a:lnTo>
-                  <a:lnTo>
-                    <a:pt x="6637457" y="2226623"/>
-                  </a:lnTo>
-                  <a:lnTo>
-                    <a:pt x="6714090" y="2233761"/>
-                  </a:lnTo>
-                  <a:lnTo>
-                    <a:pt x="6790722" y="2240724"/>
-                  </a:lnTo>
-                  <a:lnTo>
-                    <a:pt x="6867355" y="2247516"/>
-                  </a:lnTo>
-                  <a:lnTo>
-                    <a:pt x="6943987" y="2254140"/>
-                  </a:lnTo>
-                  <a:lnTo>
-                    <a:pt x="7020620" y="2260600"/>
-                  </a:lnTo>
-                  <a:lnTo>
-                    <a:pt x="7097253" y="2266902"/>
-                  </a:lnTo>
-                  <a:lnTo>
-                    <a:pt x="7173885" y="2273048"/>
-                  </a:lnTo>
-                  <a:lnTo>
-                    <a:pt x="7250518" y="2279042"/>
-                  </a:lnTo>
-                  <a:lnTo>
-                    <a:pt x="7327150" y="2284889"/>
-                  </a:lnTo>
-                  <a:lnTo>
-                    <a:pt x="7403783" y="2290591"/>
+                    <a:pt x="71622" y="65831"/>
+                  </a:lnTo>
+                  <a:lnTo>
+                    <a:pt x="143245" y="130039"/>
+                  </a:lnTo>
+                  <a:lnTo>
+                    <a:pt x="214867" y="192665"/>
+                  </a:lnTo>
+                  <a:lnTo>
+                    <a:pt x="286490" y="253747"/>
+                  </a:lnTo>
+                  <a:lnTo>
+                    <a:pt x="358112" y="313323"/>
+                  </a:lnTo>
+                  <a:lnTo>
+                    <a:pt x="429735" y="371430"/>
+                  </a:lnTo>
+                  <a:lnTo>
+                    <a:pt x="501357" y="428105"/>
+                  </a:lnTo>
+                  <a:lnTo>
+                    <a:pt x="572980" y="483383"/>
+                  </a:lnTo>
+                  <a:lnTo>
+                    <a:pt x="644602" y="537298"/>
+                  </a:lnTo>
+                  <a:lnTo>
+                    <a:pt x="716225" y="589883"/>
+                  </a:lnTo>
+                  <a:lnTo>
+                    <a:pt x="787847" y="641173"/>
+                  </a:lnTo>
+                  <a:lnTo>
+                    <a:pt x="859470" y="691198"/>
+                  </a:lnTo>
+                  <a:lnTo>
+                    <a:pt x="931092" y="739990"/>
+                  </a:lnTo>
+                  <a:lnTo>
+                    <a:pt x="1002715" y="787579"/>
+                  </a:lnTo>
+                  <a:lnTo>
+                    <a:pt x="1074337" y="833995"/>
+                  </a:lnTo>
+                  <a:lnTo>
+                    <a:pt x="1145960" y="879267"/>
+                  </a:lnTo>
+                  <a:lnTo>
+                    <a:pt x="1217582" y="923422"/>
+                  </a:lnTo>
+                  <a:lnTo>
+                    <a:pt x="1289205" y="966489"/>
+                  </a:lnTo>
+                  <a:lnTo>
+                    <a:pt x="1360827" y="1008495"/>
+                  </a:lnTo>
+                  <a:lnTo>
+                    <a:pt x="1432450" y="1049465"/>
+                  </a:lnTo>
+                  <a:lnTo>
+                    <a:pt x="1504073" y="1089425"/>
+                  </a:lnTo>
+                  <a:lnTo>
+                    <a:pt x="1575695" y="1128399"/>
+                  </a:lnTo>
+                  <a:lnTo>
+                    <a:pt x="1647318" y="1166413"/>
+                  </a:lnTo>
+                  <a:lnTo>
+                    <a:pt x="1718940" y="1203490"/>
+                  </a:lnTo>
+                  <a:lnTo>
+                    <a:pt x="1790563" y="1239653"/>
+                  </a:lnTo>
+                  <a:lnTo>
+                    <a:pt x="1862185" y="1274924"/>
+                  </a:lnTo>
+                  <a:lnTo>
+                    <a:pt x="1933808" y="1309326"/>
+                  </a:lnTo>
+                  <a:lnTo>
+                    <a:pt x="2005430" y="1342880"/>
+                  </a:lnTo>
+                  <a:lnTo>
+                    <a:pt x="2077053" y="1375607"/>
+                  </a:lnTo>
+                  <a:lnTo>
+                    <a:pt x="2148675" y="1407526"/>
+                  </a:lnTo>
+                  <a:lnTo>
+                    <a:pt x="2220298" y="1438659"/>
+                  </a:lnTo>
+                  <a:lnTo>
+                    <a:pt x="2291920" y="1469025"/>
+                  </a:lnTo>
+                  <a:lnTo>
+                    <a:pt x="2363543" y="1498642"/>
+                  </a:lnTo>
+                  <a:lnTo>
+                    <a:pt x="2435165" y="1527528"/>
+                  </a:lnTo>
+                  <a:lnTo>
+                    <a:pt x="2506788" y="1555703"/>
+                  </a:lnTo>
+                  <a:lnTo>
+                    <a:pt x="2578410" y="1583183"/>
+                  </a:lnTo>
+                  <a:lnTo>
+                    <a:pt x="2650033" y="1609986"/>
+                  </a:lnTo>
+                  <a:lnTo>
+                    <a:pt x="2721655" y="1636128"/>
+                  </a:lnTo>
+                  <a:lnTo>
+                    <a:pt x="2793278" y="1661625"/>
+                  </a:lnTo>
+                  <a:lnTo>
+                    <a:pt x="2864901" y="1686494"/>
+                  </a:lnTo>
+                  <a:lnTo>
+                    <a:pt x="2936523" y="1710750"/>
+                  </a:lnTo>
+                  <a:lnTo>
+                    <a:pt x="3008146" y="1734407"/>
+                  </a:lnTo>
+                  <a:lnTo>
+                    <a:pt x="3079768" y="1757482"/>
+                  </a:lnTo>
+                  <a:lnTo>
+                    <a:pt x="3151391" y="1779988"/>
+                  </a:lnTo>
+                  <a:lnTo>
+                    <a:pt x="3223013" y="1801939"/>
+                  </a:lnTo>
+                  <a:lnTo>
+                    <a:pt x="3294636" y="1823349"/>
+                  </a:lnTo>
+                  <a:lnTo>
+                    <a:pt x="3366258" y="1844231"/>
+                  </a:lnTo>
+                  <a:lnTo>
+                    <a:pt x="3437881" y="1864598"/>
+                  </a:lnTo>
+                  <a:lnTo>
+                    <a:pt x="3509503" y="1884463"/>
+                  </a:lnTo>
+                  <a:lnTo>
+                    <a:pt x="3581126" y="1903839"/>
+                  </a:lnTo>
+                  <a:lnTo>
+                    <a:pt x="3652748" y="1922736"/>
+                  </a:lnTo>
+                  <a:lnTo>
+                    <a:pt x="3724371" y="1941168"/>
+                  </a:lnTo>
+                  <a:lnTo>
+                    <a:pt x="3795993" y="1959146"/>
+                  </a:lnTo>
+                  <a:lnTo>
+                    <a:pt x="3867616" y="1976680"/>
+                  </a:lnTo>
+                  <a:lnTo>
+                    <a:pt x="3939238" y="1993782"/>
+                  </a:lnTo>
+                  <a:lnTo>
+                    <a:pt x="4010861" y="2010463"/>
+                  </a:lnTo>
+                  <a:lnTo>
+                    <a:pt x="4082483" y="2026732"/>
+                  </a:lnTo>
+                  <a:lnTo>
+                    <a:pt x="4154106" y="2042600"/>
+                  </a:lnTo>
+                  <a:lnTo>
+                    <a:pt x="4225729" y="2058077"/>
+                  </a:lnTo>
+                  <a:lnTo>
+                    <a:pt x="4297351" y="2073173"/>
+                  </a:lnTo>
+                  <a:lnTo>
+                    <a:pt x="4368974" y="2087896"/>
+                  </a:lnTo>
+                  <a:lnTo>
+                    <a:pt x="4440596" y="2102257"/>
+                  </a:lnTo>
+                  <a:lnTo>
+                    <a:pt x="4512219" y="2116263"/>
+                  </a:lnTo>
+                  <a:lnTo>
+                    <a:pt x="4583841" y="2129924"/>
+                  </a:lnTo>
+                  <a:lnTo>
+                    <a:pt x="4655464" y="2143248"/>
+                  </a:lnTo>
+                  <a:lnTo>
+                    <a:pt x="4727086" y="2156244"/>
+                  </a:lnTo>
+                  <a:lnTo>
+                    <a:pt x="4798709" y="2168920"/>
+                  </a:lnTo>
+                  <a:lnTo>
+                    <a:pt x="4870331" y="2181283"/>
+                  </a:lnTo>
+                  <a:lnTo>
+                    <a:pt x="4941954" y="2193341"/>
+                  </a:lnTo>
+                  <a:lnTo>
+                    <a:pt x="5013576" y="2205102"/>
+                  </a:lnTo>
+                  <a:lnTo>
+                    <a:pt x="5085199" y="2216573"/>
+                  </a:lnTo>
+                  <a:lnTo>
+                    <a:pt x="5156821" y="2227761"/>
+                  </a:lnTo>
+                  <a:lnTo>
+                    <a:pt x="5228444" y="2238674"/>
+                  </a:lnTo>
+                  <a:lnTo>
+                    <a:pt x="5300066" y="2249317"/>
+                  </a:lnTo>
+                  <a:lnTo>
+                    <a:pt x="5371689" y="2259698"/>
+                  </a:lnTo>
+                  <a:lnTo>
+                    <a:pt x="5443311" y="2269823"/>
+                  </a:lnTo>
+                  <a:lnTo>
+                    <a:pt x="5514934" y="2279699"/>
+                  </a:lnTo>
+                  <a:lnTo>
+                    <a:pt x="5586557" y="2289331"/>
+                  </a:lnTo>
+                  <a:lnTo>
+                    <a:pt x="5658179" y="2298725"/>
+                  </a:lnTo>
+                  <a:lnTo>
+                    <a:pt x="5729802" y="2307888"/>
+                  </a:lnTo>
+                  <a:lnTo>
+                    <a:pt x="5801424" y="2316826"/>
+                  </a:lnTo>
+                  <a:lnTo>
+                    <a:pt x="5873047" y="2325542"/>
+                  </a:lnTo>
+                  <a:lnTo>
+                    <a:pt x="5944669" y="2334044"/>
+                  </a:lnTo>
+                  <a:lnTo>
+                    <a:pt x="6016292" y="2342337"/>
+                  </a:lnTo>
+                  <a:lnTo>
+                    <a:pt x="6087914" y="2350425"/>
+                  </a:lnTo>
+                  <a:lnTo>
+                    <a:pt x="6159537" y="2358313"/>
+                  </a:lnTo>
+                  <a:lnTo>
+                    <a:pt x="6231159" y="2366007"/>
+                  </a:lnTo>
+                  <a:lnTo>
+                    <a:pt x="6302782" y="2373511"/>
+                  </a:lnTo>
+                  <a:lnTo>
+                    <a:pt x="6374404" y="2380831"/>
+                  </a:lnTo>
+                  <a:lnTo>
+                    <a:pt x="6446027" y="2387970"/>
+                  </a:lnTo>
+                  <a:lnTo>
+                    <a:pt x="6517649" y="2394933"/>
+                  </a:lnTo>
+                  <a:lnTo>
+                    <a:pt x="6589272" y="2401724"/>
+                  </a:lnTo>
+                  <a:lnTo>
+                    <a:pt x="6660894" y="2408348"/>
+                  </a:lnTo>
+                  <a:lnTo>
+                    <a:pt x="6732517" y="2414809"/>
+                  </a:lnTo>
+                  <a:lnTo>
+                    <a:pt x="6804139" y="2421110"/>
+                  </a:lnTo>
+                  <a:lnTo>
+                    <a:pt x="6875762" y="2427256"/>
+                  </a:lnTo>
+                  <a:lnTo>
+                    <a:pt x="6947385" y="2433250"/>
+                  </a:lnTo>
+                  <a:lnTo>
+                    <a:pt x="7019007" y="2439097"/>
+                  </a:lnTo>
+                  <a:lnTo>
+                    <a:pt x="7090630" y="2444800"/>
                   </a:lnTo>
                 </a:path>
               </a:pathLst>
@@ -4581,7 +4562,7 @@
         </p:sp>
         <p:sp>
           <p:nvSpPr>
-            <p:cNvPr id="25" name="pl25"/>
+            <p:cNvPr id="24" name="pl24"/>
             <p:cNvSpPr/>
             <p:nvPr/>
           </p:nvSpPr>
@@ -4624,13 +4605,13 @@
         </p:sp>
         <p:sp>
           <p:nvSpPr>
-            <p:cNvPr id="26" name="pl26"/>
+            <p:cNvPr id="25" name="pl25"/>
             <p:cNvSpPr/>
             <p:nvPr/>
           </p:nvSpPr>
           <p:spPr>
             <a:xfrm>
-              <a:off x="4224261" y="2073503"/>
+              <a:off x="4526955" y="2073503"/>
               <a:ext cx="0" cy="3649639"/>
             </a:xfrm>
             <a:custGeom>
@@ -4667,7 +4648,7 @@
         </p:sp>
         <p:sp>
           <p:nvSpPr>
-            <p:cNvPr id="27" name="tx27"/>
+            <p:cNvPr id="26" name="tx26"/>
             <p:cNvSpPr/>
             <p:nvPr/>
           </p:nvSpPr>
@@ -4713,7 +4694,7 @@
         </p:sp>
         <p:sp>
           <p:nvSpPr>
-            <p:cNvPr id="28" name="tx28"/>
+            <p:cNvPr id="27" name="tx27"/>
             <p:cNvSpPr/>
             <p:nvPr/>
           </p:nvSpPr>
@@ -4759,7 +4740,7 @@
         </p:sp>
         <p:sp>
           <p:nvSpPr>
-            <p:cNvPr id="29" name="tx29"/>
+            <p:cNvPr id="28" name="tx28"/>
             <p:cNvSpPr/>
             <p:nvPr/>
           </p:nvSpPr>
@@ -4805,7 +4786,7 @@
         </p:sp>
         <p:sp>
           <p:nvSpPr>
-            <p:cNvPr id="30" name="tx30"/>
+            <p:cNvPr id="29" name="tx29"/>
             <p:cNvSpPr/>
             <p:nvPr/>
           </p:nvSpPr>
@@ -4851,7 +4832,7 @@
         </p:sp>
         <p:sp>
           <p:nvSpPr>
-            <p:cNvPr id="31" name="tx31"/>
+            <p:cNvPr id="30" name="tx30"/>
             <p:cNvSpPr/>
             <p:nvPr/>
           </p:nvSpPr>
@@ -4897,14 +4878,14 @@
         </p:sp>
         <p:sp>
           <p:nvSpPr>
-            <p:cNvPr id="32" name="tx32"/>
+            <p:cNvPr id="31" name="tx31"/>
             <p:cNvSpPr/>
             <p:nvPr/>
           </p:nvSpPr>
           <p:spPr>
             <a:xfrm>
-              <a:off x="2423864" y="5785772"/>
-              <a:ext cx="155356" cy="80101"/>
+              <a:off x="2421884" y="5785772"/>
+              <a:ext cx="161574" cy="80101"/>
             </a:xfrm>
             <a:prstGeom prst="rect">
               <a:avLst/>
@@ -4936,21 +4917,21 @@
                   <a:latin typeface="Helvetica"/>
                   <a:cs typeface="Helvetica"/>
                 </a:rPr>
-                <a:t>0.8</a:t>
+                <a:t>-25</a:t>
               </a:r>
             </a:p>
           </p:txBody>
         </p:sp>
         <p:sp>
           <p:nvSpPr>
-            <p:cNvPr id="33" name="tx33"/>
+            <p:cNvPr id="32" name="tx32"/>
             <p:cNvSpPr/>
             <p:nvPr/>
           </p:nvSpPr>
           <p:spPr>
             <a:xfrm>
-              <a:off x="4196521" y="5785772"/>
-              <a:ext cx="155356" cy="80101"/>
+              <a:off x="4542539" y="5785772"/>
+              <a:ext cx="62179" cy="80101"/>
             </a:xfrm>
             <a:prstGeom prst="rect">
               <a:avLst/>
@@ -4982,21 +4963,21 @@
                   <a:latin typeface="Helvetica"/>
                   <a:cs typeface="Helvetica"/>
                 </a:rPr>
-                <a:t>1.0</a:t>
+                <a:t>0</a:t>
               </a:r>
             </a:p>
           </p:txBody>
         </p:sp>
         <p:sp>
           <p:nvSpPr>
-            <p:cNvPr id="34" name="tx34"/>
+            <p:cNvPr id="33" name="tx33"/>
             <p:cNvSpPr/>
             <p:nvPr/>
           </p:nvSpPr>
           <p:spPr>
             <a:xfrm>
-              <a:off x="5969179" y="5785772"/>
-              <a:ext cx="155356" cy="80101"/>
+              <a:off x="6582407" y="5785772"/>
+              <a:ext cx="124358" cy="80101"/>
             </a:xfrm>
             <a:prstGeom prst="rect">
               <a:avLst/>
@@ -5028,67 +5009,21 @@
                   <a:latin typeface="Helvetica"/>
                   <a:cs typeface="Helvetica"/>
                 </a:rPr>
-                <a:t>1.2</a:t>
+                <a:t>25</a:t>
               </a:r>
             </a:p>
           </p:txBody>
         </p:sp>
         <p:sp>
           <p:nvSpPr>
-            <p:cNvPr id="35" name="tx35"/>
+            <p:cNvPr id="34" name="tx34"/>
             <p:cNvSpPr/>
             <p:nvPr/>
           </p:nvSpPr>
           <p:spPr>
             <a:xfrm>
-              <a:off x="7741836" y="5785772"/>
-              <a:ext cx="155356" cy="80101"/>
-            </a:xfrm>
-            <a:prstGeom prst="rect">
-              <a:avLst/>
-            </a:prstGeom>
-            <a:noFill/>
-          </p:spPr>
-          <p:txBody>
-            <a:bodyPr lIns="0" rIns="0" tIns="0" bIns="0" anchorCtr="1" anchor="ctr" wrap="none"/>
-            <a:lstStyle/>
-            <a:p>
-              <a:pPr algn="l" marL="0" marR="0" indent="0">
-                <a:lnSpc>
-                  <a:spcPts val="880"/>
-                </a:lnSpc>
-                <a:spcBef>
-                  <a:spcPts val="0"/>
-                </a:spcBef>
-                <a:spcAft>
-                  <a:spcPts val="0"/>
-                </a:spcAft>
-              </a:pPr>
-              <a:r>
-                <a:rPr sz="880">
-                  <a:solidFill>
-                    <a:srgbClr val="4D4D4D">
-                      <a:alpha val="100000"/>
-                    </a:srgbClr>
-                  </a:solidFill>
-                  <a:latin typeface="Helvetica"/>
-                  <a:cs typeface="Helvetica"/>
-                </a:rPr>
-                <a:t>1.4</a:t>
-              </a:r>
-            </a:p>
-          </p:txBody>
-        </p:sp>
-        <p:sp>
-          <p:nvSpPr>
-            <p:cNvPr id="36" name="tx36"/>
-            <p:cNvSpPr/>
-            <p:nvPr/>
-          </p:nvSpPr>
-          <p:spPr>
-            <a:xfrm>
-              <a:off x="3879271" y="5925448"/>
-              <a:ext cx="1676186" cy="100218"/>
+              <a:off x="2928340" y="5925448"/>
+              <a:ext cx="3578047" cy="100218"/>
             </a:xfrm>
             <a:prstGeom prst="rect">
               <a:avLst/>
@@ -5120,14 +5055,14 @@
                   <a:latin typeface="Helvetica"/>
                   <a:cs typeface="Helvetica"/>
                 </a:rPr>
-                <a:t>CKD-EPI Cr-Cys / CG ratio</a:t>
+                <a:t>eGFR difference (%): 100 × (CKD-EPI Cr-Cys − CG) / CG</a:t>
               </a:r>
             </a:p>
           </p:txBody>
         </p:sp>
         <p:sp>
           <p:nvSpPr>
-            <p:cNvPr id="37" name="tx37"/>
+            <p:cNvPr id="35" name="tx35"/>
             <p:cNvSpPr/>
             <p:nvPr/>
           </p:nvSpPr>
@@ -5173,14 +5108,14 @@
         </p:sp>
         <p:sp>
           <p:nvSpPr>
-            <p:cNvPr id="38" name="tx38"/>
+            <p:cNvPr id="36" name="tx36"/>
             <p:cNvSpPr/>
             <p:nvPr/>
           </p:nvSpPr>
           <p:spPr>
             <a:xfrm>
               <a:off x="817517" y="1896563"/>
-              <a:ext cx="6899879" cy="82021"/>
+              <a:ext cx="7052127" cy="82021"/>
             </a:xfrm>
             <a:prstGeom prst="rect">
               <a:avLst/>
@@ -5212,14 +5147,14 @@
                   <a:latin typeface="Helvetica"/>
                   <a:cs typeface="Helvetica"/>
                 </a:rPr>
-                <a:t>subHR per 0.1 ratio decline: 1.33 (1.23-1.45), p_Bonf = &lt;0.001 (n = 6)  |  per IQR decline (Δ = 0.30): 2.37 (1.87-3.01)  |  IQR: [0.85, 1.15]</a:t>
+                <a:t>subHR per 10 % decline: 1.33 (1.23-1.45), p_Bonf = &lt;0.001 (n = 6)  |  per IQR decline (Δ = 29.9 %): 2.37 (1.87-3.01)  |  IQR: [-15.0, 14.9] %</a:t>
               </a:r>
             </a:p>
           </p:txBody>
         </p:sp>
         <p:sp>
           <p:nvSpPr>
-            <p:cNvPr id="39" name="tx39"/>
+            <p:cNvPr id="37" name="tx37"/>
             <p:cNvSpPr/>
             <p:nvPr/>
           </p:nvSpPr>

--- a/docs/pptx/carbo/jx-carbo-linsubhr-ratio-grade2.pptx
+++ b/docs/pptx/carbo/jx-carbo-linsubhr-ratio-grade2.pptx
@@ -2265,34 +2265,26 @@
         </p:sp>
         <p:sp>
           <p:nvSpPr>
-            <p:cNvPr id="4" name="pl4"/>
+            <p:cNvPr id="4" name="rc4"/>
             <p:cNvSpPr/>
             <p:nvPr/>
           </p:nvSpPr>
           <p:spPr>
             <a:xfrm>
-              <a:off x="817517" y="5142518"/>
-              <a:ext cx="7799693" cy="0"/>
+              <a:off x="457200" y="1600200"/>
+              <a:ext cx="8229600" cy="4525962"/>
             </a:xfrm>
-            <a:custGeom>
+            <a:prstGeom prst="rect">
               <a:avLst/>
-              <a:pathLst>
-                <a:path w="7799693" h="0">
-                  <a:moveTo>
-                    <a:pt x="0" y="0"/>
-                  </a:moveTo>
-                  <a:lnTo>
-                    <a:pt x="7799693" y="0"/>
-                  </a:lnTo>
-                  <a:lnTo>
-                    <a:pt x="7799693" y="0"/>
-                  </a:lnTo>
-                </a:path>
-              </a:pathLst>
-            </a:custGeom>
-            <a:ln w="6775" cap="flat">
+            </a:prstGeom>
+            <a:solidFill>
+              <a:srgbClr val="FFFFFF">
+                <a:alpha val="100000"/>
+              </a:srgbClr>
+            </a:solidFill>
+            <a:ln w="13550" cap="rnd">
               <a:solidFill>
-                <a:srgbClr val="EBEBEB">
+                <a:srgbClr val="FFFFFF">
                   <a:alpha val="100000"/>
                 </a:srgbClr>
               </a:solidFill>
@@ -2314,21 +2306,21 @@
           </p:nvSpPr>
           <p:spPr>
             <a:xfrm>
-              <a:off x="817517" y="4313054"/>
-              <a:ext cx="7799693" cy="0"/>
+              <a:off x="887106" y="3250627"/>
+              <a:ext cx="7660515" cy="0"/>
             </a:xfrm>
             <a:custGeom>
               <a:avLst/>
               <a:pathLst>
-                <a:path w="7799693" h="0">
+                <a:path w="7660515" h="0">
                   <a:moveTo>
                     <a:pt x="0" y="0"/>
                   </a:moveTo>
                   <a:lnTo>
-                    <a:pt x="7799693" y="0"/>
-                  </a:lnTo>
-                  <a:lnTo>
-                    <a:pt x="7799693" y="0"/>
+                    <a:pt x="7660515" y="0"/>
+                  </a:lnTo>
+                  <a:lnTo>
+                    <a:pt x="7660515" y="0"/>
                   </a:lnTo>
                 </a:path>
               </a:pathLst>
@@ -2357,21 +2349,21 @@
           </p:nvSpPr>
           <p:spPr>
             <a:xfrm>
-              <a:off x="817517" y="3483591"/>
-              <a:ext cx="7799693" cy="0"/>
+              <a:off x="887106" y="2951293"/>
+              <a:ext cx="7660515" cy="0"/>
             </a:xfrm>
             <a:custGeom>
               <a:avLst/>
               <a:pathLst>
-                <a:path w="7799693" h="0">
+                <a:path w="7660515" h="0">
                   <a:moveTo>
                     <a:pt x="0" y="0"/>
                   </a:moveTo>
                   <a:lnTo>
-                    <a:pt x="7799693" y="0"/>
-                  </a:lnTo>
-                  <a:lnTo>
-                    <a:pt x="7799693" y="0"/>
+                    <a:pt x="7660515" y="0"/>
+                  </a:lnTo>
+                  <a:lnTo>
+                    <a:pt x="7660515" y="0"/>
                   </a:lnTo>
                 </a:path>
               </a:pathLst>
@@ -2400,21 +2392,21 @@
           </p:nvSpPr>
           <p:spPr>
             <a:xfrm>
-              <a:off x="817517" y="2654127"/>
-              <a:ext cx="7799693" cy="0"/>
+              <a:off x="887106" y="2651959"/>
+              <a:ext cx="7660515" cy="0"/>
             </a:xfrm>
             <a:custGeom>
               <a:avLst/>
               <a:pathLst>
-                <a:path w="7799693" h="0">
+                <a:path w="7660515" h="0">
                   <a:moveTo>
                     <a:pt x="0" y="0"/>
                   </a:moveTo>
                   <a:lnTo>
-                    <a:pt x="7799693" y="0"/>
-                  </a:lnTo>
-                  <a:lnTo>
-                    <a:pt x="7799693" y="0"/>
+                    <a:pt x="7660515" y="0"/>
+                  </a:lnTo>
+                  <a:lnTo>
+                    <a:pt x="7660515" y="0"/>
                   </a:lnTo>
                 </a:path>
               </a:pathLst>
@@ -2443,21 +2435,21 @@
           </p:nvSpPr>
           <p:spPr>
             <a:xfrm>
-              <a:off x="1467192" y="2073503"/>
-              <a:ext cx="0" cy="3649639"/>
+              <a:off x="887106" y="2352625"/>
+              <a:ext cx="7660515" cy="0"/>
             </a:xfrm>
             <a:custGeom>
               <a:avLst/>
               <a:pathLst>
-                <a:path w="0" h="3649639">
+                <a:path w="7660515" h="0">
                   <a:moveTo>
-                    <a:pt x="0" y="3649639"/>
+                    <a:pt x="0" y="0"/>
                   </a:moveTo>
                   <a:lnTo>
-                    <a:pt x="0" y="0"/>
-                  </a:lnTo>
-                  <a:lnTo>
-                    <a:pt x="0" y="0"/>
+                    <a:pt x="7660515" y="0"/>
+                  </a:lnTo>
+                  <a:lnTo>
+                    <a:pt x="7660515" y="0"/>
                   </a:lnTo>
                 </a:path>
               </a:pathLst>
@@ -2486,15 +2478,15 @@
           </p:nvSpPr>
           <p:spPr>
             <a:xfrm>
-              <a:off x="3538150" y="2073503"/>
-              <a:ext cx="0" cy="3649639"/>
+              <a:off x="1525188" y="2143092"/>
+              <a:ext cx="0" cy="1317069"/>
             </a:xfrm>
             <a:custGeom>
               <a:avLst/>
               <a:pathLst>
-                <a:path w="0" h="3649639">
+                <a:path w="0" h="1317069">
                   <a:moveTo>
-                    <a:pt x="0" y="3649639"/>
+                    <a:pt x="0" y="1317069"/>
                   </a:moveTo>
                   <a:lnTo>
                     <a:pt x="0" y="0"/>
@@ -2529,15 +2521,15 @@
           </p:nvSpPr>
           <p:spPr>
             <a:xfrm>
-              <a:off x="5609107" y="2073503"/>
-              <a:ext cx="0" cy="3649639"/>
+              <a:off x="3559192" y="2143092"/>
+              <a:ext cx="0" cy="1317069"/>
             </a:xfrm>
             <a:custGeom>
               <a:avLst/>
               <a:pathLst>
-                <a:path w="0" h="3649639">
+                <a:path w="0" h="1317069">
                   <a:moveTo>
-                    <a:pt x="0" y="3649639"/>
+                    <a:pt x="0" y="1317069"/>
                   </a:moveTo>
                   <a:lnTo>
                     <a:pt x="0" y="0"/>
@@ -2572,15 +2564,15 @@
           </p:nvSpPr>
           <p:spPr>
             <a:xfrm>
-              <a:off x="7680065" y="2073503"/>
-              <a:ext cx="0" cy="3649639"/>
+              <a:off x="5593195" y="2143092"/>
+              <a:ext cx="0" cy="1317069"/>
             </a:xfrm>
             <a:custGeom>
               <a:avLst/>
               <a:pathLst>
-                <a:path w="0" h="3649639">
+                <a:path w="0" h="1317069">
                   <a:moveTo>
-                    <a:pt x="0" y="3649639"/>
+                    <a:pt x="0" y="1317069"/>
                   </a:moveTo>
                   <a:lnTo>
                     <a:pt x="0" y="0"/>
@@ -2615,26 +2607,26 @@
           </p:nvSpPr>
           <p:spPr>
             <a:xfrm>
-              <a:off x="817517" y="5557249"/>
-              <a:ext cx="7799693" cy="0"/>
+              <a:off x="7627198" y="2143092"/>
+              <a:ext cx="0" cy="1317069"/>
             </a:xfrm>
             <a:custGeom>
               <a:avLst/>
               <a:pathLst>
-                <a:path w="7799693" h="0">
+                <a:path w="0" h="1317069">
                   <a:moveTo>
+                    <a:pt x="0" y="1317069"/>
+                  </a:moveTo>
+                  <a:lnTo>
                     <a:pt x="0" y="0"/>
-                  </a:moveTo>
-                  <a:lnTo>
-                    <a:pt x="7799693" y="0"/>
-                  </a:lnTo>
-                  <a:lnTo>
-                    <a:pt x="7799693" y="0"/>
+                  </a:lnTo>
+                  <a:lnTo>
+                    <a:pt x="0" y="0"/>
                   </a:lnTo>
                 </a:path>
               </a:pathLst>
             </a:custGeom>
-            <a:ln w="13550" cap="flat">
+            <a:ln w="6775" cap="flat">
               <a:solidFill>
                 <a:srgbClr val="EBEBEB">
                   <a:alpha val="100000"/>
@@ -2658,21 +2650,21 @@
           </p:nvSpPr>
           <p:spPr>
             <a:xfrm>
-              <a:off x="817517" y="4727786"/>
-              <a:ext cx="7799693" cy="0"/>
+              <a:off x="887106" y="3400294"/>
+              <a:ext cx="7660515" cy="0"/>
             </a:xfrm>
             <a:custGeom>
               <a:avLst/>
               <a:pathLst>
-                <a:path w="7799693" h="0">
+                <a:path w="7660515" h="0">
                   <a:moveTo>
                     <a:pt x="0" y="0"/>
                   </a:moveTo>
                   <a:lnTo>
-                    <a:pt x="7799693" y="0"/>
-                  </a:lnTo>
-                  <a:lnTo>
-                    <a:pt x="7799693" y="0"/>
+                    <a:pt x="7660515" y="0"/>
+                  </a:lnTo>
+                  <a:lnTo>
+                    <a:pt x="7660515" y="0"/>
                   </a:lnTo>
                 </a:path>
               </a:pathLst>
@@ -2701,21 +2693,21 @@
           </p:nvSpPr>
           <p:spPr>
             <a:xfrm>
-              <a:off x="817517" y="3898322"/>
-              <a:ext cx="7799693" cy="0"/>
+              <a:off x="887106" y="3100960"/>
+              <a:ext cx="7660515" cy="0"/>
             </a:xfrm>
             <a:custGeom>
               <a:avLst/>
               <a:pathLst>
-                <a:path w="7799693" h="0">
+                <a:path w="7660515" h="0">
                   <a:moveTo>
                     <a:pt x="0" y="0"/>
                   </a:moveTo>
                   <a:lnTo>
-                    <a:pt x="7799693" y="0"/>
-                  </a:lnTo>
-                  <a:lnTo>
-                    <a:pt x="7799693" y="0"/>
+                    <a:pt x="7660515" y="0"/>
+                  </a:lnTo>
+                  <a:lnTo>
+                    <a:pt x="7660515" y="0"/>
                   </a:lnTo>
                 </a:path>
               </a:pathLst>
@@ -2744,21 +2736,21 @@
           </p:nvSpPr>
           <p:spPr>
             <a:xfrm>
-              <a:off x="817517" y="3068859"/>
-              <a:ext cx="7799693" cy="0"/>
+              <a:off x="887106" y="2801626"/>
+              <a:ext cx="7660515" cy="0"/>
             </a:xfrm>
             <a:custGeom>
               <a:avLst/>
               <a:pathLst>
-                <a:path w="7799693" h="0">
+                <a:path w="7660515" h="0">
                   <a:moveTo>
                     <a:pt x="0" y="0"/>
                   </a:moveTo>
                   <a:lnTo>
-                    <a:pt x="7799693" y="0"/>
-                  </a:lnTo>
-                  <a:lnTo>
-                    <a:pt x="7799693" y="0"/>
+                    <a:pt x="7660515" y="0"/>
+                  </a:lnTo>
+                  <a:lnTo>
+                    <a:pt x="7660515" y="0"/>
                   </a:lnTo>
                 </a:path>
               </a:pathLst>
@@ -2787,21 +2779,21 @@
           </p:nvSpPr>
           <p:spPr>
             <a:xfrm>
-              <a:off x="817517" y="2239395"/>
-              <a:ext cx="7799693" cy="0"/>
+              <a:off x="887106" y="2502292"/>
+              <a:ext cx="7660515" cy="0"/>
             </a:xfrm>
             <a:custGeom>
               <a:avLst/>
               <a:pathLst>
-                <a:path w="7799693" h="0">
+                <a:path w="7660515" h="0">
                   <a:moveTo>
                     <a:pt x="0" y="0"/>
                   </a:moveTo>
                   <a:lnTo>
-                    <a:pt x="7799693" y="0"/>
-                  </a:lnTo>
-                  <a:lnTo>
-                    <a:pt x="7799693" y="0"/>
+                    <a:pt x="7660515" y="0"/>
+                  </a:lnTo>
+                  <a:lnTo>
+                    <a:pt x="7660515" y="0"/>
                   </a:lnTo>
                 </a:path>
               </a:pathLst>
@@ -2830,21 +2822,21 @@
           </p:nvSpPr>
           <p:spPr>
             <a:xfrm>
-              <a:off x="2502671" y="2073503"/>
-              <a:ext cx="0" cy="3649639"/>
+              <a:off x="887106" y="2202958"/>
+              <a:ext cx="7660515" cy="0"/>
             </a:xfrm>
             <a:custGeom>
               <a:avLst/>
               <a:pathLst>
-                <a:path w="0" h="3649639">
+                <a:path w="7660515" h="0">
                   <a:moveTo>
-                    <a:pt x="0" y="3649639"/>
+                    <a:pt x="0" y="0"/>
                   </a:moveTo>
                   <a:lnTo>
-                    <a:pt x="0" y="0"/>
-                  </a:lnTo>
-                  <a:lnTo>
-                    <a:pt x="0" y="0"/>
+                    <a:pt x="7660515" y="0"/>
+                  </a:lnTo>
+                  <a:lnTo>
+                    <a:pt x="7660515" y="0"/>
                   </a:lnTo>
                 </a:path>
               </a:pathLst>
@@ -2873,15 +2865,15 @@
           </p:nvSpPr>
           <p:spPr>
             <a:xfrm>
-              <a:off x="4573628" y="2073503"/>
-              <a:ext cx="0" cy="3649639"/>
+              <a:off x="2542190" y="2143092"/>
+              <a:ext cx="0" cy="1317069"/>
             </a:xfrm>
             <a:custGeom>
               <a:avLst/>
               <a:pathLst>
-                <a:path w="0" h="3649639">
+                <a:path w="0" h="1317069">
                   <a:moveTo>
-                    <a:pt x="0" y="3649639"/>
+                    <a:pt x="0" y="1317069"/>
                   </a:moveTo>
                   <a:lnTo>
                     <a:pt x="0" y="0"/>
@@ -2916,15 +2908,15 @@
           </p:nvSpPr>
           <p:spPr>
             <a:xfrm>
-              <a:off x="6644586" y="2073503"/>
-              <a:ext cx="0" cy="3649639"/>
+              <a:off x="4576193" y="2143092"/>
+              <a:ext cx="0" cy="1317069"/>
             </a:xfrm>
             <a:custGeom>
               <a:avLst/>
               <a:pathLst>
-                <a:path w="0" h="3649639">
+                <a:path w="0" h="1317069">
                   <a:moveTo>
-                    <a:pt x="0" y="3649639"/>
+                    <a:pt x="0" y="1317069"/>
                   </a:moveTo>
                   <a:lnTo>
                     <a:pt x="0" y="0"/>
@@ -2953,615 +2945,658 @@
         </p:sp>
         <p:sp>
           <p:nvSpPr>
-            <p:cNvPr id="20" name="pg20"/>
+            <p:cNvPr id="20" name="pl20"/>
             <p:cNvSpPr/>
             <p:nvPr/>
           </p:nvSpPr>
           <p:spPr>
             <a:xfrm>
-              <a:off x="1172049" y="2073503"/>
-              <a:ext cx="7090630" cy="3326242"/>
+              <a:off x="6610197" y="2143092"/>
+              <a:ext cx="0" cy="1317069"/>
             </a:xfrm>
             <a:custGeom>
               <a:avLst/>
               <a:pathLst>
-                <a:path w="7090630" h="3326242">
+                <a:path w="0" h="1317069">
                   <a:moveTo>
-                    <a:pt x="128111" y="0"/>
+                    <a:pt x="0" y="1317069"/>
                   </a:moveTo>
                   <a:lnTo>
-                    <a:pt x="143245" y="23661"/>
-                  </a:lnTo>
-                  <a:lnTo>
-                    <a:pt x="214867" y="132133"/>
-                  </a:lnTo>
-                  <a:lnTo>
-                    <a:pt x="286490" y="237205"/>
-                  </a:lnTo>
-                  <a:lnTo>
-                    <a:pt x="358112" y="338982"/>
-                  </a:lnTo>
-                  <a:lnTo>
-                    <a:pt x="429735" y="437569"/>
-                  </a:lnTo>
-                  <a:lnTo>
-                    <a:pt x="501357" y="533066"/>
-                  </a:lnTo>
-                  <a:lnTo>
-                    <a:pt x="572980" y="625569"/>
-                  </a:lnTo>
-                  <a:lnTo>
-                    <a:pt x="644602" y="715171"/>
-                  </a:lnTo>
-                  <a:lnTo>
-                    <a:pt x="716225" y="801965"/>
-                  </a:lnTo>
-                  <a:lnTo>
-                    <a:pt x="787847" y="886038"/>
-                  </a:lnTo>
-                  <a:lnTo>
-                    <a:pt x="859470" y="967475"/>
-                  </a:lnTo>
-                  <a:lnTo>
-                    <a:pt x="931092" y="1046359"/>
-                  </a:lnTo>
-                  <a:lnTo>
-                    <a:pt x="1002715" y="1122770"/>
-                  </a:lnTo>
-                  <a:lnTo>
-                    <a:pt x="1074337" y="1196786"/>
-                  </a:lnTo>
-                  <a:lnTo>
-                    <a:pt x="1145960" y="1268481"/>
-                  </a:lnTo>
-                  <a:lnTo>
-                    <a:pt x="1217582" y="1337929"/>
-                  </a:lnTo>
-                  <a:lnTo>
-                    <a:pt x="1289205" y="1405199"/>
-                  </a:lnTo>
-                  <a:lnTo>
-                    <a:pt x="1360827" y="1470361"/>
-                  </a:lnTo>
-                  <a:lnTo>
-                    <a:pt x="1432450" y="1533480"/>
-                  </a:lnTo>
-                  <a:lnTo>
-                    <a:pt x="1504073" y="1594620"/>
-                  </a:lnTo>
-                  <a:lnTo>
-                    <a:pt x="1575695" y="1653843"/>
-                  </a:lnTo>
-                  <a:lnTo>
-                    <a:pt x="1647318" y="1711210"/>
-                  </a:lnTo>
-                  <a:lnTo>
-                    <a:pt x="1718940" y="1766778"/>
-                  </a:lnTo>
-                  <a:lnTo>
-                    <a:pt x="1790563" y="1820604"/>
-                  </a:lnTo>
-                  <a:lnTo>
-                    <a:pt x="1862185" y="1872743"/>
-                  </a:lnTo>
-                  <a:lnTo>
-                    <a:pt x="1933808" y="1923248"/>
-                  </a:lnTo>
-                  <a:lnTo>
-                    <a:pt x="2005430" y="1972169"/>
-                  </a:lnTo>
-                  <a:lnTo>
-                    <a:pt x="2077053" y="2019556"/>
-                  </a:lnTo>
-                  <a:lnTo>
-                    <a:pt x="2148675" y="2065458"/>
-                  </a:lnTo>
-                  <a:lnTo>
-                    <a:pt x="2220298" y="2109921"/>
-                  </a:lnTo>
-                  <a:lnTo>
-                    <a:pt x="2291920" y="2152989"/>
-                  </a:lnTo>
-                  <a:lnTo>
-                    <a:pt x="2363543" y="2194708"/>
-                  </a:lnTo>
-                  <a:lnTo>
-                    <a:pt x="2435165" y="2235119"/>
-                  </a:lnTo>
-                  <a:lnTo>
-                    <a:pt x="2506788" y="2274263"/>
-                  </a:lnTo>
-                  <a:lnTo>
-                    <a:pt x="2578410" y="2312180"/>
-                  </a:lnTo>
-                  <a:lnTo>
-                    <a:pt x="2650033" y="2348908"/>
-                  </a:lnTo>
-                  <a:lnTo>
-                    <a:pt x="2721655" y="2384485"/>
-                  </a:lnTo>
-                  <a:lnTo>
-                    <a:pt x="2793278" y="2418946"/>
-                  </a:lnTo>
-                  <a:lnTo>
-                    <a:pt x="2864901" y="2452327"/>
-                  </a:lnTo>
-                  <a:lnTo>
-                    <a:pt x="2936523" y="2484662"/>
-                  </a:lnTo>
-                  <a:lnTo>
-                    <a:pt x="3008146" y="2515983"/>
-                  </a:lnTo>
-                  <a:lnTo>
-                    <a:pt x="3079768" y="2546322"/>
-                  </a:lnTo>
-                  <a:lnTo>
-                    <a:pt x="3151391" y="2575709"/>
-                  </a:lnTo>
-                  <a:lnTo>
-                    <a:pt x="3223013" y="2604176"/>
-                  </a:lnTo>
-                  <a:lnTo>
-                    <a:pt x="3294636" y="2631750"/>
-                  </a:lnTo>
-                  <a:lnTo>
-                    <a:pt x="3366258" y="2656655"/>
-                  </a:lnTo>
-                  <a:lnTo>
-                    <a:pt x="3437881" y="2671467"/>
-                  </a:lnTo>
-                  <a:lnTo>
-                    <a:pt x="3509503" y="2686014"/>
-                  </a:lnTo>
-                  <a:lnTo>
-                    <a:pt x="3581126" y="2700300"/>
-                  </a:lnTo>
-                  <a:lnTo>
-                    <a:pt x="3652748" y="2714330"/>
-                  </a:lnTo>
-                  <a:lnTo>
-                    <a:pt x="3724371" y="2728109"/>
-                  </a:lnTo>
-                  <a:lnTo>
-                    <a:pt x="3795993" y="2741641"/>
-                  </a:lnTo>
-                  <a:lnTo>
-                    <a:pt x="3867616" y="2754931"/>
-                  </a:lnTo>
-                  <a:lnTo>
-                    <a:pt x="3939238" y="2767982"/>
-                  </a:lnTo>
-                  <a:lnTo>
-                    <a:pt x="4010861" y="2780800"/>
-                  </a:lnTo>
-                  <a:lnTo>
-                    <a:pt x="4082483" y="2793389"/>
-                  </a:lnTo>
-                  <a:lnTo>
-                    <a:pt x="4154106" y="2805752"/>
-                  </a:lnTo>
-                  <a:lnTo>
-                    <a:pt x="4225729" y="2817894"/>
-                  </a:lnTo>
-                  <a:lnTo>
-                    <a:pt x="4297351" y="2829818"/>
-                  </a:lnTo>
-                  <a:lnTo>
-                    <a:pt x="4368974" y="2841529"/>
-                  </a:lnTo>
-                  <a:lnTo>
-                    <a:pt x="4440596" y="2853030"/>
-                  </a:lnTo>
-                  <a:lnTo>
-                    <a:pt x="4512219" y="2864325"/>
-                  </a:lnTo>
-                  <a:lnTo>
-                    <a:pt x="4583841" y="2875417"/>
-                  </a:lnTo>
-                  <a:lnTo>
-                    <a:pt x="4655464" y="2886312"/>
-                  </a:lnTo>
-                  <a:lnTo>
-                    <a:pt x="4727086" y="2897011"/>
-                  </a:lnTo>
-                  <a:lnTo>
-                    <a:pt x="4798709" y="2907518"/>
-                  </a:lnTo>
-                  <a:lnTo>
-                    <a:pt x="4870331" y="2917837"/>
-                  </a:lnTo>
-                  <a:lnTo>
-                    <a:pt x="4941954" y="2927972"/>
-                  </a:lnTo>
-                  <a:lnTo>
-                    <a:pt x="5013576" y="2937925"/>
-                  </a:lnTo>
-                  <a:lnTo>
-                    <a:pt x="5085199" y="2947699"/>
-                  </a:lnTo>
-                  <a:lnTo>
-                    <a:pt x="5156821" y="2957299"/>
-                  </a:lnTo>
-                  <a:lnTo>
-                    <a:pt x="5228444" y="2966727"/>
-                  </a:lnTo>
-                  <a:lnTo>
-                    <a:pt x="5300066" y="2975986"/>
-                  </a:lnTo>
-                  <a:lnTo>
-                    <a:pt x="5371689" y="2985079"/>
-                  </a:lnTo>
-                  <a:lnTo>
-                    <a:pt x="5443311" y="2994009"/>
-                  </a:lnTo>
-                  <a:lnTo>
-                    <a:pt x="5514934" y="3002779"/>
-                  </a:lnTo>
-                  <a:lnTo>
-                    <a:pt x="5586557" y="3011393"/>
-                  </a:lnTo>
-                  <a:lnTo>
-                    <a:pt x="5658179" y="3019852"/>
-                  </a:lnTo>
-                  <a:lnTo>
-                    <a:pt x="5729802" y="3028159"/>
-                  </a:lnTo>
-                  <a:lnTo>
-                    <a:pt x="5801424" y="3036318"/>
-                  </a:lnTo>
-                  <a:lnTo>
-                    <a:pt x="5873047" y="3044331"/>
-                  </a:lnTo>
-                  <a:lnTo>
-                    <a:pt x="5944669" y="3052200"/>
-                  </a:lnTo>
-                  <a:lnTo>
-                    <a:pt x="6016292" y="3059928"/>
-                  </a:lnTo>
-                  <a:lnTo>
-                    <a:pt x="6087914" y="3067518"/>
-                  </a:lnTo>
-                  <a:lnTo>
-                    <a:pt x="6159537" y="3074972"/>
-                  </a:lnTo>
-                  <a:lnTo>
-                    <a:pt x="6231159" y="3082292"/>
-                  </a:lnTo>
-                  <a:lnTo>
-                    <a:pt x="6302782" y="3089482"/>
-                  </a:lnTo>
-                  <a:lnTo>
-                    <a:pt x="6374404" y="3096542"/>
-                  </a:lnTo>
-                  <a:lnTo>
-                    <a:pt x="6446027" y="3103476"/>
-                  </a:lnTo>
-                  <a:lnTo>
-                    <a:pt x="6517649" y="3110286"/>
-                  </a:lnTo>
-                  <a:lnTo>
-                    <a:pt x="6589272" y="3116974"/>
-                  </a:lnTo>
-                  <a:lnTo>
-                    <a:pt x="6660894" y="3123542"/>
-                  </a:lnTo>
-                  <a:lnTo>
-                    <a:pt x="6732517" y="3129993"/>
-                  </a:lnTo>
-                  <a:lnTo>
-                    <a:pt x="6804139" y="3136328"/>
-                  </a:lnTo>
-                  <a:lnTo>
-                    <a:pt x="6875762" y="3142550"/>
-                  </a:lnTo>
-                  <a:lnTo>
-                    <a:pt x="6947385" y="3148660"/>
-                  </a:lnTo>
-                  <a:lnTo>
-                    <a:pt x="7019007" y="3154661"/>
-                  </a:lnTo>
-                  <a:lnTo>
-                    <a:pt x="7090630" y="3160554"/>
-                  </a:lnTo>
-                  <a:lnTo>
-                    <a:pt x="7090630" y="3326242"/>
-                  </a:lnTo>
-                  <a:lnTo>
-                    <a:pt x="7019007" y="3321145"/>
-                  </a:lnTo>
-                  <a:lnTo>
-                    <a:pt x="6947385" y="3315882"/>
-                  </a:lnTo>
-                  <a:lnTo>
-                    <a:pt x="6875762" y="3310450"/>
-                  </a:lnTo>
-                  <a:lnTo>
-                    <a:pt x="6804139" y="3304841"/>
-                  </a:lnTo>
-                  <a:lnTo>
-                    <a:pt x="6732517" y="3299051"/>
-                  </a:lnTo>
-                  <a:lnTo>
-                    <a:pt x="6660894" y="3293073"/>
-                  </a:lnTo>
-                  <a:lnTo>
-                    <a:pt x="6589272" y="3286902"/>
-                  </a:lnTo>
-                  <a:lnTo>
-                    <a:pt x="6517649" y="3280532"/>
-                  </a:lnTo>
-                  <a:lnTo>
-                    <a:pt x="6446027" y="3273955"/>
-                  </a:lnTo>
-                  <a:lnTo>
-                    <a:pt x="6374404" y="3267165"/>
-                  </a:lnTo>
-                  <a:lnTo>
-                    <a:pt x="6302782" y="3260155"/>
-                  </a:lnTo>
-                  <a:lnTo>
-                    <a:pt x="6231159" y="3252919"/>
-                  </a:lnTo>
-                  <a:lnTo>
-                    <a:pt x="6159537" y="3245449"/>
-                  </a:lnTo>
-                  <a:lnTo>
-                    <a:pt x="6087914" y="3237736"/>
-                  </a:lnTo>
-                  <a:lnTo>
-                    <a:pt x="6016292" y="3229774"/>
-                  </a:lnTo>
-                  <a:lnTo>
-                    <a:pt x="5944669" y="3221555"/>
-                  </a:lnTo>
-                  <a:lnTo>
-                    <a:pt x="5873047" y="3213069"/>
-                  </a:lnTo>
-                  <a:lnTo>
-                    <a:pt x="5801424" y="3204309"/>
-                  </a:lnTo>
-                  <a:lnTo>
-                    <a:pt x="5729802" y="3195265"/>
-                  </a:lnTo>
-                  <a:lnTo>
-                    <a:pt x="5658179" y="3185929"/>
-                  </a:lnTo>
-                  <a:lnTo>
-                    <a:pt x="5586557" y="3176290"/>
-                  </a:lnTo>
-                  <a:lnTo>
-                    <a:pt x="5514934" y="3166339"/>
-                  </a:lnTo>
-                  <a:lnTo>
-                    <a:pt x="5443311" y="3156067"/>
-                  </a:lnTo>
-                  <a:lnTo>
-                    <a:pt x="5371689" y="3145462"/>
-                  </a:lnTo>
-                  <a:lnTo>
-                    <a:pt x="5300066" y="3134513"/>
-                  </a:lnTo>
-                  <a:lnTo>
-                    <a:pt x="5228444" y="3123211"/>
-                  </a:lnTo>
-                  <a:lnTo>
-                    <a:pt x="5156821" y="3111542"/>
-                  </a:lnTo>
-                  <a:lnTo>
-                    <a:pt x="5085199" y="3099496"/>
-                  </a:lnTo>
-                  <a:lnTo>
-                    <a:pt x="5013576" y="3087060"/>
-                  </a:lnTo>
-                  <a:lnTo>
-                    <a:pt x="4941954" y="3074222"/>
-                  </a:lnTo>
-                  <a:lnTo>
-                    <a:pt x="4870331" y="3060968"/>
-                  </a:lnTo>
-                  <a:lnTo>
-                    <a:pt x="4798709" y="3047285"/>
-                  </a:lnTo>
-                  <a:lnTo>
-                    <a:pt x="4727086" y="3033159"/>
-                  </a:lnTo>
-                  <a:lnTo>
-                    <a:pt x="4655464" y="3018576"/>
-                  </a:lnTo>
-                  <a:lnTo>
-                    <a:pt x="4583841" y="3003521"/>
-                  </a:lnTo>
-                  <a:lnTo>
-                    <a:pt x="4512219" y="2987979"/>
-                  </a:lnTo>
-                  <a:lnTo>
-                    <a:pt x="4440596" y="2971934"/>
-                  </a:lnTo>
-                  <a:lnTo>
-                    <a:pt x="4368974" y="2955370"/>
-                  </a:lnTo>
-                  <a:lnTo>
-                    <a:pt x="4297351" y="2938269"/>
-                  </a:lnTo>
-                  <a:lnTo>
-                    <a:pt x="4225729" y="2920615"/>
-                  </a:lnTo>
-                  <a:lnTo>
-                    <a:pt x="4154106" y="2902390"/>
-                  </a:lnTo>
-                  <a:lnTo>
-                    <a:pt x="4082483" y="2883575"/>
-                  </a:lnTo>
-                  <a:lnTo>
-                    <a:pt x="4010861" y="2864151"/>
-                  </a:lnTo>
-                  <a:lnTo>
-                    <a:pt x="3939238" y="2844098"/>
-                  </a:lnTo>
-                  <a:lnTo>
-                    <a:pt x="3867616" y="2823396"/>
-                  </a:lnTo>
-                  <a:lnTo>
-                    <a:pt x="3795993" y="2802025"/>
-                  </a:lnTo>
-                  <a:lnTo>
-                    <a:pt x="3724371" y="2779961"/>
-                  </a:lnTo>
-                  <a:lnTo>
-                    <a:pt x="3652748" y="2757184"/>
-                  </a:lnTo>
-                  <a:lnTo>
-                    <a:pt x="3581126" y="2733669"/>
-                  </a:lnTo>
-                  <a:lnTo>
-                    <a:pt x="3509503" y="2709394"/>
-                  </a:lnTo>
-                  <a:lnTo>
-                    <a:pt x="3437881" y="2684332"/>
-                  </a:lnTo>
-                  <a:lnTo>
-                    <a:pt x="3366258" y="2658460"/>
-                  </a:lnTo>
-                  <a:lnTo>
-                    <a:pt x="3294636" y="2641573"/>
-                  </a:lnTo>
-                  <a:lnTo>
-                    <a:pt x="3223013" y="2626217"/>
-                  </a:lnTo>
-                  <a:lnTo>
-                    <a:pt x="3151391" y="2610580"/>
-                  </a:lnTo>
-                  <a:lnTo>
-                    <a:pt x="3079768" y="2594658"/>
-                  </a:lnTo>
-                  <a:lnTo>
-                    <a:pt x="3008146" y="2578445"/>
-                  </a:lnTo>
-                  <a:lnTo>
-                    <a:pt x="2936523" y="2561937"/>
-                  </a:lnTo>
-                  <a:lnTo>
-                    <a:pt x="2864901" y="2545128"/>
-                  </a:lnTo>
-                  <a:lnTo>
-                    <a:pt x="2793278" y="2528013"/>
-                  </a:lnTo>
-                  <a:lnTo>
-                    <a:pt x="2721655" y="2510585"/>
-                  </a:lnTo>
-                  <a:lnTo>
-                    <a:pt x="2650033" y="2492840"/>
-                  </a:lnTo>
-                  <a:lnTo>
-                    <a:pt x="2578410" y="2474771"/>
-                  </a:lnTo>
-                  <a:lnTo>
-                    <a:pt x="2506788" y="2456372"/>
-                  </a:lnTo>
-                  <a:lnTo>
-                    <a:pt x="2435165" y="2437638"/>
-                  </a:lnTo>
-                  <a:lnTo>
-                    <a:pt x="2363543" y="2418563"/>
-                  </a:lnTo>
-                  <a:lnTo>
-                    <a:pt x="2291920" y="2399140"/>
-                  </a:lnTo>
-                  <a:lnTo>
-                    <a:pt x="2220298" y="2379362"/>
-                  </a:lnTo>
-                  <a:lnTo>
-                    <a:pt x="2148675" y="2359224"/>
-                  </a:lnTo>
-                  <a:lnTo>
-                    <a:pt x="2077053" y="2338718"/>
-                  </a:lnTo>
-                  <a:lnTo>
-                    <a:pt x="2005430" y="2317839"/>
-                  </a:lnTo>
-                  <a:lnTo>
-                    <a:pt x="1933808" y="2296579"/>
-                  </a:lnTo>
-                  <a:lnTo>
-                    <a:pt x="1862185" y="2274931"/>
-                  </a:lnTo>
-                  <a:lnTo>
-                    <a:pt x="1790563" y="2252889"/>
-                  </a:lnTo>
-                  <a:lnTo>
-                    <a:pt x="1718940" y="2230444"/>
-                  </a:lnTo>
-                  <a:lnTo>
-                    <a:pt x="1647318" y="2207590"/>
-                  </a:lnTo>
-                  <a:lnTo>
-                    <a:pt x="1575695" y="2184320"/>
-                  </a:lnTo>
-                  <a:lnTo>
-                    <a:pt x="1504073" y="2160625"/>
-                  </a:lnTo>
-                  <a:lnTo>
-                    <a:pt x="1432450" y="2136498"/>
-                  </a:lnTo>
-                  <a:lnTo>
-                    <a:pt x="1360827" y="2111932"/>
-                  </a:lnTo>
-                  <a:lnTo>
-                    <a:pt x="1289205" y="2086917"/>
-                  </a:lnTo>
-                  <a:lnTo>
-                    <a:pt x="1217582" y="2061446"/>
-                  </a:lnTo>
-                  <a:lnTo>
-                    <a:pt x="1145960" y="2035511"/>
-                  </a:lnTo>
-                  <a:lnTo>
-                    <a:pt x="1074337" y="2009102"/>
-                  </a:lnTo>
-                  <a:lnTo>
-                    <a:pt x="1002715" y="1982212"/>
-                  </a:lnTo>
-                  <a:lnTo>
-                    <a:pt x="931092" y="1954832"/>
-                  </a:lnTo>
-                  <a:lnTo>
-                    <a:pt x="859470" y="1926953"/>
-                  </a:lnTo>
-                  <a:lnTo>
-                    <a:pt x="787847" y="1898565"/>
-                  </a:lnTo>
-                  <a:lnTo>
-                    <a:pt x="716225" y="1869660"/>
-                  </a:lnTo>
-                  <a:lnTo>
-                    <a:pt x="644602" y="1840227"/>
-                  </a:lnTo>
-                  <a:lnTo>
-                    <a:pt x="572980" y="1810258"/>
-                  </a:lnTo>
-                  <a:lnTo>
-                    <a:pt x="501357" y="1779742"/>
-                  </a:lnTo>
-                  <a:lnTo>
-                    <a:pt x="429735" y="1748670"/>
-                  </a:lnTo>
-                  <a:lnTo>
-                    <a:pt x="358112" y="1717031"/>
-                  </a:lnTo>
-                  <a:lnTo>
-                    <a:pt x="286490" y="1684815"/>
-                  </a:lnTo>
-                  <a:lnTo>
-                    <a:pt x="214867" y="1652012"/>
-                  </a:lnTo>
-                  <a:lnTo>
-                    <a:pt x="143245" y="1618611"/>
-                  </a:lnTo>
-                  <a:lnTo>
-                    <a:pt x="71622" y="1584601"/>
-                  </a:lnTo>
-                  <a:lnTo>
-                    <a:pt x="0" y="1549970"/>
+                    <a:pt x="0" y="0"/>
+                  </a:lnTo>
+                  <a:lnTo>
+                    <a:pt x="0" y="0"/>
+                  </a:lnTo>
+                </a:path>
+              </a:pathLst>
+            </a:custGeom>
+            <a:ln w="13550" cap="flat">
+              <a:solidFill>
+                <a:srgbClr val="EBEBEB">
+                  <a:alpha val="100000"/>
+                </a:srgbClr>
+              </a:solidFill>
+              <a:prstDash val="solid"/>
+              <a:round/>
+            </a:ln>
+          </p:spPr>
+          <p:txBody>
+            <a:bodyPr/>
+            <a:lstStyle/>
+            <a:p/>
+          </p:txBody>
+        </p:sp>
+        <p:sp>
+          <p:nvSpPr>
+            <p:cNvPr id="21" name="pg21"/>
+            <p:cNvSpPr/>
+            <p:nvPr/>
+          </p:nvSpPr>
+          <p:spPr>
+            <a:xfrm>
+              <a:off x="1235312" y="2143092"/>
+              <a:ext cx="6964104" cy="1200362"/>
+            </a:xfrm>
+            <a:custGeom>
+              <a:avLst/>
+              <a:pathLst>
+                <a:path w="6964104" h="1200362">
+                  <a:moveTo>
+                    <a:pt x="125825" y="0"/>
+                  </a:moveTo>
+                  <a:lnTo>
+                    <a:pt x="140688" y="8538"/>
+                  </a:lnTo>
+                  <a:lnTo>
+                    <a:pt x="211033" y="47683"/>
+                  </a:lnTo>
+                  <a:lnTo>
+                    <a:pt x="281377" y="85601"/>
+                  </a:lnTo>
+                  <a:lnTo>
+                    <a:pt x="351722" y="122330"/>
+                  </a:lnTo>
+                  <a:lnTo>
+                    <a:pt x="422066" y="157908"/>
+                  </a:lnTo>
+                  <a:lnTo>
+                    <a:pt x="492411" y="192371"/>
+                  </a:lnTo>
+                  <a:lnTo>
+                    <a:pt x="562755" y="225753"/>
+                  </a:lnTo>
+                  <a:lnTo>
+                    <a:pt x="633100" y="258088"/>
+                  </a:lnTo>
+                  <a:lnTo>
+                    <a:pt x="703444" y="289410"/>
+                  </a:lnTo>
+                  <a:lnTo>
+                    <a:pt x="773789" y="319750"/>
+                  </a:lnTo>
+                  <a:lnTo>
+                    <a:pt x="844133" y="349139"/>
+                  </a:lnTo>
+                  <a:lnTo>
+                    <a:pt x="914478" y="377606"/>
+                  </a:lnTo>
+                  <a:lnTo>
+                    <a:pt x="984822" y="405181"/>
+                  </a:lnTo>
+                  <a:lnTo>
+                    <a:pt x="1055167" y="431892"/>
+                  </a:lnTo>
+                  <a:lnTo>
+                    <a:pt x="1125511" y="457765"/>
+                  </a:lnTo>
+                  <a:lnTo>
+                    <a:pt x="1195856" y="482827"/>
+                  </a:lnTo>
+                  <a:lnTo>
+                    <a:pt x="1266200" y="507103"/>
+                  </a:lnTo>
+                  <a:lnTo>
+                    <a:pt x="1336545" y="530618"/>
+                  </a:lnTo>
+                  <a:lnTo>
+                    <a:pt x="1406889" y="553396"/>
+                  </a:lnTo>
+                  <a:lnTo>
+                    <a:pt x="1477234" y="575460"/>
+                  </a:lnTo>
+                  <a:lnTo>
+                    <a:pt x="1547578" y="596833"/>
+                  </a:lnTo>
+                  <a:lnTo>
+                    <a:pt x="1617923" y="617535"/>
+                  </a:lnTo>
+                  <a:lnTo>
+                    <a:pt x="1688267" y="637588"/>
+                  </a:lnTo>
+                  <a:lnTo>
+                    <a:pt x="1758612" y="657013"/>
+                  </a:lnTo>
+                  <a:lnTo>
+                    <a:pt x="1828956" y="675829"/>
+                  </a:lnTo>
+                  <a:lnTo>
+                    <a:pt x="1899301" y="694054"/>
+                  </a:lnTo>
+                  <a:lnTo>
+                    <a:pt x="1969645" y="711709"/>
+                  </a:lnTo>
+                  <a:lnTo>
+                    <a:pt x="2039990" y="728810"/>
+                  </a:lnTo>
+                  <a:lnTo>
+                    <a:pt x="2110334" y="745375"/>
+                  </a:lnTo>
+                  <a:lnTo>
+                    <a:pt x="2180679" y="761420"/>
+                  </a:lnTo>
+                  <a:lnTo>
+                    <a:pt x="2251023" y="776963"/>
+                  </a:lnTo>
+                  <a:lnTo>
+                    <a:pt x="2321368" y="792018"/>
+                  </a:lnTo>
+                  <a:lnTo>
+                    <a:pt x="2391712" y="806602"/>
+                  </a:lnTo>
+                  <a:lnTo>
+                    <a:pt x="2462057" y="820728"/>
+                  </a:lnTo>
+                  <a:lnTo>
+                    <a:pt x="2532401" y="834411"/>
+                  </a:lnTo>
+                  <a:lnTo>
+                    <a:pt x="2602746" y="847665"/>
+                  </a:lnTo>
+                  <a:lnTo>
+                    <a:pt x="2673090" y="860504"/>
+                  </a:lnTo>
+                  <a:lnTo>
+                    <a:pt x="2743435" y="872940"/>
+                  </a:lnTo>
+                  <a:lnTo>
+                    <a:pt x="2813779" y="884987"/>
+                  </a:lnTo>
+                  <a:lnTo>
+                    <a:pt x="2884124" y="896656"/>
+                  </a:lnTo>
+                  <a:lnTo>
+                    <a:pt x="2954468" y="907959"/>
+                  </a:lnTo>
+                  <a:lnTo>
+                    <a:pt x="3024813" y="918907"/>
+                  </a:lnTo>
+                  <a:lnTo>
+                    <a:pt x="3095157" y="929513"/>
+                  </a:lnTo>
+                  <a:lnTo>
+                    <a:pt x="3165502" y="939786"/>
+                  </a:lnTo>
+                  <a:lnTo>
+                    <a:pt x="3235846" y="949736"/>
+                  </a:lnTo>
+                  <a:lnTo>
+                    <a:pt x="3306191" y="958724"/>
+                  </a:lnTo>
+                  <a:lnTo>
+                    <a:pt x="3376535" y="964069"/>
+                  </a:lnTo>
+                  <a:lnTo>
+                    <a:pt x="3446880" y="969319"/>
+                  </a:lnTo>
+                  <a:lnTo>
+                    <a:pt x="3517224" y="974474"/>
+                  </a:lnTo>
+                  <a:lnTo>
+                    <a:pt x="3587569" y="979537"/>
+                  </a:lnTo>
+                  <a:lnTo>
+                    <a:pt x="3657913" y="984510"/>
+                  </a:lnTo>
+                  <a:lnTo>
+                    <a:pt x="3728257" y="989393"/>
+                  </a:lnTo>
+                  <a:lnTo>
+                    <a:pt x="3798602" y="994189"/>
+                  </a:lnTo>
+                  <a:lnTo>
+                    <a:pt x="3868946" y="998899"/>
+                  </a:lnTo>
+                  <a:lnTo>
+                    <a:pt x="3939291" y="1003525"/>
+                  </a:lnTo>
+                  <a:lnTo>
+                    <a:pt x="4009635" y="1008068"/>
+                  </a:lnTo>
+                  <a:lnTo>
+                    <a:pt x="4079980" y="1012530"/>
+                  </a:lnTo>
+                  <a:lnTo>
+                    <a:pt x="4150324" y="1016911"/>
+                  </a:lnTo>
+                  <a:lnTo>
+                    <a:pt x="4220669" y="1021214"/>
+                  </a:lnTo>
+                  <a:lnTo>
+                    <a:pt x="4291013" y="1025441"/>
+                  </a:lnTo>
+                  <a:lnTo>
+                    <a:pt x="4361358" y="1029591"/>
+                  </a:lnTo>
+                  <a:lnTo>
+                    <a:pt x="4431702" y="1033667"/>
+                  </a:lnTo>
+                  <a:lnTo>
+                    <a:pt x="4502047" y="1037670"/>
+                  </a:lnTo>
+                  <a:lnTo>
+                    <a:pt x="4572391" y="1041602"/>
+                  </a:lnTo>
+                  <a:lnTo>
+                    <a:pt x="4642736" y="1045463"/>
+                  </a:lnTo>
+                  <a:lnTo>
+                    <a:pt x="4713080" y="1049255"/>
+                  </a:lnTo>
+                  <a:lnTo>
+                    <a:pt x="4783425" y="1052978"/>
+                  </a:lnTo>
+                  <a:lnTo>
+                    <a:pt x="4853769" y="1056636"/>
+                  </a:lnTo>
+                  <a:lnTo>
+                    <a:pt x="4924114" y="1060228"/>
+                  </a:lnTo>
+                  <a:lnTo>
+                    <a:pt x="4994458" y="1063755"/>
+                  </a:lnTo>
+                  <a:lnTo>
+                    <a:pt x="5064803" y="1067219"/>
+                  </a:lnTo>
+                  <a:lnTo>
+                    <a:pt x="5135147" y="1070622"/>
+                  </a:lnTo>
+                  <a:lnTo>
+                    <a:pt x="5205492" y="1073963"/>
+                  </a:lnTo>
+                  <a:lnTo>
+                    <a:pt x="5275836" y="1077244"/>
+                  </a:lnTo>
+                  <a:lnTo>
+                    <a:pt x="5346181" y="1080467"/>
+                  </a:lnTo>
+                  <a:lnTo>
+                    <a:pt x="5416525" y="1083632"/>
+                  </a:lnTo>
+                  <a:lnTo>
+                    <a:pt x="5486870" y="1086740"/>
+                  </a:lnTo>
+                  <a:lnTo>
+                    <a:pt x="5557214" y="1089793"/>
+                  </a:lnTo>
+                  <a:lnTo>
+                    <a:pt x="5627559" y="1092791"/>
+                  </a:lnTo>
+                  <a:lnTo>
+                    <a:pt x="5697903" y="1095735"/>
+                  </a:lnTo>
+                  <a:lnTo>
+                    <a:pt x="5768248" y="1098627"/>
+                  </a:lnTo>
+                  <a:lnTo>
+                    <a:pt x="5838592" y="1101467"/>
+                  </a:lnTo>
+                  <a:lnTo>
+                    <a:pt x="5908937" y="1104256"/>
+                  </a:lnTo>
+                  <a:lnTo>
+                    <a:pt x="5979281" y="1106995"/>
+                  </a:lnTo>
+                  <a:lnTo>
+                    <a:pt x="6049626" y="1109685"/>
+                  </a:lnTo>
+                  <a:lnTo>
+                    <a:pt x="6119970" y="1112326"/>
+                  </a:lnTo>
+                  <a:lnTo>
+                    <a:pt x="6190315" y="1114921"/>
+                  </a:lnTo>
+                  <a:lnTo>
+                    <a:pt x="6260659" y="1117469"/>
+                  </a:lnTo>
+                  <a:lnTo>
+                    <a:pt x="6331004" y="1119971"/>
+                  </a:lnTo>
+                  <a:lnTo>
+                    <a:pt x="6401348" y="1122429"/>
+                  </a:lnTo>
+                  <a:lnTo>
+                    <a:pt x="6471693" y="1124842"/>
+                  </a:lnTo>
+                  <a:lnTo>
+                    <a:pt x="6542037" y="1127213"/>
+                  </a:lnTo>
+                  <a:lnTo>
+                    <a:pt x="6612382" y="1129541"/>
+                  </a:lnTo>
+                  <a:lnTo>
+                    <a:pt x="6682726" y="1131827"/>
+                  </a:lnTo>
+                  <a:lnTo>
+                    <a:pt x="6753071" y="1134072"/>
+                  </a:lnTo>
+                  <a:lnTo>
+                    <a:pt x="6823415" y="1136277"/>
+                  </a:lnTo>
+                  <a:lnTo>
+                    <a:pt x="6893760" y="1138443"/>
+                  </a:lnTo>
+                  <a:lnTo>
+                    <a:pt x="6964104" y="1140569"/>
+                  </a:lnTo>
+                  <a:lnTo>
+                    <a:pt x="6964104" y="1200362"/>
+                  </a:lnTo>
+                  <a:lnTo>
+                    <a:pt x="6893760" y="1198523"/>
+                  </a:lnTo>
+                  <a:lnTo>
+                    <a:pt x="6823415" y="1196624"/>
+                  </a:lnTo>
+                  <a:lnTo>
+                    <a:pt x="6753071" y="1194663"/>
+                  </a:lnTo>
+                  <a:lnTo>
+                    <a:pt x="6682726" y="1192639"/>
+                  </a:lnTo>
+                  <a:lnTo>
+                    <a:pt x="6612382" y="1190549"/>
+                  </a:lnTo>
+                  <a:lnTo>
+                    <a:pt x="6542037" y="1188392"/>
+                  </a:lnTo>
+                  <a:lnTo>
+                    <a:pt x="6471693" y="1186165"/>
+                  </a:lnTo>
+                  <a:lnTo>
+                    <a:pt x="6401348" y="1183866"/>
+                  </a:lnTo>
+                  <a:lnTo>
+                    <a:pt x="6331004" y="1181493"/>
+                  </a:lnTo>
+                  <a:lnTo>
+                    <a:pt x="6260659" y="1179043"/>
+                  </a:lnTo>
+                  <a:lnTo>
+                    <a:pt x="6190315" y="1176513"/>
+                  </a:lnTo>
+                  <a:lnTo>
+                    <a:pt x="6119970" y="1173902"/>
+                  </a:lnTo>
+                  <a:lnTo>
+                    <a:pt x="6049626" y="1171206"/>
+                  </a:lnTo>
+                  <a:lnTo>
+                    <a:pt x="5979281" y="1168423"/>
+                  </a:lnTo>
+                  <a:lnTo>
+                    <a:pt x="5908937" y="1165549"/>
+                  </a:lnTo>
+                  <a:lnTo>
+                    <a:pt x="5838592" y="1162583"/>
+                  </a:lnTo>
+                  <a:lnTo>
+                    <a:pt x="5768248" y="1159521"/>
+                  </a:lnTo>
+                  <a:lnTo>
+                    <a:pt x="5697903" y="1156359"/>
+                  </a:lnTo>
+                  <a:lnTo>
+                    <a:pt x="5627559" y="1153096"/>
+                  </a:lnTo>
+                  <a:lnTo>
+                    <a:pt x="5557214" y="1149726"/>
+                  </a:lnTo>
+                  <a:lnTo>
+                    <a:pt x="5486870" y="1146248"/>
+                  </a:lnTo>
+                  <a:lnTo>
+                    <a:pt x="5416525" y="1142657"/>
+                  </a:lnTo>
+                  <a:lnTo>
+                    <a:pt x="5346181" y="1138950"/>
+                  </a:lnTo>
+                  <a:lnTo>
+                    <a:pt x="5275836" y="1135123"/>
+                  </a:lnTo>
+                  <a:lnTo>
+                    <a:pt x="5205492" y="1131172"/>
+                  </a:lnTo>
+                  <a:lnTo>
+                    <a:pt x="5135147" y="1127093"/>
+                  </a:lnTo>
+                  <a:lnTo>
+                    <a:pt x="5064803" y="1122882"/>
+                  </a:lnTo>
+                  <a:lnTo>
+                    <a:pt x="4994458" y="1118535"/>
+                  </a:lnTo>
+                  <a:lnTo>
+                    <a:pt x="4924114" y="1114047"/>
+                  </a:lnTo>
+                  <a:lnTo>
+                    <a:pt x="4853769" y="1109414"/>
+                  </a:lnTo>
+                  <a:lnTo>
+                    <a:pt x="4783425" y="1104631"/>
+                  </a:lnTo>
+                  <a:lnTo>
+                    <a:pt x="4713080" y="1099693"/>
+                  </a:lnTo>
+                  <a:lnTo>
+                    <a:pt x="4642736" y="1094595"/>
+                  </a:lnTo>
+                  <a:lnTo>
+                    <a:pt x="4572391" y="1089333"/>
+                  </a:lnTo>
+                  <a:lnTo>
+                    <a:pt x="4502047" y="1083900"/>
+                  </a:lnTo>
+                  <a:lnTo>
+                    <a:pt x="4431702" y="1078291"/>
+                  </a:lnTo>
+                  <a:lnTo>
+                    <a:pt x="4361358" y="1072501"/>
+                  </a:lnTo>
+                  <a:lnTo>
+                    <a:pt x="4291013" y="1066523"/>
+                  </a:lnTo>
+                  <a:lnTo>
+                    <a:pt x="4220669" y="1060352"/>
+                  </a:lnTo>
+                  <a:lnTo>
+                    <a:pt x="4150324" y="1053981"/>
+                  </a:lnTo>
+                  <a:lnTo>
+                    <a:pt x="4079980" y="1047404"/>
+                  </a:lnTo>
+                  <a:lnTo>
+                    <a:pt x="4009635" y="1040614"/>
+                  </a:lnTo>
+                  <a:lnTo>
+                    <a:pt x="3939291" y="1033604"/>
+                  </a:lnTo>
+                  <a:lnTo>
+                    <a:pt x="3868946" y="1026368"/>
+                  </a:lnTo>
+                  <a:lnTo>
+                    <a:pt x="3798602" y="1018897"/>
+                  </a:lnTo>
+                  <a:lnTo>
+                    <a:pt x="3728257" y="1011184"/>
+                  </a:lnTo>
+                  <a:lnTo>
+                    <a:pt x="3657913" y="1003222"/>
+                  </a:lnTo>
+                  <a:lnTo>
+                    <a:pt x="3587569" y="995003"/>
+                  </a:lnTo>
+                  <a:lnTo>
+                    <a:pt x="3517224" y="986517"/>
+                  </a:lnTo>
+                  <a:lnTo>
+                    <a:pt x="3446880" y="977756"/>
+                  </a:lnTo>
+                  <a:lnTo>
+                    <a:pt x="3376535" y="968712"/>
+                  </a:lnTo>
+                  <a:lnTo>
+                    <a:pt x="3306191" y="959375"/>
+                  </a:lnTo>
+                  <a:lnTo>
+                    <a:pt x="3235846" y="953281"/>
+                  </a:lnTo>
+                  <a:lnTo>
+                    <a:pt x="3165502" y="947739"/>
+                  </a:lnTo>
+                  <a:lnTo>
+                    <a:pt x="3095157" y="942096"/>
+                  </a:lnTo>
+                  <a:lnTo>
+                    <a:pt x="3024813" y="936351"/>
+                  </a:lnTo>
+                  <a:lnTo>
+                    <a:pt x="2954468" y="930500"/>
+                  </a:lnTo>
+                  <a:lnTo>
+                    <a:pt x="2884124" y="924543"/>
+                  </a:lnTo>
+                  <a:lnTo>
+                    <a:pt x="2813779" y="918477"/>
+                  </a:lnTo>
+                  <a:lnTo>
+                    <a:pt x="2743435" y="912300"/>
+                  </a:lnTo>
+                  <a:lnTo>
+                    <a:pt x="2673090" y="906011"/>
+                  </a:lnTo>
+                  <a:lnTo>
+                    <a:pt x="2602746" y="899607"/>
+                  </a:lnTo>
+                  <a:lnTo>
+                    <a:pt x="2532401" y="893086"/>
+                  </a:lnTo>
+                  <a:lnTo>
+                    <a:pt x="2462057" y="886447"/>
+                  </a:lnTo>
+                  <a:lnTo>
+                    <a:pt x="2391712" y="879686"/>
+                  </a:lnTo>
+                  <a:lnTo>
+                    <a:pt x="2321368" y="872802"/>
+                  </a:lnTo>
+                  <a:lnTo>
+                    <a:pt x="2251023" y="865793"/>
+                  </a:lnTo>
+                  <a:lnTo>
+                    <a:pt x="2180679" y="858655"/>
+                  </a:lnTo>
+                  <a:lnTo>
+                    <a:pt x="2110334" y="851388"/>
+                  </a:lnTo>
+                  <a:lnTo>
+                    <a:pt x="2039990" y="843988"/>
+                  </a:lnTo>
+                  <a:lnTo>
+                    <a:pt x="1969645" y="836453"/>
+                  </a:lnTo>
+                  <a:lnTo>
+                    <a:pt x="1899301" y="828781"/>
+                  </a:lnTo>
+                  <a:lnTo>
+                    <a:pt x="1828956" y="820969"/>
+                  </a:lnTo>
+                  <a:lnTo>
+                    <a:pt x="1758612" y="813014"/>
+                  </a:lnTo>
+                  <a:lnTo>
+                    <a:pt x="1688267" y="804914"/>
+                  </a:lnTo>
+                  <a:lnTo>
+                    <a:pt x="1617923" y="796667"/>
+                  </a:lnTo>
+                  <a:lnTo>
+                    <a:pt x="1547578" y="788269"/>
+                  </a:lnTo>
+                  <a:lnTo>
+                    <a:pt x="1477234" y="779718"/>
+                  </a:lnTo>
+                  <a:lnTo>
+                    <a:pt x="1406889" y="771012"/>
+                  </a:lnTo>
+                  <a:lnTo>
+                    <a:pt x="1336545" y="762146"/>
+                  </a:lnTo>
+                  <a:lnTo>
+                    <a:pt x="1266200" y="753119"/>
+                  </a:lnTo>
+                  <a:lnTo>
+                    <a:pt x="1195856" y="743927"/>
+                  </a:lnTo>
+                  <a:lnTo>
+                    <a:pt x="1125511" y="734568"/>
+                  </a:lnTo>
+                  <a:lnTo>
+                    <a:pt x="1055167" y="725037"/>
+                  </a:lnTo>
+                  <a:lnTo>
+                    <a:pt x="984822" y="715334"/>
+                  </a:lnTo>
+                  <a:lnTo>
+                    <a:pt x="914478" y="705453"/>
+                  </a:lnTo>
+                  <a:lnTo>
+                    <a:pt x="844133" y="695392"/>
+                  </a:lnTo>
+                  <a:lnTo>
+                    <a:pt x="773789" y="685147"/>
+                  </a:lnTo>
+                  <a:lnTo>
+                    <a:pt x="703444" y="674716"/>
+                  </a:lnTo>
+                  <a:lnTo>
+                    <a:pt x="633100" y="664094"/>
+                  </a:lnTo>
+                  <a:lnTo>
+                    <a:pt x="562755" y="653279"/>
+                  </a:lnTo>
+                  <a:lnTo>
+                    <a:pt x="492411" y="642267"/>
+                  </a:lnTo>
+                  <a:lnTo>
+                    <a:pt x="422066" y="631054"/>
+                  </a:lnTo>
+                  <a:lnTo>
+                    <a:pt x="351722" y="619636"/>
+                  </a:lnTo>
+                  <a:lnTo>
+                    <a:pt x="281377" y="608010"/>
+                  </a:lnTo>
+                  <a:lnTo>
+                    <a:pt x="211033" y="596172"/>
+                  </a:lnTo>
+                  <a:lnTo>
+                    <a:pt x="140688" y="584118"/>
+                  </a:lnTo>
+                  <a:lnTo>
+                    <a:pt x="70344" y="571845"/>
+                  </a:lnTo>
+                  <a:lnTo>
+                    <a:pt x="0" y="559347"/>
                   </a:lnTo>
                   <a:close/>
                 </a:path>
@@ -3581,640 +3616,315 @@
         </p:sp>
         <p:sp>
           <p:nvSpPr>
-            <p:cNvPr id="21" name="pl21"/>
-            <p:cNvSpPr/>
-            <p:nvPr/>
-          </p:nvSpPr>
-          <p:spPr>
-            <a:xfrm>
-              <a:off x="1300161" y="2073503"/>
-              <a:ext cx="6962518" cy="3160554"/>
-            </a:xfrm>
-            <a:custGeom>
-              <a:avLst/>
-              <a:pathLst>
-                <a:path w="6962518" h="3160554">
-                  <a:moveTo>
-                    <a:pt x="0" y="0"/>
-                  </a:moveTo>
-                  <a:lnTo>
-                    <a:pt x="15133" y="23661"/>
-                  </a:lnTo>
-                  <a:lnTo>
-                    <a:pt x="86755" y="132133"/>
-                  </a:lnTo>
-                  <a:lnTo>
-                    <a:pt x="158378" y="237205"/>
-                  </a:lnTo>
-                  <a:lnTo>
-                    <a:pt x="230000" y="338982"/>
-                  </a:lnTo>
-                  <a:lnTo>
-                    <a:pt x="301623" y="437569"/>
-                  </a:lnTo>
-                  <a:lnTo>
-                    <a:pt x="373245" y="533066"/>
-                  </a:lnTo>
-                  <a:lnTo>
-                    <a:pt x="444868" y="625569"/>
-                  </a:lnTo>
-                  <a:lnTo>
-                    <a:pt x="516490" y="715171"/>
-                  </a:lnTo>
-                  <a:lnTo>
-                    <a:pt x="588113" y="801965"/>
-                  </a:lnTo>
-                  <a:lnTo>
-                    <a:pt x="659735" y="886038"/>
-                  </a:lnTo>
-                  <a:lnTo>
-                    <a:pt x="731358" y="967475"/>
-                  </a:lnTo>
-                  <a:lnTo>
-                    <a:pt x="802981" y="1046359"/>
-                  </a:lnTo>
-                  <a:lnTo>
-                    <a:pt x="874603" y="1122770"/>
-                  </a:lnTo>
-                  <a:lnTo>
-                    <a:pt x="946226" y="1196786"/>
-                  </a:lnTo>
-                  <a:lnTo>
-                    <a:pt x="1017848" y="1268481"/>
-                  </a:lnTo>
-                  <a:lnTo>
-                    <a:pt x="1089471" y="1337929"/>
-                  </a:lnTo>
-                  <a:lnTo>
-                    <a:pt x="1161093" y="1405199"/>
-                  </a:lnTo>
-                  <a:lnTo>
-                    <a:pt x="1232716" y="1470361"/>
-                  </a:lnTo>
-                  <a:lnTo>
-                    <a:pt x="1304338" y="1533480"/>
-                  </a:lnTo>
-                  <a:lnTo>
-                    <a:pt x="1375961" y="1594620"/>
-                  </a:lnTo>
-                  <a:lnTo>
-                    <a:pt x="1447583" y="1653843"/>
-                  </a:lnTo>
-                  <a:lnTo>
-                    <a:pt x="1519206" y="1711210"/>
-                  </a:lnTo>
-                  <a:lnTo>
-                    <a:pt x="1590828" y="1766778"/>
-                  </a:lnTo>
-                  <a:lnTo>
-                    <a:pt x="1662451" y="1820604"/>
-                  </a:lnTo>
-                  <a:lnTo>
-                    <a:pt x="1734073" y="1872743"/>
-                  </a:lnTo>
-                  <a:lnTo>
-                    <a:pt x="1805696" y="1923248"/>
-                  </a:lnTo>
-                  <a:lnTo>
-                    <a:pt x="1877318" y="1972169"/>
-                  </a:lnTo>
-                  <a:lnTo>
-                    <a:pt x="1948941" y="2019556"/>
-                  </a:lnTo>
-                  <a:lnTo>
-                    <a:pt x="2020563" y="2065458"/>
-                  </a:lnTo>
-                  <a:lnTo>
-                    <a:pt x="2092186" y="2109921"/>
-                  </a:lnTo>
-                  <a:lnTo>
-                    <a:pt x="2163809" y="2152989"/>
-                  </a:lnTo>
-                  <a:lnTo>
-                    <a:pt x="2235431" y="2194708"/>
-                  </a:lnTo>
-                  <a:lnTo>
-                    <a:pt x="2307054" y="2235119"/>
-                  </a:lnTo>
-                  <a:lnTo>
-                    <a:pt x="2378676" y="2274263"/>
-                  </a:lnTo>
-                  <a:lnTo>
-                    <a:pt x="2450299" y="2312180"/>
-                  </a:lnTo>
-                  <a:lnTo>
-                    <a:pt x="2521921" y="2348908"/>
-                  </a:lnTo>
-                  <a:lnTo>
-                    <a:pt x="2593544" y="2384485"/>
-                  </a:lnTo>
-                  <a:lnTo>
-                    <a:pt x="2665166" y="2418946"/>
-                  </a:lnTo>
-                  <a:lnTo>
-                    <a:pt x="2736789" y="2452327"/>
-                  </a:lnTo>
-                  <a:lnTo>
-                    <a:pt x="2808411" y="2484662"/>
-                  </a:lnTo>
-                  <a:lnTo>
-                    <a:pt x="2880034" y="2515983"/>
-                  </a:lnTo>
-                  <a:lnTo>
-                    <a:pt x="2951656" y="2546322"/>
-                  </a:lnTo>
-                  <a:lnTo>
-                    <a:pt x="3023279" y="2575709"/>
-                  </a:lnTo>
-                  <a:lnTo>
-                    <a:pt x="3094901" y="2604176"/>
-                  </a:lnTo>
-                  <a:lnTo>
-                    <a:pt x="3166524" y="2631750"/>
-                  </a:lnTo>
-                  <a:lnTo>
-                    <a:pt x="3238146" y="2656655"/>
-                  </a:lnTo>
-                  <a:lnTo>
-                    <a:pt x="3309769" y="2671467"/>
-                  </a:lnTo>
-                  <a:lnTo>
-                    <a:pt x="3381391" y="2686014"/>
-                  </a:lnTo>
-                  <a:lnTo>
-                    <a:pt x="3453014" y="2700300"/>
-                  </a:lnTo>
-                  <a:lnTo>
-                    <a:pt x="3524637" y="2714330"/>
-                  </a:lnTo>
-                  <a:lnTo>
-                    <a:pt x="3596259" y="2728109"/>
-                  </a:lnTo>
-                  <a:lnTo>
-                    <a:pt x="3667882" y="2741641"/>
-                  </a:lnTo>
-                  <a:lnTo>
-                    <a:pt x="3739504" y="2754931"/>
-                  </a:lnTo>
-                  <a:lnTo>
-                    <a:pt x="3811127" y="2767982"/>
-                  </a:lnTo>
-                  <a:lnTo>
-                    <a:pt x="3882749" y="2780800"/>
-                  </a:lnTo>
-                  <a:lnTo>
-                    <a:pt x="3954372" y="2793389"/>
-                  </a:lnTo>
-                  <a:lnTo>
-                    <a:pt x="4025994" y="2805752"/>
-                  </a:lnTo>
-                  <a:lnTo>
-                    <a:pt x="4097617" y="2817894"/>
-                  </a:lnTo>
-                  <a:lnTo>
-                    <a:pt x="4169239" y="2829818"/>
-                  </a:lnTo>
-                  <a:lnTo>
-                    <a:pt x="4240862" y="2841529"/>
-                  </a:lnTo>
-                  <a:lnTo>
-                    <a:pt x="4312484" y="2853030"/>
-                  </a:lnTo>
-                  <a:lnTo>
-                    <a:pt x="4384107" y="2864325"/>
-                  </a:lnTo>
-                  <a:lnTo>
-                    <a:pt x="4455729" y="2875417"/>
-                  </a:lnTo>
-                  <a:lnTo>
-                    <a:pt x="4527352" y="2886312"/>
-                  </a:lnTo>
-                  <a:lnTo>
-                    <a:pt x="4598974" y="2897011"/>
-                  </a:lnTo>
-                  <a:lnTo>
-                    <a:pt x="4670597" y="2907518"/>
-                  </a:lnTo>
-                  <a:lnTo>
-                    <a:pt x="4742219" y="2917837"/>
-                  </a:lnTo>
-                  <a:lnTo>
-                    <a:pt x="4813842" y="2927972"/>
-                  </a:lnTo>
-                  <a:lnTo>
-                    <a:pt x="4885465" y="2937925"/>
-                  </a:lnTo>
-                  <a:lnTo>
-                    <a:pt x="4957087" y="2947699"/>
-                  </a:lnTo>
-                  <a:lnTo>
-                    <a:pt x="5028710" y="2957299"/>
-                  </a:lnTo>
-                  <a:lnTo>
-                    <a:pt x="5100332" y="2966727"/>
-                  </a:lnTo>
-                  <a:lnTo>
-                    <a:pt x="5171955" y="2975986"/>
-                  </a:lnTo>
-                  <a:lnTo>
-                    <a:pt x="5243577" y="2985079"/>
-                  </a:lnTo>
-                  <a:lnTo>
-                    <a:pt x="5315200" y="2994009"/>
-                  </a:lnTo>
-                  <a:lnTo>
-                    <a:pt x="5386822" y="3002779"/>
-                  </a:lnTo>
-                  <a:lnTo>
-                    <a:pt x="5458445" y="3011393"/>
-                  </a:lnTo>
-                  <a:lnTo>
-                    <a:pt x="5530067" y="3019852"/>
-                  </a:lnTo>
-                  <a:lnTo>
-                    <a:pt x="5601690" y="3028159"/>
-                  </a:lnTo>
-                  <a:lnTo>
-                    <a:pt x="5673312" y="3036318"/>
-                  </a:lnTo>
-                  <a:lnTo>
-                    <a:pt x="5744935" y="3044331"/>
-                  </a:lnTo>
-                  <a:lnTo>
-                    <a:pt x="5816557" y="3052200"/>
-                  </a:lnTo>
-                  <a:lnTo>
-                    <a:pt x="5888180" y="3059928"/>
-                  </a:lnTo>
-                  <a:lnTo>
-                    <a:pt x="5959802" y="3067518"/>
-                  </a:lnTo>
-                  <a:lnTo>
-                    <a:pt x="6031425" y="3074972"/>
-                  </a:lnTo>
-                  <a:lnTo>
-                    <a:pt x="6103047" y="3082292"/>
-                  </a:lnTo>
-                  <a:lnTo>
-                    <a:pt x="6174670" y="3089482"/>
-                  </a:lnTo>
-                  <a:lnTo>
-                    <a:pt x="6246293" y="3096542"/>
-                  </a:lnTo>
-                  <a:lnTo>
-                    <a:pt x="6317915" y="3103476"/>
-                  </a:lnTo>
-                  <a:lnTo>
-                    <a:pt x="6389538" y="3110286"/>
-                  </a:lnTo>
-                  <a:lnTo>
-                    <a:pt x="6461160" y="3116974"/>
-                  </a:lnTo>
-                  <a:lnTo>
-                    <a:pt x="6532783" y="3123542"/>
-                  </a:lnTo>
-                  <a:lnTo>
-                    <a:pt x="6604405" y="3129993"/>
-                  </a:lnTo>
-                  <a:lnTo>
-                    <a:pt x="6676028" y="3136328"/>
-                  </a:lnTo>
-                  <a:lnTo>
-                    <a:pt x="6747650" y="3142550"/>
-                  </a:lnTo>
-                  <a:lnTo>
-                    <a:pt x="6819273" y="3148660"/>
-                  </a:lnTo>
-                  <a:lnTo>
-                    <a:pt x="6890895" y="3154661"/>
-                  </a:lnTo>
-                  <a:lnTo>
-                    <a:pt x="6962518" y="3160554"/>
-                  </a:lnTo>
-                </a:path>
-              </a:pathLst>
-            </a:custGeom>
-          </p:spPr>
-          <p:txBody>
-            <a:bodyPr/>
-            <a:lstStyle/>
-            <a:p/>
-          </p:txBody>
-        </p:sp>
-        <p:sp>
-          <p:nvSpPr>
             <p:cNvPr id="22" name="pl22"/>
             <p:cNvSpPr/>
             <p:nvPr/>
           </p:nvSpPr>
           <p:spPr>
             <a:xfrm>
-              <a:off x="1172049" y="3623473"/>
-              <a:ext cx="7090630" cy="1776272"/>
+              <a:off x="1361137" y="2143092"/>
+              <a:ext cx="6838278" cy="1140569"/>
             </a:xfrm>
             <a:custGeom>
               <a:avLst/>
               <a:pathLst>
-                <a:path w="7090630" h="1776272">
+                <a:path w="6838278" h="1140569">
                   <a:moveTo>
-                    <a:pt x="7090630" y="1776272"/>
+                    <a:pt x="0" y="0"/>
                   </a:moveTo>
                   <a:lnTo>
-                    <a:pt x="7019007" y="1771174"/>
-                  </a:lnTo>
-                  <a:lnTo>
-                    <a:pt x="6947385" y="1765912"/>
-                  </a:lnTo>
-                  <a:lnTo>
-                    <a:pt x="6875762" y="1760479"/>
-                  </a:lnTo>
-                  <a:lnTo>
-                    <a:pt x="6804139" y="1754870"/>
-                  </a:lnTo>
-                  <a:lnTo>
-                    <a:pt x="6732517" y="1749080"/>
-                  </a:lnTo>
-                  <a:lnTo>
-                    <a:pt x="6660894" y="1743103"/>
-                  </a:lnTo>
-                  <a:lnTo>
-                    <a:pt x="6589272" y="1736932"/>
-                  </a:lnTo>
-                  <a:lnTo>
-                    <a:pt x="6517649" y="1730561"/>
-                  </a:lnTo>
-                  <a:lnTo>
-                    <a:pt x="6446027" y="1723984"/>
-                  </a:lnTo>
-                  <a:lnTo>
-                    <a:pt x="6374404" y="1717194"/>
-                  </a:lnTo>
-                  <a:lnTo>
-                    <a:pt x="6302782" y="1710185"/>
-                  </a:lnTo>
-                  <a:lnTo>
-                    <a:pt x="6231159" y="1702948"/>
-                  </a:lnTo>
-                  <a:lnTo>
-                    <a:pt x="6159537" y="1695478"/>
-                  </a:lnTo>
-                  <a:lnTo>
-                    <a:pt x="6087914" y="1687766"/>
-                  </a:lnTo>
-                  <a:lnTo>
-                    <a:pt x="6016292" y="1679804"/>
-                  </a:lnTo>
-                  <a:lnTo>
-                    <a:pt x="5944669" y="1671584"/>
-                  </a:lnTo>
-                  <a:lnTo>
-                    <a:pt x="5873047" y="1663098"/>
-                  </a:lnTo>
-                  <a:lnTo>
-                    <a:pt x="5801424" y="1654338"/>
-                  </a:lnTo>
-                  <a:lnTo>
-                    <a:pt x="5729802" y="1645294"/>
-                  </a:lnTo>
-                  <a:lnTo>
-                    <a:pt x="5658179" y="1635958"/>
-                  </a:lnTo>
-                  <a:lnTo>
-                    <a:pt x="5586557" y="1626319"/>
-                  </a:lnTo>
-                  <a:lnTo>
-                    <a:pt x="5514934" y="1616369"/>
-                  </a:lnTo>
-                  <a:lnTo>
-                    <a:pt x="5443311" y="1606096"/>
-                  </a:lnTo>
-                  <a:lnTo>
-                    <a:pt x="5371689" y="1595491"/>
-                  </a:lnTo>
-                  <a:lnTo>
-                    <a:pt x="5300066" y="1584543"/>
-                  </a:lnTo>
-                  <a:lnTo>
-                    <a:pt x="5228444" y="1573240"/>
-                  </a:lnTo>
-                  <a:lnTo>
-                    <a:pt x="5156821" y="1561572"/>
-                  </a:lnTo>
-                  <a:lnTo>
-                    <a:pt x="5085199" y="1549525"/>
-                  </a:lnTo>
-                  <a:lnTo>
-                    <a:pt x="5013576" y="1537090"/>
-                  </a:lnTo>
-                  <a:lnTo>
-                    <a:pt x="4941954" y="1524251"/>
-                  </a:lnTo>
-                  <a:lnTo>
-                    <a:pt x="4870331" y="1510997"/>
-                  </a:lnTo>
-                  <a:lnTo>
-                    <a:pt x="4798709" y="1497314"/>
-                  </a:lnTo>
-                  <a:lnTo>
-                    <a:pt x="4727086" y="1483189"/>
-                  </a:lnTo>
-                  <a:lnTo>
-                    <a:pt x="4655464" y="1468606"/>
-                  </a:lnTo>
-                  <a:lnTo>
-                    <a:pt x="4583841" y="1453551"/>
-                  </a:lnTo>
-                  <a:lnTo>
-                    <a:pt x="4512219" y="1438009"/>
-                  </a:lnTo>
-                  <a:lnTo>
-                    <a:pt x="4440596" y="1421964"/>
-                  </a:lnTo>
-                  <a:lnTo>
-                    <a:pt x="4368974" y="1405399"/>
-                  </a:lnTo>
-                  <a:lnTo>
-                    <a:pt x="4297351" y="1388299"/>
-                  </a:lnTo>
-                  <a:lnTo>
-                    <a:pt x="4225729" y="1370645"/>
-                  </a:lnTo>
-                  <a:lnTo>
-                    <a:pt x="4154106" y="1352419"/>
-                  </a:lnTo>
-                  <a:lnTo>
-                    <a:pt x="4082483" y="1333604"/>
-                  </a:lnTo>
-                  <a:lnTo>
-                    <a:pt x="4010861" y="1314180"/>
-                  </a:lnTo>
-                  <a:lnTo>
-                    <a:pt x="3939238" y="1294128"/>
-                  </a:lnTo>
-                  <a:lnTo>
-                    <a:pt x="3867616" y="1273426"/>
-                  </a:lnTo>
-                  <a:lnTo>
-                    <a:pt x="3795993" y="1252054"/>
-                  </a:lnTo>
-                  <a:lnTo>
-                    <a:pt x="3724371" y="1229991"/>
-                  </a:lnTo>
-                  <a:lnTo>
-                    <a:pt x="3652748" y="1207213"/>
-                  </a:lnTo>
-                  <a:lnTo>
-                    <a:pt x="3581126" y="1183699"/>
-                  </a:lnTo>
-                  <a:lnTo>
-                    <a:pt x="3509503" y="1159423"/>
-                  </a:lnTo>
-                  <a:lnTo>
-                    <a:pt x="3437881" y="1134362"/>
-                  </a:lnTo>
-                  <a:lnTo>
-                    <a:pt x="3366258" y="1108489"/>
-                  </a:lnTo>
-                  <a:lnTo>
-                    <a:pt x="3294636" y="1091603"/>
-                  </a:lnTo>
-                  <a:lnTo>
-                    <a:pt x="3223013" y="1076246"/>
-                  </a:lnTo>
-                  <a:lnTo>
-                    <a:pt x="3151391" y="1060609"/>
-                  </a:lnTo>
-                  <a:lnTo>
-                    <a:pt x="3079768" y="1044687"/>
-                  </a:lnTo>
-                  <a:lnTo>
-                    <a:pt x="3008146" y="1028475"/>
-                  </a:lnTo>
-                  <a:lnTo>
-                    <a:pt x="2936523" y="1011967"/>
-                  </a:lnTo>
-                  <a:lnTo>
-                    <a:pt x="2864901" y="995158"/>
-                  </a:lnTo>
-                  <a:lnTo>
-                    <a:pt x="2793278" y="978042"/>
-                  </a:lnTo>
-                  <a:lnTo>
-                    <a:pt x="2721655" y="960615"/>
-                  </a:lnTo>
-                  <a:lnTo>
-                    <a:pt x="2650033" y="942869"/>
-                  </a:lnTo>
-                  <a:lnTo>
-                    <a:pt x="2578410" y="924800"/>
-                  </a:lnTo>
-                  <a:lnTo>
-                    <a:pt x="2506788" y="906402"/>
-                  </a:lnTo>
-                  <a:lnTo>
-                    <a:pt x="2435165" y="887668"/>
-                  </a:lnTo>
-                  <a:lnTo>
-                    <a:pt x="2363543" y="868592"/>
-                  </a:lnTo>
-                  <a:lnTo>
-                    <a:pt x="2291920" y="849169"/>
-                  </a:lnTo>
-                  <a:lnTo>
-                    <a:pt x="2220298" y="829391"/>
-                  </a:lnTo>
-                  <a:lnTo>
-                    <a:pt x="2148675" y="809253"/>
-                  </a:lnTo>
-                  <a:lnTo>
-                    <a:pt x="2077053" y="788748"/>
-                  </a:lnTo>
-                  <a:lnTo>
-                    <a:pt x="2005430" y="767868"/>
-                  </a:lnTo>
-                  <a:lnTo>
-                    <a:pt x="1933808" y="746608"/>
-                  </a:lnTo>
-                  <a:lnTo>
-                    <a:pt x="1862185" y="724960"/>
-                  </a:lnTo>
-                  <a:lnTo>
-                    <a:pt x="1790563" y="702918"/>
-                  </a:lnTo>
-                  <a:lnTo>
-                    <a:pt x="1718940" y="680474"/>
-                  </a:lnTo>
-                  <a:lnTo>
-                    <a:pt x="1647318" y="657620"/>
-                  </a:lnTo>
-                  <a:lnTo>
-                    <a:pt x="1575695" y="634349"/>
-                  </a:lnTo>
-                  <a:lnTo>
-                    <a:pt x="1504073" y="610655"/>
-                  </a:lnTo>
-                  <a:lnTo>
-                    <a:pt x="1432450" y="586528"/>
-                  </a:lnTo>
-                  <a:lnTo>
-                    <a:pt x="1360827" y="561961"/>
-                  </a:lnTo>
-                  <a:lnTo>
-                    <a:pt x="1289205" y="536946"/>
-                  </a:lnTo>
-                  <a:lnTo>
-                    <a:pt x="1217582" y="511475"/>
-                  </a:lnTo>
-                  <a:lnTo>
-                    <a:pt x="1145960" y="485540"/>
-                  </a:lnTo>
-                  <a:lnTo>
-                    <a:pt x="1074337" y="459132"/>
-                  </a:lnTo>
-                  <a:lnTo>
-                    <a:pt x="1002715" y="432242"/>
-                  </a:lnTo>
-                  <a:lnTo>
-                    <a:pt x="931092" y="404862"/>
-                  </a:lnTo>
-                  <a:lnTo>
-                    <a:pt x="859470" y="376982"/>
-                  </a:lnTo>
-                  <a:lnTo>
-                    <a:pt x="787847" y="348594"/>
-                  </a:lnTo>
-                  <a:lnTo>
-                    <a:pt x="716225" y="319689"/>
-                  </a:lnTo>
-                  <a:lnTo>
-                    <a:pt x="644602" y="290256"/>
-                  </a:lnTo>
-                  <a:lnTo>
-                    <a:pt x="572980" y="260287"/>
-                  </a:lnTo>
-                  <a:lnTo>
-                    <a:pt x="501357" y="229771"/>
-                  </a:lnTo>
-                  <a:lnTo>
-                    <a:pt x="429735" y="198699"/>
-                  </a:lnTo>
-                  <a:lnTo>
-                    <a:pt x="358112" y="167061"/>
-                  </a:lnTo>
-                  <a:lnTo>
-                    <a:pt x="286490" y="134845"/>
-                  </a:lnTo>
-                  <a:lnTo>
-                    <a:pt x="214867" y="102042"/>
-                  </a:lnTo>
-                  <a:lnTo>
-                    <a:pt x="143245" y="68640"/>
-                  </a:lnTo>
-                  <a:lnTo>
-                    <a:pt x="71622" y="34630"/>
-                  </a:lnTo>
-                  <a:lnTo>
-                    <a:pt x="0" y="0"/>
+                    <a:pt x="14863" y="8538"/>
+                  </a:lnTo>
+                  <a:lnTo>
+                    <a:pt x="85207" y="47683"/>
+                  </a:lnTo>
+                  <a:lnTo>
+                    <a:pt x="155552" y="85601"/>
+                  </a:lnTo>
+                  <a:lnTo>
+                    <a:pt x="225896" y="122330"/>
+                  </a:lnTo>
+                  <a:lnTo>
+                    <a:pt x="296241" y="157908"/>
+                  </a:lnTo>
+                  <a:lnTo>
+                    <a:pt x="366585" y="192371"/>
+                  </a:lnTo>
+                  <a:lnTo>
+                    <a:pt x="436930" y="225753"/>
+                  </a:lnTo>
+                  <a:lnTo>
+                    <a:pt x="507274" y="258088"/>
+                  </a:lnTo>
+                  <a:lnTo>
+                    <a:pt x="577619" y="289410"/>
+                  </a:lnTo>
+                  <a:lnTo>
+                    <a:pt x="647963" y="319750"/>
+                  </a:lnTo>
+                  <a:lnTo>
+                    <a:pt x="718308" y="349139"/>
+                  </a:lnTo>
+                  <a:lnTo>
+                    <a:pt x="788652" y="377606"/>
+                  </a:lnTo>
+                  <a:lnTo>
+                    <a:pt x="858997" y="405181"/>
+                  </a:lnTo>
+                  <a:lnTo>
+                    <a:pt x="929341" y="431892"/>
+                  </a:lnTo>
+                  <a:lnTo>
+                    <a:pt x="999686" y="457765"/>
+                  </a:lnTo>
+                  <a:lnTo>
+                    <a:pt x="1070030" y="482827"/>
+                  </a:lnTo>
+                  <a:lnTo>
+                    <a:pt x="1140375" y="507103"/>
+                  </a:lnTo>
+                  <a:lnTo>
+                    <a:pt x="1210719" y="530618"/>
+                  </a:lnTo>
+                  <a:lnTo>
+                    <a:pt x="1281064" y="553396"/>
+                  </a:lnTo>
+                  <a:lnTo>
+                    <a:pt x="1351408" y="575460"/>
+                  </a:lnTo>
+                  <a:lnTo>
+                    <a:pt x="1421753" y="596833"/>
+                  </a:lnTo>
+                  <a:lnTo>
+                    <a:pt x="1492097" y="617535"/>
+                  </a:lnTo>
+                  <a:lnTo>
+                    <a:pt x="1562441" y="637588"/>
+                  </a:lnTo>
+                  <a:lnTo>
+                    <a:pt x="1632786" y="657013"/>
+                  </a:lnTo>
+                  <a:lnTo>
+                    <a:pt x="1703130" y="675829"/>
+                  </a:lnTo>
+                  <a:lnTo>
+                    <a:pt x="1773475" y="694054"/>
+                  </a:lnTo>
+                  <a:lnTo>
+                    <a:pt x="1843819" y="711709"/>
+                  </a:lnTo>
+                  <a:lnTo>
+                    <a:pt x="1914164" y="728810"/>
+                  </a:lnTo>
+                  <a:lnTo>
+                    <a:pt x="1984508" y="745375"/>
+                  </a:lnTo>
+                  <a:lnTo>
+                    <a:pt x="2054853" y="761420"/>
+                  </a:lnTo>
+                  <a:lnTo>
+                    <a:pt x="2125197" y="776963"/>
+                  </a:lnTo>
+                  <a:lnTo>
+                    <a:pt x="2195542" y="792018"/>
+                  </a:lnTo>
+                  <a:lnTo>
+                    <a:pt x="2265886" y="806602"/>
+                  </a:lnTo>
+                  <a:lnTo>
+                    <a:pt x="2336231" y="820728"/>
+                  </a:lnTo>
+                  <a:lnTo>
+                    <a:pt x="2406575" y="834411"/>
+                  </a:lnTo>
+                  <a:lnTo>
+                    <a:pt x="2476920" y="847665"/>
+                  </a:lnTo>
+                  <a:lnTo>
+                    <a:pt x="2547264" y="860504"/>
+                  </a:lnTo>
+                  <a:lnTo>
+                    <a:pt x="2617609" y="872940"/>
+                  </a:lnTo>
+                  <a:lnTo>
+                    <a:pt x="2687953" y="884987"/>
+                  </a:lnTo>
+                  <a:lnTo>
+                    <a:pt x="2758298" y="896656"/>
+                  </a:lnTo>
+                  <a:lnTo>
+                    <a:pt x="2828642" y="907959"/>
+                  </a:lnTo>
+                  <a:lnTo>
+                    <a:pt x="2898987" y="918907"/>
+                  </a:lnTo>
+                  <a:lnTo>
+                    <a:pt x="2969331" y="929513"/>
+                  </a:lnTo>
+                  <a:lnTo>
+                    <a:pt x="3039676" y="939786"/>
+                  </a:lnTo>
+                  <a:lnTo>
+                    <a:pt x="3110020" y="949736"/>
+                  </a:lnTo>
+                  <a:lnTo>
+                    <a:pt x="3180365" y="958724"/>
+                  </a:lnTo>
+                  <a:lnTo>
+                    <a:pt x="3250709" y="964069"/>
+                  </a:lnTo>
+                  <a:lnTo>
+                    <a:pt x="3321054" y="969319"/>
+                  </a:lnTo>
+                  <a:lnTo>
+                    <a:pt x="3391398" y="974474"/>
+                  </a:lnTo>
+                  <a:lnTo>
+                    <a:pt x="3461743" y="979537"/>
+                  </a:lnTo>
+                  <a:lnTo>
+                    <a:pt x="3532087" y="984510"/>
+                  </a:lnTo>
+                  <a:lnTo>
+                    <a:pt x="3602432" y="989393"/>
+                  </a:lnTo>
+                  <a:lnTo>
+                    <a:pt x="3672776" y="994189"/>
+                  </a:lnTo>
+                  <a:lnTo>
+                    <a:pt x="3743121" y="998899"/>
+                  </a:lnTo>
+                  <a:lnTo>
+                    <a:pt x="3813465" y="1003525"/>
+                  </a:lnTo>
+                  <a:lnTo>
+                    <a:pt x="3883810" y="1008068"/>
+                  </a:lnTo>
+                  <a:lnTo>
+                    <a:pt x="3954154" y="1012530"/>
+                  </a:lnTo>
+                  <a:lnTo>
+                    <a:pt x="4024499" y="1016911"/>
+                  </a:lnTo>
+                  <a:lnTo>
+                    <a:pt x="4094843" y="1021214"/>
+                  </a:lnTo>
+                  <a:lnTo>
+                    <a:pt x="4165188" y="1025441"/>
+                  </a:lnTo>
+                  <a:lnTo>
+                    <a:pt x="4235532" y="1029591"/>
+                  </a:lnTo>
+                  <a:lnTo>
+                    <a:pt x="4305877" y="1033667"/>
+                  </a:lnTo>
+                  <a:lnTo>
+                    <a:pt x="4376221" y="1037670"/>
+                  </a:lnTo>
+                  <a:lnTo>
+                    <a:pt x="4446566" y="1041602"/>
+                  </a:lnTo>
+                  <a:lnTo>
+                    <a:pt x="4516910" y="1045463"/>
+                  </a:lnTo>
+                  <a:lnTo>
+                    <a:pt x="4587255" y="1049255"/>
+                  </a:lnTo>
+                  <a:lnTo>
+                    <a:pt x="4657599" y="1052978"/>
+                  </a:lnTo>
+                  <a:lnTo>
+                    <a:pt x="4727944" y="1056636"/>
+                  </a:lnTo>
+                  <a:lnTo>
+                    <a:pt x="4798288" y="1060228"/>
+                  </a:lnTo>
+                  <a:lnTo>
+                    <a:pt x="4868633" y="1063755"/>
+                  </a:lnTo>
+                  <a:lnTo>
+                    <a:pt x="4938977" y="1067219"/>
+                  </a:lnTo>
+                  <a:lnTo>
+                    <a:pt x="5009322" y="1070622"/>
+                  </a:lnTo>
+                  <a:lnTo>
+                    <a:pt x="5079666" y="1073963"/>
+                  </a:lnTo>
+                  <a:lnTo>
+                    <a:pt x="5150011" y="1077244"/>
+                  </a:lnTo>
+                  <a:lnTo>
+                    <a:pt x="5220355" y="1080467"/>
+                  </a:lnTo>
+                  <a:lnTo>
+                    <a:pt x="5290699" y="1083632"/>
+                  </a:lnTo>
+                  <a:lnTo>
+                    <a:pt x="5361044" y="1086740"/>
+                  </a:lnTo>
+                  <a:lnTo>
+                    <a:pt x="5431388" y="1089793"/>
+                  </a:lnTo>
+                  <a:lnTo>
+                    <a:pt x="5501733" y="1092791"/>
+                  </a:lnTo>
+                  <a:lnTo>
+                    <a:pt x="5572077" y="1095735"/>
+                  </a:lnTo>
+                  <a:lnTo>
+                    <a:pt x="5642422" y="1098627"/>
+                  </a:lnTo>
+                  <a:lnTo>
+                    <a:pt x="5712766" y="1101467"/>
+                  </a:lnTo>
+                  <a:lnTo>
+                    <a:pt x="5783111" y="1104256"/>
+                  </a:lnTo>
+                  <a:lnTo>
+                    <a:pt x="5853455" y="1106995"/>
+                  </a:lnTo>
+                  <a:lnTo>
+                    <a:pt x="5923800" y="1109685"/>
+                  </a:lnTo>
+                  <a:lnTo>
+                    <a:pt x="5994144" y="1112326"/>
+                  </a:lnTo>
+                  <a:lnTo>
+                    <a:pt x="6064489" y="1114921"/>
+                  </a:lnTo>
+                  <a:lnTo>
+                    <a:pt x="6134833" y="1117469"/>
+                  </a:lnTo>
+                  <a:lnTo>
+                    <a:pt x="6205178" y="1119971"/>
+                  </a:lnTo>
+                  <a:lnTo>
+                    <a:pt x="6275522" y="1122429"/>
+                  </a:lnTo>
+                  <a:lnTo>
+                    <a:pt x="6345867" y="1124842"/>
+                  </a:lnTo>
+                  <a:lnTo>
+                    <a:pt x="6416211" y="1127213"/>
+                  </a:lnTo>
+                  <a:lnTo>
+                    <a:pt x="6486556" y="1129541"/>
+                  </a:lnTo>
+                  <a:lnTo>
+                    <a:pt x="6556900" y="1131827"/>
+                  </a:lnTo>
+                  <a:lnTo>
+                    <a:pt x="6627245" y="1134072"/>
+                  </a:lnTo>
+                  <a:lnTo>
+                    <a:pt x="6697589" y="1136277"/>
+                  </a:lnTo>
+                  <a:lnTo>
+                    <a:pt x="6767934" y="1138443"/>
+                  </a:lnTo>
+                  <a:lnTo>
+                    <a:pt x="6838278" y="1140569"/>
                   </a:lnTo>
                 </a:path>
               </a:pathLst>
@@ -4234,312 +3944,637 @@
           </p:nvSpPr>
           <p:spPr>
             <a:xfrm>
-              <a:off x="1172049" y="2886830"/>
-              <a:ext cx="7090630" cy="2444800"/>
+              <a:off x="1235312" y="2702440"/>
+              <a:ext cx="6964104" cy="641014"/>
             </a:xfrm>
             <a:custGeom>
               <a:avLst/>
               <a:pathLst>
-                <a:path w="7090630" h="2444800">
+                <a:path w="6964104" h="641014">
+                  <a:moveTo>
+                    <a:pt x="6964104" y="641014"/>
+                  </a:moveTo>
+                  <a:lnTo>
+                    <a:pt x="6893760" y="639175"/>
+                  </a:lnTo>
+                  <a:lnTo>
+                    <a:pt x="6823415" y="637276"/>
+                  </a:lnTo>
+                  <a:lnTo>
+                    <a:pt x="6753071" y="635315"/>
+                  </a:lnTo>
+                  <a:lnTo>
+                    <a:pt x="6682726" y="633291"/>
+                  </a:lnTo>
+                  <a:lnTo>
+                    <a:pt x="6612382" y="631202"/>
+                  </a:lnTo>
+                  <a:lnTo>
+                    <a:pt x="6542037" y="629044"/>
+                  </a:lnTo>
+                  <a:lnTo>
+                    <a:pt x="6471693" y="626817"/>
+                  </a:lnTo>
+                  <a:lnTo>
+                    <a:pt x="6401348" y="624518"/>
+                  </a:lnTo>
+                  <a:lnTo>
+                    <a:pt x="6331004" y="622145"/>
+                  </a:lnTo>
+                  <a:lnTo>
+                    <a:pt x="6260659" y="619695"/>
+                  </a:lnTo>
+                  <a:lnTo>
+                    <a:pt x="6190315" y="617165"/>
+                  </a:lnTo>
+                  <a:lnTo>
+                    <a:pt x="6119970" y="614554"/>
+                  </a:lnTo>
+                  <a:lnTo>
+                    <a:pt x="6049626" y="611858"/>
+                  </a:lnTo>
+                  <a:lnTo>
+                    <a:pt x="5979281" y="609075"/>
+                  </a:lnTo>
+                  <a:lnTo>
+                    <a:pt x="5908937" y="606201"/>
+                  </a:lnTo>
+                  <a:lnTo>
+                    <a:pt x="5838592" y="603235"/>
+                  </a:lnTo>
+                  <a:lnTo>
+                    <a:pt x="5768248" y="600173"/>
+                  </a:lnTo>
+                  <a:lnTo>
+                    <a:pt x="5697903" y="597011"/>
+                  </a:lnTo>
+                  <a:lnTo>
+                    <a:pt x="5627559" y="593748"/>
+                  </a:lnTo>
+                  <a:lnTo>
+                    <a:pt x="5557214" y="590378"/>
+                  </a:lnTo>
+                  <a:lnTo>
+                    <a:pt x="5486870" y="586900"/>
+                  </a:lnTo>
+                  <a:lnTo>
+                    <a:pt x="5416525" y="583309"/>
+                  </a:lnTo>
+                  <a:lnTo>
+                    <a:pt x="5346181" y="579602"/>
+                  </a:lnTo>
+                  <a:lnTo>
+                    <a:pt x="5275836" y="575775"/>
+                  </a:lnTo>
+                  <a:lnTo>
+                    <a:pt x="5205492" y="571824"/>
+                  </a:lnTo>
+                  <a:lnTo>
+                    <a:pt x="5135147" y="567745"/>
+                  </a:lnTo>
+                  <a:lnTo>
+                    <a:pt x="5064803" y="563534"/>
+                  </a:lnTo>
+                  <a:lnTo>
+                    <a:pt x="4994458" y="559187"/>
+                  </a:lnTo>
+                  <a:lnTo>
+                    <a:pt x="4924114" y="554699"/>
+                  </a:lnTo>
+                  <a:lnTo>
+                    <a:pt x="4853769" y="550066"/>
+                  </a:lnTo>
+                  <a:lnTo>
+                    <a:pt x="4783425" y="545283"/>
+                  </a:lnTo>
+                  <a:lnTo>
+                    <a:pt x="4713080" y="540345"/>
+                  </a:lnTo>
+                  <a:lnTo>
+                    <a:pt x="4642736" y="535248"/>
+                  </a:lnTo>
+                  <a:lnTo>
+                    <a:pt x="4572391" y="529985"/>
+                  </a:lnTo>
+                  <a:lnTo>
+                    <a:pt x="4502047" y="524552"/>
+                  </a:lnTo>
+                  <a:lnTo>
+                    <a:pt x="4431702" y="518943"/>
+                  </a:lnTo>
+                  <a:lnTo>
+                    <a:pt x="4361358" y="513153"/>
+                  </a:lnTo>
+                  <a:lnTo>
+                    <a:pt x="4291013" y="507175"/>
+                  </a:lnTo>
+                  <a:lnTo>
+                    <a:pt x="4220669" y="501004"/>
+                  </a:lnTo>
+                  <a:lnTo>
+                    <a:pt x="4150324" y="494633"/>
+                  </a:lnTo>
+                  <a:lnTo>
+                    <a:pt x="4079980" y="488056"/>
+                  </a:lnTo>
+                  <a:lnTo>
+                    <a:pt x="4009635" y="481266"/>
+                  </a:lnTo>
+                  <a:lnTo>
+                    <a:pt x="3939291" y="474256"/>
+                  </a:lnTo>
+                  <a:lnTo>
+                    <a:pt x="3868946" y="467020"/>
+                  </a:lnTo>
+                  <a:lnTo>
+                    <a:pt x="3798602" y="459549"/>
+                  </a:lnTo>
+                  <a:lnTo>
+                    <a:pt x="3728257" y="451837"/>
+                  </a:lnTo>
+                  <a:lnTo>
+                    <a:pt x="3657913" y="443874"/>
+                  </a:lnTo>
+                  <a:lnTo>
+                    <a:pt x="3587569" y="435655"/>
+                  </a:lnTo>
+                  <a:lnTo>
+                    <a:pt x="3517224" y="427169"/>
+                  </a:lnTo>
+                  <a:lnTo>
+                    <a:pt x="3446880" y="418408"/>
+                  </a:lnTo>
+                  <a:lnTo>
+                    <a:pt x="3376535" y="409364"/>
+                  </a:lnTo>
+                  <a:lnTo>
+                    <a:pt x="3306191" y="400027"/>
+                  </a:lnTo>
+                  <a:lnTo>
+                    <a:pt x="3235846" y="393933"/>
+                  </a:lnTo>
+                  <a:lnTo>
+                    <a:pt x="3165502" y="388392"/>
+                  </a:lnTo>
+                  <a:lnTo>
+                    <a:pt x="3095157" y="382749"/>
+                  </a:lnTo>
+                  <a:lnTo>
+                    <a:pt x="3024813" y="377003"/>
+                  </a:lnTo>
+                  <a:lnTo>
+                    <a:pt x="2954468" y="371152"/>
+                  </a:lnTo>
+                  <a:lnTo>
+                    <a:pt x="2884124" y="365195"/>
+                  </a:lnTo>
+                  <a:lnTo>
+                    <a:pt x="2813779" y="359129"/>
+                  </a:lnTo>
+                  <a:lnTo>
+                    <a:pt x="2743435" y="352952"/>
+                  </a:lnTo>
+                  <a:lnTo>
+                    <a:pt x="2673090" y="346663"/>
+                  </a:lnTo>
+                  <a:lnTo>
+                    <a:pt x="2602746" y="340259"/>
+                  </a:lnTo>
+                  <a:lnTo>
+                    <a:pt x="2532401" y="333738"/>
+                  </a:lnTo>
+                  <a:lnTo>
+                    <a:pt x="2462057" y="327099"/>
+                  </a:lnTo>
+                  <a:lnTo>
+                    <a:pt x="2391712" y="320338"/>
+                  </a:lnTo>
+                  <a:lnTo>
+                    <a:pt x="2321368" y="313454"/>
+                  </a:lnTo>
+                  <a:lnTo>
+                    <a:pt x="2251023" y="306445"/>
+                  </a:lnTo>
+                  <a:lnTo>
+                    <a:pt x="2180679" y="299307"/>
+                  </a:lnTo>
+                  <a:lnTo>
+                    <a:pt x="2110334" y="292040"/>
+                  </a:lnTo>
+                  <a:lnTo>
+                    <a:pt x="2039990" y="284640"/>
+                  </a:lnTo>
+                  <a:lnTo>
+                    <a:pt x="1969645" y="277105"/>
+                  </a:lnTo>
+                  <a:lnTo>
+                    <a:pt x="1899301" y="269433"/>
+                  </a:lnTo>
+                  <a:lnTo>
+                    <a:pt x="1828956" y="261621"/>
+                  </a:lnTo>
+                  <a:lnTo>
+                    <a:pt x="1758612" y="253666"/>
+                  </a:lnTo>
+                  <a:lnTo>
+                    <a:pt x="1688267" y="245567"/>
+                  </a:lnTo>
+                  <a:lnTo>
+                    <a:pt x="1617923" y="237319"/>
+                  </a:lnTo>
+                  <a:lnTo>
+                    <a:pt x="1547578" y="228921"/>
+                  </a:lnTo>
+                  <a:lnTo>
+                    <a:pt x="1477234" y="220371"/>
+                  </a:lnTo>
+                  <a:lnTo>
+                    <a:pt x="1406889" y="211664"/>
+                  </a:lnTo>
+                  <a:lnTo>
+                    <a:pt x="1336545" y="202798"/>
+                  </a:lnTo>
+                  <a:lnTo>
+                    <a:pt x="1266200" y="193771"/>
+                  </a:lnTo>
+                  <a:lnTo>
+                    <a:pt x="1195856" y="184579"/>
+                  </a:lnTo>
+                  <a:lnTo>
+                    <a:pt x="1125511" y="175220"/>
+                  </a:lnTo>
+                  <a:lnTo>
+                    <a:pt x="1055167" y="165689"/>
+                  </a:lnTo>
+                  <a:lnTo>
+                    <a:pt x="984822" y="155986"/>
+                  </a:lnTo>
+                  <a:lnTo>
+                    <a:pt x="914478" y="146105"/>
+                  </a:lnTo>
+                  <a:lnTo>
+                    <a:pt x="844133" y="136044"/>
+                  </a:lnTo>
+                  <a:lnTo>
+                    <a:pt x="773789" y="125799"/>
+                  </a:lnTo>
+                  <a:lnTo>
+                    <a:pt x="703444" y="115368"/>
+                  </a:lnTo>
+                  <a:lnTo>
+                    <a:pt x="633100" y="104746"/>
+                  </a:lnTo>
+                  <a:lnTo>
+                    <a:pt x="562755" y="93931"/>
+                  </a:lnTo>
+                  <a:lnTo>
+                    <a:pt x="492411" y="82919"/>
+                  </a:lnTo>
+                  <a:lnTo>
+                    <a:pt x="422066" y="71706"/>
+                  </a:lnTo>
+                  <a:lnTo>
+                    <a:pt x="351722" y="60288"/>
+                  </a:lnTo>
+                  <a:lnTo>
+                    <a:pt x="281377" y="48662"/>
+                  </a:lnTo>
+                  <a:lnTo>
+                    <a:pt x="211033" y="36824"/>
+                  </a:lnTo>
+                  <a:lnTo>
+                    <a:pt x="140688" y="24770"/>
+                  </a:lnTo>
+                  <a:lnTo>
+                    <a:pt x="70344" y="12497"/>
+                  </a:lnTo>
+                  <a:lnTo>
+                    <a:pt x="0" y="0"/>
+                  </a:lnTo>
+                </a:path>
+              </a:pathLst>
+            </a:custGeom>
+          </p:spPr>
+          <p:txBody>
+            <a:bodyPr/>
+            <a:lstStyle/>
+            <a:p/>
+          </p:txBody>
+        </p:sp>
+        <p:sp>
+          <p:nvSpPr>
+            <p:cNvPr id="24" name="pl24"/>
+            <p:cNvSpPr/>
+            <p:nvPr/>
+          </p:nvSpPr>
+          <p:spPr>
+            <a:xfrm>
+              <a:off x="1235312" y="2436602"/>
+              <a:ext cx="6964104" cy="882270"/>
+            </a:xfrm>
+            <a:custGeom>
+              <a:avLst/>
+              <a:pathLst>
+                <a:path w="6964104" h="882270">
                   <a:moveTo>
                     <a:pt x="0" y="0"/>
                   </a:moveTo>
                   <a:lnTo>
-                    <a:pt x="71622" y="65831"/>
-                  </a:lnTo>
-                  <a:lnTo>
-                    <a:pt x="143245" y="130039"/>
-                  </a:lnTo>
-                  <a:lnTo>
-                    <a:pt x="214867" y="192665"/>
-                  </a:lnTo>
-                  <a:lnTo>
-                    <a:pt x="286490" y="253747"/>
-                  </a:lnTo>
-                  <a:lnTo>
-                    <a:pt x="358112" y="313323"/>
-                  </a:lnTo>
-                  <a:lnTo>
-                    <a:pt x="429735" y="371430"/>
-                  </a:lnTo>
-                  <a:lnTo>
-                    <a:pt x="501357" y="428105"/>
-                  </a:lnTo>
-                  <a:lnTo>
-                    <a:pt x="572980" y="483383"/>
-                  </a:lnTo>
-                  <a:lnTo>
-                    <a:pt x="644602" y="537298"/>
-                  </a:lnTo>
-                  <a:lnTo>
-                    <a:pt x="716225" y="589883"/>
-                  </a:lnTo>
-                  <a:lnTo>
-                    <a:pt x="787847" y="641173"/>
-                  </a:lnTo>
-                  <a:lnTo>
-                    <a:pt x="859470" y="691198"/>
-                  </a:lnTo>
-                  <a:lnTo>
-                    <a:pt x="931092" y="739990"/>
-                  </a:lnTo>
-                  <a:lnTo>
-                    <a:pt x="1002715" y="787579"/>
-                  </a:lnTo>
-                  <a:lnTo>
-                    <a:pt x="1074337" y="833995"/>
-                  </a:lnTo>
-                  <a:lnTo>
-                    <a:pt x="1145960" y="879267"/>
-                  </a:lnTo>
-                  <a:lnTo>
-                    <a:pt x="1217582" y="923422"/>
-                  </a:lnTo>
-                  <a:lnTo>
-                    <a:pt x="1289205" y="966489"/>
-                  </a:lnTo>
-                  <a:lnTo>
-                    <a:pt x="1360827" y="1008495"/>
-                  </a:lnTo>
-                  <a:lnTo>
-                    <a:pt x="1432450" y="1049465"/>
-                  </a:lnTo>
-                  <a:lnTo>
-                    <a:pt x="1504073" y="1089425"/>
-                  </a:lnTo>
-                  <a:lnTo>
-                    <a:pt x="1575695" y="1128399"/>
-                  </a:lnTo>
-                  <a:lnTo>
-                    <a:pt x="1647318" y="1166413"/>
-                  </a:lnTo>
-                  <a:lnTo>
-                    <a:pt x="1718940" y="1203490"/>
-                  </a:lnTo>
-                  <a:lnTo>
-                    <a:pt x="1790563" y="1239653"/>
-                  </a:lnTo>
-                  <a:lnTo>
-                    <a:pt x="1862185" y="1274924"/>
-                  </a:lnTo>
-                  <a:lnTo>
-                    <a:pt x="1933808" y="1309326"/>
-                  </a:lnTo>
-                  <a:lnTo>
-                    <a:pt x="2005430" y="1342880"/>
-                  </a:lnTo>
-                  <a:lnTo>
-                    <a:pt x="2077053" y="1375607"/>
-                  </a:lnTo>
-                  <a:lnTo>
-                    <a:pt x="2148675" y="1407526"/>
-                  </a:lnTo>
-                  <a:lnTo>
-                    <a:pt x="2220298" y="1438659"/>
-                  </a:lnTo>
-                  <a:lnTo>
-                    <a:pt x="2291920" y="1469025"/>
-                  </a:lnTo>
-                  <a:lnTo>
-                    <a:pt x="2363543" y="1498642"/>
-                  </a:lnTo>
-                  <a:lnTo>
-                    <a:pt x="2435165" y="1527528"/>
-                  </a:lnTo>
-                  <a:lnTo>
-                    <a:pt x="2506788" y="1555703"/>
-                  </a:lnTo>
-                  <a:lnTo>
-                    <a:pt x="2578410" y="1583183"/>
-                  </a:lnTo>
-                  <a:lnTo>
-                    <a:pt x="2650033" y="1609986"/>
-                  </a:lnTo>
-                  <a:lnTo>
-                    <a:pt x="2721655" y="1636128"/>
-                  </a:lnTo>
-                  <a:lnTo>
-                    <a:pt x="2793278" y="1661625"/>
-                  </a:lnTo>
-                  <a:lnTo>
-                    <a:pt x="2864901" y="1686494"/>
-                  </a:lnTo>
-                  <a:lnTo>
-                    <a:pt x="2936523" y="1710750"/>
-                  </a:lnTo>
-                  <a:lnTo>
-                    <a:pt x="3008146" y="1734407"/>
-                  </a:lnTo>
-                  <a:lnTo>
-                    <a:pt x="3079768" y="1757482"/>
-                  </a:lnTo>
-                  <a:lnTo>
-                    <a:pt x="3151391" y="1779988"/>
-                  </a:lnTo>
-                  <a:lnTo>
-                    <a:pt x="3223013" y="1801939"/>
-                  </a:lnTo>
-                  <a:lnTo>
-                    <a:pt x="3294636" y="1823349"/>
-                  </a:lnTo>
-                  <a:lnTo>
-                    <a:pt x="3366258" y="1844231"/>
-                  </a:lnTo>
-                  <a:lnTo>
-                    <a:pt x="3437881" y="1864598"/>
-                  </a:lnTo>
-                  <a:lnTo>
-                    <a:pt x="3509503" y="1884463"/>
-                  </a:lnTo>
-                  <a:lnTo>
-                    <a:pt x="3581126" y="1903839"/>
-                  </a:lnTo>
-                  <a:lnTo>
-                    <a:pt x="3652748" y="1922736"/>
-                  </a:lnTo>
-                  <a:lnTo>
-                    <a:pt x="3724371" y="1941168"/>
-                  </a:lnTo>
-                  <a:lnTo>
-                    <a:pt x="3795993" y="1959146"/>
-                  </a:lnTo>
-                  <a:lnTo>
-                    <a:pt x="3867616" y="1976680"/>
-                  </a:lnTo>
-                  <a:lnTo>
-                    <a:pt x="3939238" y="1993782"/>
-                  </a:lnTo>
-                  <a:lnTo>
-                    <a:pt x="4010861" y="2010463"/>
-                  </a:lnTo>
-                  <a:lnTo>
-                    <a:pt x="4082483" y="2026732"/>
-                  </a:lnTo>
-                  <a:lnTo>
-                    <a:pt x="4154106" y="2042600"/>
-                  </a:lnTo>
-                  <a:lnTo>
-                    <a:pt x="4225729" y="2058077"/>
-                  </a:lnTo>
-                  <a:lnTo>
-                    <a:pt x="4297351" y="2073173"/>
-                  </a:lnTo>
-                  <a:lnTo>
-                    <a:pt x="4368974" y="2087896"/>
-                  </a:lnTo>
-                  <a:lnTo>
-                    <a:pt x="4440596" y="2102257"/>
-                  </a:lnTo>
-                  <a:lnTo>
-                    <a:pt x="4512219" y="2116263"/>
-                  </a:lnTo>
-                  <a:lnTo>
-                    <a:pt x="4583841" y="2129924"/>
-                  </a:lnTo>
-                  <a:lnTo>
-                    <a:pt x="4655464" y="2143248"/>
-                  </a:lnTo>
-                  <a:lnTo>
-                    <a:pt x="4727086" y="2156244"/>
-                  </a:lnTo>
-                  <a:lnTo>
-                    <a:pt x="4798709" y="2168920"/>
-                  </a:lnTo>
-                  <a:lnTo>
-                    <a:pt x="4870331" y="2181283"/>
-                  </a:lnTo>
-                  <a:lnTo>
-                    <a:pt x="4941954" y="2193341"/>
-                  </a:lnTo>
-                  <a:lnTo>
-                    <a:pt x="5013576" y="2205102"/>
-                  </a:lnTo>
-                  <a:lnTo>
-                    <a:pt x="5085199" y="2216573"/>
-                  </a:lnTo>
-                  <a:lnTo>
-                    <a:pt x="5156821" y="2227761"/>
-                  </a:lnTo>
-                  <a:lnTo>
-                    <a:pt x="5228444" y="2238674"/>
-                  </a:lnTo>
-                  <a:lnTo>
-                    <a:pt x="5300066" y="2249317"/>
-                  </a:lnTo>
-                  <a:lnTo>
-                    <a:pt x="5371689" y="2259698"/>
-                  </a:lnTo>
-                  <a:lnTo>
-                    <a:pt x="5443311" y="2269823"/>
-                  </a:lnTo>
-                  <a:lnTo>
-                    <a:pt x="5514934" y="2279699"/>
-                  </a:lnTo>
-                  <a:lnTo>
-                    <a:pt x="5586557" y="2289331"/>
-                  </a:lnTo>
-                  <a:lnTo>
-                    <a:pt x="5658179" y="2298725"/>
-                  </a:lnTo>
-                  <a:lnTo>
-                    <a:pt x="5729802" y="2307888"/>
-                  </a:lnTo>
-                  <a:lnTo>
-                    <a:pt x="5801424" y="2316826"/>
-                  </a:lnTo>
-                  <a:lnTo>
-                    <a:pt x="5873047" y="2325542"/>
-                  </a:lnTo>
-                  <a:lnTo>
-                    <a:pt x="5944669" y="2334044"/>
-                  </a:lnTo>
-                  <a:lnTo>
-                    <a:pt x="6016292" y="2342337"/>
-                  </a:lnTo>
-                  <a:lnTo>
-                    <a:pt x="6087914" y="2350425"/>
-                  </a:lnTo>
-                  <a:lnTo>
-                    <a:pt x="6159537" y="2358313"/>
-                  </a:lnTo>
-                  <a:lnTo>
-                    <a:pt x="6231159" y="2366007"/>
-                  </a:lnTo>
-                  <a:lnTo>
-                    <a:pt x="6302782" y="2373511"/>
-                  </a:lnTo>
-                  <a:lnTo>
-                    <a:pt x="6374404" y="2380831"/>
-                  </a:lnTo>
-                  <a:lnTo>
-                    <a:pt x="6446027" y="2387970"/>
-                  </a:lnTo>
-                  <a:lnTo>
-                    <a:pt x="6517649" y="2394933"/>
-                  </a:lnTo>
-                  <a:lnTo>
-                    <a:pt x="6589272" y="2401724"/>
-                  </a:lnTo>
-                  <a:lnTo>
-                    <a:pt x="6660894" y="2408348"/>
-                  </a:lnTo>
-                  <a:lnTo>
-                    <a:pt x="6732517" y="2414809"/>
-                  </a:lnTo>
-                  <a:lnTo>
-                    <a:pt x="6804139" y="2421110"/>
-                  </a:lnTo>
-                  <a:lnTo>
-                    <a:pt x="6875762" y="2427256"/>
-                  </a:lnTo>
-                  <a:lnTo>
-                    <a:pt x="6947385" y="2433250"/>
-                  </a:lnTo>
-                  <a:lnTo>
-                    <a:pt x="7019007" y="2439097"/>
-                  </a:lnTo>
-                  <a:lnTo>
-                    <a:pt x="7090630" y="2444800"/>
+                    <a:pt x="70344" y="23756"/>
+                  </a:lnTo>
+                  <a:lnTo>
+                    <a:pt x="140688" y="46928"/>
+                  </a:lnTo>
+                  <a:lnTo>
+                    <a:pt x="211033" y="69528"/>
+                  </a:lnTo>
+                  <a:lnTo>
+                    <a:pt x="281377" y="91571"/>
+                  </a:lnTo>
+                  <a:lnTo>
+                    <a:pt x="351722" y="113070"/>
+                  </a:lnTo>
+                  <a:lnTo>
+                    <a:pt x="422066" y="134040"/>
+                  </a:lnTo>
+                  <a:lnTo>
+                    <a:pt x="492411" y="154493"/>
+                  </a:lnTo>
+                  <a:lnTo>
+                    <a:pt x="562755" y="174441"/>
+                  </a:lnTo>
+                  <a:lnTo>
+                    <a:pt x="633100" y="193898"/>
+                  </a:lnTo>
+                  <a:lnTo>
+                    <a:pt x="703444" y="212875"/>
+                  </a:lnTo>
+                  <a:lnTo>
+                    <a:pt x="773789" y="231384"/>
+                  </a:lnTo>
+                  <a:lnTo>
+                    <a:pt x="844133" y="249437"/>
+                  </a:lnTo>
+                  <a:lnTo>
+                    <a:pt x="914478" y="267045"/>
+                  </a:lnTo>
+                  <a:lnTo>
+                    <a:pt x="984822" y="284218"/>
+                  </a:lnTo>
+                  <a:lnTo>
+                    <a:pt x="1055167" y="300969"/>
+                  </a:lnTo>
+                  <a:lnTo>
+                    <a:pt x="1125511" y="317306"/>
+                  </a:lnTo>
+                  <a:lnTo>
+                    <a:pt x="1195856" y="333241"/>
+                  </a:lnTo>
+                  <a:lnTo>
+                    <a:pt x="1266200" y="348783"/>
+                  </a:lnTo>
+                  <a:lnTo>
+                    <a:pt x="1336545" y="363942"/>
+                  </a:lnTo>
+                  <a:lnTo>
+                    <a:pt x="1406889" y="378727"/>
+                  </a:lnTo>
+                  <a:lnTo>
+                    <a:pt x="1477234" y="393147"/>
+                  </a:lnTo>
+                  <a:lnTo>
+                    <a:pt x="1547578" y="407212"/>
+                  </a:lnTo>
+                  <a:lnTo>
+                    <a:pt x="1617923" y="420931"/>
+                  </a:lnTo>
+                  <a:lnTo>
+                    <a:pt x="1688267" y="434311"/>
+                  </a:lnTo>
+                  <a:lnTo>
+                    <a:pt x="1758612" y="447361"/>
+                  </a:lnTo>
+                  <a:lnTo>
+                    <a:pt x="1828956" y="460090"/>
+                  </a:lnTo>
+                  <a:lnTo>
+                    <a:pt x="1899301" y="472505"/>
+                  </a:lnTo>
+                  <a:lnTo>
+                    <a:pt x="1969645" y="484613"/>
+                  </a:lnTo>
+                  <a:lnTo>
+                    <a:pt x="2039990" y="496424"/>
+                  </a:lnTo>
+                  <a:lnTo>
+                    <a:pt x="2110334" y="507943"/>
+                  </a:lnTo>
+                  <a:lnTo>
+                    <a:pt x="2180679" y="519178"/>
+                  </a:lnTo>
+                  <a:lnTo>
+                    <a:pt x="2251023" y="530136"/>
+                  </a:lnTo>
+                  <a:lnTo>
+                    <a:pt x="2321368" y="540824"/>
+                  </a:lnTo>
+                  <a:lnTo>
+                    <a:pt x="2391712" y="551249"/>
+                  </a:lnTo>
+                  <a:lnTo>
+                    <a:pt x="2462057" y="561416"/>
+                  </a:lnTo>
+                  <a:lnTo>
+                    <a:pt x="2532401" y="571333"/>
+                  </a:lnTo>
+                  <a:lnTo>
+                    <a:pt x="2602746" y="581006"/>
+                  </a:lnTo>
+                  <a:lnTo>
+                    <a:pt x="2673090" y="590440"/>
+                  </a:lnTo>
+                  <a:lnTo>
+                    <a:pt x="2743435" y="599641"/>
+                  </a:lnTo>
+                  <a:lnTo>
+                    <a:pt x="2813779" y="608616"/>
+                  </a:lnTo>
+                  <a:lnTo>
+                    <a:pt x="2884124" y="617369"/>
+                  </a:lnTo>
+                  <a:lnTo>
+                    <a:pt x="2954468" y="625907"/>
+                  </a:lnTo>
+                  <a:lnTo>
+                    <a:pt x="3024813" y="634234"/>
+                  </a:lnTo>
+                  <a:lnTo>
+                    <a:pt x="3095157" y="642355"/>
+                  </a:lnTo>
+                  <a:lnTo>
+                    <a:pt x="3165502" y="650277"/>
+                  </a:lnTo>
+                  <a:lnTo>
+                    <a:pt x="3235846" y="658003"/>
+                  </a:lnTo>
+                  <a:lnTo>
+                    <a:pt x="3306191" y="665539"/>
+                  </a:lnTo>
+                  <a:lnTo>
+                    <a:pt x="3376535" y="672889"/>
+                  </a:lnTo>
+                  <a:lnTo>
+                    <a:pt x="3446880" y="680058"/>
+                  </a:lnTo>
+                  <a:lnTo>
+                    <a:pt x="3517224" y="687050"/>
+                  </a:lnTo>
+                  <a:lnTo>
+                    <a:pt x="3587569" y="693870"/>
+                  </a:lnTo>
+                  <a:lnTo>
+                    <a:pt x="3657913" y="700522"/>
+                  </a:lnTo>
+                  <a:lnTo>
+                    <a:pt x="3728257" y="707009"/>
+                  </a:lnTo>
+                  <a:lnTo>
+                    <a:pt x="3798602" y="713337"/>
+                  </a:lnTo>
+                  <a:lnTo>
+                    <a:pt x="3868946" y="719509"/>
+                  </a:lnTo>
+                  <a:lnTo>
+                    <a:pt x="3939291" y="725528"/>
+                  </a:lnTo>
+                  <a:lnTo>
+                    <a:pt x="4009635" y="731400"/>
+                  </a:lnTo>
+                  <a:lnTo>
+                    <a:pt x="4079980" y="737126"/>
+                  </a:lnTo>
+                  <a:lnTo>
+                    <a:pt x="4150324" y="742711"/>
+                  </a:lnTo>
+                  <a:lnTo>
+                    <a:pt x="4220669" y="748159"/>
+                  </a:lnTo>
+                  <a:lnTo>
+                    <a:pt x="4291013" y="753472"/>
+                  </a:lnTo>
+                  <a:lnTo>
+                    <a:pt x="4361358" y="758655"/>
+                  </a:lnTo>
+                  <a:lnTo>
+                    <a:pt x="4431702" y="763709"/>
+                  </a:lnTo>
+                  <a:lnTo>
+                    <a:pt x="4502047" y="768639"/>
+                  </a:lnTo>
+                  <a:lnTo>
+                    <a:pt x="4572391" y="773448"/>
+                  </a:lnTo>
+                  <a:lnTo>
+                    <a:pt x="4642736" y="778137"/>
+                  </a:lnTo>
+                  <a:lnTo>
+                    <a:pt x="4713080" y="782712"/>
+                  </a:lnTo>
+                  <a:lnTo>
+                    <a:pt x="4783425" y="787173"/>
+                  </a:lnTo>
+                  <a:lnTo>
+                    <a:pt x="4853769" y="791525"/>
+                  </a:lnTo>
+                  <a:lnTo>
+                    <a:pt x="4924114" y="795769"/>
+                  </a:lnTo>
+                  <a:lnTo>
+                    <a:pt x="4994458" y="799909"/>
+                  </a:lnTo>
+                  <a:lnTo>
+                    <a:pt x="5064803" y="803946"/>
+                  </a:lnTo>
+                  <a:lnTo>
+                    <a:pt x="5135147" y="807884"/>
+                  </a:lnTo>
+                  <a:lnTo>
+                    <a:pt x="5205492" y="811725"/>
+                  </a:lnTo>
+                  <a:lnTo>
+                    <a:pt x="5275836" y="815472"/>
+                  </a:lnTo>
+                  <a:lnTo>
+                    <a:pt x="5346181" y="819125"/>
+                  </a:lnTo>
+                  <a:lnTo>
+                    <a:pt x="5416525" y="822689"/>
+                  </a:lnTo>
+                  <a:lnTo>
+                    <a:pt x="5486870" y="826165"/>
+                  </a:lnTo>
+                  <a:lnTo>
+                    <a:pt x="5557214" y="829556"/>
+                  </a:lnTo>
+                  <a:lnTo>
+                    <a:pt x="5627559" y="832862"/>
+                  </a:lnTo>
+                  <a:lnTo>
+                    <a:pt x="5697903" y="836088"/>
+                  </a:lnTo>
+                  <a:lnTo>
+                    <a:pt x="5768248" y="839233"/>
+                  </a:lnTo>
+                  <a:lnTo>
+                    <a:pt x="5838592" y="842301"/>
+                  </a:lnTo>
+                  <a:lnTo>
+                    <a:pt x="5908937" y="845294"/>
+                  </a:lnTo>
+                  <a:lnTo>
+                    <a:pt x="5979281" y="848213"/>
+                  </a:lnTo>
+                  <a:lnTo>
+                    <a:pt x="6049626" y="851059"/>
+                  </a:lnTo>
+                  <a:lnTo>
+                    <a:pt x="6119970" y="853836"/>
+                  </a:lnTo>
+                  <a:lnTo>
+                    <a:pt x="6190315" y="856544"/>
+                  </a:lnTo>
+                  <a:lnTo>
+                    <a:pt x="6260659" y="859186"/>
+                  </a:lnTo>
+                  <a:lnTo>
+                    <a:pt x="6331004" y="861762"/>
+                  </a:lnTo>
+                  <a:lnTo>
+                    <a:pt x="6401348" y="864275"/>
+                  </a:lnTo>
+                  <a:lnTo>
+                    <a:pt x="6471693" y="866725"/>
+                  </a:lnTo>
+                  <a:lnTo>
+                    <a:pt x="6542037" y="869116"/>
+                  </a:lnTo>
+                  <a:lnTo>
+                    <a:pt x="6612382" y="871447"/>
+                  </a:lnTo>
+                  <a:lnTo>
+                    <a:pt x="6682726" y="873721"/>
+                  </a:lnTo>
+                  <a:lnTo>
+                    <a:pt x="6753071" y="875939"/>
+                  </a:lnTo>
+                  <a:lnTo>
+                    <a:pt x="6823415" y="878102"/>
+                  </a:lnTo>
+                  <a:lnTo>
+                    <a:pt x="6893760" y="880212"/>
+                  </a:lnTo>
+                  <a:lnTo>
+                    <a:pt x="6964104" y="882270"/>
                   </a:lnTo>
                 </a:path>
               </a:pathLst>
@@ -4562,27 +4597,27 @@
         </p:sp>
         <p:sp>
           <p:nvSpPr>
-            <p:cNvPr id="24" name="pl24"/>
+            <p:cNvPr id="25" name="pl25"/>
             <p:cNvSpPr/>
             <p:nvPr/>
           </p:nvSpPr>
           <p:spPr>
             <a:xfrm>
-              <a:off x="817517" y="4727786"/>
-              <a:ext cx="7799693" cy="0"/>
+              <a:off x="887106" y="3100960"/>
+              <a:ext cx="7660515" cy="0"/>
             </a:xfrm>
             <a:custGeom>
               <a:avLst/>
               <a:pathLst>
-                <a:path w="7799693" h="0">
+                <a:path w="7660515" h="0">
                   <a:moveTo>
                     <a:pt x="0" y="0"/>
                   </a:moveTo>
                   <a:lnTo>
-                    <a:pt x="7799693" y="0"/>
-                  </a:lnTo>
-                  <a:lnTo>
-                    <a:pt x="7799693" y="0"/>
+                    <a:pt x="7660515" y="0"/>
+                  </a:lnTo>
+                  <a:lnTo>
+                    <a:pt x="7660515" y="0"/>
                   </a:lnTo>
                 </a:path>
               </a:pathLst>
@@ -4605,21 +4640,21 @@
         </p:sp>
         <p:sp>
           <p:nvSpPr>
-            <p:cNvPr id="25" name="pl25"/>
+            <p:cNvPr id="26" name="pl26"/>
             <p:cNvSpPr/>
             <p:nvPr/>
           </p:nvSpPr>
           <p:spPr>
             <a:xfrm>
-              <a:off x="4526955" y="2073503"/>
-              <a:ext cx="0" cy="3649639"/>
+              <a:off x="4530353" y="2143092"/>
+              <a:ext cx="0" cy="1317069"/>
             </a:xfrm>
             <a:custGeom>
               <a:avLst/>
               <a:pathLst>
-                <a:path w="0" h="3649639">
+                <a:path w="0" h="1317069">
                   <a:moveTo>
-                    <a:pt x="0" y="3649639"/>
+                    <a:pt x="0" y="1317069"/>
                   </a:moveTo>
                   <a:lnTo>
                     <a:pt x="0" y="0"/>
@@ -4648,13 +4683,13 @@
         </p:sp>
         <p:sp>
           <p:nvSpPr>
-            <p:cNvPr id="26" name="tx26"/>
+            <p:cNvPr id="27" name="tx27"/>
             <p:cNvSpPr/>
             <p:nvPr/>
           </p:nvSpPr>
           <p:spPr>
             <a:xfrm>
-              <a:off x="692708" y="5517199"/>
+              <a:off x="762297" y="3360243"/>
               <a:ext cx="62179" cy="80101"/>
             </a:xfrm>
             <a:prstGeom prst="rect">
@@ -4694,13 +4729,13 @@
         </p:sp>
         <p:sp>
           <p:nvSpPr>
-            <p:cNvPr id="27" name="tx27"/>
+            <p:cNvPr id="28" name="tx28"/>
             <p:cNvSpPr/>
             <p:nvPr/>
           </p:nvSpPr>
           <p:spPr>
             <a:xfrm>
-              <a:off x="692708" y="4687735"/>
+              <a:off x="762297" y="3060909"/>
               <a:ext cx="62179" cy="80101"/>
             </a:xfrm>
             <a:prstGeom prst="rect">
@@ -4740,13 +4775,13 @@
         </p:sp>
         <p:sp>
           <p:nvSpPr>
-            <p:cNvPr id="28" name="tx28"/>
+            <p:cNvPr id="29" name="tx29"/>
             <p:cNvSpPr/>
             <p:nvPr/>
           </p:nvSpPr>
           <p:spPr>
             <a:xfrm>
-              <a:off x="692708" y="3858272"/>
+              <a:off x="762297" y="2761575"/>
               <a:ext cx="62179" cy="80101"/>
             </a:xfrm>
             <a:prstGeom prst="rect">
@@ -4786,13 +4821,13 @@
         </p:sp>
         <p:sp>
           <p:nvSpPr>
-            <p:cNvPr id="29" name="tx29"/>
+            <p:cNvPr id="30" name="tx30"/>
             <p:cNvSpPr/>
             <p:nvPr/>
           </p:nvSpPr>
           <p:spPr>
             <a:xfrm>
-              <a:off x="692708" y="3028808"/>
+              <a:off x="762297" y="2462242"/>
               <a:ext cx="62179" cy="80101"/>
             </a:xfrm>
             <a:prstGeom prst="rect">
@@ -4832,13 +4867,13 @@
         </p:sp>
         <p:sp>
           <p:nvSpPr>
-            <p:cNvPr id="30" name="tx30"/>
+            <p:cNvPr id="31" name="tx31"/>
             <p:cNvSpPr/>
             <p:nvPr/>
           </p:nvSpPr>
           <p:spPr>
             <a:xfrm>
-              <a:off x="692708" y="2199345"/>
+              <a:off x="762297" y="2162908"/>
               <a:ext cx="62179" cy="80101"/>
             </a:xfrm>
             <a:prstGeom prst="rect">
@@ -4878,13 +4913,13 @@
         </p:sp>
         <p:sp>
           <p:nvSpPr>
-            <p:cNvPr id="31" name="tx31"/>
+            <p:cNvPr id="32" name="tx32"/>
             <p:cNvSpPr/>
             <p:nvPr/>
           </p:nvSpPr>
           <p:spPr>
             <a:xfrm>
-              <a:off x="2421884" y="5785772"/>
+              <a:off x="2461403" y="3522791"/>
               <a:ext cx="161574" cy="80101"/>
             </a:xfrm>
             <a:prstGeom prst="rect">
@@ -4924,13 +4959,13 @@
         </p:sp>
         <p:sp>
           <p:nvSpPr>
-            <p:cNvPr id="32" name="tx32"/>
+            <p:cNvPr id="33" name="tx33"/>
             <p:cNvSpPr/>
             <p:nvPr/>
           </p:nvSpPr>
           <p:spPr>
             <a:xfrm>
-              <a:off x="4542539" y="5785772"/>
+              <a:off x="4545104" y="3522791"/>
               <a:ext cx="62179" cy="80101"/>
             </a:xfrm>
             <a:prstGeom prst="rect">
@@ -4970,13 +5005,13 @@
         </p:sp>
         <p:sp>
           <p:nvSpPr>
-            <p:cNvPr id="33" name="tx33"/>
+            <p:cNvPr id="34" name="tx34"/>
             <p:cNvSpPr/>
             <p:nvPr/>
           </p:nvSpPr>
           <p:spPr>
             <a:xfrm>
-              <a:off x="6582407" y="5785772"/>
+              <a:off x="6548017" y="3522791"/>
               <a:ext cx="124358" cy="80101"/>
             </a:xfrm>
             <a:prstGeom prst="rect">
@@ -5016,13 +5051,13 @@
         </p:sp>
         <p:sp>
           <p:nvSpPr>
-            <p:cNvPr id="34" name="tx34"/>
+            <p:cNvPr id="35" name="tx35"/>
             <p:cNvSpPr/>
             <p:nvPr/>
           </p:nvSpPr>
           <p:spPr>
             <a:xfrm>
-              <a:off x="2928340" y="5925448"/>
+              <a:off x="2928340" y="3662467"/>
               <a:ext cx="3578047" cy="100218"/>
             </a:xfrm>
             <a:prstGeom prst="rect">
@@ -5062,13 +5097,13 @@
         </p:sp>
         <p:sp>
           <p:nvSpPr>
-            <p:cNvPr id="35" name="tx35"/>
+            <p:cNvPr id="36" name="tx36"/>
             <p:cNvSpPr/>
             <p:nvPr/>
           </p:nvSpPr>
           <p:spPr>
             <a:xfrm rot="-5400000">
-              <a:off x="68446" y="3848213"/>
+              <a:off x="138035" y="2751517"/>
               <a:ext cx="1016904" cy="100218"/>
             </a:xfrm>
             <a:prstGeom prst="rect">
@@ -5108,13 +5143,13 @@
         </p:sp>
         <p:sp>
           <p:nvSpPr>
-            <p:cNvPr id="36" name="tx36"/>
+            <p:cNvPr id="37" name="tx37"/>
             <p:cNvSpPr/>
             <p:nvPr/>
           </p:nvSpPr>
           <p:spPr>
             <a:xfrm>
-              <a:off x="817517" y="1896563"/>
+              <a:off x="887106" y="1966152"/>
               <a:ext cx="7052127" cy="82021"/>
             </a:xfrm>
             <a:prstGeom prst="rect">
@@ -5154,13 +5189,3740 @@
         </p:sp>
         <p:sp>
           <p:nvSpPr>
-            <p:cNvPr id="37" name="tx37"/>
+            <p:cNvPr id="38" name="tx38"/>
             <p:cNvSpPr/>
             <p:nvPr/>
           </p:nvSpPr>
           <p:spPr>
             <a:xfrm>
-              <a:off x="817517" y="1669789"/>
+              <a:off x="887106" y="1739378"/>
+              <a:ext cx="2821289" cy="120152"/>
+            </a:xfrm>
+            <a:prstGeom prst="rect">
+              <a:avLst/>
+            </a:prstGeom>
+            <a:noFill/>
+          </p:spPr>
+          <p:txBody>
+            <a:bodyPr lIns="0" rIns="0" tIns="0" bIns="0" anchorCtr="1" anchor="ctr" wrap="none"/>
+            <a:lstStyle/>
+            <a:p>
+              <a:pPr algn="l" marL="0" marR="0" indent="0">
+                <a:lnSpc>
+                  <a:spcPts val="1320"/>
+                </a:lnSpc>
+                <a:spcBef>
+                  <a:spcPts val="0"/>
+                </a:spcBef>
+                <a:spcAft>
+                  <a:spcPts val="0"/>
+                </a:spcAft>
+              </a:pPr>
+              <a:r>
+                <a:rPr sz="1320">
+                  <a:solidFill>
+                    <a:srgbClr val="000000">
+                      <a:alpha val="100000"/>
+                    </a:srgbClr>
+                  </a:solidFill>
+                  <a:latin typeface="Helvetica"/>
+                  <a:cs typeface="Helvetica"/>
+                </a:rPr>
+                <a:t>Composite Grade 2 AEs (Carboplatin)</a:t>
+              </a:r>
+            </a:p>
+          </p:txBody>
+        </p:sp>
+        <p:sp>
+          <p:nvSpPr>
+            <p:cNvPr id="39" name="pl39"/>
+            <p:cNvSpPr/>
+            <p:nvPr/>
+          </p:nvSpPr>
+          <p:spPr>
+            <a:xfrm>
+              <a:off x="887106" y="5444019"/>
+              <a:ext cx="7660515" cy="0"/>
+            </a:xfrm>
+            <a:custGeom>
+              <a:avLst/>
+              <a:pathLst>
+                <a:path w="7660515" h="0">
+                  <a:moveTo>
+                    <a:pt x="0" y="0"/>
+                  </a:moveTo>
+                  <a:lnTo>
+                    <a:pt x="7660515" y="0"/>
+                  </a:lnTo>
+                  <a:lnTo>
+                    <a:pt x="7660515" y="0"/>
+                  </a:lnTo>
+                </a:path>
+              </a:pathLst>
+            </a:custGeom>
+            <a:ln w="6775" cap="flat">
+              <a:solidFill>
+                <a:srgbClr val="EBEBEB">
+                  <a:alpha val="100000"/>
+                </a:srgbClr>
+              </a:solidFill>
+              <a:prstDash val="solid"/>
+              <a:round/>
+            </a:ln>
+          </p:spPr>
+          <p:txBody>
+            <a:bodyPr/>
+            <a:lstStyle/>
+            <a:p/>
+          </p:txBody>
+        </p:sp>
+        <p:sp>
+          <p:nvSpPr>
+            <p:cNvPr id="40" name="pl40"/>
+            <p:cNvSpPr/>
+            <p:nvPr/>
+          </p:nvSpPr>
+          <p:spPr>
+            <a:xfrm>
+              <a:off x="887106" y="5144686"/>
+              <a:ext cx="7660515" cy="0"/>
+            </a:xfrm>
+            <a:custGeom>
+              <a:avLst/>
+              <a:pathLst>
+                <a:path w="7660515" h="0">
+                  <a:moveTo>
+                    <a:pt x="0" y="0"/>
+                  </a:moveTo>
+                  <a:lnTo>
+                    <a:pt x="7660515" y="0"/>
+                  </a:lnTo>
+                  <a:lnTo>
+                    <a:pt x="7660515" y="0"/>
+                  </a:lnTo>
+                </a:path>
+              </a:pathLst>
+            </a:custGeom>
+            <a:ln w="6775" cap="flat">
+              <a:solidFill>
+                <a:srgbClr val="EBEBEB">
+                  <a:alpha val="100000"/>
+                </a:srgbClr>
+              </a:solidFill>
+              <a:prstDash val="solid"/>
+              <a:round/>
+            </a:ln>
+          </p:spPr>
+          <p:txBody>
+            <a:bodyPr/>
+            <a:lstStyle/>
+            <a:p/>
+          </p:txBody>
+        </p:sp>
+        <p:sp>
+          <p:nvSpPr>
+            <p:cNvPr id="41" name="pl41"/>
+            <p:cNvSpPr/>
+            <p:nvPr/>
+          </p:nvSpPr>
+          <p:spPr>
+            <a:xfrm>
+              <a:off x="887106" y="4845352"/>
+              <a:ext cx="7660515" cy="0"/>
+            </a:xfrm>
+            <a:custGeom>
+              <a:avLst/>
+              <a:pathLst>
+                <a:path w="7660515" h="0">
+                  <a:moveTo>
+                    <a:pt x="0" y="0"/>
+                  </a:moveTo>
+                  <a:lnTo>
+                    <a:pt x="7660515" y="0"/>
+                  </a:lnTo>
+                  <a:lnTo>
+                    <a:pt x="7660515" y="0"/>
+                  </a:lnTo>
+                </a:path>
+              </a:pathLst>
+            </a:custGeom>
+            <a:ln w="6775" cap="flat">
+              <a:solidFill>
+                <a:srgbClr val="EBEBEB">
+                  <a:alpha val="100000"/>
+                </a:srgbClr>
+              </a:solidFill>
+              <a:prstDash val="solid"/>
+              <a:round/>
+            </a:ln>
+          </p:spPr>
+          <p:txBody>
+            <a:bodyPr/>
+            <a:lstStyle/>
+            <a:p/>
+          </p:txBody>
+        </p:sp>
+        <p:sp>
+          <p:nvSpPr>
+            <p:cNvPr id="42" name="pl42"/>
+            <p:cNvSpPr/>
+            <p:nvPr/>
+          </p:nvSpPr>
+          <p:spPr>
+            <a:xfrm>
+              <a:off x="887106" y="4546018"/>
+              <a:ext cx="7660515" cy="0"/>
+            </a:xfrm>
+            <a:custGeom>
+              <a:avLst/>
+              <a:pathLst>
+                <a:path w="7660515" h="0">
+                  <a:moveTo>
+                    <a:pt x="0" y="0"/>
+                  </a:moveTo>
+                  <a:lnTo>
+                    <a:pt x="7660515" y="0"/>
+                  </a:lnTo>
+                  <a:lnTo>
+                    <a:pt x="7660515" y="0"/>
+                  </a:lnTo>
+                </a:path>
+              </a:pathLst>
+            </a:custGeom>
+            <a:ln w="6775" cap="flat">
+              <a:solidFill>
+                <a:srgbClr val="EBEBEB">
+                  <a:alpha val="100000"/>
+                </a:srgbClr>
+              </a:solidFill>
+              <a:prstDash val="solid"/>
+              <a:round/>
+            </a:ln>
+          </p:spPr>
+          <p:txBody>
+            <a:bodyPr/>
+            <a:lstStyle/>
+            <a:p/>
+          </p:txBody>
+        </p:sp>
+        <p:sp>
+          <p:nvSpPr>
+            <p:cNvPr id="43" name="pl43"/>
+            <p:cNvSpPr/>
+            <p:nvPr/>
+          </p:nvSpPr>
+          <p:spPr>
+            <a:xfrm>
+              <a:off x="914987" y="4336484"/>
+              <a:ext cx="0" cy="1317069"/>
+            </a:xfrm>
+            <a:custGeom>
+              <a:avLst/>
+              <a:pathLst>
+                <a:path w="0" h="1317069">
+                  <a:moveTo>
+                    <a:pt x="0" y="1317069"/>
+                  </a:moveTo>
+                  <a:lnTo>
+                    <a:pt x="0" y="0"/>
+                  </a:lnTo>
+                  <a:lnTo>
+                    <a:pt x="0" y="0"/>
+                  </a:lnTo>
+                </a:path>
+              </a:pathLst>
+            </a:custGeom>
+            <a:ln w="6775" cap="flat">
+              <a:solidFill>
+                <a:srgbClr val="EBEBEB">
+                  <a:alpha val="100000"/>
+                </a:srgbClr>
+              </a:solidFill>
+              <a:prstDash val="solid"/>
+              <a:round/>
+            </a:ln>
+          </p:spPr>
+          <p:txBody>
+            <a:bodyPr/>
+            <a:lstStyle/>
+            <a:p/>
+          </p:txBody>
+        </p:sp>
+        <p:sp>
+          <p:nvSpPr>
+            <p:cNvPr id="44" name="pl44"/>
+            <p:cNvSpPr/>
+            <p:nvPr/>
+          </p:nvSpPr>
+          <p:spPr>
+            <a:xfrm>
+              <a:off x="1728588" y="4336484"/>
+              <a:ext cx="0" cy="1317069"/>
+            </a:xfrm>
+            <a:custGeom>
+              <a:avLst/>
+              <a:pathLst>
+                <a:path w="0" h="1317069">
+                  <a:moveTo>
+                    <a:pt x="0" y="1317069"/>
+                  </a:moveTo>
+                  <a:lnTo>
+                    <a:pt x="0" y="0"/>
+                  </a:lnTo>
+                  <a:lnTo>
+                    <a:pt x="0" y="0"/>
+                  </a:lnTo>
+                </a:path>
+              </a:pathLst>
+            </a:custGeom>
+            <a:ln w="6775" cap="flat">
+              <a:solidFill>
+                <a:srgbClr val="EBEBEB">
+                  <a:alpha val="100000"/>
+                </a:srgbClr>
+              </a:solidFill>
+              <a:prstDash val="solid"/>
+              <a:round/>
+            </a:ln>
+          </p:spPr>
+          <p:txBody>
+            <a:bodyPr/>
+            <a:lstStyle/>
+            <a:p/>
+          </p:txBody>
+        </p:sp>
+        <p:sp>
+          <p:nvSpPr>
+            <p:cNvPr id="45" name="pl45"/>
+            <p:cNvSpPr/>
+            <p:nvPr/>
+          </p:nvSpPr>
+          <p:spPr>
+            <a:xfrm>
+              <a:off x="2542190" y="4336484"/>
+              <a:ext cx="0" cy="1317069"/>
+            </a:xfrm>
+            <a:custGeom>
+              <a:avLst/>
+              <a:pathLst>
+                <a:path w="0" h="1317069">
+                  <a:moveTo>
+                    <a:pt x="0" y="1317069"/>
+                  </a:moveTo>
+                  <a:lnTo>
+                    <a:pt x="0" y="0"/>
+                  </a:lnTo>
+                  <a:lnTo>
+                    <a:pt x="0" y="0"/>
+                  </a:lnTo>
+                </a:path>
+              </a:pathLst>
+            </a:custGeom>
+            <a:ln w="6775" cap="flat">
+              <a:solidFill>
+                <a:srgbClr val="EBEBEB">
+                  <a:alpha val="100000"/>
+                </a:srgbClr>
+              </a:solidFill>
+              <a:prstDash val="solid"/>
+              <a:round/>
+            </a:ln>
+          </p:spPr>
+          <p:txBody>
+            <a:bodyPr/>
+            <a:lstStyle/>
+            <a:p/>
+          </p:txBody>
+        </p:sp>
+        <p:sp>
+          <p:nvSpPr>
+            <p:cNvPr id="46" name="pl46"/>
+            <p:cNvSpPr/>
+            <p:nvPr/>
+          </p:nvSpPr>
+          <p:spPr>
+            <a:xfrm>
+              <a:off x="3355791" y="4336484"/>
+              <a:ext cx="0" cy="1317069"/>
+            </a:xfrm>
+            <a:custGeom>
+              <a:avLst/>
+              <a:pathLst>
+                <a:path w="0" h="1317069">
+                  <a:moveTo>
+                    <a:pt x="0" y="1317069"/>
+                  </a:moveTo>
+                  <a:lnTo>
+                    <a:pt x="0" y="0"/>
+                  </a:lnTo>
+                  <a:lnTo>
+                    <a:pt x="0" y="0"/>
+                  </a:lnTo>
+                </a:path>
+              </a:pathLst>
+            </a:custGeom>
+            <a:ln w="6775" cap="flat">
+              <a:solidFill>
+                <a:srgbClr val="EBEBEB">
+                  <a:alpha val="100000"/>
+                </a:srgbClr>
+              </a:solidFill>
+              <a:prstDash val="solid"/>
+              <a:round/>
+            </a:ln>
+          </p:spPr>
+          <p:txBody>
+            <a:bodyPr/>
+            <a:lstStyle/>
+            <a:p/>
+          </p:txBody>
+        </p:sp>
+        <p:sp>
+          <p:nvSpPr>
+            <p:cNvPr id="47" name="pl47"/>
+            <p:cNvSpPr/>
+            <p:nvPr/>
+          </p:nvSpPr>
+          <p:spPr>
+            <a:xfrm>
+              <a:off x="4169393" y="4336484"/>
+              <a:ext cx="0" cy="1317069"/>
+            </a:xfrm>
+            <a:custGeom>
+              <a:avLst/>
+              <a:pathLst>
+                <a:path w="0" h="1317069">
+                  <a:moveTo>
+                    <a:pt x="0" y="1317069"/>
+                  </a:moveTo>
+                  <a:lnTo>
+                    <a:pt x="0" y="0"/>
+                  </a:lnTo>
+                  <a:lnTo>
+                    <a:pt x="0" y="0"/>
+                  </a:lnTo>
+                </a:path>
+              </a:pathLst>
+            </a:custGeom>
+            <a:ln w="6775" cap="flat">
+              <a:solidFill>
+                <a:srgbClr val="EBEBEB">
+                  <a:alpha val="100000"/>
+                </a:srgbClr>
+              </a:solidFill>
+              <a:prstDash val="solid"/>
+              <a:round/>
+            </a:ln>
+          </p:spPr>
+          <p:txBody>
+            <a:bodyPr/>
+            <a:lstStyle/>
+            <a:p/>
+          </p:txBody>
+        </p:sp>
+        <p:sp>
+          <p:nvSpPr>
+            <p:cNvPr id="48" name="pl48"/>
+            <p:cNvSpPr/>
+            <p:nvPr/>
+          </p:nvSpPr>
+          <p:spPr>
+            <a:xfrm>
+              <a:off x="4982994" y="4336484"/>
+              <a:ext cx="0" cy="1317069"/>
+            </a:xfrm>
+            <a:custGeom>
+              <a:avLst/>
+              <a:pathLst>
+                <a:path w="0" h="1317069">
+                  <a:moveTo>
+                    <a:pt x="0" y="1317069"/>
+                  </a:moveTo>
+                  <a:lnTo>
+                    <a:pt x="0" y="0"/>
+                  </a:lnTo>
+                  <a:lnTo>
+                    <a:pt x="0" y="0"/>
+                  </a:lnTo>
+                </a:path>
+              </a:pathLst>
+            </a:custGeom>
+            <a:ln w="6775" cap="flat">
+              <a:solidFill>
+                <a:srgbClr val="EBEBEB">
+                  <a:alpha val="100000"/>
+                </a:srgbClr>
+              </a:solidFill>
+              <a:prstDash val="solid"/>
+              <a:round/>
+            </a:ln>
+          </p:spPr>
+          <p:txBody>
+            <a:bodyPr/>
+            <a:lstStyle/>
+            <a:p/>
+          </p:txBody>
+        </p:sp>
+        <p:sp>
+          <p:nvSpPr>
+            <p:cNvPr id="49" name="pl49"/>
+            <p:cNvSpPr/>
+            <p:nvPr/>
+          </p:nvSpPr>
+          <p:spPr>
+            <a:xfrm>
+              <a:off x="5796595" y="4336484"/>
+              <a:ext cx="0" cy="1317069"/>
+            </a:xfrm>
+            <a:custGeom>
+              <a:avLst/>
+              <a:pathLst>
+                <a:path w="0" h="1317069">
+                  <a:moveTo>
+                    <a:pt x="0" y="1317069"/>
+                  </a:moveTo>
+                  <a:lnTo>
+                    <a:pt x="0" y="0"/>
+                  </a:lnTo>
+                  <a:lnTo>
+                    <a:pt x="0" y="0"/>
+                  </a:lnTo>
+                </a:path>
+              </a:pathLst>
+            </a:custGeom>
+            <a:ln w="6775" cap="flat">
+              <a:solidFill>
+                <a:srgbClr val="EBEBEB">
+                  <a:alpha val="100000"/>
+                </a:srgbClr>
+              </a:solidFill>
+              <a:prstDash val="solid"/>
+              <a:round/>
+            </a:ln>
+          </p:spPr>
+          <p:txBody>
+            <a:bodyPr/>
+            <a:lstStyle/>
+            <a:p/>
+          </p:txBody>
+        </p:sp>
+        <p:sp>
+          <p:nvSpPr>
+            <p:cNvPr id="50" name="pl50"/>
+            <p:cNvSpPr/>
+            <p:nvPr/>
+          </p:nvSpPr>
+          <p:spPr>
+            <a:xfrm>
+              <a:off x="6610197" y="4336484"/>
+              <a:ext cx="0" cy="1317069"/>
+            </a:xfrm>
+            <a:custGeom>
+              <a:avLst/>
+              <a:pathLst>
+                <a:path w="0" h="1317069">
+                  <a:moveTo>
+                    <a:pt x="0" y="1317069"/>
+                  </a:moveTo>
+                  <a:lnTo>
+                    <a:pt x="0" y="0"/>
+                  </a:lnTo>
+                  <a:lnTo>
+                    <a:pt x="0" y="0"/>
+                  </a:lnTo>
+                </a:path>
+              </a:pathLst>
+            </a:custGeom>
+            <a:ln w="6775" cap="flat">
+              <a:solidFill>
+                <a:srgbClr val="EBEBEB">
+                  <a:alpha val="100000"/>
+                </a:srgbClr>
+              </a:solidFill>
+              <a:prstDash val="solid"/>
+              <a:round/>
+            </a:ln>
+          </p:spPr>
+          <p:txBody>
+            <a:bodyPr/>
+            <a:lstStyle/>
+            <a:p/>
+          </p:txBody>
+        </p:sp>
+        <p:sp>
+          <p:nvSpPr>
+            <p:cNvPr id="51" name="pl51"/>
+            <p:cNvSpPr/>
+            <p:nvPr/>
+          </p:nvSpPr>
+          <p:spPr>
+            <a:xfrm>
+              <a:off x="7423798" y="4336484"/>
+              <a:ext cx="0" cy="1317069"/>
+            </a:xfrm>
+            <a:custGeom>
+              <a:avLst/>
+              <a:pathLst>
+                <a:path w="0" h="1317069">
+                  <a:moveTo>
+                    <a:pt x="0" y="1317069"/>
+                  </a:moveTo>
+                  <a:lnTo>
+                    <a:pt x="0" y="0"/>
+                  </a:lnTo>
+                  <a:lnTo>
+                    <a:pt x="0" y="0"/>
+                  </a:lnTo>
+                </a:path>
+              </a:pathLst>
+            </a:custGeom>
+            <a:ln w="6775" cap="flat">
+              <a:solidFill>
+                <a:srgbClr val="EBEBEB">
+                  <a:alpha val="100000"/>
+                </a:srgbClr>
+              </a:solidFill>
+              <a:prstDash val="solid"/>
+              <a:round/>
+            </a:ln>
+          </p:spPr>
+          <p:txBody>
+            <a:bodyPr/>
+            <a:lstStyle/>
+            <a:p/>
+          </p:txBody>
+        </p:sp>
+        <p:sp>
+          <p:nvSpPr>
+            <p:cNvPr id="52" name="pl52"/>
+            <p:cNvSpPr/>
+            <p:nvPr/>
+          </p:nvSpPr>
+          <p:spPr>
+            <a:xfrm>
+              <a:off x="8237399" y="4336484"/>
+              <a:ext cx="0" cy="1317069"/>
+            </a:xfrm>
+            <a:custGeom>
+              <a:avLst/>
+              <a:pathLst>
+                <a:path w="0" h="1317069">
+                  <a:moveTo>
+                    <a:pt x="0" y="1317069"/>
+                  </a:moveTo>
+                  <a:lnTo>
+                    <a:pt x="0" y="0"/>
+                  </a:lnTo>
+                  <a:lnTo>
+                    <a:pt x="0" y="0"/>
+                  </a:lnTo>
+                </a:path>
+              </a:pathLst>
+            </a:custGeom>
+            <a:ln w="6775" cap="flat">
+              <a:solidFill>
+                <a:srgbClr val="EBEBEB">
+                  <a:alpha val="100000"/>
+                </a:srgbClr>
+              </a:solidFill>
+              <a:prstDash val="solid"/>
+              <a:round/>
+            </a:ln>
+          </p:spPr>
+          <p:txBody>
+            <a:bodyPr/>
+            <a:lstStyle/>
+            <a:p/>
+          </p:txBody>
+        </p:sp>
+        <p:sp>
+          <p:nvSpPr>
+            <p:cNvPr id="53" name="pl53"/>
+            <p:cNvSpPr/>
+            <p:nvPr/>
+          </p:nvSpPr>
+          <p:spPr>
+            <a:xfrm>
+              <a:off x="887106" y="5593686"/>
+              <a:ext cx="7660515" cy="0"/>
+            </a:xfrm>
+            <a:custGeom>
+              <a:avLst/>
+              <a:pathLst>
+                <a:path w="7660515" h="0">
+                  <a:moveTo>
+                    <a:pt x="0" y="0"/>
+                  </a:moveTo>
+                  <a:lnTo>
+                    <a:pt x="7660515" y="0"/>
+                  </a:lnTo>
+                  <a:lnTo>
+                    <a:pt x="7660515" y="0"/>
+                  </a:lnTo>
+                </a:path>
+              </a:pathLst>
+            </a:custGeom>
+            <a:ln w="13550" cap="flat">
+              <a:solidFill>
+                <a:srgbClr val="EBEBEB">
+                  <a:alpha val="100000"/>
+                </a:srgbClr>
+              </a:solidFill>
+              <a:prstDash val="solid"/>
+              <a:round/>
+            </a:ln>
+          </p:spPr>
+          <p:txBody>
+            <a:bodyPr/>
+            <a:lstStyle/>
+            <a:p/>
+          </p:txBody>
+        </p:sp>
+        <p:sp>
+          <p:nvSpPr>
+            <p:cNvPr id="54" name="pl54"/>
+            <p:cNvSpPr/>
+            <p:nvPr/>
+          </p:nvSpPr>
+          <p:spPr>
+            <a:xfrm>
+              <a:off x="887106" y="5294352"/>
+              <a:ext cx="7660515" cy="0"/>
+            </a:xfrm>
+            <a:custGeom>
+              <a:avLst/>
+              <a:pathLst>
+                <a:path w="7660515" h="0">
+                  <a:moveTo>
+                    <a:pt x="0" y="0"/>
+                  </a:moveTo>
+                  <a:lnTo>
+                    <a:pt x="7660515" y="0"/>
+                  </a:lnTo>
+                  <a:lnTo>
+                    <a:pt x="7660515" y="0"/>
+                  </a:lnTo>
+                </a:path>
+              </a:pathLst>
+            </a:custGeom>
+            <a:ln w="13550" cap="flat">
+              <a:solidFill>
+                <a:srgbClr val="EBEBEB">
+                  <a:alpha val="100000"/>
+                </a:srgbClr>
+              </a:solidFill>
+              <a:prstDash val="solid"/>
+              <a:round/>
+            </a:ln>
+          </p:spPr>
+          <p:txBody>
+            <a:bodyPr/>
+            <a:lstStyle/>
+            <a:p/>
+          </p:txBody>
+        </p:sp>
+        <p:sp>
+          <p:nvSpPr>
+            <p:cNvPr id="55" name="pl55"/>
+            <p:cNvSpPr/>
+            <p:nvPr/>
+          </p:nvSpPr>
+          <p:spPr>
+            <a:xfrm>
+              <a:off x="887106" y="4995019"/>
+              <a:ext cx="7660515" cy="0"/>
+            </a:xfrm>
+            <a:custGeom>
+              <a:avLst/>
+              <a:pathLst>
+                <a:path w="7660515" h="0">
+                  <a:moveTo>
+                    <a:pt x="0" y="0"/>
+                  </a:moveTo>
+                  <a:lnTo>
+                    <a:pt x="7660515" y="0"/>
+                  </a:lnTo>
+                  <a:lnTo>
+                    <a:pt x="7660515" y="0"/>
+                  </a:lnTo>
+                </a:path>
+              </a:pathLst>
+            </a:custGeom>
+            <a:ln w="13550" cap="flat">
+              <a:solidFill>
+                <a:srgbClr val="EBEBEB">
+                  <a:alpha val="100000"/>
+                </a:srgbClr>
+              </a:solidFill>
+              <a:prstDash val="solid"/>
+              <a:round/>
+            </a:ln>
+          </p:spPr>
+          <p:txBody>
+            <a:bodyPr/>
+            <a:lstStyle/>
+            <a:p/>
+          </p:txBody>
+        </p:sp>
+        <p:sp>
+          <p:nvSpPr>
+            <p:cNvPr id="56" name="pl56"/>
+            <p:cNvSpPr/>
+            <p:nvPr/>
+          </p:nvSpPr>
+          <p:spPr>
+            <a:xfrm>
+              <a:off x="887106" y="4695685"/>
+              <a:ext cx="7660515" cy="0"/>
+            </a:xfrm>
+            <a:custGeom>
+              <a:avLst/>
+              <a:pathLst>
+                <a:path w="7660515" h="0">
+                  <a:moveTo>
+                    <a:pt x="0" y="0"/>
+                  </a:moveTo>
+                  <a:lnTo>
+                    <a:pt x="7660515" y="0"/>
+                  </a:lnTo>
+                  <a:lnTo>
+                    <a:pt x="7660515" y="0"/>
+                  </a:lnTo>
+                </a:path>
+              </a:pathLst>
+            </a:custGeom>
+            <a:ln w="13550" cap="flat">
+              <a:solidFill>
+                <a:srgbClr val="EBEBEB">
+                  <a:alpha val="100000"/>
+                </a:srgbClr>
+              </a:solidFill>
+              <a:prstDash val="solid"/>
+              <a:round/>
+            </a:ln>
+          </p:spPr>
+          <p:txBody>
+            <a:bodyPr/>
+            <a:lstStyle/>
+            <a:p/>
+          </p:txBody>
+        </p:sp>
+        <p:sp>
+          <p:nvSpPr>
+            <p:cNvPr id="57" name="pl57"/>
+            <p:cNvSpPr/>
+            <p:nvPr/>
+          </p:nvSpPr>
+          <p:spPr>
+            <a:xfrm>
+              <a:off x="887106" y="4396351"/>
+              <a:ext cx="7660515" cy="0"/>
+            </a:xfrm>
+            <a:custGeom>
+              <a:avLst/>
+              <a:pathLst>
+                <a:path w="7660515" h="0">
+                  <a:moveTo>
+                    <a:pt x="0" y="0"/>
+                  </a:moveTo>
+                  <a:lnTo>
+                    <a:pt x="7660515" y="0"/>
+                  </a:lnTo>
+                  <a:lnTo>
+                    <a:pt x="7660515" y="0"/>
+                  </a:lnTo>
+                </a:path>
+              </a:pathLst>
+            </a:custGeom>
+            <a:ln w="13550" cap="flat">
+              <a:solidFill>
+                <a:srgbClr val="EBEBEB">
+                  <a:alpha val="100000"/>
+                </a:srgbClr>
+              </a:solidFill>
+              <a:prstDash val="solid"/>
+              <a:round/>
+            </a:ln>
+          </p:spPr>
+          <p:txBody>
+            <a:bodyPr/>
+            <a:lstStyle/>
+            <a:p/>
+          </p:txBody>
+        </p:sp>
+        <p:sp>
+          <p:nvSpPr>
+            <p:cNvPr id="58" name="pl58"/>
+            <p:cNvSpPr/>
+            <p:nvPr/>
+          </p:nvSpPr>
+          <p:spPr>
+            <a:xfrm>
+              <a:off x="1321788" y="4336484"/>
+              <a:ext cx="0" cy="1317069"/>
+            </a:xfrm>
+            <a:custGeom>
+              <a:avLst/>
+              <a:pathLst>
+                <a:path w="0" h="1317069">
+                  <a:moveTo>
+                    <a:pt x="0" y="1317069"/>
+                  </a:moveTo>
+                  <a:lnTo>
+                    <a:pt x="0" y="0"/>
+                  </a:lnTo>
+                  <a:lnTo>
+                    <a:pt x="0" y="0"/>
+                  </a:lnTo>
+                </a:path>
+              </a:pathLst>
+            </a:custGeom>
+            <a:ln w="13550" cap="flat">
+              <a:solidFill>
+                <a:srgbClr val="EBEBEB">
+                  <a:alpha val="100000"/>
+                </a:srgbClr>
+              </a:solidFill>
+              <a:prstDash val="solid"/>
+              <a:round/>
+            </a:ln>
+          </p:spPr>
+          <p:txBody>
+            <a:bodyPr/>
+            <a:lstStyle/>
+            <a:p/>
+          </p:txBody>
+        </p:sp>
+        <p:sp>
+          <p:nvSpPr>
+            <p:cNvPr id="59" name="pl59"/>
+            <p:cNvSpPr/>
+            <p:nvPr/>
+          </p:nvSpPr>
+          <p:spPr>
+            <a:xfrm>
+              <a:off x="2135389" y="4336484"/>
+              <a:ext cx="0" cy="1317069"/>
+            </a:xfrm>
+            <a:custGeom>
+              <a:avLst/>
+              <a:pathLst>
+                <a:path w="0" h="1317069">
+                  <a:moveTo>
+                    <a:pt x="0" y="1317069"/>
+                  </a:moveTo>
+                  <a:lnTo>
+                    <a:pt x="0" y="0"/>
+                  </a:lnTo>
+                  <a:lnTo>
+                    <a:pt x="0" y="0"/>
+                  </a:lnTo>
+                </a:path>
+              </a:pathLst>
+            </a:custGeom>
+            <a:ln w="13550" cap="flat">
+              <a:solidFill>
+                <a:srgbClr val="EBEBEB">
+                  <a:alpha val="100000"/>
+                </a:srgbClr>
+              </a:solidFill>
+              <a:prstDash val="solid"/>
+              <a:round/>
+            </a:ln>
+          </p:spPr>
+          <p:txBody>
+            <a:bodyPr/>
+            <a:lstStyle/>
+            <a:p/>
+          </p:txBody>
+        </p:sp>
+        <p:sp>
+          <p:nvSpPr>
+            <p:cNvPr id="60" name="pl60"/>
+            <p:cNvSpPr/>
+            <p:nvPr/>
+          </p:nvSpPr>
+          <p:spPr>
+            <a:xfrm>
+              <a:off x="2948991" y="4336484"/>
+              <a:ext cx="0" cy="1317069"/>
+            </a:xfrm>
+            <a:custGeom>
+              <a:avLst/>
+              <a:pathLst>
+                <a:path w="0" h="1317069">
+                  <a:moveTo>
+                    <a:pt x="0" y="1317069"/>
+                  </a:moveTo>
+                  <a:lnTo>
+                    <a:pt x="0" y="0"/>
+                  </a:lnTo>
+                  <a:lnTo>
+                    <a:pt x="0" y="0"/>
+                  </a:lnTo>
+                </a:path>
+              </a:pathLst>
+            </a:custGeom>
+            <a:ln w="13550" cap="flat">
+              <a:solidFill>
+                <a:srgbClr val="EBEBEB">
+                  <a:alpha val="100000"/>
+                </a:srgbClr>
+              </a:solidFill>
+              <a:prstDash val="solid"/>
+              <a:round/>
+            </a:ln>
+          </p:spPr>
+          <p:txBody>
+            <a:bodyPr/>
+            <a:lstStyle/>
+            <a:p/>
+          </p:txBody>
+        </p:sp>
+        <p:sp>
+          <p:nvSpPr>
+            <p:cNvPr id="61" name="pl61"/>
+            <p:cNvSpPr/>
+            <p:nvPr/>
+          </p:nvSpPr>
+          <p:spPr>
+            <a:xfrm>
+              <a:off x="3762592" y="4336484"/>
+              <a:ext cx="0" cy="1317069"/>
+            </a:xfrm>
+            <a:custGeom>
+              <a:avLst/>
+              <a:pathLst>
+                <a:path w="0" h="1317069">
+                  <a:moveTo>
+                    <a:pt x="0" y="1317069"/>
+                  </a:moveTo>
+                  <a:lnTo>
+                    <a:pt x="0" y="0"/>
+                  </a:lnTo>
+                  <a:lnTo>
+                    <a:pt x="0" y="0"/>
+                  </a:lnTo>
+                </a:path>
+              </a:pathLst>
+            </a:custGeom>
+            <a:ln w="13550" cap="flat">
+              <a:solidFill>
+                <a:srgbClr val="EBEBEB">
+                  <a:alpha val="100000"/>
+                </a:srgbClr>
+              </a:solidFill>
+              <a:prstDash val="solid"/>
+              <a:round/>
+            </a:ln>
+          </p:spPr>
+          <p:txBody>
+            <a:bodyPr/>
+            <a:lstStyle/>
+            <a:p/>
+          </p:txBody>
+        </p:sp>
+        <p:sp>
+          <p:nvSpPr>
+            <p:cNvPr id="62" name="pl62"/>
+            <p:cNvSpPr/>
+            <p:nvPr/>
+          </p:nvSpPr>
+          <p:spPr>
+            <a:xfrm>
+              <a:off x="4576193" y="4336484"/>
+              <a:ext cx="0" cy="1317069"/>
+            </a:xfrm>
+            <a:custGeom>
+              <a:avLst/>
+              <a:pathLst>
+                <a:path w="0" h="1317069">
+                  <a:moveTo>
+                    <a:pt x="0" y="1317069"/>
+                  </a:moveTo>
+                  <a:lnTo>
+                    <a:pt x="0" y="0"/>
+                  </a:lnTo>
+                  <a:lnTo>
+                    <a:pt x="0" y="0"/>
+                  </a:lnTo>
+                </a:path>
+              </a:pathLst>
+            </a:custGeom>
+            <a:ln w="13550" cap="flat">
+              <a:solidFill>
+                <a:srgbClr val="EBEBEB">
+                  <a:alpha val="100000"/>
+                </a:srgbClr>
+              </a:solidFill>
+              <a:prstDash val="solid"/>
+              <a:round/>
+            </a:ln>
+          </p:spPr>
+          <p:txBody>
+            <a:bodyPr/>
+            <a:lstStyle/>
+            <a:p/>
+          </p:txBody>
+        </p:sp>
+        <p:sp>
+          <p:nvSpPr>
+            <p:cNvPr id="63" name="pl63"/>
+            <p:cNvSpPr/>
+            <p:nvPr/>
+          </p:nvSpPr>
+          <p:spPr>
+            <a:xfrm>
+              <a:off x="5389795" y="4336484"/>
+              <a:ext cx="0" cy="1317069"/>
+            </a:xfrm>
+            <a:custGeom>
+              <a:avLst/>
+              <a:pathLst>
+                <a:path w="0" h="1317069">
+                  <a:moveTo>
+                    <a:pt x="0" y="1317069"/>
+                  </a:moveTo>
+                  <a:lnTo>
+                    <a:pt x="0" y="0"/>
+                  </a:lnTo>
+                  <a:lnTo>
+                    <a:pt x="0" y="0"/>
+                  </a:lnTo>
+                </a:path>
+              </a:pathLst>
+            </a:custGeom>
+            <a:ln w="13550" cap="flat">
+              <a:solidFill>
+                <a:srgbClr val="EBEBEB">
+                  <a:alpha val="100000"/>
+                </a:srgbClr>
+              </a:solidFill>
+              <a:prstDash val="solid"/>
+              <a:round/>
+            </a:ln>
+          </p:spPr>
+          <p:txBody>
+            <a:bodyPr/>
+            <a:lstStyle/>
+            <a:p/>
+          </p:txBody>
+        </p:sp>
+        <p:sp>
+          <p:nvSpPr>
+            <p:cNvPr id="64" name="pl64"/>
+            <p:cNvSpPr/>
+            <p:nvPr/>
+          </p:nvSpPr>
+          <p:spPr>
+            <a:xfrm>
+              <a:off x="6203396" y="4336484"/>
+              <a:ext cx="0" cy="1317069"/>
+            </a:xfrm>
+            <a:custGeom>
+              <a:avLst/>
+              <a:pathLst>
+                <a:path w="0" h="1317069">
+                  <a:moveTo>
+                    <a:pt x="0" y="1317069"/>
+                  </a:moveTo>
+                  <a:lnTo>
+                    <a:pt x="0" y="0"/>
+                  </a:lnTo>
+                  <a:lnTo>
+                    <a:pt x="0" y="0"/>
+                  </a:lnTo>
+                </a:path>
+              </a:pathLst>
+            </a:custGeom>
+            <a:ln w="13550" cap="flat">
+              <a:solidFill>
+                <a:srgbClr val="EBEBEB">
+                  <a:alpha val="100000"/>
+                </a:srgbClr>
+              </a:solidFill>
+              <a:prstDash val="solid"/>
+              <a:round/>
+            </a:ln>
+          </p:spPr>
+          <p:txBody>
+            <a:bodyPr/>
+            <a:lstStyle/>
+            <a:p/>
+          </p:txBody>
+        </p:sp>
+        <p:sp>
+          <p:nvSpPr>
+            <p:cNvPr id="65" name="pl65"/>
+            <p:cNvSpPr/>
+            <p:nvPr/>
+          </p:nvSpPr>
+          <p:spPr>
+            <a:xfrm>
+              <a:off x="7016997" y="4336484"/>
+              <a:ext cx="0" cy="1317069"/>
+            </a:xfrm>
+            <a:custGeom>
+              <a:avLst/>
+              <a:pathLst>
+                <a:path w="0" h="1317069">
+                  <a:moveTo>
+                    <a:pt x="0" y="1317069"/>
+                  </a:moveTo>
+                  <a:lnTo>
+                    <a:pt x="0" y="0"/>
+                  </a:lnTo>
+                  <a:lnTo>
+                    <a:pt x="0" y="0"/>
+                  </a:lnTo>
+                </a:path>
+              </a:pathLst>
+            </a:custGeom>
+            <a:ln w="13550" cap="flat">
+              <a:solidFill>
+                <a:srgbClr val="EBEBEB">
+                  <a:alpha val="100000"/>
+                </a:srgbClr>
+              </a:solidFill>
+              <a:prstDash val="solid"/>
+              <a:round/>
+            </a:ln>
+          </p:spPr>
+          <p:txBody>
+            <a:bodyPr/>
+            <a:lstStyle/>
+            <a:p/>
+          </p:txBody>
+        </p:sp>
+        <p:sp>
+          <p:nvSpPr>
+            <p:cNvPr id="66" name="pl66"/>
+            <p:cNvSpPr/>
+            <p:nvPr/>
+          </p:nvSpPr>
+          <p:spPr>
+            <a:xfrm>
+              <a:off x="7830599" y="4336484"/>
+              <a:ext cx="0" cy="1317069"/>
+            </a:xfrm>
+            <a:custGeom>
+              <a:avLst/>
+              <a:pathLst>
+                <a:path w="0" h="1317069">
+                  <a:moveTo>
+                    <a:pt x="0" y="1317069"/>
+                  </a:moveTo>
+                  <a:lnTo>
+                    <a:pt x="0" y="0"/>
+                  </a:lnTo>
+                  <a:lnTo>
+                    <a:pt x="0" y="0"/>
+                  </a:lnTo>
+                </a:path>
+              </a:pathLst>
+            </a:custGeom>
+            <a:ln w="13550" cap="flat">
+              <a:solidFill>
+                <a:srgbClr val="EBEBEB">
+                  <a:alpha val="100000"/>
+                </a:srgbClr>
+              </a:solidFill>
+              <a:prstDash val="solid"/>
+              <a:round/>
+            </a:ln>
+          </p:spPr>
+          <p:txBody>
+            <a:bodyPr/>
+            <a:lstStyle/>
+            <a:p/>
+          </p:txBody>
+        </p:sp>
+        <p:sp>
+          <p:nvSpPr>
+            <p:cNvPr id="67" name="pg67"/>
+            <p:cNvSpPr/>
+            <p:nvPr/>
+          </p:nvSpPr>
+          <p:spPr>
+            <a:xfrm>
+              <a:off x="1235312" y="4336484"/>
+              <a:ext cx="6964104" cy="1200362"/>
+            </a:xfrm>
+            <a:custGeom>
+              <a:avLst/>
+              <a:pathLst>
+                <a:path w="6964104" h="1200362">
+                  <a:moveTo>
+                    <a:pt x="125825" y="0"/>
+                  </a:moveTo>
+                  <a:lnTo>
+                    <a:pt x="140688" y="8538"/>
+                  </a:lnTo>
+                  <a:lnTo>
+                    <a:pt x="211033" y="47683"/>
+                  </a:lnTo>
+                  <a:lnTo>
+                    <a:pt x="281377" y="85601"/>
+                  </a:lnTo>
+                  <a:lnTo>
+                    <a:pt x="351722" y="122330"/>
+                  </a:lnTo>
+                  <a:lnTo>
+                    <a:pt x="422066" y="157908"/>
+                  </a:lnTo>
+                  <a:lnTo>
+                    <a:pt x="492411" y="192371"/>
+                  </a:lnTo>
+                  <a:lnTo>
+                    <a:pt x="562755" y="225753"/>
+                  </a:lnTo>
+                  <a:lnTo>
+                    <a:pt x="633100" y="258088"/>
+                  </a:lnTo>
+                  <a:lnTo>
+                    <a:pt x="703444" y="289410"/>
+                  </a:lnTo>
+                  <a:lnTo>
+                    <a:pt x="773789" y="319750"/>
+                  </a:lnTo>
+                  <a:lnTo>
+                    <a:pt x="844133" y="349139"/>
+                  </a:lnTo>
+                  <a:lnTo>
+                    <a:pt x="914478" y="377606"/>
+                  </a:lnTo>
+                  <a:lnTo>
+                    <a:pt x="984822" y="405181"/>
+                  </a:lnTo>
+                  <a:lnTo>
+                    <a:pt x="1055167" y="431892"/>
+                  </a:lnTo>
+                  <a:lnTo>
+                    <a:pt x="1125511" y="457765"/>
+                  </a:lnTo>
+                  <a:lnTo>
+                    <a:pt x="1195856" y="482827"/>
+                  </a:lnTo>
+                  <a:lnTo>
+                    <a:pt x="1266200" y="507103"/>
+                  </a:lnTo>
+                  <a:lnTo>
+                    <a:pt x="1336545" y="530618"/>
+                  </a:lnTo>
+                  <a:lnTo>
+                    <a:pt x="1406889" y="553396"/>
+                  </a:lnTo>
+                  <a:lnTo>
+                    <a:pt x="1477234" y="575460"/>
+                  </a:lnTo>
+                  <a:lnTo>
+                    <a:pt x="1547578" y="596833"/>
+                  </a:lnTo>
+                  <a:lnTo>
+                    <a:pt x="1617923" y="617535"/>
+                  </a:lnTo>
+                  <a:lnTo>
+                    <a:pt x="1688267" y="637588"/>
+                  </a:lnTo>
+                  <a:lnTo>
+                    <a:pt x="1758612" y="657013"/>
+                  </a:lnTo>
+                  <a:lnTo>
+                    <a:pt x="1828956" y="675829"/>
+                  </a:lnTo>
+                  <a:lnTo>
+                    <a:pt x="1899301" y="694054"/>
+                  </a:lnTo>
+                  <a:lnTo>
+                    <a:pt x="1969645" y="711709"/>
+                  </a:lnTo>
+                  <a:lnTo>
+                    <a:pt x="2039990" y="728810"/>
+                  </a:lnTo>
+                  <a:lnTo>
+                    <a:pt x="2110334" y="745375"/>
+                  </a:lnTo>
+                  <a:lnTo>
+                    <a:pt x="2180679" y="761420"/>
+                  </a:lnTo>
+                  <a:lnTo>
+                    <a:pt x="2251023" y="776963"/>
+                  </a:lnTo>
+                  <a:lnTo>
+                    <a:pt x="2321368" y="792018"/>
+                  </a:lnTo>
+                  <a:lnTo>
+                    <a:pt x="2391712" y="806602"/>
+                  </a:lnTo>
+                  <a:lnTo>
+                    <a:pt x="2462057" y="820728"/>
+                  </a:lnTo>
+                  <a:lnTo>
+                    <a:pt x="2532401" y="834411"/>
+                  </a:lnTo>
+                  <a:lnTo>
+                    <a:pt x="2602746" y="847665"/>
+                  </a:lnTo>
+                  <a:lnTo>
+                    <a:pt x="2673090" y="860504"/>
+                  </a:lnTo>
+                  <a:lnTo>
+                    <a:pt x="2743435" y="872940"/>
+                  </a:lnTo>
+                  <a:lnTo>
+                    <a:pt x="2813779" y="884987"/>
+                  </a:lnTo>
+                  <a:lnTo>
+                    <a:pt x="2884124" y="896656"/>
+                  </a:lnTo>
+                  <a:lnTo>
+                    <a:pt x="2954468" y="907959"/>
+                  </a:lnTo>
+                  <a:lnTo>
+                    <a:pt x="3024813" y="918907"/>
+                  </a:lnTo>
+                  <a:lnTo>
+                    <a:pt x="3095157" y="929513"/>
+                  </a:lnTo>
+                  <a:lnTo>
+                    <a:pt x="3165502" y="939786"/>
+                  </a:lnTo>
+                  <a:lnTo>
+                    <a:pt x="3235846" y="949736"/>
+                  </a:lnTo>
+                  <a:lnTo>
+                    <a:pt x="3306191" y="958724"/>
+                  </a:lnTo>
+                  <a:lnTo>
+                    <a:pt x="3376535" y="964069"/>
+                  </a:lnTo>
+                  <a:lnTo>
+                    <a:pt x="3446880" y="969319"/>
+                  </a:lnTo>
+                  <a:lnTo>
+                    <a:pt x="3517224" y="974474"/>
+                  </a:lnTo>
+                  <a:lnTo>
+                    <a:pt x="3587569" y="979537"/>
+                  </a:lnTo>
+                  <a:lnTo>
+                    <a:pt x="3657913" y="984510"/>
+                  </a:lnTo>
+                  <a:lnTo>
+                    <a:pt x="3728257" y="989393"/>
+                  </a:lnTo>
+                  <a:lnTo>
+                    <a:pt x="3798602" y="994189"/>
+                  </a:lnTo>
+                  <a:lnTo>
+                    <a:pt x="3868946" y="998899"/>
+                  </a:lnTo>
+                  <a:lnTo>
+                    <a:pt x="3939291" y="1003525"/>
+                  </a:lnTo>
+                  <a:lnTo>
+                    <a:pt x="4009635" y="1008068"/>
+                  </a:lnTo>
+                  <a:lnTo>
+                    <a:pt x="4079980" y="1012530"/>
+                  </a:lnTo>
+                  <a:lnTo>
+                    <a:pt x="4150324" y="1016911"/>
+                  </a:lnTo>
+                  <a:lnTo>
+                    <a:pt x="4220669" y="1021214"/>
+                  </a:lnTo>
+                  <a:lnTo>
+                    <a:pt x="4291013" y="1025441"/>
+                  </a:lnTo>
+                  <a:lnTo>
+                    <a:pt x="4361358" y="1029591"/>
+                  </a:lnTo>
+                  <a:lnTo>
+                    <a:pt x="4431702" y="1033667"/>
+                  </a:lnTo>
+                  <a:lnTo>
+                    <a:pt x="4502047" y="1037670"/>
+                  </a:lnTo>
+                  <a:lnTo>
+                    <a:pt x="4572391" y="1041602"/>
+                  </a:lnTo>
+                  <a:lnTo>
+                    <a:pt x="4642736" y="1045463"/>
+                  </a:lnTo>
+                  <a:lnTo>
+                    <a:pt x="4713080" y="1049255"/>
+                  </a:lnTo>
+                  <a:lnTo>
+                    <a:pt x="4783425" y="1052978"/>
+                  </a:lnTo>
+                  <a:lnTo>
+                    <a:pt x="4853769" y="1056636"/>
+                  </a:lnTo>
+                  <a:lnTo>
+                    <a:pt x="4924114" y="1060228"/>
+                  </a:lnTo>
+                  <a:lnTo>
+                    <a:pt x="4994458" y="1063755"/>
+                  </a:lnTo>
+                  <a:lnTo>
+                    <a:pt x="5064803" y="1067219"/>
+                  </a:lnTo>
+                  <a:lnTo>
+                    <a:pt x="5135147" y="1070622"/>
+                  </a:lnTo>
+                  <a:lnTo>
+                    <a:pt x="5205492" y="1073963"/>
+                  </a:lnTo>
+                  <a:lnTo>
+                    <a:pt x="5275836" y="1077244"/>
+                  </a:lnTo>
+                  <a:lnTo>
+                    <a:pt x="5346181" y="1080467"/>
+                  </a:lnTo>
+                  <a:lnTo>
+                    <a:pt x="5416525" y="1083632"/>
+                  </a:lnTo>
+                  <a:lnTo>
+                    <a:pt x="5486870" y="1086740"/>
+                  </a:lnTo>
+                  <a:lnTo>
+                    <a:pt x="5557214" y="1089793"/>
+                  </a:lnTo>
+                  <a:lnTo>
+                    <a:pt x="5627559" y="1092791"/>
+                  </a:lnTo>
+                  <a:lnTo>
+                    <a:pt x="5697903" y="1095735"/>
+                  </a:lnTo>
+                  <a:lnTo>
+                    <a:pt x="5768248" y="1098627"/>
+                  </a:lnTo>
+                  <a:lnTo>
+                    <a:pt x="5838592" y="1101467"/>
+                  </a:lnTo>
+                  <a:lnTo>
+                    <a:pt x="5908937" y="1104256"/>
+                  </a:lnTo>
+                  <a:lnTo>
+                    <a:pt x="5979281" y="1106995"/>
+                  </a:lnTo>
+                  <a:lnTo>
+                    <a:pt x="6049626" y="1109685"/>
+                  </a:lnTo>
+                  <a:lnTo>
+                    <a:pt x="6119970" y="1112326"/>
+                  </a:lnTo>
+                  <a:lnTo>
+                    <a:pt x="6190315" y="1114921"/>
+                  </a:lnTo>
+                  <a:lnTo>
+                    <a:pt x="6260659" y="1117469"/>
+                  </a:lnTo>
+                  <a:lnTo>
+                    <a:pt x="6331004" y="1119971"/>
+                  </a:lnTo>
+                  <a:lnTo>
+                    <a:pt x="6401348" y="1122429"/>
+                  </a:lnTo>
+                  <a:lnTo>
+                    <a:pt x="6471693" y="1124842"/>
+                  </a:lnTo>
+                  <a:lnTo>
+                    <a:pt x="6542037" y="1127213"/>
+                  </a:lnTo>
+                  <a:lnTo>
+                    <a:pt x="6612382" y="1129541"/>
+                  </a:lnTo>
+                  <a:lnTo>
+                    <a:pt x="6682726" y="1131827"/>
+                  </a:lnTo>
+                  <a:lnTo>
+                    <a:pt x="6753071" y="1134072"/>
+                  </a:lnTo>
+                  <a:lnTo>
+                    <a:pt x="6823415" y="1136277"/>
+                  </a:lnTo>
+                  <a:lnTo>
+                    <a:pt x="6893760" y="1138443"/>
+                  </a:lnTo>
+                  <a:lnTo>
+                    <a:pt x="6964104" y="1140569"/>
+                  </a:lnTo>
+                  <a:lnTo>
+                    <a:pt x="6964104" y="1200362"/>
+                  </a:lnTo>
+                  <a:lnTo>
+                    <a:pt x="6893760" y="1198523"/>
+                  </a:lnTo>
+                  <a:lnTo>
+                    <a:pt x="6823415" y="1196624"/>
+                  </a:lnTo>
+                  <a:lnTo>
+                    <a:pt x="6753071" y="1194663"/>
+                  </a:lnTo>
+                  <a:lnTo>
+                    <a:pt x="6682726" y="1192639"/>
+                  </a:lnTo>
+                  <a:lnTo>
+                    <a:pt x="6612382" y="1190549"/>
+                  </a:lnTo>
+                  <a:lnTo>
+                    <a:pt x="6542037" y="1188392"/>
+                  </a:lnTo>
+                  <a:lnTo>
+                    <a:pt x="6471693" y="1186165"/>
+                  </a:lnTo>
+                  <a:lnTo>
+                    <a:pt x="6401348" y="1183866"/>
+                  </a:lnTo>
+                  <a:lnTo>
+                    <a:pt x="6331004" y="1181493"/>
+                  </a:lnTo>
+                  <a:lnTo>
+                    <a:pt x="6260659" y="1179043"/>
+                  </a:lnTo>
+                  <a:lnTo>
+                    <a:pt x="6190315" y="1176513"/>
+                  </a:lnTo>
+                  <a:lnTo>
+                    <a:pt x="6119970" y="1173902"/>
+                  </a:lnTo>
+                  <a:lnTo>
+                    <a:pt x="6049626" y="1171206"/>
+                  </a:lnTo>
+                  <a:lnTo>
+                    <a:pt x="5979281" y="1168423"/>
+                  </a:lnTo>
+                  <a:lnTo>
+                    <a:pt x="5908937" y="1165549"/>
+                  </a:lnTo>
+                  <a:lnTo>
+                    <a:pt x="5838592" y="1162583"/>
+                  </a:lnTo>
+                  <a:lnTo>
+                    <a:pt x="5768248" y="1159521"/>
+                  </a:lnTo>
+                  <a:lnTo>
+                    <a:pt x="5697903" y="1156359"/>
+                  </a:lnTo>
+                  <a:lnTo>
+                    <a:pt x="5627559" y="1153096"/>
+                  </a:lnTo>
+                  <a:lnTo>
+                    <a:pt x="5557214" y="1149726"/>
+                  </a:lnTo>
+                  <a:lnTo>
+                    <a:pt x="5486870" y="1146248"/>
+                  </a:lnTo>
+                  <a:lnTo>
+                    <a:pt x="5416525" y="1142657"/>
+                  </a:lnTo>
+                  <a:lnTo>
+                    <a:pt x="5346181" y="1138950"/>
+                  </a:lnTo>
+                  <a:lnTo>
+                    <a:pt x="5275836" y="1135123"/>
+                  </a:lnTo>
+                  <a:lnTo>
+                    <a:pt x="5205492" y="1131172"/>
+                  </a:lnTo>
+                  <a:lnTo>
+                    <a:pt x="5135147" y="1127093"/>
+                  </a:lnTo>
+                  <a:lnTo>
+                    <a:pt x="5064803" y="1122882"/>
+                  </a:lnTo>
+                  <a:lnTo>
+                    <a:pt x="4994458" y="1118535"/>
+                  </a:lnTo>
+                  <a:lnTo>
+                    <a:pt x="4924114" y="1114047"/>
+                  </a:lnTo>
+                  <a:lnTo>
+                    <a:pt x="4853769" y="1109414"/>
+                  </a:lnTo>
+                  <a:lnTo>
+                    <a:pt x="4783425" y="1104631"/>
+                  </a:lnTo>
+                  <a:lnTo>
+                    <a:pt x="4713080" y="1099693"/>
+                  </a:lnTo>
+                  <a:lnTo>
+                    <a:pt x="4642736" y="1094595"/>
+                  </a:lnTo>
+                  <a:lnTo>
+                    <a:pt x="4572391" y="1089333"/>
+                  </a:lnTo>
+                  <a:lnTo>
+                    <a:pt x="4502047" y="1083900"/>
+                  </a:lnTo>
+                  <a:lnTo>
+                    <a:pt x="4431702" y="1078291"/>
+                  </a:lnTo>
+                  <a:lnTo>
+                    <a:pt x="4361358" y="1072501"/>
+                  </a:lnTo>
+                  <a:lnTo>
+                    <a:pt x="4291013" y="1066523"/>
+                  </a:lnTo>
+                  <a:lnTo>
+                    <a:pt x="4220669" y="1060352"/>
+                  </a:lnTo>
+                  <a:lnTo>
+                    <a:pt x="4150324" y="1053981"/>
+                  </a:lnTo>
+                  <a:lnTo>
+                    <a:pt x="4079980" y="1047404"/>
+                  </a:lnTo>
+                  <a:lnTo>
+                    <a:pt x="4009635" y="1040614"/>
+                  </a:lnTo>
+                  <a:lnTo>
+                    <a:pt x="3939291" y="1033604"/>
+                  </a:lnTo>
+                  <a:lnTo>
+                    <a:pt x="3868946" y="1026368"/>
+                  </a:lnTo>
+                  <a:lnTo>
+                    <a:pt x="3798602" y="1018897"/>
+                  </a:lnTo>
+                  <a:lnTo>
+                    <a:pt x="3728257" y="1011184"/>
+                  </a:lnTo>
+                  <a:lnTo>
+                    <a:pt x="3657913" y="1003222"/>
+                  </a:lnTo>
+                  <a:lnTo>
+                    <a:pt x="3587569" y="995003"/>
+                  </a:lnTo>
+                  <a:lnTo>
+                    <a:pt x="3517224" y="986517"/>
+                  </a:lnTo>
+                  <a:lnTo>
+                    <a:pt x="3446880" y="977756"/>
+                  </a:lnTo>
+                  <a:lnTo>
+                    <a:pt x="3376535" y="968712"/>
+                  </a:lnTo>
+                  <a:lnTo>
+                    <a:pt x="3306191" y="959375"/>
+                  </a:lnTo>
+                  <a:lnTo>
+                    <a:pt x="3235846" y="953281"/>
+                  </a:lnTo>
+                  <a:lnTo>
+                    <a:pt x="3165502" y="947739"/>
+                  </a:lnTo>
+                  <a:lnTo>
+                    <a:pt x="3095157" y="942096"/>
+                  </a:lnTo>
+                  <a:lnTo>
+                    <a:pt x="3024813" y="936351"/>
+                  </a:lnTo>
+                  <a:lnTo>
+                    <a:pt x="2954468" y="930500"/>
+                  </a:lnTo>
+                  <a:lnTo>
+                    <a:pt x="2884124" y="924543"/>
+                  </a:lnTo>
+                  <a:lnTo>
+                    <a:pt x="2813779" y="918477"/>
+                  </a:lnTo>
+                  <a:lnTo>
+                    <a:pt x="2743435" y="912300"/>
+                  </a:lnTo>
+                  <a:lnTo>
+                    <a:pt x="2673090" y="906011"/>
+                  </a:lnTo>
+                  <a:lnTo>
+                    <a:pt x="2602746" y="899607"/>
+                  </a:lnTo>
+                  <a:lnTo>
+                    <a:pt x="2532401" y="893086"/>
+                  </a:lnTo>
+                  <a:lnTo>
+                    <a:pt x="2462057" y="886447"/>
+                  </a:lnTo>
+                  <a:lnTo>
+                    <a:pt x="2391712" y="879686"/>
+                  </a:lnTo>
+                  <a:lnTo>
+                    <a:pt x="2321368" y="872802"/>
+                  </a:lnTo>
+                  <a:lnTo>
+                    <a:pt x="2251023" y="865793"/>
+                  </a:lnTo>
+                  <a:lnTo>
+                    <a:pt x="2180679" y="858655"/>
+                  </a:lnTo>
+                  <a:lnTo>
+                    <a:pt x="2110334" y="851388"/>
+                  </a:lnTo>
+                  <a:lnTo>
+                    <a:pt x="2039990" y="843988"/>
+                  </a:lnTo>
+                  <a:lnTo>
+                    <a:pt x="1969645" y="836453"/>
+                  </a:lnTo>
+                  <a:lnTo>
+                    <a:pt x="1899301" y="828781"/>
+                  </a:lnTo>
+                  <a:lnTo>
+                    <a:pt x="1828956" y="820969"/>
+                  </a:lnTo>
+                  <a:lnTo>
+                    <a:pt x="1758612" y="813014"/>
+                  </a:lnTo>
+                  <a:lnTo>
+                    <a:pt x="1688267" y="804914"/>
+                  </a:lnTo>
+                  <a:lnTo>
+                    <a:pt x="1617923" y="796667"/>
+                  </a:lnTo>
+                  <a:lnTo>
+                    <a:pt x="1547578" y="788269"/>
+                  </a:lnTo>
+                  <a:lnTo>
+                    <a:pt x="1477234" y="779718"/>
+                  </a:lnTo>
+                  <a:lnTo>
+                    <a:pt x="1406889" y="771012"/>
+                  </a:lnTo>
+                  <a:lnTo>
+                    <a:pt x="1336545" y="762146"/>
+                  </a:lnTo>
+                  <a:lnTo>
+                    <a:pt x="1266200" y="753119"/>
+                  </a:lnTo>
+                  <a:lnTo>
+                    <a:pt x="1195856" y="743927"/>
+                  </a:lnTo>
+                  <a:lnTo>
+                    <a:pt x="1125511" y="734568"/>
+                  </a:lnTo>
+                  <a:lnTo>
+                    <a:pt x="1055167" y="725037"/>
+                  </a:lnTo>
+                  <a:lnTo>
+                    <a:pt x="984822" y="715334"/>
+                  </a:lnTo>
+                  <a:lnTo>
+                    <a:pt x="914478" y="705453"/>
+                  </a:lnTo>
+                  <a:lnTo>
+                    <a:pt x="844133" y="695392"/>
+                  </a:lnTo>
+                  <a:lnTo>
+                    <a:pt x="773789" y="685147"/>
+                  </a:lnTo>
+                  <a:lnTo>
+                    <a:pt x="703444" y="674716"/>
+                  </a:lnTo>
+                  <a:lnTo>
+                    <a:pt x="633100" y="664094"/>
+                  </a:lnTo>
+                  <a:lnTo>
+                    <a:pt x="562755" y="653279"/>
+                  </a:lnTo>
+                  <a:lnTo>
+                    <a:pt x="492411" y="642267"/>
+                  </a:lnTo>
+                  <a:lnTo>
+                    <a:pt x="422066" y="631054"/>
+                  </a:lnTo>
+                  <a:lnTo>
+                    <a:pt x="351722" y="619636"/>
+                  </a:lnTo>
+                  <a:lnTo>
+                    <a:pt x="281377" y="608010"/>
+                  </a:lnTo>
+                  <a:lnTo>
+                    <a:pt x="211033" y="596172"/>
+                  </a:lnTo>
+                  <a:lnTo>
+                    <a:pt x="140688" y="584118"/>
+                  </a:lnTo>
+                  <a:lnTo>
+                    <a:pt x="70344" y="571845"/>
+                  </a:lnTo>
+                  <a:lnTo>
+                    <a:pt x="0" y="559347"/>
+                  </a:lnTo>
+                  <a:close/>
+                </a:path>
+              </a:pathLst>
+            </a:custGeom>
+            <a:solidFill>
+              <a:srgbClr val="FF8C00">
+                <a:alpha val="20000"/>
+              </a:srgbClr>
+            </a:solidFill>
+          </p:spPr>
+          <p:txBody>
+            <a:bodyPr/>
+            <a:lstStyle/>
+            <a:p/>
+          </p:txBody>
+        </p:sp>
+        <p:sp>
+          <p:nvSpPr>
+            <p:cNvPr id="68" name="pl68"/>
+            <p:cNvSpPr/>
+            <p:nvPr/>
+          </p:nvSpPr>
+          <p:spPr>
+            <a:xfrm>
+              <a:off x="1361137" y="4336484"/>
+              <a:ext cx="6838278" cy="1140569"/>
+            </a:xfrm>
+            <a:custGeom>
+              <a:avLst/>
+              <a:pathLst>
+                <a:path w="6838278" h="1140569">
+                  <a:moveTo>
+                    <a:pt x="0" y="0"/>
+                  </a:moveTo>
+                  <a:lnTo>
+                    <a:pt x="14863" y="8538"/>
+                  </a:lnTo>
+                  <a:lnTo>
+                    <a:pt x="85207" y="47683"/>
+                  </a:lnTo>
+                  <a:lnTo>
+                    <a:pt x="155552" y="85601"/>
+                  </a:lnTo>
+                  <a:lnTo>
+                    <a:pt x="225896" y="122330"/>
+                  </a:lnTo>
+                  <a:lnTo>
+                    <a:pt x="296241" y="157908"/>
+                  </a:lnTo>
+                  <a:lnTo>
+                    <a:pt x="366585" y="192371"/>
+                  </a:lnTo>
+                  <a:lnTo>
+                    <a:pt x="436930" y="225753"/>
+                  </a:lnTo>
+                  <a:lnTo>
+                    <a:pt x="507274" y="258088"/>
+                  </a:lnTo>
+                  <a:lnTo>
+                    <a:pt x="577619" y="289410"/>
+                  </a:lnTo>
+                  <a:lnTo>
+                    <a:pt x="647963" y="319750"/>
+                  </a:lnTo>
+                  <a:lnTo>
+                    <a:pt x="718308" y="349139"/>
+                  </a:lnTo>
+                  <a:lnTo>
+                    <a:pt x="788652" y="377606"/>
+                  </a:lnTo>
+                  <a:lnTo>
+                    <a:pt x="858997" y="405181"/>
+                  </a:lnTo>
+                  <a:lnTo>
+                    <a:pt x="929341" y="431892"/>
+                  </a:lnTo>
+                  <a:lnTo>
+                    <a:pt x="999686" y="457765"/>
+                  </a:lnTo>
+                  <a:lnTo>
+                    <a:pt x="1070030" y="482827"/>
+                  </a:lnTo>
+                  <a:lnTo>
+                    <a:pt x="1140375" y="507103"/>
+                  </a:lnTo>
+                  <a:lnTo>
+                    <a:pt x="1210719" y="530618"/>
+                  </a:lnTo>
+                  <a:lnTo>
+                    <a:pt x="1281064" y="553396"/>
+                  </a:lnTo>
+                  <a:lnTo>
+                    <a:pt x="1351408" y="575460"/>
+                  </a:lnTo>
+                  <a:lnTo>
+                    <a:pt x="1421753" y="596833"/>
+                  </a:lnTo>
+                  <a:lnTo>
+                    <a:pt x="1492097" y="617535"/>
+                  </a:lnTo>
+                  <a:lnTo>
+                    <a:pt x="1562441" y="637588"/>
+                  </a:lnTo>
+                  <a:lnTo>
+                    <a:pt x="1632786" y="657013"/>
+                  </a:lnTo>
+                  <a:lnTo>
+                    <a:pt x="1703130" y="675829"/>
+                  </a:lnTo>
+                  <a:lnTo>
+                    <a:pt x="1773475" y="694054"/>
+                  </a:lnTo>
+                  <a:lnTo>
+                    <a:pt x="1843819" y="711709"/>
+                  </a:lnTo>
+                  <a:lnTo>
+                    <a:pt x="1914164" y="728810"/>
+                  </a:lnTo>
+                  <a:lnTo>
+                    <a:pt x="1984508" y="745375"/>
+                  </a:lnTo>
+                  <a:lnTo>
+                    <a:pt x="2054853" y="761420"/>
+                  </a:lnTo>
+                  <a:lnTo>
+                    <a:pt x="2125197" y="776963"/>
+                  </a:lnTo>
+                  <a:lnTo>
+                    <a:pt x="2195542" y="792018"/>
+                  </a:lnTo>
+                  <a:lnTo>
+                    <a:pt x="2265886" y="806602"/>
+                  </a:lnTo>
+                  <a:lnTo>
+                    <a:pt x="2336231" y="820728"/>
+                  </a:lnTo>
+                  <a:lnTo>
+                    <a:pt x="2406575" y="834411"/>
+                  </a:lnTo>
+                  <a:lnTo>
+                    <a:pt x="2476920" y="847665"/>
+                  </a:lnTo>
+                  <a:lnTo>
+                    <a:pt x="2547264" y="860504"/>
+                  </a:lnTo>
+                  <a:lnTo>
+                    <a:pt x="2617609" y="872940"/>
+                  </a:lnTo>
+                  <a:lnTo>
+                    <a:pt x="2687953" y="884987"/>
+                  </a:lnTo>
+                  <a:lnTo>
+                    <a:pt x="2758298" y="896656"/>
+                  </a:lnTo>
+                  <a:lnTo>
+                    <a:pt x="2828642" y="907959"/>
+                  </a:lnTo>
+                  <a:lnTo>
+                    <a:pt x="2898987" y="918907"/>
+                  </a:lnTo>
+                  <a:lnTo>
+                    <a:pt x="2969331" y="929513"/>
+                  </a:lnTo>
+                  <a:lnTo>
+                    <a:pt x="3039676" y="939786"/>
+                  </a:lnTo>
+                  <a:lnTo>
+                    <a:pt x="3110020" y="949736"/>
+                  </a:lnTo>
+                  <a:lnTo>
+                    <a:pt x="3180365" y="958724"/>
+                  </a:lnTo>
+                  <a:lnTo>
+                    <a:pt x="3250709" y="964069"/>
+                  </a:lnTo>
+                  <a:lnTo>
+                    <a:pt x="3321054" y="969319"/>
+                  </a:lnTo>
+                  <a:lnTo>
+                    <a:pt x="3391398" y="974474"/>
+                  </a:lnTo>
+                  <a:lnTo>
+                    <a:pt x="3461743" y="979537"/>
+                  </a:lnTo>
+                  <a:lnTo>
+                    <a:pt x="3532087" y="984510"/>
+                  </a:lnTo>
+                  <a:lnTo>
+                    <a:pt x="3602432" y="989393"/>
+                  </a:lnTo>
+                  <a:lnTo>
+                    <a:pt x="3672776" y="994189"/>
+                  </a:lnTo>
+                  <a:lnTo>
+                    <a:pt x="3743121" y="998899"/>
+                  </a:lnTo>
+                  <a:lnTo>
+                    <a:pt x="3813465" y="1003525"/>
+                  </a:lnTo>
+                  <a:lnTo>
+                    <a:pt x="3883810" y="1008068"/>
+                  </a:lnTo>
+                  <a:lnTo>
+                    <a:pt x="3954154" y="1012530"/>
+                  </a:lnTo>
+                  <a:lnTo>
+                    <a:pt x="4024499" y="1016911"/>
+                  </a:lnTo>
+                  <a:lnTo>
+                    <a:pt x="4094843" y="1021214"/>
+                  </a:lnTo>
+                  <a:lnTo>
+                    <a:pt x="4165188" y="1025441"/>
+                  </a:lnTo>
+                  <a:lnTo>
+                    <a:pt x="4235532" y="1029591"/>
+                  </a:lnTo>
+                  <a:lnTo>
+                    <a:pt x="4305877" y="1033667"/>
+                  </a:lnTo>
+                  <a:lnTo>
+                    <a:pt x="4376221" y="1037670"/>
+                  </a:lnTo>
+                  <a:lnTo>
+                    <a:pt x="4446566" y="1041602"/>
+                  </a:lnTo>
+                  <a:lnTo>
+                    <a:pt x="4516910" y="1045463"/>
+                  </a:lnTo>
+                  <a:lnTo>
+                    <a:pt x="4587255" y="1049255"/>
+                  </a:lnTo>
+                  <a:lnTo>
+                    <a:pt x="4657599" y="1052978"/>
+                  </a:lnTo>
+                  <a:lnTo>
+                    <a:pt x="4727944" y="1056636"/>
+                  </a:lnTo>
+                  <a:lnTo>
+                    <a:pt x="4798288" y="1060228"/>
+                  </a:lnTo>
+                  <a:lnTo>
+                    <a:pt x="4868633" y="1063755"/>
+                  </a:lnTo>
+                  <a:lnTo>
+                    <a:pt x="4938977" y="1067219"/>
+                  </a:lnTo>
+                  <a:lnTo>
+                    <a:pt x="5009322" y="1070622"/>
+                  </a:lnTo>
+                  <a:lnTo>
+                    <a:pt x="5079666" y="1073963"/>
+                  </a:lnTo>
+                  <a:lnTo>
+                    <a:pt x="5150011" y="1077244"/>
+                  </a:lnTo>
+                  <a:lnTo>
+                    <a:pt x="5220355" y="1080467"/>
+                  </a:lnTo>
+                  <a:lnTo>
+                    <a:pt x="5290699" y="1083632"/>
+                  </a:lnTo>
+                  <a:lnTo>
+                    <a:pt x="5361044" y="1086740"/>
+                  </a:lnTo>
+                  <a:lnTo>
+                    <a:pt x="5431388" y="1089793"/>
+                  </a:lnTo>
+                  <a:lnTo>
+                    <a:pt x="5501733" y="1092791"/>
+                  </a:lnTo>
+                  <a:lnTo>
+                    <a:pt x="5572077" y="1095735"/>
+                  </a:lnTo>
+                  <a:lnTo>
+                    <a:pt x="5642422" y="1098627"/>
+                  </a:lnTo>
+                  <a:lnTo>
+                    <a:pt x="5712766" y="1101467"/>
+                  </a:lnTo>
+                  <a:lnTo>
+                    <a:pt x="5783111" y="1104256"/>
+                  </a:lnTo>
+                  <a:lnTo>
+                    <a:pt x="5853455" y="1106995"/>
+                  </a:lnTo>
+                  <a:lnTo>
+                    <a:pt x="5923800" y="1109685"/>
+                  </a:lnTo>
+                  <a:lnTo>
+                    <a:pt x="5994144" y="1112326"/>
+                  </a:lnTo>
+                  <a:lnTo>
+                    <a:pt x="6064489" y="1114921"/>
+                  </a:lnTo>
+                  <a:lnTo>
+                    <a:pt x="6134833" y="1117469"/>
+                  </a:lnTo>
+                  <a:lnTo>
+                    <a:pt x="6205178" y="1119971"/>
+                  </a:lnTo>
+                  <a:lnTo>
+                    <a:pt x="6275522" y="1122429"/>
+                  </a:lnTo>
+                  <a:lnTo>
+                    <a:pt x="6345867" y="1124842"/>
+                  </a:lnTo>
+                  <a:lnTo>
+                    <a:pt x="6416211" y="1127213"/>
+                  </a:lnTo>
+                  <a:lnTo>
+                    <a:pt x="6486556" y="1129541"/>
+                  </a:lnTo>
+                  <a:lnTo>
+                    <a:pt x="6556900" y="1131827"/>
+                  </a:lnTo>
+                  <a:lnTo>
+                    <a:pt x="6627245" y="1134072"/>
+                  </a:lnTo>
+                  <a:lnTo>
+                    <a:pt x="6697589" y="1136277"/>
+                  </a:lnTo>
+                  <a:lnTo>
+                    <a:pt x="6767934" y="1138443"/>
+                  </a:lnTo>
+                  <a:lnTo>
+                    <a:pt x="6838278" y="1140569"/>
+                  </a:lnTo>
+                </a:path>
+              </a:pathLst>
+            </a:custGeom>
+          </p:spPr>
+          <p:txBody>
+            <a:bodyPr/>
+            <a:lstStyle/>
+            <a:p/>
+          </p:txBody>
+        </p:sp>
+        <p:sp>
+          <p:nvSpPr>
+            <p:cNvPr id="69" name="pl69"/>
+            <p:cNvSpPr/>
+            <p:nvPr/>
+          </p:nvSpPr>
+          <p:spPr>
+            <a:xfrm>
+              <a:off x="1235312" y="4895832"/>
+              <a:ext cx="6964104" cy="641014"/>
+            </a:xfrm>
+            <a:custGeom>
+              <a:avLst/>
+              <a:pathLst>
+                <a:path w="6964104" h="641014">
+                  <a:moveTo>
+                    <a:pt x="6964104" y="641014"/>
+                  </a:moveTo>
+                  <a:lnTo>
+                    <a:pt x="6893760" y="639175"/>
+                  </a:lnTo>
+                  <a:lnTo>
+                    <a:pt x="6823415" y="637276"/>
+                  </a:lnTo>
+                  <a:lnTo>
+                    <a:pt x="6753071" y="635315"/>
+                  </a:lnTo>
+                  <a:lnTo>
+                    <a:pt x="6682726" y="633291"/>
+                  </a:lnTo>
+                  <a:lnTo>
+                    <a:pt x="6612382" y="631202"/>
+                  </a:lnTo>
+                  <a:lnTo>
+                    <a:pt x="6542037" y="629044"/>
+                  </a:lnTo>
+                  <a:lnTo>
+                    <a:pt x="6471693" y="626817"/>
+                  </a:lnTo>
+                  <a:lnTo>
+                    <a:pt x="6401348" y="624518"/>
+                  </a:lnTo>
+                  <a:lnTo>
+                    <a:pt x="6331004" y="622145"/>
+                  </a:lnTo>
+                  <a:lnTo>
+                    <a:pt x="6260659" y="619695"/>
+                  </a:lnTo>
+                  <a:lnTo>
+                    <a:pt x="6190315" y="617165"/>
+                  </a:lnTo>
+                  <a:lnTo>
+                    <a:pt x="6119970" y="614554"/>
+                  </a:lnTo>
+                  <a:lnTo>
+                    <a:pt x="6049626" y="611858"/>
+                  </a:lnTo>
+                  <a:lnTo>
+                    <a:pt x="5979281" y="609075"/>
+                  </a:lnTo>
+                  <a:lnTo>
+                    <a:pt x="5908937" y="606201"/>
+                  </a:lnTo>
+                  <a:lnTo>
+                    <a:pt x="5838592" y="603235"/>
+                  </a:lnTo>
+                  <a:lnTo>
+                    <a:pt x="5768248" y="600173"/>
+                  </a:lnTo>
+                  <a:lnTo>
+                    <a:pt x="5697903" y="597011"/>
+                  </a:lnTo>
+                  <a:lnTo>
+                    <a:pt x="5627559" y="593748"/>
+                  </a:lnTo>
+                  <a:lnTo>
+                    <a:pt x="5557214" y="590378"/>
+                  </a:lnTo>
+                  <a:lnTo>
+                    <a:pt x="5486870" y="586900"/>
+                  </a:lnTo>
+                  <a:lnTo>
+                    <a:pt x="5416525" y="583309"/>
+                  </a:lnTo>
+                  <a:lnTo>
+                    <a:pt x="5346181" y="579602"/>
+                  </a:lnTo>
+                  <a:lnTo>
+                    <a:pt x="5275836" y="575775"/>
+                  </a:lnTo>
+                  <a:lnTo>
+                    <a:pt x="5205492" y="571824"/>
+                  </a:lnTo>
+                  <a:lnTo>
+                    <a:pt x="5135147" y="567745"/>
+                  </a:lnTo>
+                  <a:lnTo>
+                    <a:pt x="5064803" y="563534"/>
+                  </a:lnTo>
+                  <a:lnTo>
+                    <a:pt x="4994458" y="559187"/>
+                  </a:lnTo>
+                  <a:lnTo>
+                    <a:pt x="4924114" y="554699"/>
+                  </a:lnTo>
+                  <a:lnTo>
+                    <a:pt x="4853769" y="550066"/>
+                  </a:lnTo>
+                  <a:lnTo>
+                    <a:pt x="4783425" y="545283"/>
+                  </a:lnTo>
+                  <a:lnTo>
+                    <a:pt x="4713080" y="540345"/>
+                  </a:lnTo>
+                  <a:lnTo>
+                    <a:pt x="4642736" y="535248"/>
+                  </a:lnTo>
+                  <a:lnTo>
+                    <a:pt x="4572391" y="529985"/>
+                  </a:lnTo>
+                  <a:lnTo>
+                    <a:pt x="4502047" y="524552"/>
+                  </a:lnTo>
+                  <a:lnTo>
+                    <a:pt x="4431702" y="518943"/>
+                  </a:lnTo>
+                  <a:lnTo>
+                    <a:pt x="4361358" y="513153"/>
+                  </a:lnTo>
+                  <a:lnTo>
+                    <a:pt x="4291013" y="507175"/>
+                  </a:lnTo>
+                  <a:lnTo>
+                    <a:pt x="4220669" y="501004"/>
+                  </a:lnTo>
+                  <a:lnTo>
+                    <a:pt x="4150324" y="494633"/>
+                  </a:lnTo>
+                  <a:lnTo>
+                    <a:pt x="4079980" y="488056"/>
+                  </a:lnTo>
+                  <a:lnTo>
+                    <a:pt x="4009635" y="481266"/>
+                  </a:lnTo>
+                  <a:lnTo>
+                    <a:pt x="3939291" y="474256"/>
+                  </a:lnTo>
+                  <a:lnTo>
+                    <a:pt x="3868946" y="467020"/>
+                  </a:lnTo>
+                  <a:lnTo>
+                    <a:pt x="3798602" y="459549"/>
+                  </a:lnTo>
+                  <a:lnTo>
+                    <a:pt x="3728257" y="451837"/>
+                  </a:lnTo>
+                  <a:lnTo>
+                    <a:pt x="3657913" y="443874"/>
+                  </a:lnTo>
+                  <a:lnTo>
+                    <a:pt x="3587569" y="435655"/>
+                  </a:lnTo>
+                  <a:lnTo>
+                    <a:pt x="3517224" y="427169"/>
+                  </a:lnTo>
+                  <a:lnTo>
+                    <a:pt x="3446880" y="418408"/>
+                  </a:lnTo>
+                  <a:lnTo>
+                    <a:pt x="3376535" y="409364"/>
+                  </a:lnTo>
+                  <a:lnTo>
+                    <a:pt x="3306191" y="400027"/>
+                  </a:lnTo>
+                  <a:lnTo>
+                    <a:pt x="3235846" y="393933"/>
+                  </a:lnTo>
+                  <a:lnTo>
+                    <a:pt x="3165502" y="388392"/>
+                  </a:lnTo>
+                  <a:lnTo>
+                    <a:pt x="3095157" y="382749"/>
+                  </a:lnTo>
+                  <a:lnTo>
+                    <a:pt x="3024813" y="377003"/>
+                  </a:lnTo>
+                  <a:lnTo>
+                    <a:pt x="2954468" y="371152"/>
+                  </a:lnTo>
+                  <a:lnTo>
+                    <a:pt x="2884124" y="365195"/>
+                  </a:lnTo>
+                  <a:lnTo>
+                    <a:pt x="2813779" y="359129"/>
+                  </a:lnTo>
+                  <a:lnTo>
+                    <a:pt x="2743435" y="352952"/>
+                  </a:lnTo>
+                  <a:lnTo>
+                    <a:pt x="2673090" y="346663"/>
+                  </a:lnTo>
+                  <a:lnTo>
+                    <a:pt x="2602746" y="340259"/>
+                  </a:lnTo>
+                  <a:lnTo>
+                    <a:pt x="2532401" y="333738"/>
+                  </a:lnTo>
+                  <a:lnTo>
+                    <a:pt x="2462057" y="327099"/>
+                  </a:lnTo>
+                  <a:lnTo>
+                    <a:pt x="2391712" y="320338"/>
+                  </a:lnTo>
+                  <a:lnTo>
+                    <a:pt x="2321368" y="313454"/>
+                  </a:lnTo>
+                  <a:lnTo>
+                    <a:pt x="2251023" y="306445"/>
+                  </a:lnTo>
+                  <a:lnTo>
+                    <a:pt x="2180679" y="299307"/>
+                  </a:lnTo>
+                  <a:lnTo>
+                    <a:pt x="2110334" y="292040"/>
+                  </a:lnTo>
+                  <a:lnTo>
+                    <a:pt x="2039990" y="284640"/>
+                  </a:lnTo>
+                  <a:lnTo>
+                    <a:pt x="1969645" y="277105"/>
+                  </a:lnTo>
+                  <a:lnTo>
+                    <a:pt x="1899301" y="269433"/>
+                  </a:lnTo>
+                  <a:lnTo>
+                    <a:pt x="1828956" y="261621"/>
+                  </a:lnTo>
+                  <a:lnTo>
+                    <a:pt x="1758612" y="253666"/>
+                  </a:lnTo>
+                  <a:lnTo>
+                    <a:pt x="1688267" y="245567"/>
+                  </a:lnTo>
+                  <a:lnTo>
+                    <a:pt x="1617923" y="237319"/>
+                  </a:lnTo>
+                  <a:lnTo>
+                    <a:pt x="1547578" y="228921"/>
+                  </a:lnTo>
+                  <a:lnTo>
+                    <a:pt x="1477234" y="220371"/>
+                  </a:lnTo>
+                  <a:lnTo>
+                    <a:pt x="1406889" y="211664"/>
+                  </a:lnTo>
+                  <a:lnTo>
+                    <a:pt x="1336545" y="202798"/>
+                  </a:lnTo>
+                  <a:lnTo>
+                    <a:pt x="1266200" y="193771"/>
+                  </a:lnTo>
+                  <a:lnTo>
+                    <a:pt x="1195856" y="184579"/>
+                  </a:lnTo>
+                  <a:lnTo>
+                    <a:pt x="1125511" y="175220"/>
+                  </a:lnTo>
+                  <a:lnTo>
+                    <a:pt x="1055167" y="165689"/>
+                  </a:lnTo>
+                  <a:lnTo>
+                    <a:pt x="984822" y="155986"/>
+                  </a:lnTo>
+                  <a:lnTo>
+                    <a:pt x="914478" y="146105"/>
+                  </a:lnTo>
+                  <a:lnTo>
+                    <a:pt x="844133" y="136044"/>
+                  </a:lnTo>
+                  <a:lnTo>
+                    <a:pt x="773789" y="125799"/>
+                  </a:lnTo>
+                  <a:lnTo>
+                    <a:pt x="703444" y="115368"/>
+                  </a:lnTo>
+                  <a:lnTo>
+                    <a:pt x="633100" y="104746"/>
+                  </a:lnTo>
+                  <a:lnTo>
+                    <a:pt x="562755" y="93931"/>
+                  </a:lnTo>
+                  <a:lnTo>
+                    <a:pt x="492411" y="82919"/>
+                  </a:lnTo>
+                  <a:lnTo>
+                    <a:pt x="422066" y="71706"/>
+                  </a:lnTo>
+                  <a:lnTo>
+                    <a:pt x="351722" y="60288"/>
+                  </a:lnTo>
+                  <a:lnTo>
+                    <a:pt x="281377" y="48662"/>
+                  </a:lnTo>
+                  <a:lnTo>
+                    <a:pt x="211033" y="36824"/>
+                  </a:lnTo>
+                  <a:lnTo>
+                    <a:pt x="140688" y="24770"/>
+                  </a:lnTo>
+                  <a:lnTo>
+                    <a:pt x="70344" y="12497"/>
+                  </a:lnTo>
+                  <a:lnTo>
+                    <a:pt x="0" y="0"/>
+                  </a:lnTo>
+                </a:path>
+              </a:pathLst>
+            </a:custGeom>
+          </p:spPr>
+          <p:txBody>
+            <a:bodyPr/>
+            <a:lstStyle/>
+            <a:p/>
+          </p:txBody>
+        </p:sp>
+        <p:sp>
+          <p:nvSpPr>
+            <p:cNvPr id="70" name="pl70"/>
+            <p:cNvSpPr/>
+            <p:nvPr/>
+          </p:nvSpPr>
+          <p:spPr>
+            <a:xfrm>
+              <a:off x="1235312" y="4629995"/>
+              <a:ext cx="6964104" cy="882270"/>
+            </a:xfrm>
+            <a:custGeom>
+              <a:avLst/>
+              <a:pathLst>
+                <a:path w="6964104" h="882270">
+                  <a:moveTo>
+                    <a:pt x="0" y="0"/>
+                  </a:moveTo>
+                  <a:lnTo>
+                    <a:pt x="70344" y="23756"/>
+                  </a:lnTo>
+                  <a:lnTo>
+                    <a:pt x="140688" y="46928"/>
+                  </a:lnTo>
+                  <a:lnTo>
+                    <a:pt x="211033" y="69528"/>
+                  </a:lnTo>
+                  <a:lnTo>
+                    <a:pt x="281377" y="91571"/>
+                  </a:lnTo>
+                  <a:lnTo>
+                    <a:pt x="351722" y="113070"/>
+                  </a:lnTo>
+                  <a:lnTo>
+                    <a:pt x="422066" y="134040"/>
+                  </a:lnTo>
+                  <a:lnTo>
+                    <a:pt x="492411" y="154493"/>
+                  </a:lnTo>
+                  <a:lnTo>
+                    <a:pt x="562755" y="174441"/>
+                  </a:lnTo>
+                  <a:lnTo>
+                    <a:pt x="633100" y="193898"/>
+                  </a:lnTo>
+                  <a:lnTo>
+                    <a:pt x="703444" y="212875"/>
+                  </a:lnTo>
+                  <a:lnTo>
+                    <a:pt x="773789" y="231384"/>
+                  </a:lnTo>
+                  <a:lnTo>
+                    <a:pt x="844133" y="249437"/>
+                  </a:lnTo>
+                  <a:lnTo>
+                    <a:pt x="914478" y="267045"/>
+                  </a:lnTo>
+                  <a:lnTo>
+                    <a:pt x="984822" y="284218"/>
+                  </a:lnTo>
+                  <a:lnTo>
+                    <a:pt x="1055167" y="300969"/>
+                  </a:lnTo>
+                  <a:lnTo>
+                    <a:pt x="1125511" y="317306"/>
+                  </a:lnTo>
+                  <a:lnTo>
+                    <a:pt x="1195856" y="333241"/>
+                  </a:lnTo>
+                  <a:lnTo>
+                    <a:pt x="1266200" y="348783"/>
+                  </a:lnTo>
+                  <a:lnTo>
+                    <a:pt x="1336545" y="363942"/>
+                  </a:lnTo>
+                  <a:lnTo>
+                    <a:pt x="1406889" y="378727"/>
+                  </a:lnTo>
+                  <a:lnTo>
+                    <a:pt x="1477234" y="393147"/>
+                  </a:lnTo>
+                  <a:lnTo>
+                    <a:pt x="1547578" y="407212"/>
+                  </a:lnTo>
+                  <a:lnTo>
+                    <a:pt x="1617923" y="420931"/>
+                  </a:lnTo>
+                  <a:lnTo>
+                    <a:pt x="1688267" y="434311"/>
+                  </a:lnTo>
+                  <a:lnTo>
+                    <a:pt x="1758612" y="447361"/>
+                  </a:lnTo>
+                  <a:lnTo>
+                    <a:pt x="1828956" y="460090"/>
+                  </a:lnTo>
+                  <a:lnTo>
+                    <a:pt x="1899301" y="472505"/>
+                  </a:lnTo>
+                  <a:lnTo>
+                    <a:pt x="1969645" y="484613"/>
+                  </a:lnTo>
+                  <a:lnTo>
+                    <a:pt x="2039990" y="496424"/>
+                  </a:lnTo>
+                  <a:lnTo>
+                    <a:pt x="2110334" y="507943"/>
+                  </a:lnTo>
+                  <a:lnTo>
+                    <a:pt x="2180679" y="519178"/>
+                  </a:lnTo>
+                  <a:lnTo>
+                    <a:pt x="2251023" y="530136"/>
+                  </a:lnTo>
+                  <a:lnTo>
+                    <a:pt x="2321368" y="540824"/>
+                  </a:lnTo>
+                  <a:lnTo>
+                    <a:pt x="2391712" y="551249"/>
+                  </a:lnTo>
+                  <a:lnTo>
+                    <a:pt x="2462057" y="561416"/>
+                  </a:lnTo>
+                  <a:lnTo>
+                    <a:pt x="2532401" y="571333"/>
+                  </a:lnTo>
+                  <a:lnTo>
+                    <a:pt x="2602746" y="581006"/>
+                  </a:lnTo>
+                  <a:lnTo>
+                    <a:pt x="2673090" y="590440"/>
+                  </a:lnTo>
+                  <a:lnTo>
+                    <a:pt x="2743435" y="599641"/>
+                  </a:lnTo>
+                  <a:lnTo>
+                    <a:pt x="2813779" y="608616"/>
+                  </a:lnTo>
+                  <a:lnTo>
+                    <a:pt x="2884124" y="617369"/>
+                  </a:lnTo>
+                  <a:lnTo>
+                    <a:pt x="2954468" y="625907"/>
+                  </a:lnTo>
+                  <a:lnTo>
+                    <a:pt x="3024813" y="634234"/>
+                  </a:lnTo>
+                  <a:lnTo>
+                    <a:pt x="3095157" y="642355"/>
+                  </a:lnTo>
+                  <a:lnTo>
+                    <a:pt x="3165502" y="650277"/>
+                  </a:lnTo>
+                  <a:lnTo>
+                    <a:pt x="3235846" y="658003"/>
+                  </a:lnTo>
+                  <a:lnTo>
+                    <a:pt x="3306191" y="665539"/>
+                  </a:lnTo>
+                  <a:lnTo>
+                    <a:pt x="3376535" y="672889"/>
+                  </a:lnTo>
+                  <a:lnTo>
+                    <a:pt x="3446880" y="680058"/>
+                  </a:lnTo>
+                  <a:lnTo>
+                    <a:pt x="3517224" y="687050"/>
+                  </a:lnTo>
+                  <a:lnTo>
+                    <a:pt x="3587569" y="693870"/>
+                  </a:lnTo>
+                  <a:lnTo>
+                    <a:pt x="3657913" y="700522"/>
+                  </a:lnTo>
+                  <a:lnTo>
+                    <a:pt x="3728257" y="707009"/>
+                  </a:lnTo>
+                  <a:lnTo>
+                    <a:pt x="3798602" y="713337"/>
+                  </a:lnTo>
+                  <a:lnTo>
+                    <a:pt x="3868946" y="719509"/>
+                  </a:lnTo>
+                  <a:lnTo>
+                    <a:pt x="3939291" y="725528"/>
+                  </a:lnTo>
+                  <a:lnTo>
+                    <a:pt x="4009635" y="731400"/>
+                  </a:lnTo>
+                  <a:lnTo>
+                    <a:pt x="4079980" y="737126"/>
+                  </a:lnTo>
+                  <a:lnTo>
+                    <a:pt x="4150324" y="742711"/>
+                  </a:lnTo>
+                  <a:lnTo>
+                    <a:pt x="4220669" y="748159"/>
+                  </a:lnTo>
+                  <a:lnTo>
+                    <a:pt x="4291013" y="753472"/>
+                  </a:lnTo>
+                  <a:lnTo>
+                    <a:pt x="4361358" y="758655"/>
+                  </a:lnTo>
+                  <a:lnTo>
+                    <a:pt x="4431702" y="763709"/>
+                  </a:lnTo>
+                  <a:lnTo>
+                    <a:pt x="4502047" y="768639"/>
+                  </a:lnTo>
+                  <a:lnTo>
+                    <a:pt x="4572391" y="773448"/>
+                  </a:lnTo>
+                  <a:lnTo>
+                    <a:pt x="4642736" y="778137"/>
+                  </a:lnTo>
+                  <a:lnTo>
+                    <a:pt x="4713080" y="782712"/>
+                  </a:lnTo>
+                  <a:lnTo>
+                    <a:pt x="4783425" y="787173"/>
+                  </a:lnTo>
+                  <a:lnTo>
+                    <a:pt x="4853769" y="791525"/>
+                  </a:lnTo>
+                  <a:lnTo>
+                    <a:pt x="4924114" y="795769"/>
+                  </a:lnTo>
+                  <a:lnTo>
+                    <a:pt x="4994458" y="799909"/>
+                  </a:lnTo>
+                  <a:lnTo>
+                    <a:pt x="5064803" y="803946"/>
+                  </a:lnTo>
+                  <a:lnTo>
+                    <a:pt x="5135147" y="807884"/>
+                  </a:lnTo>
+                  <a:lnTo>
+                    <a:pt x="5205492" y="811725"/>
+                  </a:lnTo>
+                  <a:lnTo>
+                    <a:pt x="5275836" y="815472"/>
+                  </a:lnTo>
+                  <a:lnTo>
+                    <a:pt x="5346181" y="819125"/>
+                  </a:lnTo>
+                  <a:lnTo>
+                    <a:pt x="5416525" y="822689"/>
+                  </a:lnTo>
+                  <a:lnTo>
+                    <a:pt x="5486870" y="826165"/>
+                  </a:lnTo>
+                  <a:lnTo>
+                    <a:pt x="5557214" y="829556"/>
+                  </a:lnTo>
+                  <a:lnTo>
+                    <a:pt x="5627559" y="832862"/>
+                  </a:lnTo>
+                  <a:lnTo>
+                    <a:pt x="5697903" y="836088"/>
+                  </a:lnTo>
+                  <a:lnTo>
+                    <a:pt x="5768248" y="839233"/>
+                  </a:lnTo>
+                  <a:lnTo>
+                    <a:pt x="5838592" y="842301"/>
+                  </a:lnTo>
+                  <a:lnTo>
+                    <a:pt x="5908937" y="845294"/>
+                  </a:lnTo>
+                  <a:lnTo>
+                    <a:pt x="5979281" y="848213"/>
+                  </a:lnTo>
+                  <a:lnTo>
+                    <a:pt x="6049626" y="851059"/>
+                  </a:lnTo>
+                  <a:lnTo>
+                    <a:pt x="6119970" y="853836"/>
+                  </a:lnTo>
+                  <a:lnTo>
+                    <a:pt x="6190315" y="856544"/>
+                  </a:lnTo>
+                  <a:lnTo>
+                    <a:pt x="6260659" y="859186"/>
+                  </a:lnTo>
+                  <a:lnTo>
+                    <a:pt x="6331004" y="861762"/>
+                  </a:lnTo>
+                  <a:lnTo>
+                    <a:pt x="6401348" y="864275"/>
+                  </a:lnTo>
+                  <a:lnTo>
+                    <a:pt x="6471693" y="866725"/>
+                  </a:lnTo>
+                  <a:lnTo>
+                    <a:pt x="6542037" y="869116"/>
+                  </a:lnTo>
+                  <a:lnTo>
+                    <a:pt x="6612382" y="871447"/>
+                  </a:lnTo>
+                  <a:lnTo>
+                    <a:pt x="6682726" y="873721"/>
+                  </a:lnTo>
+                  <a:lnTo>
+                    <a:pt x="6753071" y="875939"/>
+                  </a:lnTo>
+                  <a:lnTo>
+                    <a:pt x="6823415" y="878102"/>
+                  </a:lnTo>
+                  <a:lnTo>
+                    <a:pt x="6893760" y="880212"/>
+                  </a:lnTo>
+                  <a:lnTo>
+                    <a:pt x="6964104" y="882270"/>
+                  </a:lnTo>
+                </a:path>
+              </a:pathLst>
+            </a:custGeom>
+            <a:ln w="27101" cap="flat">
+              <a:solidFill>
+                <a:srgbClr val="FF8C00">
+                  <a:alpha val="100000"/>
+                </a:srgbClr>
+              </a:solidFill>
+              <a:prstDash val="solid"/>
+              <a:round/>
+            </a:ln>
+          </p:spPr>
+          <p:txBody>
+            <a:bodyPr/>
+            <a:lstStyle/>
+            <a:p/>
+          </p:txBody>
+        </p:sp>
+        <p:sp>
+          <p:nvSpPr>
+            <p:cNvPr id="71" name="pl71"/>
+            <p:cNvSpPr/>
+            <p:nvPr/>
+          </p:nvSpPr>
+          <p:spPr>
+            <a:xfrm>
+              <a:off x="887106" y="5294352"/>
+              <a:ext cx="7660515" cy="0"/>
+            </a:xfrm>
+            <a:custGeom>
+              <a:avLst/>
+              <a:pathLst>
+                <a:path w="7660515" h="0">
+                  <a:moveTo>
+                    <a:pt x="0" y="0"/>
+                  </a:moveTo>
+                  <a:lnTo>
+                    <a:pt x="7660515" y="0"/>
+                  </a:lnTo>
+                  <a:lnTo>
+                    <a:pt x="7660515" y="0"/>
+                  </a:lnTo>
+                </a:path>
+              </a:pathLst>
+            </a:custGeom>
+            <a:ln w="13550" cap="flat">
+              <a:solidFill>
+                <a:srgbClr val="7F7F7F">
+                  <a:alpha val="100000"/>
+                </a:srgbClr>
+              </a:solidFill>
+              <a:prstDash val="dash"/>
+              <a:round/>
+            </a:ln>
+          </p:spPr>
+          <p:txBody>
+            <a:bodyPr/>
+            <a:lstStyle/>
+            <a:p/>
+          </p:txBody>
+        </p:sp>
+        <p:sp>
+          <p:nvSpPr>
+            <p:cNvPr id="72" name="pl72"/>
+            <p:cNvSpPr/>
+            <p:nvPr/>
+          </p:nvSpPr>
+          <p:spPr>
+            <a:xfrm>
+              <a:off x="4530353" y="4336484"/>
+              <a:ext cx="0" cy="1317069"/>
+            </a:xfrm>
+            <a:custGeom>
+              <a:avLst/>
+              <a:pathLst>
+                <a:path w="0" h="1317069">
+                  <a:moveTo>
+                    <a:pt x="0" y="1317069"/>
+                  </a:moveTo>
+                  <a:lnTo>
+                    <a:pt x="0" y="0"/>
+                  </a:lnTo>
+                  <a:lnTo>
+                    <a:pt x="0" y="0"/>
+                  </a:lnTo>
+                </a:path>
+              </a:pathLst>
+            </a:custGeom>
+            <a:ln w="13550" cap="flat">
+              <a:solidFill>
+                <a:srgbClr val="666666">
+                  <a:alpha val="100000"/>
+                </a:srgbClr>
+              </a:solidFill>
+              <a:prstDash val="dot"/>
+              <a:round/>
+            </a:ln>
+          </p:spPr>
+          <p:txBody>
+            <a:bodyPr/>
+            <a:lstStyle/>
+            <a:p/>
+          </p:txBody>
+        </p:sp>
+        <p:sp>
+          <p:nvSpPr>
+            <p:cNvPr id="73" name="tx73"/>
+            <p:cNvSpPr/>
+            <p:nvPr/>
+          </p:nvSpPr>
+          <p:spPr>
+            <a:xfrm>
+              <a:off x="762297" y="5553636"/>
+              <a:ext cx="62179" cy="80101"/>
+            </a:xfrm>
+            <a:prstGeom prst="rect">
+              <a:avLst/>
+            </a:prstGeom>
+            <a:noFill/>
+          </p:spPr>
+          <p:txBody>
+            <a:bodyPr lIns="0" rIns="0" tIns="0" bIns="0" anchorCtr="1" anchor="ctr" wrap="none"/>
+            <a:lstStyle/>
+            <a:p>
+              <a:pPr algn="l" marL="0" marR="0" indent="0">
+                <a:lnSpc>
+                  <a:spcPts val="880"/>
+                </a:lnSpc>
+                <a:spcBef>
+                  <a:spcPts val="0"/>
+                </a:spcBef>
+                <a:spcAft>
+                  <a:spcPts val="0"/>
+                </a:spcAft>
+              </a:pPr>
+              <a:r>
+                <a:rPr sz="880">
+                  <a:solidFill>
+                    <a:srgbClr val="4D4D4D">
+                      <a:alpha val="100000"/>
+                    </a:srgbClr>
+                  </a:solidFill>
+                  <a:latin typeface="Helvetica"/>
+                  <a:cs typeface="Helvetica"/>
+                </a:rPr>
+                <a:t>0</a:t>
+              </a:r>
+            </a:p>
+          </p:txBody>
+        </p:sp>
+        <p:sp>
+          <p:nvSpPr>
+            <p:cNvPr id="74" name="tx74"/>
+            <p:cNvSpPr/>
+            <p:nvPr/>
+          </p:nvSpPr>
+          <p:spPr>
+            <a:xfrm>
+              <a:off x="762297" y="5254302"/>
+              <a:ext cx="62179" cy="80101"/>
+            </a:xfrm>
+            <a:prstGeom prst="rect">
+              <a:avLst/>
+            </a:prstGeom>
+            <a:noFill/>
+          </p:spPr>
+          <p:txBody>
+            <a:bodyPr lIns="0" rIns="0" tIns="0" bIns="0" anchorCtr="1" anchor="ctr" wrap="none"/>
+            <a:lstStyle/>
+            <a:p>
+              <a:pPr algn="l" marL="0" marR="0" indent="0">
+                <a:lnSpc>
+                  <a:spcPts val="880"/>
+                </a:lnSpc>
+                <a:spcBef>
+                  <a:spcPts val="0"/>
+                </a:spcBef>
+                <a:spcAft>
+                  <a:spcPts val="0"/>
+                </a:spcAft>
+              </a:pPr>
+              <a:r>
+                <a:rPr sz="880">
+                  <a:solidFill>
+                    <a:srgbClr val="4D4D4D">
+                      <a:alpha val="100000"/>
+                    </a:srgbClr>
+                  </a:solidFill>
+                  <a:latin typeface="Helvetica"/>
+                  <a:cs typeface="Helvetica"/>
+                </a:rPr>
+                <a:t>1</a:t>
+              </a:r>
+            </a:p>
+          </p:txBody>
+        </p:sp>
+        <p:sp>
+          <p:nvSpPr>
+            <p:cNvPr id="75" name="tx75"/>
+            <p:cNvSpPr/>
+            <p:nvPr/>
+          </p:nvSpPr>
+          <p:spPr>
+            <a:xfrm>
+              <a:off x="762297" y="4954968"/>
+              <a:ext cx="62179" cy="80101"/>
+            </a:xfrm>
+            <a:prstGeom prst="rect">
+              <a:avLst/>
+            </a:prstGeom>
+            <a:noFill/>
+          </p:spPr>
+          <p:txBody>
+            <a:bodyPr lIns="0" rIns="0" tIns="0" bIns="0" anchorCtr="1" anchor="ctr" wrap="none"/>
+            <a:lstStyle/>
+            <a:p>
+              <a:pPr algn="l" marL="0" marR="0" indent="0">
+                <a:lnSpc>
+                  <a:spcPts val="880"/>
+                </a:lnSpc>
+                <a:spcBef>
+                  <a:spcPts val="0"/>
+                </a:spcBef>
+                <a:spcAft>
+                  <a:spcPts val="0"/>
+                </a:spcAft>
+              </a:pPr>
+              <a:r>
+                <a:rPr sz="880">
+                  <a:solidFill>
+                    <a:srgbClr val="4D4D4D">
+                      <a:alpha val="100000"/>
+                    </a:srgbClr>
+                  </a:solidFill>
+                  <a:latin typeface="Helvetica"/>
+                  <a:cs typeface="Helvetica"/>
+                </a:rPr>
+                <a:t>2</a:t>
+              </a:r>
+            </a:p>
+          </p:txBody>
+        </p:sp>
+        <p:sp>
+          <p:nvSpPr>
+            <p:cNvPr id="76" name="tx76"/>
+            <p:cNvSpPr/>
+            <p:nvPr/>
+          </p:nvSpPr>
+          <p:spPr>
+            <a:xfrm>
+              <a:off x="762297" y="4655634"/>
+              <a:ext cx="62179" cy="80101"/>
+            </a:xfrm>
+            <a:prstGeom prst="rect">
+              <a:avLst/>
+            </a:prstGeom>
+            <a:noFill/>
+          </p:spPr>
+          <p:txBody>
+            <a:bodyPr lIns="0" rIns="0" tIns="0" bIns="0" anchorCtr="1" anchor="ctr" wrap="none"/>
+            <a:lstStyle/>
+            <a:p>
+              <a:pPr algn="l" marL="0" marR="0" indent="0">
+                <a:lnSpc>
+                  <a:spcPts val="880"/>
+                </a:lnSpc>
+                <a:spcBef>
+                  <a:spcPts val="0"/>
+                </a:spcBef>
+                <a:spcAft>
+                  <a:spcPts val="0"/>
+                </a:spcAft>
+              </a:pPr>
+              <a:r>
+                <a:rPr sz="880">
+                  <a:solidFill>
+                    <a:srgbClr val="4D4D4D">
+                      <a:alpha val="100000"/>
+                    </a:srgbClr>
+                  </a:solidFill>
+                  <a:latin typeface="Helvetica"/>
+                  <a:cs typeface="Helvetica"/>
+                </a:rPr>
+                <a:t>3</a:t>
+              </a:r>
+            </a:p>
+          </p:txBody>
+        </p:sp>
+        <p:sp>
+          <p:nvSpPr>
+            <p:cNvPr id="77" name="tx77"/>
+            <p:cNvSpPr/>
+            <p:nvPr/>
+          </p:nvSpPr>
+          <p:spPr>
+            <a:xfrm>
+              <a:off x="762297" y="4356300"/>
+              <a:ext cx="62179" cy="80101"/>
+            </a:xfrm>
+            <a:prstGeom prst="rect">
+              <a:avLst/>
+            </a:prstGeom>
+            <a:noFill/>
+          </p:spPr>
+          <p:txBody>
+            <a:bodyPr lIns="0" rIns="0" tIns="0" bIns="0" anchorCtr="1" anchor="ctr" wrap="none"/>
+            <a:lstStyle/>
+            <a:p>
+              <a:pPr algn="l" marL="0" marR="0" indent="0">
+                <a:lnSpc>
+                  <a:spcPts val="880"/>
+                </a:lnSpc>
+                <a:spcBef>
+                  <a:spcPts val="0"/>
+                </a:spcBef>
+                <a:spcAft>
+                  <a:spcPts val="0"/>
+                </a:spcAft>
+              </a:pPr>
+              <a:r>
+                <a:rPr sz="880">
+                  <a:solidFill>
+                    <a:srgbClr val="4D4D4D">
+                      <a:alpha val="100000"/>
+                    </a:srgbClr>
+                  </a:solidFill>
+                  <a:latin typeface="Helvetica"/>
+                  <a:cs typeface="Helvetica"/>
+                </a:rPr>
+                <a:t>4</a:t>
+              </a:r>
+            </a:p>
+          </p:txBody>
+        </p:sp>
+        <p:sp>
+          <p:nvSpPr>
+            <p:cNvPr id="78" name="tx78"/>
+            <p:cNvSpPr/>
+            <p:nvPr/>
+          </p:nvSpPr>
+          <p:spPr>
+            <a:xfrm>
+              <a:off x="1241001" y="5716183"/>
+              <a:ext cx="161574" cy="80101"/>
+            </a:xfrm>
+            <a:prstGeom prst="rect">
+              <a:avLst/>
+            </a:prstGeom>
+            <a:noFill/>
+          </p:spPr>
+          <p:txBody>
+            <a:bodyPr lIns="0" rIns="0" tIns="0" bIns="0" anchorCtr="1" anchor="ctr" wrap="none"/>
+            <a:lstStyle/>
+            <a:p>
+              <a:pPr algn="l" marL="0" marR="0" indent="0">
+                <a:lnSpc>
+                  <a:spcPts val="880"/>
+                </a:lnSpc>
+                <a:spcBef>
+                  <a:spcPts val="0"/>
+                </a:spcBef>
+                <a:spcAft>
+                  <a:spcPts val="0"/>
+                </a:spcAft>
+              </a:pPr>
+              <a:r>
+                <a:rPr sz="880">
+                  <a:solidFill>
+                    <a:srgbClr val="4D4D4D">
+                      <a:alpha val="100000"/>
+                    </a:srgbClr>
+                  </a:solidFill>
+                  <a:latin typeface="Helvetica"/>
+                  <a:cs typeface="Helvetica"/>
+                </a:rPr>
+                <a:t>-40</a:t>
+              </a:r>
+            </a:p>
+          </p:txBody>
+        </p:sp>
+        <p:sp>
+          <p:nvSpPr>
+            <p:cNvPr id="79" name="tx79"/>
+            <p:cNvSpPr/>
+            <p:nvPr/>
+          </p:nvSpPr>
+          <p:spPr>
+            <a:xfrm>
+              <a:off x="2054602" y="5716183"/>
+              <a:ext cx="161574" cy="80101"/>
+            </a:xfrm>
+            <a:prstGeom prst="rect">
+              <a:avLst/>
+            </a:prstGeom>
+            <a:noFill/>
+          </p:spPr>
+          <p:txBody>
+            <a:bodyPr lIns="0" rIns="0" tIns="0" bIns="0" anchorCtr="1" anchor="ctr" wrap="none"/>
+            <a:lstStyle/>
+            <a:p>
+              <a:pPr algn="l" marL="0" marR="0" indent="0">
+                <a:lnSpc>
+                  <a:spcPts val="880"/>
+                </a:lnSpc>
+                <a:spcBef>
+                  <a:spcPts val="0"/>
+                </a:spcBef>
+                <a:spcAft>
+                  <a:spcPts val="0"/>
+                </a:spcAft>
+              </a:pPr>
+              <a:r>
+                <a:rPr sz="880">
+                  <a:solidFill>
+                    <a:srgbClr val="4D4D4D">
+                      <a:alpha val="100000"/>
+                    </a:srgbClr>
+                  </a:solidFill>
+                  <a:latin typeface="Helvetica"/>
+                  <a:cs typeface="Helvetica"/>
+                </a:rPr>
+                <a:t>-30</a:t>
+              </a:r>
+            </a:p>
+          </p:txBody>
+        </p:sp>
+        <p:sp>
+          <p:nvSpPr>
+            <p:cNvPr id="80" name="tx80"/>
+            <p:cNvSpPr/>
+            <p:nvPr/>
+          </p:nvSpPr>
+          <p:spPr>
+            <a:xfrm>
+              <a:off x="2868203" y="5716183"/>
+              <a:ext cx="161574" cy="80101"/>
+            </a:xfrm>
+            <a:prstGeom prst="rect">
+              <a:avLst/>
+            </a:prstGeom>
+            <a:noFill/>
+          </p:spPr>
+          <p:txBody>
+            <a:bodyPr lIns="0" rIns="0" tIns="0" bIns="0" anchorCtr="1" anchor="ctr" wrap="none"/>
+            <a:lstStyle/>
+            <a:p>
+              <a:pPr algn="l" marL="0" marR="0" indent="0">
+                <a:lnSpc>
+                  <a:spcPts val="880"/>
+                </a:lnSpc>
+                <a:spcBef>
+                  <a:spcPts val="0"/>
+                </a:spcBef>
+                <a:spcAft>
+                  <a:spcPts val="0"/>
+                </a:spcAft>
+              </a:pPr>
+              <a:r>
+                <a:rPr sz="880">
+                  <a:solidFill>
+                    <a:srgbClr val="4D4D4D">
+                      <a:alpha val="100000"/>
+                    </a:srgbClr>
+                  </a:solidFill>
+                  <a:latin typeface="Helvetica"/>
+                  <a:cs typeface="Helvetica"/>
+                </a:rPr>
+                <a:t>-20</a:t>
+              </a:r>
+            </a:p>
+          </p:txBody>
+        </p:sp>
+        <p:sp>
+          <p:nvSpPr>
+            <p:cNvPr id="81" name="tx81"/>
+            <p:cNvSpPr/>
+            <p:nvPr/>
+          </p:nvSpPr>
+          <p:spPr>
+            <a:xfrm>
+              <a:off x="3681805" y="5716183"/>
+              <a:ext cx="161574" cy="80101"/>
+            </a:xfrm>
+            <a:prstGeom prst="rect">
+              <a:avLst/>
+            </a:prstGeom>
+            <a:noFill/>
+          </p:spPr>
+          <p:txBody>
+            <a:bodyPr lIns="0" rIns="0" tIns="0" bIns="0" anchorCtr="1" anchor="ctr" wrap="none"/>
+            <a:lstStyle/>
+            <a:p>
+              <a:pPr algn="l" marL="0" marR="0" indent="0">
+                <a:lnSpc>
+                  <a:spcPts val="880"/>
+                </a:lnSpc>
+                <a:spcBef>
+                  <a:spcPts val="0"/>
+                </a:spcBef>
+                <a:spcAft>
+                  <a:spcPts val="0"/>
+                </a:spcAft>
+              </a:pPr>
+              <a:r>
+                <a:rPr sz="880">
+                  <a:solidFill>
+                    <a:srgbClr val="4D4D4D">
+                      <a:alpha val="100000"/>
+                    </a:srgbClr>
+                  </a:solidFill>
+                  <a:latin typeface="Helvetica"/>
+                  <a:cs typeface="Helvetica"/>
+                </a:rPr>
+                <a:t>-10</a:t>
+              </a:r>
+            </a:p>
+          </p:txBody>
+        </p:sp>
+        <p:sp>
+          <p:nvSpPr>
+            <p:cNvPr id="82" name="tx82"/>
+            <p:cNvSpPr/>
+            <p:nvPr/>
+          </p:nvSpPr>
+          <p:spPr>
+            <a:xfrm>
+              <a:off x="4545104" y="5716183"/>
+              <a:ext cx="62179" cy="80101"/>
+            </a:xfrm>
+            <a:prstGeom prst="rect">
+              <a:avLst/>
+            </a:prstGeom>
+            <a:noFill/>
+          </p:spPr>
+          <p:txBody>
+            <a:bodyPr lIns="0" rIns="0" tIns="0" bIns="0" anchorCtr="1" anchor="ctr" wrap="none"/>
+            <a:lstStyle/>
+            <a:p>
+              <a:pPr algn="l" marL="0" marR="0" indent="0">
+                <a:lnSpc>
+                  <a:spcPts val="880"/>
+                </a:lnSpc>
+                <a:spcBef>
+                  <a:spcPts val="0"/>
+                </a:spcBef>
+                <a:spcAft>
+                  <a:spcPts val="0"/>
+                </a:spcAft>
+              </a:pPr>
+              <a:r>
+                <a:rPr sz="880">
+                  <a:solidFill>
+                    <a:srgbClr val="4D4D4D">
+                      <a:alpha val="100000"/>
+                    </a:srgbClr>
+                  </a:solidFill>
+                  <a:latin typeface="Helvetica"/>
+                  <a:cs typeface="Helvetica"/>
+                </a:rPr>
+                <a:t>0</a:t>
+              </a:r>
+            </a:p>
+          </p:txBody>
+        </p:sp>
+        <p:sp>
+          <p:nvSpPr>
+            <p:cNvPr id="83" name="tx83"/>
+            <p:cNvSpPr/>
+            <p:nvPr/>
+          </p:nvSpPr>
+          <p:spPr>
+            <a:xfrm>
+              <a:off x="5327615" y="5716183"/>
+              <a:ext cx="124358" cy="80101"/>
+            </a:xfrm>
+            <a:prstGeom prst="rect">
+              <a:avLst/>
+            </a:prstGeom>
+            <a:noFill/>
+          </p:spPr>
+          <p:txBody>
+            <a:bodyPr lIns="0" rIns="0" tIns="0" bIns="0" anchorCtr="1" anchor="ctr" wrap="none"/>
+            <a:lstStyle/>
+            <a:p>
+              <a:pPr algn="l" marL="0" marR="0" indent="0">
+                <a:lnSpc>
+                  <a:spcPts val="880"/>
+                </a:lnSpc>
+                <a:spcBef>
+                  <a:spcPts val="0"/>
+                </a:spcBef>
+                <a:spcAft>
+                  <a:spcPts val="0"/>
+                </a:spcAft>
+              </a:pPr>
+              <a:r>
+                <a:rPr sz="880">
+                  <a:solidFill>
+                    <a:srgbClr val="4D4D4D">
+                      <a:alpha val="100000"/>
+                    </a:srgbClr>
+                  </a:solidFill>
+                  <a:latin typeface="Helvetica"/>
+                  <a:cs typeface="Helvetica"/>
+                </a:rPr>
+                <a:t>10</a:t>
+              </a:r>
+            </a:p>
+          </p:txBody>
+        </p:sp>
+        <p:sp>
+          <p:nvSpPr>
+            <p:cNvPr id="84" name="tx84"/>
+            <p:cNvSpPr/>
+            <p:nvPr/>
+          </p:nvSpPr>
+          <p:spPr>
+            <a:xfrm>
+              <a:off x="6141217" y="5716183"/>
+              <a:ext cx="124358" cy="80101"/>
+            </a:xfrm>
+            <a:prstGeom prst="rect">
+              <a:avLst/>
+            </a:prstGeom>
+            <a:noFill/>
+          </p:spPr>
+          <p:txBody>
+            <a:bodyPr lIns="0" rIns="0" tIns="0" bIns="0" anchorCtr="1" anchor="ctr" wrap="none"/>
+            <a:lstStyle/>
+            <a:p>
+              <a:pPr algn="l" marL="0" marR="0" indent="0">
+                <a:lnSpc>
+                  <a:spcPts val="880"/>
+                </a:lnSpc>
+                <a:spcBef>
+                  <a:spcPts val="0"/>
+                </a:spcBef>
+                <a:spcAft>
+                  <a:spcPts val="0"/>
+                </a:spcAft>
+              </a:pPr>
+              <a:r>
+                <a:rPr sz="880">
+                  <a:solidFill>
+                    <a:srgbClr val="4D4D4D">
+                      <a:alpha val="100000"/>
+                    </a:srgbClr>
+                  </a:solidFill>
+                  <a:latin typeface="Helvetica"/>
+                  <a:cs typeface="Helvetica"/>
+                </a:rPr>
+                <a:t>20</a:t>
+              </a:r>
+            </a:p>
+          </p:txBody>
+        </p:sp>
+        <p:sp>
+          <p:nvSpPr>
+            <p:cNvPr id="85" name="tx85"/>
+            <p:cNvSpPr/>
+            <p:nvPr/>
+          </p:nvSpPr>
+          <p:spPr>
+            <a:xfrm>
+              <a:off x="6954818" y="5716183"/>
+              <a:ext cx="124358" cy="80101"/>
+            </a:xfrm>
+            <a:prstGeom prst="rect">
+              <a:avLst/>
+            </a:prstGeom>
+            <a:noFill/>
+          </p:spPr>
+          <p:txBody>
+            <a:bodyPr lIns="0" rIns="0" tIns="0" bIns="0" anchorCtr="1" anchor="ctr" wrap="none"/>
+            <a:lstStyle/>
+            <a:p>
+              <a:pPr algn="l" marL="0" marR="0" indent="0">
+                <a:lnSpc>
+                  <a:spcPts val="880"/>
+                </a:lnSpc>
+                <a:spcBef>
+                  <a:spcPts val="0"/>
+                </a:spcBef>
+                <a:spcAft>
+                  <a:spcPts val="0"/>
+                </a:spcAft>
+              </a:pPr>
+              <a:r>
+                <a:rPr sz="880">
+                  <a:solidFill>
+                    <a:srgbClr val="4D4D4D">
+                      <a:alpha val="100000"/>
+                    </a:srgbClr>
+                  </a:solidFill>
+                  <a:latin typeface="Helvetica"/>
+                  <a:cs typeface="Helvetica"/>
+                </a:rPr>
+                <a:t>30</a:t>
+              </a:r>
+            </a:p>
+          </p:txBody>
+        </p:sp>
+        <p:sp>
+          <p:nvSpPr>
+            <p:cNvPr id="86" name="tx86"/>
+            <p:cNvSpPr/>
+            <p:nvPr/>
+          </p:nvSpPr>
+          <p:spPr>
+            <a:xfrm>
+              <a:off x="7768419" y="5716183"/>
+              <a:ext cx="124358" cy="80101"/>
+            </a:xfrm>
+            <a:prstGeom prst="rect">
+              <a:avLst/>
+            </a:prstGeom>
+            <a:noFill/>
+          </p:spPr>
+          <p:txBody>
+            <a:bodyPr lIns="0" rIns="0" tIns="0" bIns="0" anchorCtr="1" anchor="ctr" wrap="none"/>
+            <a:lstStyle/>
+            <a:p>
+              <a:pPr algn="l" marL="0" marR="0" indent="0">
+                <a:lnSpc>
+                  <a:spcPts val="880"/>
+                </a:lnSpc>
+                <a:spcBef>
+                  <a:spcPts val="0"/>
+                </a:spcBef>
+                <a:spcAft>
+                  <a:spcPts val="0"/>
+                </a:spcAft>
+              </a:pPr>
+              <a:r>
+                <a:rPr sz="880">
+                  <a:solidFill>
+                    <a:srgbClr val="4D4D4D">
+                      <a:alpha val="100000"/>
+                    </a:srgbClr>
+                  </a:solidFill>
+                  <a:latin typeface="Helvetica"/>
+                  <a:cs typeface="Helvetica"/>
+                </a:rPr>
+                <a:t>40</a:t>
+              </a:r>
+            </a:p>
+          </p:txBody>
+        </p:sp>
+        <p:sp>
+          <p:nvSpPr>
+            <p:cNvPr id="87" name="tx87"/>
+            <p:cNvSpPr/>
+            <p:nvPr/>
+          </p:nvSpPr>
+          <p:spPr>
+            <a:xfrm>
+              <a:off x="2928340" y="5855859"/>
+              <a:ext cx="3578047" cy="100218"/>
+            </a:xfrm>
+            <a:prstGeom prst="rect">
+              <a:avLst/>
+            </a:prstGeom>
+            <a:noFill/>
+          </p:spPr>
+          <p:txBody>
+            <a:bodyPr lIns="0" rIns="0" tIns="0" bIns="0" anchorCtr="1" anchor="ctr" wrap="none"/>
+            <a:lstStyle/>
+            <a:p>
+              <a:pPr algn="l" marL="0" marR="0" indent="0">
+                <a:lnSpc>
+                  <a:spcPts val="1100"/>
+                </a:lnSpc>
+                <a:spcBef>
+                  <a:spcPts val="0"/>
+                </a:spcBef>
+                <a:spcAft>
+                  <a:spcPts val="0"/>
+                </a:spcAft>
+              </a:pPr>
+              <a:r>
+                <a:rPr sz="1100">
+                  <a:solidFill>
+                    <a:srgbClr val="000000">
+                      <a:alpha val="100000"/>
+                    </a:srgbClr>
+                  </a:solidFill>
+                  <a:latin typeface="Helvetica"/>
+                  <a:cs typeface="Helvetica"/>
+                </a:rPr>
+                <a:t>eGFR difference (%): 100 × (CKD-EPI Cr-Cys − CG) / CG</a:t>
+              </a:r>
+            </a:p>
+          </p:txBody>
+        </p:sp>
+        <p:sp>
+          <p:nvSpPr>
+            <p:cNvPr id="88" name="tx88"/>
+            <p:cNvSpPr/>
+            <p:nvPr/>
+          </p:nvSpPr>
+          <p:spPr>
+            <a:xfrm rot="-5400000">
+              <a:off x="138035" y="4944909"/>
+              <a:ext cx="1016904" cy="100218"/>
+            </a:xfrm>
+            <a:prstGeom prst="rect">
+              <a:avLst/>
+            </a:prstGeom>
+            <a:noFill/>
+          </p:spPr>
+          <p:txBody>
+            <a:bodyPr lIns="0" rIns="0" tIns="0" bIns="0" anchorCtr="1" anchor="ctr" wrap="none"/>
+            <a:lstStyle/>
+            <a:p>
+              <a:pPr algn="l" marL="0" marR="0" indent="0">
+                <a:lnSpc>
+                  <a:spcPts val="1100"/>
+                </a:lnSpc>
+                <a:spcBef>
+                  <a:spcPts val="0"/>
+                </a:spcBef>
+                <a:spcAft>
+                  <a:spcPts val="0"/>
+                </a:spcAft>
+              </a:pPr>
+              <a:r>
+                <a:rPr sz="1100">
+                  <a:solidFill>
+                    <a:srgbClr val="000000">
+                      <a:alpha val="100000"/>
+                    </a:srgbClr>
+                  </a:solidFill>
+                  <a:latin typeface="Helvetica"/>
+                  <a:cs typeface="Helvetica"/>
+                </a:rPr>
+                <a:t>subHR (95% CI)</a:t>
+              </a:r>
+            </a:p>
+          </p:txBody>
+        </p:sp>
+        <p:sp>
+          <p:nvSpPr>
+            <p:cNvPr id="89" name="tx89"/>
+            <p:cNvSpPr/>
+            <p:nvPr/>
+          </p:nvSpPr>
+          <p:spPr>
+            <a:xfrm>
+              <a:off x="887106" y="4159544"/>
+              <a:ext cx="7052127" cy="82021"/>
+            </a:xfrm>
+            <a:prstGeom prst="rect">
+              <a:avLst/>
+            </a:prstGeom>
+            <a:noFill/>
+          </p:spPr>
+          <p:txBody>
+            <a:bodyPr lIns="0" rIns="0" tIns="0" bIns="0" anchorCtr="1" anchor="ctr" wrap="none"/>
+            <a:lstStyle/>
+            <a:p>
+              <a:pPr algn="l" marL="0" marR="0" indent="0">
+                <a:lnSpc>
+                  <a:spcPts val="900"/>
+                </a:lnSpc>
+                <a:spcBef>
+                  <a:spcPts val="0"/>
+                </a:spcBef>
+                <a:spcAft>
+                  <a:spcPts val="0"/>
+                </a:spcAft>
+              </a:pPr>
+              <a:r>
+                <a:rPr sz="900">
+                  <a:solidFill>
+                    <a:srgbClr val="404040">
+                      <a:alpha val="100000"/>
+                    </a:srgbClr>
+                  </a:solidFill>
+                  <a:latin typeface="Helvetica"/>
+                  <a:cs typeface="Helvetica"/>
+                </a:rPr>
+                <a:t>subHR per 10 % decline: 1.33 (1.23-1.45), p_Bonf = &lt;0.001 (n = 6)  |  per IQR decline (Δ = 29.9 %): 2.37 (1.87-3.01)  |  IQR: [-15.0, 14.9] %</a:t>
+              </a:r>
+            </a:p>
+          </p:txBody>
+        </p:sp>
+        <p:sp>
+          <p:nvSpPr>
+            <p:cNvPr id="90" name="tx90"/>
+            <p:cNvSpPr/>
+            <p:nvPr/>
+          </p:nvSpPr>
+          <p:spPr>
+            <a:xfrm>
+              <a:off x="887106" y="3932770"/>
               <a:ext cx="2821289" cy="120152"/>
             </a:xfrm>
             <a:prstGeom prst="rect">
